--- a/Lecture Notes & PPT/Unit 4 Part 2.pptx
+++ b/Lecture Notes & PPT/Unit 4 Part 2.pptx
@@ -1,60 +1,60 @@
 
 <file path=ppt/presentation.xml><?xml version="1.0" encoding="utf-8"?>
-<p:presentation xmlns:a="http://schemas.openxmlformats.org/drawingml/2006/main" xmlns:r="http://schemas.openxmlformats.org/officeDocument/2006/relationships" xmlns:p="http://schemas.openxmlformats.org/presentationml/2006/main" xmlns:m="http://schemas.openxmlformats.org/officeDocument/2006/math" xmlns:a14="http://schemas.microsoft.com/office/drawing/2010/main">
+<p:presentation xmlns:a="http://schemas.openxmlformats.org/drawingml/2006/main" xmlns:r="http://schemas.openxmlformats.org/officeDocument/2006/relationships" xmlns:p="http://schemas.openxmlformats.org/presentationml/2006/main">
   <p:sldMasterIdLst>
-    <p:sldMasterId id="2147483648" r:id="rId5"/>
+    <p:sldMasterId id="2147483648" r:id="rId1"/>
   </p:sldMasterIdLst>
   <p:notesMasterIdLst>
-    <p:notesMasterId r:id="rId7"/>
+    <p:notesMasterId r:id="rId47"/>
   </p:notesMasterIdLst>
   <p:sldIdLst>
-    <p:sldId id="256" r:id="rId8"/>
-    <p:sldId id="257" r:id="rId9"/>
-    <p:sldId id="258" r:id="rId10"/>
-    <p:sldId id="259" r:id="rId11"/>
-    <p:sldId id="260" r:id="rId12"/>
-    <p:sldId id="261" r:id="rId13"/>
-    <p:sldId id="262" r:id="rId14"/>
-    <p:sldId id="263" r:id="rId15"/>
-    <p:sldId id="264" r:id="rId16"/>
-    <p:sldId id="265" r:id="rId17"/>
-    <p:sldId id="266" r:id="rId18"/>
-    <p:sldId id="267" r:id="rId19"/>
-    <p:sldId id="268" r:id="rId20"/>
-    <p:sldId id="269" r:id="rId21"/>
-    <p:sldId id="270" r:id="rId22"/>
-    <p:sldId id="271" r:id="rId23"/>
-    <p:sldId id="272" r:id="rId24"/>
-    <p:sldId id="273" r:id="rId25"/>
-    <p:sldId id="274" r:id="rId26"/>
-    <p:sldId id="275" r:id="rId27"/>
-    <p:sldId id="276" r:id="rId28"/>
-    <p:sldId id="277" r:id="rId30"/>
-    <p:sldId id="278" r:id="rId31"/>
-    <p:sldId id="279" r:id="rId32"/>
-    <p:sldId id="280" r:id="rId33"/>
-    <p:sldId id="281" r:id="rId34"/>
-    <p:sldId id="282" r:id="rId35"/>
-    <p:sldId id="283" r:id="rId36"/>
-    <p:sldId id="284" r:id="rId37"/>
-    <p:sldId id="285" r:id="rId38"/>
-    <p:sldId id="286" r:id="rId39"/>
-    <p:sldId id="287" r:id="rId40"/>
-    <p:sldId id="288" r:id="rId41"/>
-    <p:sldId id="289" r:id="rId42"/>
-    <p:sldId id="290" r:id="rId43"/>
-    <p:sldId id="291" r:id="rId44"/>
-    <p:sldId id="292" r:id="rId45"/>
-    <p:sldId id="293" r:id="rId46"/>
-    <p:sldId id="294" r:id="rId47"/>
-    <p:sldId id="295" r:id="rId48"/>
-    <p:sldId id="296" r:id="rId49"/>
-    <p:sldId id="297" r:id="rId50"/>
-    <p:sldId id="298" r:id="rId51"/>
-    <p:sldId id="299" r:id="rId52"/>
-    <p:sldId id="300" r:id="rId53"/>
+    <p:sldId id="256" r:id="rId2"/>
+    <p:sldId id="257" r:id="rId3"/>
+    <p:sldId id="258" r:id="rId4"/>
+    <p:sldId id="259" r:id="rId5"/>
+    <p:sldId id="260" r:id="rId6"/>
+    <p:sldId id="261" r:id="rId7"/>
+    <p:sldId id="262" r:id="rId8"/>
+    <p:sldId id="263" r:id="rId9"/>
+    <p:sldId id="264" r:id="rId10"/>
+    <p:sldId id="265" r:id="rId11"/>
+    <p:sldId id="266" r:id="rId12"/>
+    <p:sldId id="267" r:id="rId13"/>
+    <p:sldId id="268" r:id="rId14"/>
+    <p:sldId id="269" r:id="rId15"/>
+    <p:sldId id="270" r:id="rId16"/>
+    <p:sldId id="271" r:id="rId17"/>
+    <p:sldId id="272" r:id="rId18"/>
+    <p:sldId id="273" r:id="rId19"/>
+    <p:sldId id="274" r:id="rId20"/>
+    <p:sldId id="275" r:id="rId21"/>
+    <p:sldId id="276" r:id="rId22"/>
+    <p:sldId id="277" r:id="rId23"/>
+    <p:sldId id="278" r:id="rId24"/>
+    <p:sldId id="279" r:id="rId25"/>
+    <p:sldId id="280" r:id="rId26"/>
+    <p:sldId id="281" r:id="rId27"/>
+    <p:sldId id="282" r:id="rId28"/>
+    <p:sldId id="283" r:id="rId29"/>
+    <p:sldId id="284" r:id="rId30"/>
+    <p:sldId id="285" r:id="rId31"/>
+    <p:sldId id="286" r:id="rId32"/>
+    <p:sldId id="287" r:id="rId33"/>
+    <p:sldId id="288" r:id="rId34"/>
+    <p:sldId id="289" r:id="rId35"/>
+    <p:sldId id="290" r:id="rId36"/>
+    <p:sldId id="291" r:id="rId37"/>
+    <p:sldId id="292" r:id="rId38"/>
+    <p:sldId id="293" r:id="rId39"/>
+    <p:sldId id="294" r:id="rId40"/>
+    <p:sldId id="295" r:id="rId41"/>
+    <p:sldId id="296" r:id="rId42"/>
+    <p:sldId id="297" r:id="rId43"/>
+    <p:sldId id="298" r:id="rId44"/>
+    <p:sldId id="299" r:id="rId45"/>
+    <p:sldId id="300" r:id="rId46"/>
   </p:sldIdLst>
-  <p:sldSz cx="9144000" cy="5143500"/>
+  <p:sldSz cx="9144000" cy="5143500" type="screen16x9"/>
   <p:notesSz cx="6858000" cy="9144000"/>
   <p:defaultTextStyle>
     <a:defPPr marL="0" marR="0" indent="0" algn="l" defTabSz="914400" rtl="0" fontAlgn="auto" latinLnBrk="1" hangingPunct="0">
@@ -72,7 +72,7 @@
       <a:buFontTx/>
       <a:buNone/>
       <a:tabLst/>
-      <a:defRPr b="0" baseline="0" cap="none" i="0" spc="0" strike="noStrike" sz="1800" u="none" kumimoji="0" normalizeH="0">
+      <a:defRPr kumimoji="0" sz="1800" b="0" i="0" u="none" strike="noStrike" cap="none" spc="0" normalizeH="0" baseline="0">
         <a:ln>
           <a:noFill/>
         </a:ln>
@@ -98,7 +98,7 @@
       <a:buFontTx/>
       <a:buNone/>
       <a:tabLst/>
-      <a:defRPr b="0" baseline="0" cap="none" i="0" spc="0" strike="noStrike" sz="1400" u="none" kumimoji="0" normalizeH="0">
+      <a:defRPr kumimoji="0" sz="1400" b="0" i="0" u="none" strike="noStrike" cap="none" spc="0" normalizeH="0" baseline="0">
         <a:ln>
           <a:noFill/>
         </a:ln>
@@ -128,7 +128,7 @@
       <a:buFontTx/>
       <a:buNone/>
       <a:tabLst/>
-      <a:defRPr b="0" baseline="0" cap="none" i="0" spc="0" strike="noStrike" sz="1400" u="none" kumimoji="0" normalizeH="0">
+      <a:defRPr kumimoji="0" sz="1400" b="0" i="0" u="none" strike="noStrike" cap="none" spc="0" normalizeH="0" baseline="0">
         <a:ln>
           <a:noFill/>
         </a:ln>
@@ -158,7 +158,7 @@
       <a:buFontTx/>
       <a:buNone/>
       <a:tabLst/>
-      <a:defRPr b="0" baseline="0" cap="none" i="0" spc="0" strike="noStrike" sz="1400" u="none" kumimoji="0" normalizeH="0">
+      <a:defRPr kumimoji="0" sz="1400" b="0" i="0" u="none" strike="noStrike" cap="none" spc="0" normalizeH="0" baseline="0">
         <a:ln>
           <a:noFill/>
         </a:ln>
@@ -188,7 +188,7 @@
       <a:buFontTx/>
       <a:buNone/>
       <a:tabLst/>
-      <a:defRPr b="0" baseline="0" cap="none" i="0" spc="0" strike="noStrike" sz="1400" u="none" kumimoji="0" normalizeH="0">
+      <a:defRPr kumimoji="0" sz="1400" b="0" i="0" u="none" strike="noStrike" cap="none" spc="0" normalizeH="0" baseline="0">
         <a:ln>
           <a:noFill/>
         </a:ln>
@@ -218,7 +218,7 @@
       <a:buFontTx/>
       <a:buNone/>
       <a:tabLst/>
-      <a:defRPr b="0" baseline="0" cap="none" i="0" spc="0" strike="noStrike" sz="1400" u="none" kumimoji="0" normalizeH="0">
+      <a:defRPr kumimoji="0" sz="1400" b="0" i="0" u="none" strike="noStrike" cap="none" spc="0" normalizeH="0" baseline="0">
         <a:ln>
           <a:noFill/>
         </a:ln>
@@ -248,7 +248,7 @@
       <a:buFontTx/>
       <a:buNone/>
       <a:tabLst/>
-      <a:defRPr b="0" baseline="0" cap="none" i="0" spc="0" strike="noStrike" sz="1400" u="none" kumimoji="0" normalizeH="0">
+      <a:defRPr kumimoji="0" sz="1400" b="0" i="0" u="none" strike="noStrike" cap="none" spc="0" normalizeH="0" baseline="0">
         <a:ln>
           <a:noFill/>
         </a:ln>
@@ -278,7 +278,7 @@
       <a:buFontTx/>
       <a:buNone/>
       <a:tabLst/>
-      <a:defRPr b="0" baseline="0" cap="none" i="0" spc="0" strike="noStrike" sz="1400" u="none" kumimoji="0" normalizeH="0">
+      <a:defRPr kumimoji="0" sz="1400" b="0" i="0" u="none" strike="noStrike" cap="none" spc="0" normalizeH="0" baseline="0">
         <a:ln>
           <a:noFill/>
         </a:ln>
@@ -308,7 +308,7 @@
       <a:buFontTx/>
       <a:buNone/>
       <a:tabLst/>
-      <a:defRPr b="0" baseline="0" cap="none" i="0" spc="0" strike="noStrike" sz="1400" u="none" kumimoji="0" normalizeH="0">
+      <a:defRPr kumimoji="0" sz="1400" b="0" i="0" u="none" strike="noStrike" cap="none" spc="0" normalizeH="0" baseline="0">
         <a:ln>
           <a:noFill/>
         </a:ln>
@@ -338,7 +338,7 @@
       <a:buFontTx/>
       <a:buNone/>
       <a:tabLst/>
-      <a:defRPr b="0" baseline="0" cap="none" i="0" spc="0" strike="noStrike" sz="1400" u="none" kumimoji="0" normalizeH="0">
+      <a:defRPr kumimoji="0" sz="1400" b="0" i="0" u="none" strike="noStrike" cap="none" spc="0" normalizeH="0" baseline="0">
         <a:ln>
           <a:noFill/>
         </a:ln>
@@ -358,13 +358,13 @@
 </file>
 
 <file path=ppt/commentAuthors.xml><?xml version="1.0" encoding="utf-8"?>
-<p:cmAuthorLst xmlns:a="http://schemas.openxmlformats.org/drawingml/2006/main" xmlns:r="http://schemas.openxmlformats.org/officeDocument/2006/relationships" xmlns:p="http://schemas.openxmlformats.org/presentationml/2006/main" xmlns:m="http://schemas.openxmlformats.org/officeDocument/2006/math" xmlns:a14="http://schemas.microsoft.com/office/drawing/2010/main">
+<p:cmAuthorLst xmlns:a="http://schemas.openxmlformats.org/drawingml/2006/main" xmlns:r="http://schemas.openxmlformats.org/officeDocument/2006/relationships" xmlns:p="http://schemas.openxmlformats.org/presentationml/2006/main">
   <p:cmAuthor id="0" name="Rahul Patil" initials="RP" lastIdx="1" clrIdx="0"/>
 </p:cmAuthorLst>
 </file>
 
 <file path=ppt/comments/comment1.xml><?xml version="1.0" encoding="utf-8"?>
-<p:cmLst xmlns:a="http://schemas.openxmlformats.org/drawingml/2006/main" xmlns:r="http://schemas.openxmlformats.org/officeDocument/2006/relationships" xmlns:p="http://schemas.openxmlformats.org/presentationml/2006/main" xmlns:m="http://schemas.openxmlformats.org/officeDocument/2006/math" xmlns:a14="http://schemas.microsoft.com/office/drawing/2010/main">
+<p:cmLst xmlns:a="http://schemas.openxmlformats.org/drawingml/2006/main" xmlns:r="http://schemas.openxmlformats.org/officeDocument/2006/relationships" xmlns:p="http://schemas.openxmlformats.org/presentationml/2006/main">
   <p:cm authorId="0" dt="2026-02-11T11:14:33.903" idx="1">
     <p:pos x="2932" y="2815"/>
     <p:text/>
@@ -378,8 +378,13 @@
 </file>
 
 <file path=ppt/notesMasters/notesMaster1.xml><?xml version="1.0" encoding="utf-8"?>
-<p:notesMaster xmlns:a="http://schemas.openxmlformats.org/drawingml/2006/main" xmlns:r="http://schemas.openxmlformats.org/officeDocument/2006/relationships" xmlns:p="http://schemas.openxmlformats.org/presentationml/2006/main" xmlns:m="http://schemas.openxmlformats.org/officeDocument/2006/math" xmlns:a14="http://schemas.microsoft.com/office/drawing/2010/main">
+<p:notesMaster xmlns:a="http://schemas.openxmlformats.org/drawingml/2006/main" xmlns:r="http://schemas.openxmlformats.org/officeDocument/2006/relationships" xmlns:p="http://schemas.openxmlformats.org/presentationml/2006/main">
   <p:cSld>
+    <p:bg>
+      <p:bgRef idx="1001">
+        <a:schemeClr val="bg1"/>
+      </p:bgRef>
+    </p:bg>
     <p:spTree>
       <p:nvGrpSpPr>
         <p:cNvPr id="1" name=""/>
@@ -397,7 +402,9 @@
       <p:sp>
         <p:nvSpPr>
           <p:cNvPr id="168" name="Shape 168"/>
-          <p:cNvSpPr/>
+          <p:cNvSpPr>
+            <a:spLocks noGrp="1" noRot="1" noChangeAspect="1"/>
+          </p:cNvSpPr>
           <p:nvPr>
             <p:ph type="sldImg"/>
           </p:nvPr>
@@ -415,14 +422,16 @@
           <a:bodyPr/>
           <a:lstStyle/>
           <a:p>
-            <a:pPr/>
+            <a:endParaRPr/>
           </a:p>
         </p:txBody>
       </p:sp>
       <p:sp>
         <p:nvSpPr>
           <p:cNvPr id="169" name="Shape 169"/>
-          <p:cNvSpPr/>
+          <p:cNvSpPr>
+            <a:spLocks noGrp="1"/>
+          </p:cNvSpPr>
           <p:nvPr>
             <p:ph type="body" sz="quarter" idx="1"/>
           </p:nvPr>
@@ -440,7 +449,7 @@
           <a:bodyPr/>
           <a:lstStyle/>
           <a:p>
-            <a:pPr/>
+            <a:endParaRPr/>
           </a:p>
         </p:txBody>
       </p:sp>
@@ -525,7 +534,7 @@
 </file>
 
 <file path=ppt/slideLayouts/slideLayout1.xml><?xml version="1.0" encoding="utf-8"?>
-<p:sldLayout xmlns:a="http://schemas.openxmlformats.org/drawingml/2006/main" xmlns:r="http://schemas.openxmlformats.org/officeDocument/2006/relationships" xmlns:p="http://schemas.openxmlformats.org/presentationml/2006/main" xmlns:m="http://schemas.openxmlformats.org/officeDocument/2006/math" xmlns:a14="http://schemas.microsoft.com/office/drawing/2010/main" type="title" showMasterSp="1" showMasterPhAnim="1">
+<p:sldLayout xmlns:a="http://schemas.openxmlformats.org/drawingml/2006/main" xmlns:r="http://schemas.openxmlformats.org/officeDocument/2006/relationships" xmlns:p="http://schemas.openxmlformats.org/presentationml/2006/main" type="title">
   <p:cSld name="TITLE">
     <p:spTree>
       <p:nvGrpSpPr>
@@ -544,7 +553,9 @@
       <p:sp>
         <p:nvSpPr>
           <p:cNvPr id="11" name="Title Text"/>
-          <p:cNvSpPr txBox="1"/>
+          <p:cNvSpPr txBox="1">
+            <a:spLocks noGrp="1"/>
+          </p:cNvSpPr>
           <p:nvPr>
             <p:ph type="title"/>
           </p:nvPr>
@@ -566,7 +577,6 @@
             </a:lvl1pPr>
           </a:lstStyle>
           <a:p>
-            <a:pPr/>
             <a:r>
               <a:t>Title Text</a:t>
             </a:r>
@@ -576,7 +586,9 @@
       <p:sp>
         <p:nvSpPr>
           <p:cNvPr id="12" name="Body Level One…"/>
-          <p:cNvSpPr txBox="1"/>
+          <p:cNvSpPr txBox="1">
+            <a:spLocks noGrp="1"/>
+          </p:cNvSpPr>
           <p:nvPr>
             <p:ph type="body" sz="quarter" idx="1"/>
           </p:nvPr>
@@ -645,7 +657,6 @@
             </a:lvl5pPr>
           </a:lstStyle>
           <a:p>
-            <a:pPr/>
             <a:r>
               <a:t>Body Level One</a:t>
             </a:r>
@@ -679,7 +690,9 @@
       <p:sp>
         <p:nvSpPr>
           <p:cNvPr id="13" name="Slide Number"/>
-          <p:cNvSpPr txBox="1"/>
+          <p:cNvSpPr txBox="1">
+            <a:spLocks noGrp="1"/>
+          </p:cNvSpPr>
           <p:nvPr>
             <p:ph type="sldNum" sz="quarter" idx="2"/>
           </p:nvPr>
@@ -693,8 +706,10 @@
           <a:bodyPr/>
           <a:lstStyle/>
           <a:p>
-            <a:pPr/>
-            <a:fld id="{86CB4B4D-7CA3-9044-876B-883B54F8677D}" type="slidenum"/>
+            <a:fld id="{86CB4B4D-7CA3-9044-876B-883B54F8677D}" type="slidenum">
+              <a:t>‹#›</a:t>
+            </a:fld>
+            <a:endParaRPr/>
           </a:p>
         </p:txBody>
       </p:sp>
@@ -703,12 +718,12 @@
   <p:clrMapOvr>
     <a:masterClrMapping/>
   </p:clrMapOvr>
-  <p:transition xmlns:p14="http://schemas.microsoft.com/office/powerpoint/2010/main" spd="med" advClick="1"/>
+  <p:transition spd="med"/>
 </p:sldLayout>
 </file>
 
 <file path=ppt/slideLayouts/slideLayout10.xml><?xml version="1.0" encoding="utf-8"?>
-<p:sldLayout xmlns:a="http://schemas.openxmlformats.org/drawingml/2006/main" xmlns:r="http://schemas.openxmlformats.org/officeDocument/2006/relationships" xmlns:p="http://schemas.openxmlformats.org/presentationml/2006/main" xmlns:m="http://schemas.openxmlformats.org/officeDocument/2006/math" xmlns:a14="http://schemas.microsoft.com/office/drawing/2010/main" type="tx" showMasterSp="1" showMasterPhAnim="1">
+<p:sldLayout xmlns:a="http://schemas.openxmlformats.org/drawingml/2006/main" xmlns:r="http://schemas.openxmlformats.org/officeDocument/2006/relationships" xmlns:p="http://schemas.openxmlformats.org/presentationml/2006/main" type="tx">
   <p:cSld name="BIG_NUMBER">
     <p:spTree>
       <p:nvGrpSpPr>
@@ -727,7 +742,9 @@
       <p:sp>
         <p:nvSpPr>
           <p:cNvPr id="91" name="xx%"/>
-          <p:cNvSpPr txBox="1"/>
+          <p:cNvSpPr txBox="1">
+            <a:spLocks noGrp="1"/>
+          </p:cNvSpPr>
           <p:nvPr>
             <p:ph type="title" hasCustomPrompt="1"/>
           </p:nvPr>
@@ -749,7 +766,6 @@
             </a:lvl1pPr>
           </a:lstStyle>
           <a:p>
-            <a:pPr/>
             <a:r>
               <a:t>xx%</a:t>
             </a:r>
@@ -759,7 +775,9 @@
       <p:sp>
         <p:nvSpPr>
           <p:cNvPr id="92" name="Body Level One…"/>
-          <p:cNvSpPr txBox="1"/>
+          <p:cNvSpPr txBox="1">
+            <a:spLocks noGrp="1"/>
+          </p:cNvSpPr>
           <p:nvPr>
             <p:ph type="body" sz="half" idx="1"/>
           </p:nvPr>
@@ -783,7 +801,6 @@
             <a:lvl5pPr algn="ctr"/>
           </a:lstStyle>
           <a:p>
-            <a:pPr/>
             <a:r>
               <a:t>Body Level One</a:t>
             </a:r>
@@ -817,7 +834,9 @@
       <p:sp>
         <p:nvSpPr>
           <p:cNvPr id="93" name="Slide Number"/>
-          <p:cNvSpPr txBox="1"/>
+          <p:cNvSpPr txBox="1">
+            <a:spLocks noGrp="1"/>
+          </p:cNvSpPr>
           <p:nvPr>
             <p:ph type="sldNum" sz="quarter" idx="2"/>
           </p:nvPr>
@@ -831,8 +850,10 @@
           <a:bodyPr/>
           <a:lstStyle/>
           <a:p>
-            <a:pPr/>
-            <a:fld id="{86CB4B4D-7CA3-9044-876B-883B54F8677D}" type="slidenum"/>
+            <a:fld id="{86CB4B4D-7CA3-9044-876B-883B54F8677D}" type="slidenum">
+              <a:t>‹#›</a:t>
+            </a:fld>
+            <a:endParaRPr/>
           </a:p>
         </p:txBody>
       </p:sp>
@@ -841,12 +862,12 @@
   <p:clrMapOvr>
     <a:masterClrMapping/>
   </p:clrMapOvr>
-  <p:transition xmlns:p14="http://schemas.microsoft.com/office/powerpoint/2010/main" spd="med" advClick="1"/>
+  <p:transition spd="med"/>
 </p:sldLayout>
 </file>
 
 <file path=ppt/slideLayouts/slideLayout11.xml><?xml version="1.0" encoding="utf-8"?>
-<p:sldLayout xmlns:a="http://schemas.openxmlformats.org/drawingml/2006/main" xmlns:r="http://schemas.openxmlformats.org/officeDocument/2006/relationships" xmlns:p="http://schemas.openxmlformats.org/presentationml/2006/main" xmlns:m="http://schemas.openxmlformats.org/officeDocument/2006/math" xmlns:a14="http://schemas.microsoft.com/office/drawing/2010/main" type="tx" showMasterSp="1" showMasterPhAnim="1">
+<p:sldLayout xmlns:a="http://schemas.openxmlformats.org/drawingml/2006/main" xmlns:r="http://schemas.openxmlformats.org/officeDocument/2006/relationships" xmlns:p="http://schemas.openxmlformats.org/presentationml/2006/main" type="tx">
   <p:cSld name="BLANK">
     <p:spTree>
       <p:nvGrpSpPr>
@@ -865,7 +886,9 @@
       <p:sp>
         <p:nvSpPr>
           <p:cNvPr id="100" name="Slide Number"/>
-          <p:cNvSpPr txBox="1"/>
+          <p:cNvSpPr txBox="1">
+            <a:spLocks noGrp="1"/>
+          </p:cNvSpPr>
           <p:nvPr>
             <p:ph type="sldNum" sz="quarter" idx="2"/>
           </p:nvPr>
@@ -879,8 +902,10 @@
           <a:bodyPr/>
           <a:lstStyle/>
           <a:p>
-            <a:pPr/>
-            <a:fld id="{86CB4B4D-7CA3-9044-876B-883B54F8677D}" type="slidenum"/>
+            <a:fld id="{86CB4B4D-7CA3-9044-876B-883B54F8677D}" type="slidenum">
+              <a:t>‹#›</a:t>
+            </a:fld>
+            <a:endParaRPr/>
           </a:p>
         </p:txBody>
       </p:sp>
@@ -889,12 +914,12 @@
   <p:clrMapOvr>
     <a:masterClrMapping/>
   </p:clrMapOvr>
-  <p:transition xmlns:p14="http://schemas.microsoft.com/office/powerpoint/2010/main" spd="med" advClick="1"/>
+  <p:transition spd="med"/>
 </p:sldLayout>
 </file>
 
 <file path=ppt/slideLayouts/slideLayout12.xml><?xml version="1.0" encoding="utf-8"?>
-<p:sldLayout xmlns:a="http://schemas.openxmlformats.org/drawingml/2006/main" xmlns:r="http://schemas.openxmlformats.org/officeDocument/2006/relationships" xmlns:p="http://schemas.openxmlformats.org/presentationml/2006/main" xmlns:m="http://schemas.openxmlformats.org/officeDocument/2006/math" xmlns:a14="http://schemas.microsoft.com/office/drawing/2010/main" type="tx" showMasterSp="1" showMasterPhAnim="1">
+<p:sldLayout xmlns:a="http://schemas.openxmlformats.org/drawingml/2006/main" xmlns:r="http://schemas.openxmlformats.org/officeDocument/2006/relationships" xmlns:p="http://schemas.openxmlformats.org/presentationml/2006/main" type="tx">
   <p:cSld name="OBJECT">
     <p:spTree>
       <p:nvGrpSpPr>
@@ -935,7 +960,7 @@
           <a:bodyPr lIns="45719" rIns="45719"/>
           <a:lstStyle/>
           <a:p>
-            <a:pPr/>
+            <a:endParaRPr/>
           </a:p>
         </p:txBody>
       </p:sp>
@@ -966,14 +991,16 @@
           <a:bodyPr lIns="45719" rIns="45719"/>
           <a:lstStyle/>
           <a:p>
-            <a:pPr/>
+            <a:endParaRPr/>
           </a:p>
         </p:txBody>
       </p:sp>
       <p:sp>
         <p:nvSpPr>
           <p:cNvPr id="109" name="Title Text"/>
-          <p:cNvSpPr txBox="1"/>
+          <p:cNvSpPr txBox="1">
+            <a:spLocks noGrp="1"/>
+          </p:cNvSpPr>
           <p:nvPr>
             <p:ph type="title"/>
           </p:nvPr>
@@ -1003,7 +1030,6 @@
             </a:lvl1pPr>
           </a:lstStyle>
           <a:p>
-            <a:pPr/>
             <a:r>
               <a:t>Title Text</a:t>
             </a:r>
@@ -1013,7 +1039,9 @@
       <p:sp>
         <p:nvSpPr>
           <p:cNvPr id="110" name="Body Level One…"/>
-          <p:cNvSpPr txBox="1"/>
+          <p:cNvSpPr txBox="1">
+            <a:spLocks noGrp="1"/>
+          </p:cNvSpPr>
           <p:nvPr>
             <p:ph type="body" sz="quarter" idx="1"/>
           </p:nvPr>
@@ -1122,7 +1150,6 @@
             </a:lvl5pPr>
           </a:lstStyle>
           <a:p>
-            <a:pPr/>
             <a:r>
               <a:t>Body Level One</a:t>
             </a:r>
@@ -1156,7 +1183,9 @@
       <p:sp>
         <p:nvSpPr>
           <p:cNvPr id="111" name="Slide Number"/>
-          <p:cNvSpPr txBox="1"/>
+          <p:cNvSpPr txBox="1">
+            <a:spLocks noGrp="1"/>
+          </p:cNvSpPr>
           <p:nvPr>
             <p:ph type="sldNum" sz="quarter" idx="2"/>
           </p:nvPr>
@@ -1184,8 +1213,10 @@
             </a:lvl1pPr>
           </a:lstStyle>
           <a:p>
-            <a:pPr/>
-            <a:fld id="{86CB4B4D-7CA3-9044-876B-883B54F8677D}" type="slidenum"/>
+            <a:fld id="{86CB4B4D-7CA3-9044-876B-883B54F8677D}" type="slidenum">
+              <a:t>‹#›</a:t>
+            </a:fld>
+            <a:endParaRPr/>
           </a:p>
         </p:txBody>
       </p:sp>
@@ -1194,12 +1225,12 @@
   <p:clrMapOvr>
     <a:masterClrMapping/>
   </p:clrMapOvr>
-  <p:transition xmlns:p14="http://schemas.microsoft.com/office/powerpoint/2010/main" spd="med" advClick="1"/>
+  <p:transition spd="med"/>
 </p:sldLayout>
 </file>
 
 <file path=ppt/slideLayouts/slideLayout13.xml><?xml version="1.0" encoding="utf-8"?>
-<p:sldLayout xmlns:a="http://schemas.openxmlformats.org/drawingml/2006/main" xmlns:r="http://schemas.openxmlformats.org/officeDocument/2006/relationships" xmlns:p="http://schemas.openxmlformats.org/presentationml/2006/main" xmlns:m="http://schemas.openxmlformats.org/officeDocument/2006/math" xmlns:a14="http://schemas.microsoft.com/office/drawing/2010/main" type="tx" showMasterSp="1" showMasterPhAnim="1">
+<p:sldLayout xmlns:a="http://schemas.openxmlformats.org/drawingml/2006/main" xmlns:r="http://schemas.openxmlformats.org/officeDocument/2006/relationships" xmlns:p="http://schemas.openxmlformats.org/presentationml/2006/main" type="tx">
   <p:cSld name="OBJECT 0">
     <p:spTree>
       <p:nvGrpSpPr>
@@ -1218,7 +1249,9 @@
       <p:sp>
         <p:nvSpPr>
           <p:cNvPr id="118" name="Title Text"/>
-          <p:cNvSpPr txBox="1"/>
+          <p:cNvSpPr txBox="1">
+            <a:spLocks noGrp="1"/>
+          </p:cNvSpPr>
           <p:nvPr>
             <p:ph type="title"/>
           </p:nvPr>
@@ -1248,7 +1281,6 @@
             </a:lvl1pPr>
           </a:lstStyle>
           <a:p>
-            <a:pPr/>
             <a:r>
               <a:t>Title Text</a:t>
             </a:r>
@@ -1258,7 +1290,9 @@
       <p:sp>
         <p:nvSpPr>
           <p:cNvPr id="119" name="Body Level One…"/>
-          <p:cNvSpPr txBox="1"/>
+          <p:cNvSpPr txBox="1">
+            <a:spLocks noGrp="1"/>
+          </p:cNvSpPr>
           <p:nvPr>
             <p:ph type="body" sz="quarter" idx="1"/>
           </p:nvPr>
@@ -1367,7 +1401,6 @@
             </a:lvl5pPr>
           </a:lstStyle>
           <a:p>
-            <a:pPr/>
             <a:r>
               <a:t>Body Level One</a:t>
             </a:r>
@@ -1401,7 +1434,9 @@
       <p:sp>
         <p:nvSpPr>
           <p:cNvPr id="120" name="Slide Number"/>
-          <p:cNvSpPr txBox="1"/>
+          <p:cNvSpPr txBox="1">
+            <a:spLocks noGrp="1"/>
+          </p:cNvSpPr>
           <p:nvPr>
             <p:ph type="sldNum" sz="quarter" idx="2"/>
           </p:nvPr>
@@ -1429,8 +1464,10 @@
             </a:lvl1pPr>
           </a:lstStyle>
           <a:p>
-            <a:pPr/>
-            <a:fld id="{86CB4B4D-7CA3-9044-876B-883B54F8677D}" type="slidenum"/>
+            <a:fld id="{86CB4B4D-7CA3-9044-876B-883B54F8677D}" type="slidenum">
+              <a:t>‹#›</a:t>
+            </a:fld>
+            <a:endParaRPr/>
           </a:p>
         </p:txBody>
       </p:sp>
@@ -1439,12 +1476,12 @@
   <p:clrMapOvr>
     <a:masterClrMapping/>
   </p:clrMapOvr>
-  <p:transition xmlns:p14="http://schemas.microsoft.com/office/powerpoint/2010/main" spd="med" advClick="1"/>
+  <p:transition spd="med"/>
 </p:sldLayout>
 </file>
 
 <file path=ppt/slideLayouts/slideLayout14.xml><?xml version="1.0" encoding="utf-8"?>
-<p:sldLayout xmlns:a="http://schemas.openxmlformats.org/drawingml/2006/main" xmlns:r="http://schemas.openxmlformats.org/officeDocument/2006/relationships" xmlns:p="http://schemas.openxmlformats.org/presentationml/2006/main" xmlns:m="http://schemas.openxmlformats.org/officeDocument/2006/math" xmlns:a14="http://schemas.microsoft.com/office/drawing/2010/main" type="tx" showMasterSp="1" showMasterPhAnim="1">
+<p:sldLayout xmlns:a="http://schemas.openxmlformats.org/drawingml/2006/main" xmlns:r="http://schemas.openxmlformats.org/officeDocument/2006/relationships" xmlns:p="http://schemas.openxmlformats.org/presentationml/2006/main" type="tx">
   <p:cSld name="Title Only">
     <p:spTree>
       <p:nvGrpSpPr>
@@ -1485,7 +1522,7 @@
           <a:bodyPr lIns="45719" rIns="45719"/>
           <a:lstStyle/>
           <a:p>
-            <a:pPr/>
+            <a:endParaRPr/>
           </a:p>
         </p:txBody>
       </p:sp>
@@ -1516,14 +1553,16 @@
           <a:bodyPr lIns="45719" rIns="45719"/>
           <a:lstStyle/>
           <a:p>
-            <a:pPr/>
+            <a:endParaRPr/>
           </a:p>
         </p:txBody>
       </p:sp>
       <p:sp>
         <p:nvSpPr>
           <p:cNvPr id="129" name="Title Text"/>
-          <p:cNvSpPr txBox="1"/>
+          <p:cNvSpPr txBox="1">
+            <a:spLocks noGrp="1"/>
+          </p:cNvSpPr>
           <p:nvPr>
             <p:ph type="title"/>
           </p:nvPr>
@@ -1553,7 +1592,6 @@
             </a:lvl1pPr>
           </a:lstStyle>
           <a:p>
-            <a:pPr/>
             <a:r>
               <a:t>Title Text</a:t>
             </a:r>
@@ -1563,7 +1601,9 @@
       <p:sp>
         <p:nvSpPr>
           <p:cNvPr id="130" name="Slide Number"/>
-          <p:cNvSpPr txBox="1"/>
+          <p:cNvSpPr txBox="1">
+            <a:spLocks noGrp="1"/>
+          </p:cNvSpPr>
           <p:nvPr>
             <p:ph type="sldNum" sz="quarter" idx="2"/>
           </p:nvPr>
@@ -1591,8 +1631,10 @@
             </a:lvl1pPr>
           </a:lstStyle>
           <a:p>
-            <a:pPr/>
-            <a:fld id="{86CB4B4D-7CA3-9044-876B-883B54F8677D}" type="slidenum"/>
+            <a:fld id="{86CB4B4D-7CA3-9044-876B-883B54F8677D}" type="slidenum">
+              <a:t>‹#›</a:t>
+            </a:fld>
+            <a:endParaRPr/>
           </a:p>
         </p:txBody>
       </p:sp>
@@ -1601,12 +1643,12 @@
   <p:clrMapOvr>
     <a:masterClrMapping/>
   </p:clrMapOvr>
-  <p:transition xmlns:p14="http://schemas.microsoft.com/office/powerpoint/2010/main" spd="med" advClick="1"/>
+  <p:transition spd="med"/>
 </p:sldLayout>
 </file>
 
 <file path=ppt/slideLayouts/slideLayout15.xml><?xml version="1.0" encoding="utf-8"?>
-<p:sldLayout xmlns:a="http://schemas.openxmlformats.org/drawingml/2006/main" xmlns:r="http://schemas.openxmlformats.org/officeDocument/2006/relationships" xmlns:p="http://schemas.openxmlformats.org/presentationml/2006/main" xmlns:m="http://schemas.openxmlformats.org/officeDocument/2006/math" xmlns:a14="http://schemas.microsoft.com/office/drawing/2010/main" type="tx" showMasterSp="1" showMasterPhAnim="1">
+<p:sldLayout xmlns:a="http://schemas.openxmlformats.org/drawingml/2006/main" xmlns:r="http://schemas.openxmlformats.org/officeDocument/2006/relationships" xmlns:p="http://schemas.openxmlformats.org/presentationml/2006/main" type="tx">
   <p:cSld name="Blank">
     <p:spTree>
       <p:nvGrpSpPr>
@@ -1647,7 +1689,7 @@
           <a:bodyPr lIns="45719" rIns="45719"/>
           <a:lstStyle/>
           <a:p>
-            <a:pPr/>
+            <a:endParaRPr/>
           </a:p>
         </p:txBody>
       </p:sp>
@@ -1678,14 +1720,16 @@
           <a:bodyPr lIns="45719" rIns="45719"/>
           <a:lstStyle/>
           <a:p>
-            <a:pPr/>
+            <a:endParaRPr/>
           </a:p>
         </p:txBody>
       </p:sp>
       <p:sp>
         <p:nvSpPr>
           <p:cNvPr id="139" name="Slide Number"/>
-          <p:cNvSpPr txBox="1"/>
+          <p:cNvSpPr txBox="1">
+            <a:spLocks noGrp="1"/>
+          </p:cNvSpPr>
           <p:nvPr>
             <p:ph type="sldNum" sz="quarter" idx="2"/>
           </p:nvPr>
@@ -1713,8 +1757,10 @@
             </a:lvl1pPr>
           </a:lstStyle>
           <a:p>
-            <a:pPr/>
-            <a:fld id="{86CB4B4D-7CA3-9044-876B-883B54F8677D}" type="slidenum"/>
+            <a:fld id="{86CB4B4D-7CA3-9044-876B-883B54F8677D}" type="slidenum">
+              <a:t>‹#›</a:t>
+            </a:fld>
+            <a:endParaRPr/>
           </a:p>
         </p:txBody>
       </p:sp>
@@ -1723,12 +1769,12 @@
   <p:clrMapOvr>
     <a:masterClrMapping/>
   </p:clrMapOvr>
-  <p:transition xmlns:p14="http://schemas.microsoft.com/office/powerpoint/2010/main" spd="med" advClick="1"/>
+  <p:transition spd="med"/>
 </p:sldLayout>
 </file>
 
 <file path=ppt/slideLayouts/slideLayout16.xml><?xml version="1.0" encoding="utf-8"?>
-<p:sldLayout xmlns:a="http://schemas.openxmlformats.org/drawingml/2006/main" xmlns:r="http://schemas.openxmlformats.org/officeDocument/2006/relationships" xmlns:p="http://schemas.openxmlformats.org/presentationml/2006/main" xmlns:m="http://schemas.openxmlformats.org/officeDocument/2006/math" xmlns:a14="http://schemas.microsoft.com/office/drawing/2010/main" type="tx" showMasterSp="1" showMasterPhAnim="1">
+<p:sldLayout xmlns:a="http://schemas.openxmlformats.org/drawingml/2006/main" xmlns:r="http://schemas.openxmlformats.org/officeDocument/2006/relationships" xmlns:p="http://schemas.openxmlformats.org/presentationml/2006/main" type="tx">
   <p:cSld name="Title Slide">
     <p:spTree>
       <p:nvGrpSpPr>
@@ -1769,7 +1815,7 @@
           <a:bodyPr lIns="45719" rIns="45719"/>
           <a:lstStyle/>
           <a:p>
-            <a:pPr/>
+            <a:endParaRPr/>
           </a:p>
         </p:txBody>
       </p:sp>
@@ -1800,14 +1846,16 @@
           <a:bodyPr lIns="45719" rIns="45719"/>
           <a:lstStyle/>
           <a:p>
-            <a:pPr/>
+            <a:endParaRPr/>
           </a:p>
         </p:txBody>
       </p:sp>
       <p:sp>
         <p:nvSpPr>
           <p:cNvPr id="148" name="Title Text"/>
-          <p:cNvSpPr txBox="1"/>
+          <p:cNvSpPr txBox="1">
+            <a:spLocks noGrp="1"/>
+          </p:cNvSpPr>
           <p:nvPr>
             <p:ph type="title"/>
           </p:nvPr>
@@ -1837,7 +1885,6 @@
             </a:lvl1pPr>
           </a:lstStyle>
           <a:p>
-            <a:pPr/>
             <a:r>
               <a:t>Title Text</a:t>
             </a:r>
@@ -1847,7 +1894,9 @@
       <p:sp>
         <p:nvSpPr>
           <p:cNvPr id="149" name="Body Level One…"/>
-          <p:cNvSpPr txBox="1"/>
+          <p:cNvSpPr txBox="1">
+            <a:spLocks noGrp="1"/>
+          </p:cNvSpPr>
           <p:nvPr>
             <p:ph type="body" sz="quarter" idx="1"/>
           </p:nvPr>
@@ -1956,7 +2005,6 @@
             </a:lvl5pPr>
           </a:lstStyle>
           <a:p>
-            <a:pPr/>
             <a:r>
               <a:t>Body Level One</a:t>
             </a:r>
@@ -1990,7 +2038,9 @@
       <p:sp>
         <p:nvSpPr>
           <p:cNvPr id="150" name="Slide Number"/>
-          <p:cNvSpPr txBox="1"/>
+          <p:cNvSpPr txBox="1">
+            <a:spLocks noGrp="1"/>
+          </p:cNvSpPr>
           <p:nvPr>
             <p:ph type="sldNum" sz="quarter" idx="2"/>
           </p:nvPr>
@@ -2018,8 +2068,10 @@
             </a:lvl1pPr>
           </a:lstStyle>
           <a:p>
-            <a:pPr/>
-            <a:fld id="{86CB4B4D-7CA3-9044-876B-883B54F8677D}" type="slidenum"/>
+            <a:fld id="{86CB4B4D-7CA3-9044-876B-883B54F8677D}" type="slidenum">
+              <a:t>‹#›</a:t>
+            </a:fld>
+            <a:endParaRPr/>
           </a:p>
         </p:txBody>
       </p:sp>
@@ -2028,12 +2080,12 @@
   <p:clrMapOvr>
     <a:masterClrMapping/>
   </p:clrMapOvr>
-  <p:transition xmlns:p14="http://schemas.microsoft.com/office/powerpoint/2010/main" spd="med" advClick="1"/>
+  <p:transition spd="med"/>
 </p:sldLayout>
 </file>
 
 <file path=ppt/slideLayouts/slideLayout17.xml><?xml version="1.0" encoding="utf-8"?>
-<p:sldLayout xmlns:a="http://schemas.openxmlformats.org/drawingml/2006/main" xmlns:r="http://schemas.openxmlformats.org/officeDocument/2006/relationships" xmlns:p="http://schemas.openxmlformats.org/presentationml/2006/main" xmlns:m="http://schemas.openxmlformats.org/officeDocument/2006/math" xmlns:a14="http://schemas.microsoft.com/office/drawing/2010/main" type="tx" showMasterSp="1" showMasterPhAnim="1">
+<p:sldLayout xmlns:a="http://schemas.openxmlformats.org/drawingml/2006/main" xmlns:r="http://schemas.openxmlformats.org/officeDocument/2006/relationships" xmlns:p="http://schemas.openxmlformats.org/presentationml/2006/main" type="tx">
   <p:cSld name="Two Content">
     <p:spTree>
       <p:nvGrpSpPr>
@@ -2074,7 +2126,7 @@
           <a:bodyPr lIns="45719" rIns="45719"/>
           <a:lstStyle/>
           <a:p>
-            <a:pPr/>
+            <a:endParaRPr/>
           </a:p>
         </p:txBody>
       </p:sp>
@@ -2105,14 +2157,16 @@
           <a:bodyPr lIns="45719" rIns="45719"/>
           <a:lstStyle/>
           <a:p>
-            <a:pPr/>
+            <a:endParaRPr/>
           </a:p>
         </p:txBody>
       </p:sp>
       <p:sp>
         <p:nvSpPr>
           <p:cNvPr id="159" name="Title Text"/>
-          <p:cNvSpPr txBox="1"/>
+          <p:cNvSpPr txBox="1">
+            <a:spLocks noGrp="1"/>
+          </p:cNvSpPr>
           <p:nvPr>
             <p:ph type="title"/>
           </p:nvPr>
@@ -2142,7 +2196,6 @@
             </a:lvl1pPr>
           </a:lstStyle>
           <a:p>
-            <a:pPr/>
             <a:r>
               <a:t>Title Text</a:t>
             </a:r>
@@ -2152,7 +2205,9 @@
       <p:sp>
         <p:nvSpPr>
           <p:cNvPr id="160" name="Body Level One…"/>
-          <p:cNvSpPr txBox="1"/>
+          <p:cNvSpPr txBox="1">
+            <a:spLocks noGrp="1"/>
+          </p:cNvSpPr>
           <p:nvPr>
             <p:ph type="body" sz="half" idx="1"/>
           </p:nvPr>
@@ -2261,7 +2316,6 @@
             </a:lvl5pPr>
           </a:lstStyle>
           <a:p>
-            <a:pPr/>
             <a:r>
               <a:t>Body Level One</a:t>
             </a:r>
@@ -2295,7 +2349,9 @@
       <p:sp>
         <p:nvSpPr>
           <p:cNvPr id="161" name="Google Shape;82;p18"/>
-          <p:cNvSpPr txBox="1"/>
+          <p:cNvSpPr txBox="1">
+            <a:spLocks noGrp="1"/>
+          </p:cNvSpPr>
           <p:nvPr>
             <p:ph type="body" sz="half" idx="21"/>
           </p:nvPr>
@@ -2331,13 +2387,16 @@
                 <a:sym typeface="Corbel"/>
               </a:defRPr>
             </a:pPr>
+            <a:endParaRPr/>
           </a:p>
         </p:txBody>
       </p:sp>
       <p:sp>
         <p:nvSpPr>
           <p:cNvPr id="162" name="Slide Number"/>
-          <p:cNvSpPr txBox="1"/>
+          <p:cNvSpPr txBox="1">
+            <a:spLocks noGrp="1"/>
+          </p:cNvSpPr>
           <p:nvPr>
             <p:ph type="sldNum" sz="quarter" idx="2"/>
           </p:nvPr>
@@ -2365,8 +2424,10 @@
             </a:lvl1pPr>
           </a:lstStyle>
           <a:p>
-            <a:pPr/>
-            <a:fld id="{86CB4B4D-7CA3-9044-876B-883B54F8677D}" type="slidenum"/>
+            <a:fld id="{86CB4B4D-7CA3-9044-876B-883B54F8677D}" type="slidenum">
+              <a:t>‹#›</a:t>
+            </a:fld>
+            <a:endParaRPr/>
           </a:p>
         </p:txBody>
       </p:sp>
@@ -2375,12 +2436,12 @@
   <p:clrMapOvr>
     <a:masterClrMapping/>
   </p:clrMapOvr>
-  <p:transition xmlns:p14="http://schemas.microsoft.com/office/powerpoint/2010/main" spd="med" advClick="1"/>
+  <p:transition spd="med"/>
 </p:sldLayout>
 </file>
 
 <file path=ppt/slideLayouts/slideLayout2.xml><?xml version="1.0" encoding="utf-8"?>
-<p:sldLayout xmlns:a="http://schemas.openxmlformats.org/drawingml/2006/main" xmlns:r="http://schemas.openxmlformats.org/officeDocument/2006/relationships" xmlns:p="http://schemas.openxmlformats.org/presentationml/2006/main" xmlns:m="http://schemas.openxmlformats.org/officeDocument/2006/math" xmlns:a14="http://schemas.microsoft.com/office/drawing/2010/main" type="tx" showMasterSp="1" showMasterPhAnim="1">
+<p:sldLayout xmlns:a="http://schemas.openxmlformats.org/drawingml/2006/main" xmlns:r="http://schemas.openxmlformats.org/officeDocument/2006/relationships" xmlns:p="http://schemas.openxmlformats.org/presentationml/2006/main" type="tx">
   <p:cSld name="SECTION_HEADER">
     <p:spTree>
       <p:nvGrpSpPr>
@@ -2399,7 +2460,9 @@
       <p:sp>
         <p:nvSpPr>
           <p:cNvPr id="20" name="Title Text"/>
-          <p:cNvSpPr txBox="1"/>
+          <p:cNvSpPr txBox="1">
+            <a:spLocks noGrp="1"/>
+          </p:cNvSpPr>
           <p:nvPr>
             <p:ph type="title"/>
           </p:nvPr>
@@ -2421,7 +2484,6 @@
             </a:lvl1pPr>
           </a:lstStyle>
           <a:p>
-            <a:pPr/>
             <a:r>
               <a:t>Title Text</a:t>
             </a:r>
@@ -2431,7 +2493,9 @@
       <p:sp>
         <p:nvSpPr>
           <p:cNvPr id="21" name="Slide Number"/>
-          <p:cNvSpPr txBox="1"/>
+          <p:cNvSpPr txBox="1">
+            <a:spLocks noGrp="1"/>
+          </p:cNvSpPr>
           <p:nvPr>
             <p:ph type="sldNum" sz="quarter" idx="2"/>
           </p:nvPr>
@@ -2445,8 +2509,10 @@
           <a:bodyPr/>
           <a:lstStyle/>
           <a:p>
-            <a:pPr/>
-            <a:fld id="{86CB4B4D-7CA3-9044-876B-883B54F8677D}" type="slidenum"/>
+            <a:fld id="{86CB4B4D-7CA3-9044-876B-883B54F8677D}" type="slidenum">
+              <a:t>‹#›</a:t>
+            </a:fld>
+            <a:endParaRPr/>
           </a:p>
         </p:txBody>
       </p:sp>
@@ -2455,12 +2521,12 @@
   <p:clrMapOvr>
     <a:masterClrMapping/>
   </p:clrMapOvr>
-  <p:transition xmlns:p14="http://schemas.microsoft.com/office/powerpoint/2010/main" spd="med" advClick="1"/>
+  <p:transition spd="med"/>
 </p:sldLayout>
 </file>
 
 <file path=ppt/slideLayouts/slideLayout3.xml><?xml version="1.0" encoding="utf-8"?>
-<p:sldLayout xmlns:a="http://schemas.openxmlformats.org/drawingml/2006/main" xmlns:r="http://schemas.openxmlformats.org/officeDocument/2006/relationships" xmlns:p="http://schemas.openxmlformats.org/presentationml/2006/main" xmlns:m="http://schemas.openxmlformats.org/officeDocument/2006/math" xmlns:a14="http://schemas.microsoft.com/office/drawing/2010/main" type="tx" showMasterSp="1" showMasterPhAnim="1">
+<p:sldLayout xmlns:a="http://schemas.openxmlformats.org/drawingml/2006/main" xmlns:r="http://schemas.openxmlformats.org/officeDocument/2006/relationships" xmlns:p="http://schemas.openxmlformats.org/presentationml/2006/main" type="tx">
   <p:cSld name="TITLE_AND_BODY">
     <p:spTree>
       <p:nvGrpSpPr>
@@ -2479,7 +2545,9 @@
       <p:sp>
         <p:nvSpPr>
           <p:cNvPr id="28" name="Title Text"/>
-          <p:cNvSpPr txBox="1"/>
+          <p:cNvSpPr txBox="1">
+            <a:spLocks noGrp="1"/>
+          </p:cNvSpPr>
           <p:nvPr>
             <p:ph type="title"/>
           </p:nvPr>
@@ -2493,7 +2561,6 @@
           <a:bodyPr/>
           <a:lstStyle/>
           <a:p>
-            <a:pPr/>
             <a:r>
               <a:t>Title Text</a:t>
             </a:r>
@@ -2503,7 +2570,9 @@
       <p:sp>
         <p:nvSpPr>
           <p:cNvPr id="29" name="Body Level One…"/>
-          <p:cNvSpPr txBox="1"/>
+          <p:cNvSpPr txBox="1">
+            <a:spLocks noGrp="1"/>
+          </p:cNvSpPr>
           <p:nvPr>
             <p:ph type="body" idx="1"/>
           </p:nvPr>
@@ -2517,7 +2586,6 @@
           <a:bodyPr/>
           <a:lstStyle/>
           <a:p>
-            <a:pPr/>
             <a:r>
               <a:t>Body Level One</a:t>
             </a:r>
@@ -2551,7 +2619,9 @@
       <p:sp>
         <p:nvSpPr>
           <p:cNvPr id="30" name="Slide Number"/>
-          <p:cNvSpPr txBox="1"/>
+          <p:cNvSpPr txBox="1">
+            <a:spLocks noGrp="1"/>
+          </p:cNvSpPr>
           <p:nvPr>
             <p:ph type="sldNum" sz="quarter" idx="2"/>
           </p:nvPr>
@@ -2565,8 +2635,10 @@
           <a:bodyPr/>
           <a:lstStyle/>
           <a:p>
-            <a:pPr/>
-            <a:fld id="{86CB4B4D-7CA3-9044-876B-883B54F8677D}" type="slidenum"/>
+            <a:fld id="{86CB4B4D-7CA3-9044-876B-883B54F8677D}" type="slidenum">
+              <a:t>‹#›</a:t>
+            </a:fld>
+            <a:endParaRPr/>
           </a:p>
         </p:txBody>
       </p:sp>
@@ -2575,12 +2647,12 @@
   <p:clrMapOvr>
     <a:masterClrMapping/>
   </p:clrMapOvr>
-  <p:transition xmlns:p14="http://schemas.microsoft.com/office/powerpoint/2010/main" spd="med" advClick="1"/>
+  <p:transition spd="med"/>
 </p:sldLayout>
 </file>
 
 <file path=ppt/slideLayouts/slideLayout4.xml><?xml version="1.0" encoding="utf-8"?>
-<p:sldLayout xmlns:a="http://schemas.openxmlformats.org/drawingml/2006/main" xmlns:r="http://schemas.openxmlformats.org/officeDocument/2006/relationships" xmlns:p="http://schemas.openxmlformats.org/presentationml/2006/main" xmlns:m="http://schemas.openxmlformats.org/officeDocument/2006/math" xmlns:a14="http://schemas.microsoft.com/office/drawing/2010/main" type="tx" showMasterSp="1" showMasterPhAnim="1">
+<p:sldLayout xmlns:a="http://schemas.openxmlformats.org/drawingml/2006/main" xmlns:r="http://schemas.openxmlformats.org/officeDocument/2006/relationships" xmlns:p="http://schemas.openxmlformats.org/presentationml/2006/main" type="tx">
   <p:cSld name="TITLE_AND_TWO_COLUMNS">
     <p:spTree>
       <p:nvGrpSpPr>
@@ -2599,7 +2671,9 @@
       <p:sp>
         <p:nvSpPr>
           <p:cNvPr id="37" name="Title Text"/>
-          <p:cNvSpPr txBox="1"/>
+          <p:cNvSpPr txBox="1">
+            <a:spLocks noGrp="1"/>
+          </p:cNvSpPr>
           <p:nvPr>
             <p:ph type="title"/>
           </p:nvPr>
@@ -2613,7 +2687,6 @@
           <a:bodyPr/>
           <a:lstStyle/>
           <a:p>
-            <a:pPr/>
             <a:r>
               <a:t>Title Text</a:t>
             </a:r>
@@ -2623,7 +2696,9 @@
       <p:sp>
         <p:nvSpPr>
           <p:cNvPr id="38" name="Body Level One…"/>
-          <p:cNvSpPr txBox="1"/>
+          <p:cNvSpPr txBox="1">
+            <a:spLocks noGrp="1"/>
+          </p:cNvSpPr>
           <p:nvPr>
             <p:ph type="body" sz="half" idx="1"/>
           </p:nvPr>
@@ -2662,7 +2737,6 @@
             </a:lvl5pPr>
           </a:lstStyle>
           <a:p>
-            <a:pPr/>
             <a:r>
               <a:t>Body Level One</a:t>
             </a:r>
@@ -2696,7 +2770,9 @@
       <p:sp>
         <p:nvSpPr>
           <p:cNvPr id="39" name="Google Shape;23;p5"/>
-          <p:cNvSpPr txBox="1"/>
+          <p:cNvSpPr txBox="1">
+            <a:spLocks noGrp="1"/>
+          </p:cNvSpPr>
           <p:nvPr>
             <p:ph type="body" sz="half" idx="21"/>
           </p:nvPr>
@@ -2718,13 +2794,16 @@
               <a:buSzPts val="1400"/>
               <a:defRPr sz="1400"/>
             </a:pPr>
+            <a:endParaRPr/>
           </a:p>
         </p:txBody>
       </p:sp>
       <p:sp>
         <p:nvSpPr>
           <p:cNvPr id="40" name="Slide Number"/>
-          <p:cNvSpPr txBox="1"/>
+          <p:cNvSpPr txBox="1">
+            <a:spLocks noGrp="1"/>
+          </p:cNvSpPr>
           <p:nvPr>
             <p:ph type="sldNum" sz="quarter" idx="2"/>
           </p:nvPr>
@@ -2738,8 +2817,10 @@
           <a:bodyPr/>
           <a:lstStyle/>
           <a:p>
-            <a:pPr/>
-            <a:fld id="{86CB4B4D-7CA3-9044-876B-883B54F8677D}" type="slidenum"/>
+            <a:fld id="{86CB4B4D-7CA3-9044-876B-883B54F8677D}" type="slidenum">
+              <a:t>‹#›</a:t>
+            </a:fld>
+            <a:endParaRPr/>
           </a:p>
         </p:txBody>
       </p:sp>
@@ -2748,12 +2829,12 @@
   <p:clrMapOvr>
     <a:masterClrMapping/>
   </p:clrMapOvr>
-  <p:transition xmlns:p14="http://schemas.microsoft.com/office/powerpoint/2010/main" spd="med" advClick="1"/>
+  <p:transition spd="med"/>
 </p:sldLayout>
 </file>
 
 <file path=ppt/slideLayouts/slideLayout5.xml><?xml version="1.0" encoding="utf-8"?>
-<p:sldLayout xmlns:a="http://schemas.openxmlformats.org/drawingml/2006/main" xmlns:r="http://schemas.openxmlformats.org/officeDocument/2006/relationships" xmlns:p="http://schemas.openxmlformats.org/presentationml/2006/main" xmlns:m="http://schemas.openxmlformats.org/officeDocument/2006/math" xmlns:a14="http://schemas.microsoft.com/office/drawing/2010/main" type="tx" showMasterSp="1" showMasterPhAnim="1">
+<p:sldLayout xmlns:a="http://schemas.openxmlformats.org/drawingml/2006/main" xmlns:r="http://schemas.openxmlformats.org/officeDocument/2006/relationships" xmlns:p="http://schemas.openxmlformats.org/presentationml/2006/main" type="tx">
   <p:cSld name="TITLE_ONLY">
     <p:spTree>
       <p:nvGrpSpPr>
@@ -2772,7 +2853,9 @@
       <p:sp>
         <p:nvSpPr>
           <p:cNvPr id="47" name="Title Text"/>
-          <p:cNvSpPr txBox="1"/>
+          <p:cNvSpPr txBox="1">
+            <a:spLocks noGrp="1"/>
+          </p:cNvSpPr>
           <p:nvPr>
             <p:ph type="title"/>
           </p:nvPr>
@@ -2786,7 +2869,6 @@
           <a:bodyPr/>
           <a:lstStyle/>
           <a:p>
-            <a:pPr/>
             <a:r>
               <a:t>Title Text</a:t>
             </a:r>
@@ -2796,7 +2878,9 @@
       <p:sp>
         <p:nvSpPr>
           <p:cNvPr id="48" name="Slide Number"/>
-          <p:cNvSpPr txBox="1"/>
+          <p:cNvSpPr txBox="1">
+            <a:spLocks noGrp="1"/>
+          </p:cNvSpPr>
           <p:nvPr>
             <p:ph type="sldNum" sz="quarter" idx="2"/>
           </p:nvPr>
@@ -2810,8 +2894,10 @@
           <a:bodyPr/>
           <a:lstStyle/>
           <a:p>
-            <a:pPr/>
-            <a:fld id="{86CB4B4D-7CA3-9044-876B-883B54F8677D}" type="slidenum"/>
+            <a:fld id="{86CB4B4D-7CA3-9044-876B-883B54F8677D}" type="slidenum">
+              <a:t>‹#›</a:t>
+            </a:fld>
+            <a:endParaRPr/>
           </a:p>
         </p:txBody>
       </p:sp>
@@ -2820,12 +2906,12 @@
   <p:clrMapOvr>
     <a:masterClrMapping/>
   </p:clrMapOvr>
-  <p:transition xmlns:p14="http://schemas.microsoft.com/office/powerpoint/2010/main" spd="med" advClick="1"/>
+  <p:transition spd="med"/>
 </p:sldLayout>
 </file>
 
 <file path=ppt/slideLayouts/slideLayout6.xml><?xml version="1.0" encoding="utf-8"?>
-<p:sldLayout xmlns:a="http://schemas.openxmlformats.org/drawingml/2006/main" xmlns:r="http://schemas.openxmlformats.org/officeDocument/2006/relationships" xmlns:p="http://schemas.openxmlformats.org/presentationml/2006/main" xmlns:m="http://schemas.openxmlformats.org/officeDocument/2006/math" xmlns:a14="http://schemas.microsoft.com/office/drawing/2010/main" type="tx" showMasterSp="1" showMasterPhAnim="1">
+<p:sldLayout xmlns:a="http://schemas.openxmlformats.org/drawingml/2006/main" xmlns:r="http://schemas.openxmlformats.org/officeDocument/2006/relationships" xmlns:p="http://schemas.openxmlformats.org/presentationml/2006/main" type="tx">
   <p:cSld name="ONE_COLUMN_TEXT">
     <p:spTree>
       <p:nvGrpSpPr>
@@ -2844,7 +2930,9 @@
       <p:sp>
         <p:nvSpPr>
           <p:cNvPr id="55" name="Title Text"/>
-          <p:cNvSpPr txBox="1"/>
+          <p:cNvSpPr txBox="1">
+            <a:spLocks noGrp="1"/>
+          </p:cNvSpPr>
           <p:nvPr>
             <p:ph type="title"/>
           </p:nvPr>
@@ -2866,7 +2954,6 @@
             </a:lvl1pPr>
           </a:lstStyle>
           <a:p>
-            <a:pPr/>
             <a:r>
               <a:t>Title Text</a:t>
             </a:r>
@@ -2876,7 +2963,9 @@
       <p:sp>
         <p:nvSpPr>
           <p:cNvPr id="56" name="Body Level One…"/>
-          <p:cNvSpPr txBox="1"/>
+          <p:cNvSpPr txBox="1">
+            <a:spLocks noGrp="1"/>
+          </p:cNvSpPr>
           <p:nvPr>
             <p:ph type="body" sz="quarter" idx="1"/>
           </p:nvPr>
@@ -2915,7 +3004,6 @@
             </a:lvl5pPr>
           </a:lstStyle>
           <a:p>
-            <a:pPr/>
             <a:r>
               <a:t>Body Level One</a:t>
             </a:r>
@@ -2949,7 +3037,9 @@
       <p:sp>
         <p:nvSpPr>
           <p:cNvPr id="57" name="Slide Number"/>
-          <p:cNvSpPr txBox="1"/>
+          <p:cNvSpPr txBox="1">
+            <a:spLocks noGrp="1"/>
+          </p:cNvSpPr>
           <p:nvPr>
             <p:ph type="sldNum" sz="quarter" idx="2"/>
           </p:nvPr>
@@ -2963,8 +3053,10 @@
           <a:bodyPr/>
           <a:lstStyle/>
           <a:p>
-            <a:pPr/>
-            <a:fld id="{86CB4B4D-7CA3-9044-876B-883B54F8677D}" type="slidenum"/>
+            <a:fld id="{86CB4B4D-7CA3-9044-876B-883B54F8677D}" type="slidenum">
+              <a:t>‹#›</a:t>
+            </a:fld>
+            <a:endParaRPr/>
           </a:p>
         </p:txBody>
       </p:sp>
@@ -2973,12 +3065,12 @@
   <p:clrMapOvr>
     <a:masterClrMapping/>
   </p:clrMapOvr>
-  <p:transition xmlns:p14="http://schemas.microsoft.com/office/powerpoint/2010/main" spd="med" advClick="1"/>
+  <p:transition spd="med"/>
 </p:sldLayout>
 </file>
 
 <file path=ppt/slideLayouts/slideLayout7.xml><?xml version="1.0" encoding="utf-8"?>
-<p:sldLayout xmlns:a="http://schemas.openxmlformats.org/drawingml/2006/main" xmlns:r="http://schemas.openxmlformats.org/officeDocument/2006/relationships" xmlns:p="http://schemas.openxmlformats.org/presentationml/2006/main" xmlns:m="http://schemas.openxmlformats.org/officeDocument/2006/math" xmlns:a14="http://schemas.microsoft.com/office/drawing/2010/main" type="tx" showMasterSp="1" showMasterPhAnim="1">
+<p:sldLayout xmlns:a="http://schemas.openxmlformats.org/drawingml/2006/main" xmlns:r="http://schemas.openxmlformats.org/officeDocument/2006/relationships" xmlns:p="http://schemas.openxmlformats.org/presentationml/2006/main" type="tx">
   <p:cSld name="MAIN_POINT">
     <p:spTree>
       <p:nvGrpSpPr>
@@ -2997,7 +3089,9 @@
       <p:sp>
         <p:nvSpPr>
           <p:cNvPr id="64" name="Title Text"/>
-          <p:cNvSpPr txBox="1"/>
+          <p:cNvSpPr txBox="1">
+            <a:spLocks noGrp="1"/>
+          </p:cNvSpPr>
           <p:nvPr>
             <p:ph type="title"/>
           </p:nvPr>
@@ -3019,7 +3113,6 @@
             </a:lvl1pPr>
           </a:lstStyle>
           <a:p>
-            <a:pPr/>
             <a:r>
               <a:t>Title Text</a:t>
             </a:r>
@@ -3029,7 +3122,9 @@
       <p:sp>
         <p:nvSpPr>
           <p:cNvPr id="65" name="Slide Number"/>
-          <p:cNvSpPr txBox="1"/>
+          <p:cNvSpPr txBox="1">
+            <a:spLocks noGrp="1"/>
+          </p:cNvSpPr>
           <p:nvPr>
             <p:ph type="sldNum" sz="quarter" idx="2"/>
           </p:nvPr>
@@ -3043,8 +3138,10 @@
           <a:bodyPr/>
           <a:lstStyle/>
           <a:p>
-            <a:pPr/>
-            <a:fld id="{86CB4B4D-7CA3-9044-876B-883B54F8677D}" type="slidenum"/>
+            <a:fld id="{86CB4B4D-7CA3-9044-876B-883B54F8677D}" type="slidenum">
+              <a:t>‹#›</a:t>
+            </a:fld>
+            <a:endParaRPr/>
           </a:p>
         </p:txBody>
       </p:sp>
@@ -3053,12 +3150,12 @@
   <p:clrMapOvr>
     <a:masterClrMapping/>
   </p:clrMapOvr>
-  <p:transition xmlns:p14="http://schemas.microsoft.com/office/powerpoint/2010/main" spd="med" advClick="1"/>
+  <p:transition spd="med"/>
 </p:sldLayout>
 </file>
 
 <file path=ppt/slideLayouts/slideLayout8.xml><?xml version="1.0" encoding="utf-8"?>
-<p:sldLayout xmlns:a="http://schemas.openxmlformats.org/drawingml/2006/main" xmlns:r="http://schemas.openxmlformats.org/officeDocument/2006/relationships" xmlns:p="http://schemas.openxmlformats.org/presentationml/2006/main" xmlns:m="http://schemas.openxmlformats.org/officeDocument/2006/math" xmlns:a14="http://schemas.microsoft.com/office/drawing/2010/main" type="tx" showMasterSp="1" showMasterPhAnim="1">
+<p:sldLayout xmlns:a="http://schemas.openxmlformats.org/drawingml/2006/main" xmlns:r="http://schemas.openxmlformats.org/officeDocument/2006/relationships" xmlns:p="http://schemas.openxmlformats.org/presentationml/2006/main" type="tx">
   <p:cSld name="SECTION_TITLE_AND_DESCRIPTION">
     <p:spTree>
       <p:nvGrpSpPr>
@@ -3099,14 +3196,16 @@
           <a:bodyPr lIns="45719" rIns="45719" anchor="ctr"/>
           <a:lstStyle/>
           <a:p>
-            <a:pPr/>
+            <a:endParaRPr/>
           </a:p>
         </p:txBody>
       </p:sp>
       <p:sp>
         <p:nvSpPr>
           <p:cNvPr id="73" name="Title Text"/>
-          <p:cNvSpPr txBox="1"/>
+          <p:cNvSpPr txBox="1">
+            <a:spLocks noGrp="1"/>
+          </p:cNvSpPr>
           <p:nvPr>
             <p:ph type="title"/>
           </p:nvPr>
@@ -3128,7 +3227,6 @@
             </a:lvl1pPr>
           </a:lstStyle>
           <a:p>
-            <a:pPr/>
             <a:r>
               <a:t>Title Text</a:t>
             </a:r>
@@ -3138,7 +3236,9 @@
       <p:sp>
         <p:nvSpPr>
           <p:cNvPr id="74" name="Body Level One…"/>
-          <p:cNvSpPr txBox="1"/>
+          <p:cNvSpPr txBox="1">
+            <a:spLocks noGrp="1"/>
+          </p:cNvSpPr>
           <p:nvPr>
             <p:ph type="body" sz="quarter" idx="1"/>
           </p:nvPr>
@@ -3207,7 +3307,6 @@
             </a:lvl5pPr>
           </a:lstStyle>
           <a:p>
-            <a:pPr/>
             <a:r>
               <a:t>Body Level One</a:t>
             </a:r>
@@ -3241,7 +3340,9 @@
       <p:sp>
         <p:nvSpPr>
           <p:cNvPr id="75" name="Google Shape;39;p9"/>
-          <p:cNvSpPr txBox="1"/>
+          <p:cNvSpPr txBox="1">
+            <a:spLocks noGrp="1"/>
+          </p:cNvSpPr>
           <p:nvPr>
             <p:ph type="body" sz="half" idx="21"/>
           </p:nvPr>
@@ -3259,14 +3360,16 @@
           <a:bodyPr anchor="ctr"/>
           <a:lstStyle/>
           <a:p>
-            <a:pPr/>
+            <a:endParaRPr/>
           </a:p>
         </p:txBody>
       </p:sp>
       <p:sp>
         <p:nvSpPr>
           <p:cNvPr id="76" name="Slide Number"/>
-          <p:cNvSpPr txBox="1"/>
+          <p:cNvSpPr txBox="1">
+            <a:spLocks noGrp="1"/>
+          </p:cNvSpPr>
           <p:nvPr>
             <p:ph type="sldNum" sz="quarter" idx="2"/>
           </p:nvPr>
@@ -3280,8 +3383,10 @@
           <a:bodyPr/>
           <a:lstStyle/>
           <a:p>
-            <a:pPr/>
-            <a:fld id="{86CB4B4D-7CA3-9044-876B-883B54F8677D}" type="slidenum"/>
+            <a:fld id="{86CB4B4D-7CA3-9044-876B-883B54F8677D}" type="slidenum">
+              <a:t>‹#›</a:t>
+            </a:fld>
+            <a:endParaRPr/>
           </a:p>
         </p:txBody>
       </p:sp>
@@ -3290,12 +3395,12 @@
   <p:clrMapOvr>
     <a:masterClrMapping/>
   </p:clrMapOvr>
-  <p:transition xmlns:p14="http://schemas.microsoft.com/office/powerpoint/2010/main" spd="med" advClick="1"/>
+  <p:transition spd="med"/>
 </p:sldLayout>
 </file>
 
 <file path=ppt/slideLayouts/slideLayout9.xml><?xml version="1.0" encoding="utf-8"?>
-<p:sldLayout xmlns:a="http://schemas.openxmlformats.org/drawingml/2006/main" xmlns:r="http://schemas.openxmlformats.org/officeDocument/2006/relationships" xmlns:p="http://schemas.openxmlformats.org/presentationml/2006/main" xmlns:m="http://schemas.openxmlformats.org/officeDocument/2006/math" xmlns:a14="http://schemas.microsoft.com/office/drawing/2010/main" type="tx" showMasterSp="1" showMasterPhAnim="1">
+<p:sldLayout xmlns:a="http://schemas.openxmlformats.org/drawingml/2006/main" xmlns:r="http://schemas.openxmlformats.org/officeDocument/2006/relationships" xmlns:p="http://schemas.openxmlformats.org/presentationml/2006/main" type="tx">
   <p:cSld name="CAPTION_ONLY">
     <p:spTree>
       <p:nvGrpSpPr>
@@ -3314,7 +3419,9 @@
       <p:sp>
         <p:nvSpPr>
           <p:cNvPr id="83" name="Body Level One…"/>
-          <p:cNvSpPr txBox="1"/>
+          <p:cNvSpPr txBox="1">
+            <a:spLocks noGrp="1"/>
+          </p:cNvSpPr>
           <p:nvPr>
             <p:ph type="body" sz="quarter" idx="1"/>
           </p:nvPr>
@@ -3370,7 +3477,6 @@
             </a:lvl5pPr>
           </a:lstStyle>
           <a:p>
-            <a:pPr/>
             <a:r>
               <a:t>Body Level One</a:t>
             </a:r>
@@ -3404,7 +3510,9 @@
       <p:sp>
         <p:nvSpPr>
           <p:cNvPr id="84" name="Slide Number"/>
-          <p:cNvSpPr txBox="1"/>
+          <p:cNvSpPr txBox="1">
+            <a:spLocks noGrp="1"/>
+          </p:cNvSpPr>
           <p:nvPr>
             <p:ph type="sldNum" sz="quarter" idx="2"/>
           </p:nvPr>
@@ -3418,8 +3526,10 @@
           <a:bodyPr/>
           <a:lstStyle/>
           <a:p>
-            <a:pPr/>
-            <a:fld id="{86CB4B4D-7CA3-9044-876B-883B54F8677D}" type="slidenum"/>
+            <a:fld id="{86CB4B4D-7CA3-9044-876B-883B54F8677D}" type="slidenum">
+              <a:t>‹#›</a:t>
+            </a:fld>
+            <a:endParaRPr/>
           </a:p>
         </p:txBody>
       </p:sp>
@@ -3428,18 +3538,19 @@
   <p:clrMapOvr>
     <a:masterClrMapping/>
   </p:clrMapOvr>
-  <p:transition xmlns:p14="http://schemas.microsoft.com/office/powerpoint/2010/main" spd="med" advClick="1"/>
+  <p:transition spd="med"/>
 </p:sldLayout>
 </file>
 
 <file path=ppt/slideMasters/slideMaster1.xml><?xml version="1.0" encoding="utf-8"?>
-<p:sldMaster xmlns:a="http://schemas.openxmlformats.org/drawingml/2006/main" xmlns:r="http://schemas.openxmlformats.org/officeDocument/2006/relationships" xmlns:p="http://schemas.openxmlformats.org/presentationml/2006/main" xmlns:m="http://schemas.openxmlformats.org/officeDocument/2006/math" xmlns:a14="http://schemas.microsoft.com/office/drawing/2010/main">
+<p:sldMaster xmlns:a="http://schemas.openxmlformats.org/drawingml/2006/main" xmlns:r="http://schemas.openxmlformats.org/officeDocument/2006/relationships" xmlns:p="http://schemas.openxmlformats.org/presentationml/2006/main">
   <p:cSld>
     <p:bg>
       <p:bgPr>
         <a:solidFill>
           <a:srgbClr val="FFFFFF"/>
         </a:solidFill>
+        <a:effectLst/>
       </p:bgPr>
     </p:bg>
     <p:spTree>
@@ -3459,7 +3570,9 @@
       <p:sp>
         <p:nvSpPr>
           <p:cNvPr id="2" name="Title Text"/>
-          <p:cNvSpPr txBox="1"/>
+          <p:cNvSpPr txBox="1">
+            <a:spLocks noGrp="1"/>
+          </p:cNvSpPr>
           <p:nvPr>
             <p:ph type="title"/>
           </p:nvPr>
@@ -3477,17 +3590,16 @@
           </a:ln>
           <a:extLst>
             <a:ext uri="{C572A759-6A51-4108-AA02-DFA0A04FC94B}">
-              <ma14:wrappingTextBoxFlag xmlns:ma14="http://schemas.microsoft.com/office/mac/drawingml/2011/main" val="1"/>
+              <ma14:wrappingTextBoxFlag xmlns:ma14="http://schemas.microsoft.com/office/mac/drawingml/2011/main" xmlns:a14="http://schemas.microsoft.com/office/drawing/2010/main" xmlns:m="http://schemas.openxmlformats.org/officeDocument/2006/math" xmlns="" val="1"/>
             </a:ext>
           </a:extLst>
         </p:spPr>
         <p:txBody>
           <a:bodyPr lIns="91424" tIns="91424" rIns="91424" bIns="91424">
-            <a:normAutofit fontScale="100000" lnSpcReduction="0"/>
+            <a:normAutofit/>
           </a:bodyPr>
           <a:lstStyle/>
           <a:p>
-            <a:pPr/>
             <a:r>
               <a:t>Title Text</a:t>
             </a:r>
@@ -3497,7 +3609,9 @@
       <p:sp>
         <p:nvSpPr>
           <p:cNvPr id="3" name="Body Level One…"/>
-          <p:cNvSpPr txBox="1"/>
+          <p:cNvSpPr txBox="1">
+            <a:spLocks noGrp="1"/>
+          </p:cNvSpPr>
           <p:nvPr>
             <p:ph type="body" idx="1"/>
           </p:nvPr>
@@ -3515,17 +3629,16 @@
           </a:ln>
           <a:extLst>
             <a:ext uri="{C572A759-6A51-4108-AA02-DFA0A04FC94B}">
-              <ma14:wrappingTextBoxFlag xmlns:ma14="http://schemas.microsoft.com/office/mac/drawingml/2011/main" val="1"/>
+              <ma14:wrappingTextBoxFlag xmlns:ma14="http://schemas.microsoft.com/office/mac/drawingml/2011/main" xmlns:a14="http://schemas.microsoft.com/office/drawing/2010/main" xmlns:m="http://schemas.openxmlformats.org/officeDocument/2006/math" xmlns="" val="1"/>
             </a:ext>
           </a:extLst>
         </p:spPr>
         <p:txBody>
           <a:bodyPr lIns="91424" tIns="91424" rIns="91424" bIns="91424">
-            <a:normAutofit fontScale="100000" lnSpcReduction="0"/>
+            <a:normAutofit/>
           </a:bodyPr>
           <a:lstStyle/>
           <a:p>
-            <a:pPr/>
             <a:r>
               <a:t>Body Level One</a:t>
             </a:r>
@@ -3559,7 +3672,9 @@
       <p:sp>
         <p:nvSpPr>
           <p:cNvPr id="4" name="Slide Number"/>
-          <p:cNvSpPr txBox="1"/>
+          <p:cNvSpPr txBox="1">
+            <a:spLocks noGrp="1"/>
+          </p:cNvSpPr>
           <p:nvPr>
             <p:ph type="sldNum" sz="quarter" idx="2"/>
           </p:nvPr>
@@ -3578,7 +3693,7 @@
         </p:spPr>
         <p:txBody>
           <a:bodyPr wrap="none" lIns="91424" tIns="91424" rIns="91424" bIns="91424" anchor="ctr">
-            <a:normAutofit fontScale="100000" lnSpcReduction="0"/>
+            <a:normAutofit/>
           </a:bodyPr>
           <a:lstStyle>
             <a:lvl1pPr algn="r">
@@ -3592,8 +3707,10 @@
             </a:lvl1pPr>
           </a:lstStyle>
           <a:p>
-            <a:pPr/>
-            <a:fld id="{86CB4B4D-7CA3-9044-876B-883B54F8677D}" type="slidenum"/>
+            <a:fld id="{86CB4B4D-7CA3-9044-876B-883B54F8677D}" type="slidenum">
+              <a:t>‹#›</a:t>
+            </a:fld>
+            <a:endParaRPr/>
           </a:p>
         </p:txBody>
       </p:sp>
@@ -3601,25 +3718,25 @@
   </p:cSld>
   <p:clrMap bg1="lt1" tx1="dk1" bg2="lt2" tx2="dk2" accent1="accent1" accent2="accent2" accent3="accent3" accent4="accent4" accent5="accent5" accent6="accent6" hlink="hlink" folHlink="folHlink"/>
   <p:sldLayoutIdLst>
-    <p:sldLayoutId id="2147483649" r:id="rId2"/>
-    <p:sldLayoutId id="2147483650" r:id="rId3"/>
-    <p:sldLayoutId id="2147483651" r:id="rId4"/>
-    <p:sldLayoutId id="2147483652" r:id="rId5"/>
-    <p:sldLayoutId id="2147483653" r:id="rId6"/>
-    <p:sldLayoutId id="2147483654" r:id="rId7"/>
-    <p:sldLayoutId id="2147483655" r:id="rId8"/>
-    <p:sldLayoutId id="2147483656" r:id="rId9"/>
-    <p:sldLayoutId id="2147483657" r:id="rId10"/>
-    <p:sldLayoutId id="2147483658" r:id="rId11"/>
-    <p:sldLayoutId id="2147483659" r:id="rId12"/>
-    <p:sldLayoutId id="2147483660" r:id="rId13"/>
-    <p:sldLayoutId id="2147483661" r:id="rId14"/>
-    <p:sldLayoutId id="2147483662" r:id="rId15"/>
-    <p:sldLayoutId id="2147483663" r:id="rId16"/>
-    <p:sldLayoutId id="2147483664" r:id="rId17"/>
-    <p:sldLayoutId id="2147483665" r:id="rId18"/>
+    <p:sldLayoutId id="2147483649" r:id="rId1"/>
+    <p:sldLayoutId id="2147483650" r:id="rId2"/>
+    <p:sldLayoutId id="2147483651" r:id="rId3"/>
+    <p:sldLayoutId id="2147483652" r:id="rId4"/>
+    <p:sldLayoutId id="2147483653" r:id="rId5"/>
+    <p:sldLayoutId id="2147483654" r:id="rId6"/>
+    <p:sldLayoutId id="2147483655" r:id="rId7"/>
+    <p:sldLayoutId id="2147483656" r:id="rId8"/>
+    <p:sldLayoutId id="2147483657" r:id="rId9"/>
+    <p:sldLayoutId id="2147483658" r:id="rId10"/>
+    <p:sldLayoutId id="2147483659" r:id="rId11"/>
+    <p:sldLayoutId id="2147483660" r:id="rId12"/>
+    <p:sldLayoutId id="2147483661" r:id="rId13"/>
+    <p:sldLayoutId id="2147483662" r:id="rId14"/>
+    <p:sldLayoutId id="2147483663" r:id="rId15"/>
+    <p:sldLayoutId id="2147483664" r:id="rId16"/>
+    <p:sldLayoutId id="2147483665" r:id="rId17"/>
   </p:sldLayoutIdLst>
-  <p:transition xmlns:p14="http://schemas.microsoft.com/office/powerpoint/2010/main" spd="med" advClick="1"/>
+  <p:transition spd="med"/>
   <p:txStyles>
     <p:titleStyle>
       <a:lvl1pPr marL="0" marR="0" indent="0" algn="l" defTabSz="914400" rtl="0" latinLnBrk="0">
@@ -3637,7 +3754,7 @@
         <a:buFontTx/>
         <a:buNone/>
         <a:tabLst/>
-        <a:defRPr b="0" baseline="0" cap="none" i="0" spc="0" strike="noStrike" sz="2800" u="none">
+        <a:defRPr sz="2800" b="0" i="0" u="none" strike="noStrike" cap="none" spc="0" baseline="0">
           <a:solidFill>
             <a:srgbClr val="000000"/>
           </a:solidFill>
@@ -3663,7 +3780,7 @@
         <a:buFontTx/>
         <a:buNone/>
         <a:tabLst/>
-        <a:defRPr b="0" baseline="0" cap="none" i="0" spc="0" strike="noStrike" sz="2800" u="none">
+        <a:defRPr sz="2800" b="0" i="0" u="none" strike="noStrike" cap="none" spc="0" baseline="0">
           <a:solidFill>
             <a:srgbClr val="000000"/>
           </a:solidFill>
@@ -3689,7 +3806,7 @@
         <a:buFontTx/>
         <a:buNone/>
         <a:tabLst/>
-        <a:defRPr b="0" baseline="0" cap="none" i="0" spc="0" strike="noStrike" sz="2800" u="none">
+        <a:defRPr sz="2800" b="0" i="0" u="none" strike="noStrike" cap="none" spc="0" baseline="0">
           <a:solidFill>
             <a:srgbClr val="000000"/>
           </a:solidFill>
@@ -3715,7 +3832,7 @@
         <a:buFontTx/>
         <a:buNone/>
         <a:tabLst/>
-        <a:defRPr b="0" baseline="0" cap="none" i="0" spc="0" strike="noStrike" sz="2800" u="none">
+        <a:defRPr sz="2800" b="0" i="0" u="none" strike="noStrike" cap="none" spc="0" baseline="0">
           <a:solidFill>
             <a:srgbClr val="000000"/>
           </a:solidFill>
@@ -3741,7 +3858,7 @@
         <a:buFontTx/>
         <a:buNone/>
         <a:tabLst/>
-        <a:defRPr b="0" baseline="0" cap="none" i="0" spc="0" strike="noStrike" sz="2800" u="none">
+        <a:defRPr sz="2800" b="0" i="0" u="none" strike="noStrike" cap="none" spc="0" baseline="0">
           <a:solidFill>
             <a:srgbClr val="000000"/>
           </a:solidFill>
@@ -3767,7 +3884,7 @@
         <a:buFontTx/>
         <a:buNone/>
         <a:tabLst/>
-        <a:defRPr b="0" baseline="0" cap="none" i="0" spc="0" strike="noStrike" sz="2800" u="none">
+        <a:defRPr sz="2800" b="0" i="0" u="none" strike="noStrike" cap="none" spc="0" baseline="0">
           <a:solidFill>
             <a:srgbClr val="000000"/>
           </a:solidFill>
@@ -3793,7 +3910,7 @@
         <a:buFontTx/>
         <a:buNone/>
         <a:tabLst/>
-        <a:defRPr b="0" baseline="0" cap="none" i="0" spc="0" strike="noStrike" sz="2800" u="none">
+        <a:defRPr sz="2800" b="0" i="0" u="none" strike="noStrike" cap="none" spc="0" baseline="0">
           <a:solidFill>
             <a:srgbClr val="000000"/>
           </a:solidFill>
@@ -3819,7 +3936,7 @@
         <a:buFontTx/>
         <a:buNone/>
         <a:tabLst/>
-        <a:defRPr b="0" baseline="0" cap="none" i="0" spc="0" strike="noStrike" sz="2800" u="none">
+        <a:defRPr sz="2800" b="0" i="0" u="none" strike="noStrike" cap="none" spc="0" baseline="0">
           <a:solidFill>
             <a:srgbClr val="000000"/>
           </a:solidFill>
@@ -3845,7 +3962,7 @@
         <a:buFontTx/>
         <a:buNone/>
         <a:tabLst/>
-        <a:defRPr b="0" baseline="0" cap="none" i="0" spc="0" strike="noStrike" sz="2800" u="none">
+        <a:defRPr sz="2800" b="0" i="0" u="none" strike="noStrike" cap="none" spc="0" baseline="0">
           <a:solidFill>
             <a:srgbClr val="000000"/>
           </a:solidFill>
@@ -3877,7 +3994,7 @@
         <a:buFont typeface="Arial"/>
         <a:buChar char="●"/>
         <a:tabLst/>
-        <a:defRPr b="0" baseline="0" cap="none" i="0" spc="0" strike="noStrike" sz="1800" u="none">
+        <a:defRPr sz="1800" b="0" i="0" u="none" strike="noStrike" cap="none" spc="0" baseline="0">
           <a:solidFill>
             <a:schemeClr val="accent2">
               <a:lumOff val="21764"/>
@@ -3909,7 +4026,7 @@
         <a:buFont typeface="Arial"/>
         <a:buChar char="○"/>
         <a:tabLst/>
-        <a:defRPr b="0" baseline="0" cap="none" i="0" spc="0" strike="noStrike" sz="1800" u="none">
+        <a:defRPr sz="1800" b="0" i="0" u="none" strike="noStrike" cap="none" spc="0" baseline="0">
           <a:solidFill>
             <a:schemeClr val="accent2">
               <a:lumOff val="21764"/>
@@ -3941,7 +4058,7 @@
         <a:buFont typeface="Arial"/>
         <a:buChar char="■"/>
         <a:tabLst/>
-        <a:defRPr b="0" baseline="0" cap="none" i="0" spc="0" strike="noStrike" sz="1800" u="none">
+        <a:defRPr sz="1800" b="0" i="0" u="none" strike="noStrike" cap="none" spc="0" baseline="0">
           <a:solidFill>
             <a:schemeClr val="accent2">
               <a:lumOff val="21764"/>
@@ -3973,7 +4090,7 @@
         <a:buFont typeface="Arial"/>
         <a:buChar char="●"/>
         <a:tabLst/>
-        <a:defRPr b="0" baseline="0" cap="none" i="0" spc="0" strike="noStrike" sz="1800" u="none">
+        <a:defRPr sz="1800" b="0" i="0" u="none" strike="noStrike" cap="none" spc="0" baseline="0">
           <a:solidFill>
             <a:schemeClr val="accent2">
               <a:lumOff val="21764"/>
@@ -4005,7 +4122,7 @@
         <a:buFont typeface="Arial"/>
         <a:buChar char="○"/>
         <a:tabLst/>
-        <a:defRPr b="0" baseline="0" cap="none" i="0" spc="0" strike="noStrike" sz="1800" u="none">
+        <a:defRPr sz="1800" b="0" i="0" u="none" strike="noStrike" cap="none" spc="0" baseline="0">
           <a:solidFill>
             <a:schemeClr val="accent2">
               <a:lumOff val="21764"/>
@@ -4037,7 +4154,7 @@
         <a:buFont typeface="Arial"/>
         <a:buChar char="■"/>
         <a:tabLst/>
-        <a:defRPr b="0" baseline="0" cap="none" i="0" spc="0" strike="noStrike" sz="1800" u="none">
+        <a:defRPr sz="1800" b="0" i="0" u="none" strike="noStrike" cap="none" spc="0" baseline="0">
           <a:solidFill>
             <a:schemeClr val="accent2">
               <a:lumOff val="21764"/>
@@ -4069,7 +4186,7 @@
         <a:buFont typeface="Arial"/>
         <a:buChar char="●"/>
         <a:tabLst/>
-        <a:defRPr b="0" baseline="0" cap="none" i="0" spc="0" strike="noStrike" sz="1800" u="none">
+        <a:defRPr sz="1800" b="0" i="0" u="none" strike="noStrike" cap="none" spc="0" baseline="0">
           <a:solidFill>
             <a:schemeClr val="accent2">
               <a:lumOff val="21764"/>
@@ -4101,7 +4218,7 @@
         <a:buFont typeface="Arial"/>
         <a:buChar char="○"/>
         <a:tabLst/>
-        <a:defRPr b="0" baseline="0" cap="none" i="0" spc="0" strike="noStrike" sz="1800" u="none">
+        <a:defRPr sz="1800" b="0" i="0" u="none" strike="noStrike" cap="none" spc="0" baseline="0">
           <a:solidFill>
             <a:schemeClr val="accent2">
               <a:lumOff val="21764"/>
@@ -4133,7 +4250,7 @@
         <a:buFont typeface="Arial"/>
         <a:buChar char="■"/>
         <a:tabLst/>
-        <a:defRPr b="0" baseline="0" cap="none" i="0" spc="0" strike="noStrike" sz="1800" u="none">
+        <a:defRPr sz="1800" b="0" i="0" u="none" strike="noStrike" cap="none" spc="0" baseline="0">
           <a:solidFill>
             <a:schemeClr val="accent2">
               <a:lumOff val="21764"/>
@@ -4163,7 +4280,7 @@
         <a:buFontTx/>
         <a:buNone/>
         <a:tabLst/>
-        <a:defRPr b="0" baseline="0" cap="none" i="0" spc="0" strike="noStrike" sz="1000" u="none">
+        <a:defRPr sz="1000" b="0" i="0" u="none" strike="noStrike" cap="none" spc="0" baseline="0">
           <a:solidFill>
             <a:schemeClr val="tx1"/>
           </a:solidFill>
@@ -4189,7 +4306,7 @@
         <a:buFontTx/>
         <a:buNone/>
         <a:tabLst/>
-        <a:defRPr b="0" baseline="0" cap="none" i="0" spc="0" strike="noStrike" sz="1000" u="none">
+        <a:defRPr sz="1000" b="0" i="0" u="none" strike="noStrike" cap="none" spc="0" baseline="0">
           <a:solidFill>
             <a:schemeClr val="tx1"/>
           </a:solidFill>
@@ -4215,7 +4332,7 @@
         <a:buFontTx/>
         <a:buNone/>
         <a:tabLst/>
-        <a:defRPr b="0" baseline="0" cap="none" i="0" spc="0" strike="noStrike" sz="1000" u="none">
+        <a:defRPr sz="1000" b="0" i="0" u="none" strike="noStrike" cap="none" spc="0" baseline="0">
           <a:solidFill>
             <a:schemeClr val="tx1"/>
           </a:solidFill>
@@ -4241,7 +4358,7 @@
         <a:buFontTx/>
         <a:buNone/>
         <a:tabLst/>
-        <a:defRPr b="0" baseline="0" cap="none" i="0" spc="0" strike="noStrike" sz="1000" u="none">
+        <a:defRPr sz="1000" b="0" i="0" u="none" strike="noStrike" cap="none" spc="0" baseline="0">
           <a:solidFill>
             <a:schemeClr val="tx1"/>
           </a:solidFill>
@@ -4267,7 +4384,7 @@
         <a:buFontTx/>
         <a:buNone/>
         <a:tabLst/>
-        <a:defRPr b="0" baseline="0" cap="none" i="0" spc="0" strike="noStrike" sz="1000" u="none">
+        <a:defRPr sz="1000" b="0" i="0" u="none" strike="noStrike" cap="none" spc="0" baseline="0">
           <a:solidFill>
             <a:schemeClr val="tx1"/>
           </a:solidFill>
@@ -4293,7 +4410,7 @@
         <a:buFontTx/>
         <a:buNone/>
         <a:tabLst/>
-        <a:defRPr b="0" baseline="0" cap="none" i="0" spc="0" strike="noStrike" sz="1000" u="none">
+        <a:defRPr sz="1000" b="0" i="0" u="none" strike="noStrike" cap="none" spc="0" baseline="0">
           <a:solidFill>
             <a:schemeClr val="tx1"/>
           </a:solidFill>
@@ -4319,7 +4436,7 @@
         <a:buFontTx/>
         <a:buNone/>
         <a:tabLst/>
-        <a:defRPr b="0" baseline="0" cap="none" i="0" spc="0" strike="noStrike" sz="1000" u="none">
+        <a:defRPr sz="1000" b="0" i="0" u="none" strike="noStrike" cap="none" spc="0" baseline="0">
           <a:solidFill>
             <a:schemeClr val="tx1"/>
           </a:solidFill>
@@ -4345,7 +4462,7 @@
         <a:buFontTx/>
         <a:buNone/>
         <a:tabLst/>
-        <a:defRPr b="0" baseline="0" cap="none" i="0" spc="0" strike="noStrike" sz="1000" u="none">
+        <a:defRPr sz="1000" b="0" i="0" u="none" strike="noStrike" cap="none" spc="0" baseline="0">
           <a:solidFill>
             <a:schemeClr val="tx1"/>
           </a:solidFill>
@@ -4371,7 +4488,7 @@
         <a:buFontTx/>
         <a:buNone/>
         <a:tabLst/>
-        <a:defRPr b="0" baseline="0" cap="none" i="0" spc="0" strike="noStrike" sz="1000" u="none">
+        <a:defRPr sz="1000" b="0" i="0" u="none" strike="noStrike" cap="none" spc="0" baseline="0">
           <a:solidFill>
             <a:schemeClr val="tx1"/>
           </a:solidFill>
@@ -4388,7 +4505,7 @@
 </file>
 
 <file path=ppt/slides/slide1.xml><?xml version="1.0" encoding="utf-8"?>
-<p:sld xmlns:a="http://schemas.openxmlformats.org/drawingml/2006/main" xmlns:r="http://schemas.openxmlformats.org/officeDocument/2006/relationships" xmlns:p="http://schemas.openxmlformats.org/presentationml/2006/main" xmlns:m="http://schemas.openxmlformats.org/officeDocument/2006/math" xmlns:a14="http://schemas.microsoft.com/office/drawing/2010/main" showMasterSp="1" showMasterPhAnim="1">
+<p:sld xmlns:a="http://schemas.openxmlformats.org/drawingml/2006/main" xmlns:r="http://schemas.openxmlformats.org/officeDocument/2006/relationships" xmlns:p="http://schemas.openxmlformats.org/presentationml/2006/main">
   <p:cSld>
     <p:spTree>
       <p:nvGrpSpPr>
@@ -4431,7 +4548,7 @@
           <a:bodyPr lIns="45719" rIns="45719"/>
           <a:lstStyle/>
           <a:p>
-            <a:pPr/>
+            <a:endParaRPr/>
           </a:p>
         </p:txBody>
       </p:sp>
@@ -4460,14 +4577,16 @@
           <a:bodyPr lIns="45719" rIns="45719"/>
           <a:lstStyle/>
           <a:p>
-            <a:pPr/>
+            <a:endParaRPr/>
           </a:p>
         </p:txBody>
       </p:sp>
       <p:sp>
         <p:nvSpPr>
           <p:cNvPr id="173" name="Google Shape;93;p19"/>
-          <p:cNvSpPr txBox="1"/>
+          <p:cNvSpPr txBox="1">
+            <a:spLocks noGrp="1"/>
+          </p:cNvSpPr>
           <p:nvPr>
             <p:ph type="title"/>
           </p:nvPr>
@@ -4545,12 +4664,12 @@
   <p:clrMapOvr>
     <a:masterClrMapping/>
   </p:clrMapOvr>
-  <p:transition xmlns:p14="http://schemas.microsoft.com/office/powerpoint/2010/main" spd="med" advClick="1"/>
+  <p:transition spd="med"/>
 </p:sld>
 </file>
 
 <file path=ppt/slides/slide10.xml><?xml version="1.0" encoding="utf-8"?>
-<p:sld xmlns:a="http://schemas.openxmlformats.org/drawingml/2006/main" xmlns:r="http://schemas.openxmlformats.org/officeDocument/2006/relationships" xmlns:p="http://schemas.openxmlformats.org/presentationml/2006/main" xmlns:m="http://schemas.openxmlformats.org/officeDocument/2006/math" xmlns:a14="http://schemas.microsoft.com/office/drawing/2010/main" showMasterSp="1" showMasterPhAnim="1">
+<p:sld xmlns:a="http://schemas.openxmlformats.org/drawingml/2006/main" xmlns:r="http://schemas.openxmlformats.org/officeDocument/2006/relationships" xmlns:p="http://schemas.openxmlformats.org/presentationml/2006/main">
   <p:cSld>
     <p:spTree>
       <p:nvGrpSpPr>
@@ -4569,7 +4688,9 @@
       <p:sp>
         <p:nvSpPr>
           <p:cNvPr id="220" name="Google Shape;150;p27"/>
-          <p:cNvSpPr txBox="1"/>
+          <p:cNvSpPr txBox="1">
+            <a:spLocks noGrp="1"/>
+          </p:cNvSpPr>
           <p:nvPr>
             <p:ph type="title"/>
           </p:nvPr>
@@ -4594,6 +4715,7 @@
               <a:t>Mapping to Java Interface</a:t>
             </a:r>
             <a:br/>
+            <a:endParaRPr/>
           </a:p>
         </p:txBody>
       </p:sp>
@@ -4634,17 +4756,29 @@
         </p:nvGraphicFramePr>
         <p:xfrm>
           <a:off x="2858366" y="715518"/>
-          <a:ext cx="4502151" cy="1"/>
+          <a:ext cx="4502150" cy="1402080"/>
         </p:xfrm>
-        <a:graphic xmlns:a="http://schemas.openxmlformats.org/drawingml/2006/main">
+        <a:graphic>
           <a:graphicData uri="http://schemas.openxmlformats.org/drawingml/2006/table">
             <a:tbl>
-              <a:tblPr firstCol="0" firstRow="0" lastCol="0" lastRow="0" bandCol="0" bandRow="0" rtl="0">
+              <a:tblPr>
                 <a:tableStyleId>{4C3C2611-4C71-4FC5-86AE-919BDF0F9419}</a:tableStyleId>
               </a:tblPr>
               <a:tblGrid>
-                <a:gridCol w="2251075"/>
-                <a:gridCol w="2251075"/>
+                <a:gridCol w="2251075">
+                  <a:extLst>
+                    <a:ext uri="{9D8B030D-6E8A-4147-A177-3AD203B41FA5}">
+                      <a16:colId xmlns:a16="http://schemas.microsoft.com/office/drawing/2014/main" val="20000"/>
+                    </a:ext>
+                  </a:extLst>
+                </a:gridCol>
+                <a:gridCol w="2251075">
+                  <a:extLst>
+                    <a:ext uri="{9D8B030D-6E8A-4147-A177-3AD203B41FA5}">
+                      <a16:colId xmlns:a16="http://schemas.microsoft.com/office/drawing/2014/main" val="20001"/>
+                    </a:ext>
+                  </a:extLst>
+                </a:gridCol>
               </a:tblGrid>
               <a:tr h="204452">
                 <a:tc>
@@ -4656,12 +4790,12 @@
                         <a:defRPr sz="1800"/>
                       </a:pPr>
                       <a:r>
-                        <a:rPr b="1" sz="1400"/>
+                        <a:rPr sz="1400" b="1"/>
                         <a:t>Real World</a:t>
                       </a:r>
                     </a:p>
                   </a:txBody>
-                  <a:tcPr marL="45720" marR="45720" marT="45720" marB="45720" anchor="ctr" anchorCtr="0" horzOverflow="overflow">
+                  <a:tcPr marL="45720" marR="45720" anchor="ctr" horzOverflow="overflow">
                     <a:lnL w="12700">
                       <a:miter lim="400000"/>
                     </a:lnL>
@@ -4686,12 +4820,12 @@
                         <a:defRPr sz="1800"/>
                       </a:pPr>
                       <a:r>
-                        <a:rPr b="1" sz="1400"/>
+                        <a:rPr sz="1400" b="1"/>
                         <a:t>Java</a:t>
                       </a:r>
                     </a:p>
                   </a:txBody>
-                  <a:tcPr marL="45720" marR="45720" marT="45720" marB="45720" anchor="ctr" anchorCtr="0" horzOverflow="overflow">
+                  <a:tcPr marL="45720" marR="45720" anchor="ctr" horzOverflow="overflow">
                     <a:lnL w="12700">
                       <a:miter lim="400000"/>
                     </a:lnL>
@@ -4707,6 +4841,11 @@
                     <a:noFill/>
                   </a:tcPr>
                 </a:tc>
+                <a:extLst>
+                  <a:ext uri="{0D108BD9-81ED-4DB2-BD59-A6C34878D82A}">
+                    <a16:rowId xmlns:a16="http://schemas.microsoft.com/office/drawing/2014/main" val="10000"/>
+                  </a:ext>
+                </a:extLst>
               </a:tr>
               <a:tr h="204452">
                 <a:tc>
@@ -4723,7 +4862,7 @@
                       </a:r>
                     </a:p>
                   </a:txBody>
-                  <a:tcPr marL="45720" marR="45720" marT="45720" marB="45720" anchor="ctr" anchorCtr="0" horzOverflow="overflow">
+                  <a:tcPr marL="45720" marR="45720" anchor="ctr" horzOverflow="overflow">
                     <a:lnL w="12700">
                       <a:miter lim="400000"/>
                     </a:lnL>
@@ -4753,7 +4892,7 @@
                       </a:r>
                     </a:p>
                   </a:txBody>
-                  <a:tcPr marL="45720" marR="45720" marT="45720" marB="45720" anchor="ctr" anchorCtr="0" horzOverflow="overflow">
+                  <a:tcPr marL="45720" marR="45720" anchor="ctr" horzOverflow="overflow">
                     <a:lnL w="12700">
                       <a:miter lim="400000"/>
                     </a:lnL>
@@ -4769,6 +4908,11 @@
                     <a:noFill/>
                   </a:tcPr>
                 </a:tc>
+                <a:extLst>
+                  <a:ext uri="{0D108BD9-81ED-4DB2-BD59-A6C34878D82A}">
+                    <a16:rowId xmlns:a16="http://schemas.microsoft.com/office/drawing/2014/main" val="10001"/>
+                  </a:ext>
+                </a:extLst>
               </a:tr>
               <a:tr h="204452">
                 <a:tc>
@@ -4785,7 +4929,7 @@
                       </a:r>
                     </a:p>
                   </a:txBody>
-                  <a:tcPr marL="45720" marR="45720" marT="45720" marB="45720" anchor="ctr" anchorCtr="0" horzOverflow="overflow">
+                  <a:tcPr marL="45720" marR="45720" anchor="ctr" horzOverflow="overflow">
                     <a:lnL w="12700">
                       <a:miter lim="400000"/>
                     </a:lnL>
@@ -4815,7 +4959,7 @@
                       </a:r>
                     </a:p>
                   </a:txBody>
-                  <a:tcPr marL="45720" marR="45720" marT="45720" marB="45720" anchor="ctr" anchorCtr="0" horzOverflow="overflow">
+                  <a:tcPr marL="45720" marR="45720" anchor="ctr" horzOverflow="overflow">
                     <a:lnL w="12700">
                       <a:miter lim="400000"/>
                     </a:lnL>
@@ -4831,6 +4975,11 @@
                     <a:noFill/>
                   </a:tcPr>
                 </a:tc>
+                <a:extLst>
+                  <a:ext uri="{0D108BD9-81ED-4DB2-BD59-A6C34878D82A}">
+                    <a16:rowId xmlns:a16="http://schemas.microsoft.com/office/drawing/2014/main" val="10002"/>
+                  </a:ext>
+                </a:extLst>
               </a:tr>
               <a:tr h="204452">
                 <a:tc>
@@ -4847,7 +4996,7 @@
                       </a:r>
                     </a:p>
                   </a:txBody>
-                  <a:tcPr marL="45720" marR="45720" marT="45720" marB="45720" anchor="ctr" anchorCtr="0" horzOverflow="overflow">
+                  <a:tcPr marL="45720" marR="45720" anchor="ctr" horzOverflow="overflow">
                     <a:lnL w="12700">
                       <a:miter lim="400000"/>
                     </a:lnL>
@@ -4877,7 +5026,7 @@
                       </a:r>
                     </a:p>
                   </a:txBody>
-                  <a:tcPr marL="45720" marR="45720" marT="45720" marB="45720" anchor="ctr" anchorCtr="0" horzOverflow="overflow">
+                  <a:tcPr marL="45720" marR="45720" anchor="ctr" horzOverflow="overflow">
                     <a:lnL w="12700">
                       <a:miter lim="400000"/>
                     </a:lnL>
@@ -4893,6 +5042,11 @@
                     <a:noFill/>
                   </a:tcPr>
                 </a:tc>
+                <a:extLst>
+                  <a:ext uri="{0D108BD9-81ED-4DB2-BD59-A6C34878D82A}">
+                    <a16:rowId xmlns:a16="http://schemas.microsoft.com/office/drawing/2014/main" val="10003"/>
+                  </a:ext>
+                </a:extLst>
               </a:tr>
               <a:tr h="204452">
                 <a:tc>
@@ -4909,7 +5063,7 @@
                       </a:r>
                     </a:p>
                   </a:txBody>
-                  <a:tcPr marL="45720" marR="45720" marT="45720" marB="45720" anchor="ctr" anchorCtr="0" horzOverflow="overflow">
+                  <a:tcPr marL="45720" marR="45720" anchor="ctr" horzOverflow="overflow">
                     <a:lnL w="12700">
                       <a:miter lim="400000"/>
                     </a:lnL>
@@ -4939,7 +5093,7 @@
                       </a:r>
                     </a:p>
                   </a:txBody>
-                  <a:tcPr marL="45720" marR="45720" marT="45720" marB="45720" anchor="ctr" anchorCtr="0" horzOverflow="overflow">
+                  <a:tcPr marL="45720" marR="45720" anchor="ctr" horzOverflow="overflow">
                     <a:lnL w="12700">
                       <a:miter lim="400000"/>
                     </a:lnL>
@@ -4955,6 +5109,11 @@
                     <a:noFill/>
                   </a:tcPr>
                 </a:tc>
+                <a:extLst>
+                  <a:ext uri="{0D108BD9-81ED-4DB2-BD59-A6C34878D82A}">
+                    <a16:rowId xmlns:a16="http://schemas.microsoft.com/office/drawing/2014/main" val="10004"/>
+                  </a:ext>
+                </a:extLst>
               </a:tr>
             </a:tbl>
           </a:graphicData>
@@ -4979,7 +5138,7 @@
           </a:ln>
           <a:extLst>
             <a:ext uri="{C572A759-6A51-4108-AA02-DFA0A04FC94B}">
-              <ma14:wrappingTextBoxFlag xmlns:ma14="http://schemas.microsoft.com/office/mac/drawingml/2011/main" val="1"/>
+              <ma14:wrappingTextBoxFlag xmlns:ma14="http://schemas.microsoft.com/office/mac/drawingml/2011/main" xmlns:a14="http://schemas.microsoft.com/office/drawing/2010/main" xmlns:m="http://schemas.openxmlformats.org/officeDocument/2006/math" xmlns="" val="1"/>
             </a:ext>
           </a:extLst>
         </p:spPr>
@@ -5061,38 +5220,6 @@
               <a:t>multiple implementations</a:t>
             </a:r>
             <a:endParaRPr sz="700"/>
-          </a:p>
-        </p:txBody>
-      </p:sp>
-      <p:sp>
-        <p:nvSpPr>
-          <p:cNvPr id="224" name="Rectangle 2"/>
-          <p:cNvSpPr/>
-          <p:nvPr/>
-        </p:nvSpPr>
-        <p:spPr>
-          <a:xfrm>
-            <a:off x="2587985" y="3156966"/>
-            <a:ext cx="6248835" cy="45720"/>
-          </a:xfrm>
-          <a:prstGeom prst="rect">
-            <a:avLst/>
-          </a:prstGeom>
-          <a:solidFill>
-            <a:srgbClr val="000000"/>
-          </a:solidFill>
-          <a:ln>
-            <a:solidFill>
-              <a:srgbClr val="000000"/>
-            </a:solidFill>
-            <a:miter/>
-          </a:ln>
-        </p:spPr>
-        <p:txBody>
-          <a:bodyPr lIns="45719" rIns="45719" anchor="ctr"/>
-          <a:lstStyle/>
-          <a:p>
-            <a:pPr/>
           </a:p>
         </p:txBody>
       </p:sp>
@@ -5115,7 +5242,7 @@
           </a:ln>
           <a:extLst>
             <a:ext uri="{C572A759-6A51-4108-AA02-DFA0A04FC94B}">
-              <ma14:wrappingTextBoxFlag xmlns:ma14="http://schemas.microsoft.com/office/mac/drawingml/2011/main" val="1"/>
+              <ma14:wrappingTextBoxFlag xmlns:ma14="http://schemas.microsoft.com/office/mac/drawingml/2011/main" xmlns:a14="http://schemas.microsoft.com/office/drawing/2010/main" xmlns:m="http://schemas.openxmlformats.org/officeDocument/2006/math" xmlns="" val="1"/>
             </a:ext>
           </a:extLst>
         </p:spPr>
@@ -5234,12 +5361,12 @@
   <p:clrMapOvr>
     <a:masterClrMapping/>
   </p:clrMapOvr>
-  <p:transition xmlns:p14="http://schemas.microsoft.com/office/powerpoint/2010/main" spd="med" advClick="1"/>
+  <p:transition spd="med"/>
 </p:sld>
 </file>
 
 <file path=ppt/slides/slide11.xml><?xml version="1.0" encoding="utf-8"?>
-<p:sld xmlns:a="http://schemas.openxmlformats.org/drawingml/2006/main" xmlns:r="http://schemas.openxmlformats.org/officeDocument/2006/relationships" xmlns:p="http://schemas.openxmlformats.org/presentationml/2006/main" xmlns:m="http://schemas.openxmlformats.org/officeDocument/2006/math" xmlns:a14="http://schemas.microsoft.com/office/drawing/2010/main" showMasterSp="1" showMasterPhAnim="1">
+<p:sld xmlns:a="http://schemas.openxmlformats.org/drawingml/2006/main" xmlns:r="http://schemas.openxmlformats.org/officeDocument/2006/relationships" xmlns:p="http://schemas.openxmlformats.org/presentationml/2006/main">
   <p:cSld>
     <p:spTree>
       <p:nvGrpSpPr>
@@ -5274,7 +5401,7 @@
           </a:ln>
           <a:extLst>
             <a:ext uri="{C572A759-6A51-4108-AA02-DFA0A04FC94B}">
-              <ma14:wrappingTextBoxFlag xmlns:ma14="http://schemas.microsoft.com/office/mac/drawingml/2011/main" val="1"/>
+              <ma14:wrappingTextBoxFlag xmlns:ma14="http://schemas.microsoft.com/office/mac/drawingml/2011/main" xmlns:a14="http://schemas.microsoft.com/office/drawing/2010/main" xmlns:m="http://schemas.openxmlformats.org/officeDocument/2006/math" xmlns="" val="1"/>
             </a:ext>
           </a:extLst>
         </p:spPr>
@@ -5302,7 +5429,6 @@
             </a:lvl1pPr>
           </a:lstStyle>
           <a:p>
-            <a:pPr/>
             <a:r>
               <a:t>Creating an Interface in Java</a:t>
             </a:r>
@@ -5312,7 +5438,9 @@
       <p:sp>
         <p:nvSpPr>
           <p:cNvPr id="229" name="Google Shape;160;p28"/>
-          <p:cNvSpPr txBox="1"/>
+          <p:cNvSpPr txBox="1">
+            <a:spLocks noGrp="1"/>
+          </p:cNvSpPr>
           <p:nvPr>
             <p:ph type="title"/>
           </p:nvPr>
@@ -5378,7 +5506,7 @@
           </a:ln>
           <a:extLst>
             <a:ext uri="{C572A759-6A51-4108-AA02-DFA0A04FC94B}">
-              <ma14:wrappingTextBoxFlag xmlns:ma14="http://schemas.microsoft.com/office/mac/drawingml/2011/main" val="1"/>
+              <ma14:wrappingTextBoxFlag xmlns:ma14="http://schemas.microsoft.com/office/mac/drawingml/2011/main" xmlns:a14="http://schemas.microsoft.com/office/drawing/2010/main" xmlns:m="http://schemas.openxmlformats.org/officeDocument/2006/math" xmlns="" val="1"/>
             </a:ext>
           </a:extLst>
         </p:spPr>
@@ -5396,19 +5524,16 @@
             </a:r>
           </a:p>
           <a:p>
-            <a:pPr/>
             <a:r>
               <a:t>No method body is provided</a:t>
             </a:r>
           </a:p>
           <a:p>
-            <a:pPr/>
             <a:r>
               <a:t>No object can be created from the interface</a:t>
             </a:r>
           </a:p>
           <a:p>
-            <a:pPr/>
             <a:r>
               <a:t>Interface only specifies </a:t>
             </a:r>
@@ -5418,13 +5543,12 @@
             </a:r>
           </a:p>
           <a:p>
-            <a:pPr/>
             <a:r>
               <a:t>Implementation is responsibility of the class</a:t>
             </a:r>
           </a:p>
           <a:p>
-            <a:pPr/>
+            <a:endParaRPr/>
           </a:p>
           <a:p>
             <a:pPr>
@@ -5435,7 +5559,6 @@
             </a:r>
           </a:p>
           <a:p>
-            <a:pPr/>
             <a:r>
               <a:t>Interface acts as a </a:t>
             </a:r>
@@ -5445,13 +5568,11 @@
             </a:r>
           </a:p>
           <a:p>
-            <a:pPr/>
             <a:r>
               <a:t>Multiple classes can implement the same interface</a:t>
             </a:r>
           </a:p>
           <a:p>
-            <a:pPr/>
             <a:r>
               <a:t>Ensures </a:t>
             </a:r>
@@ -5499,12 +5620,12 @@
   <p:clrMapOvr>
     <a:masterClrMapping/>
   </p:clrMapOvr>
-  <p:transition xmlns:p14="http://schemas.microsoft.com/office/powerpoint/2010/main" spd="med" advClick="1"/>
+  <p:transition spd="med"/>
 </p:sld>
 </file>
 
 <file path=ppt/slides/slide12.xml><?xml version="1.0" encoding="utf-8"?>
-<p:sld xmlns:a="http://schemas.openxmlformats.org/drawingml/2006/main" xmlns:r="http://schemas.openxmlformats.org/officeDocument/2006/relationships" xmlns:p="http://schemas.openxmlformats.org/presentationml/2006/main" xmlns:m="http://schemas.openxmlformats.org/officeDocument/2006/math" xmlns:a14="http://schemas.microsoft.com/office/drawing/2010/main" showMasterSp="1" showMasterPhAnim="1">
+<p:sld xmlns:a="http://schemas.openxmlformats.org/drawingml/2006/main" xmlns:r="http://schemas.openxmlformats.org/officeDocument/2006/relationships" xmlns:p="http://schemas.openxmlformats.org/presentationml/2006/main">
   <p:cSld>
     <p:spTree>
       <p:nvGrpSpPr>
@@ -5523,7 +5644,9 @@
       <p:sp>
         <p:nvSpPr>
           <p:cNvPr id="233" name="Google Shape;168;p29"/>
-          <p:cNvSpPr txBox="1"/>
+          <p:cNvSpPr txBox="1">
+            <a:spLocks noGrp="1"/>
+          </p:cNvSpPr>
           <p:nvPr>
             <p:ph type="title"/>
           </p:nvPr>
@@ -5545,7 +5668,6 @@
             </a:lvl1pPr>
           </a:lstStyle>
           <a:p>
-            <a:pPr/>
             <a:r>
               <a:t>Implementing an Interface in Java</a:t>
             </a:r>
@@ -5600,7 +5722,7 @@
           </a:ln>
           <a:extLst>
             <a:ext uri="{C572A759-6A51-4108-AA02-DFA0A04FC94B}">
-              <ma14:wrappingTextBoxFlag xmlns:ma14="http://schemas.microsoft.com/office/mac/drawingml/2011/main" val="1"/>
+              <ma14:wrappingTextBoxFlag xmlns:ma14="http://schemas.microsoft.com/office/mac/drawingml/2011/main" xmlns:a14="http://schemas.microsoft.com/office/drawing/2010/main" xmlns:m="http://schemas.openxmlformats.org/officeDocument/2006/math" xmlns="" val="1"/>
             </a:ext>
           </a:extLst>
         </p:spPr>
@@ -5627,6 +5749,7 @@
               </a:lnSpc>
               <a:defRPr sz="1000"/>
             </a:pPr>
+            <a:endParaRPr/>
           </a:p>
           <a:p>
             <a:pPr>
@@ -5668,6 +5791,7 @@
               </a:lnSpc>
               <a:defRPr sz="1000"/>
             </a:pPr>
+            <a:endParaRPr/>
           </a:p>
           <a:p>
             <a:pPr>
@@ -5720,6 +5844,7 @@
               </a:lnSpc>
               <a:defRPr sz="1000"/>
             </a:pPr>
+            <a:endParaRPr/>
           </a:p>
           <a:p>
             <a:pPr>
@@ -5730,7 +5855,6 @@
             </a:r>
           </a:p>
           <a:p>
-            <a:pPr/>
             <a:r>
               <a:t>All interface methods </a:t>
             </a:r>
@@ -5740,7 +5864,6 @@
             </a:r>
           </a:p>
           <a:p>
-            <a:pPr/>
             <a:r>
               <a:t>Implemented methods </a:t>
             </a:r>
@@ -5750,7 +5873,6 @@
             </a:r>
           </a:p>
           <a:p>
-            <a:pPr/>
             <a:r>
               <a:t>Method signature must </a:t>
             </a:r>
@@ -5763,7 +5885,6 @@
             </a:r>
           </a:p>
           <a:p>
-            <a:pPr/>
             <a:r>
               <a:t>A class can implement </a:t>
             </a:r>
@@ -5779,12 +5900,12 @@
   <p:clrMapOvr>
     <a:masterClrMapping/>
   </p:clrMapOvr>
-  <p:transition xmlns:p14="http://schemas.microsoft.com/office/powerpoint/2010/main" spd="med" advClick="1"/>
+  <p:transition spd="med"/>
 </p:sld>
 </file>
 
 <file path=ppt/slides/slide13.xml><?xml version="1.0" encoding="utf-8"?>
-<p:sld xmlns:a="http://schemas.openxmlformats.org/drawingml/2006/main" xmlns:r="http://schemas.openxmlformats.org/officeDocument/2006/relationships" xmlns:p="http://schemas.openxmlformats.org/presentationml/2006/main" xmlns:m="http://schemas.openxmlformats.org/officeDocument/2006/math" xmlns:a14="http://schemas.microsoft.com/office/drawing/2010/main" showMasterSp="1" showMasterPhAnim="1">
+<p:sld xmlns:a="http://schemas.openxmlformats.org/drawingml/2006/main" xmlns:r="http://schemas.openxmlformats.org/officeDocument/2006/relationships" xmlns:p="http://schemas.openxmlformats.org/presentationml/2006/main">
   <p:cSld>
     <p:spTree>
       <p:nvGrpSpPr>
@@ -5803,7 +5924,9 @@
       <p:sp>
         <p:nvSpPr>
           <p:cNvPr id="237" name="Google Shape;176;p30"/>
-          <p:cNvSpPr txBox="1"/>
+          <p:cNvSpPr txBox="1">
+            <a:spLocks noGrp="1"/>
+          </p:cNvSpPr>
           <p:nvPr>
             <p:ph type="title"/>
           </p:nvPr>
@@ -5825,7 +5948,6 @@
             </a:lvl1pPr>
           </a:lstStyle>
           <a:p>
-            <a:pPr/>
             <a:r>
               <a:t>Rules and Restrictions While Implementing an Interface</a:t>
             </a:r>
@@ -5880,7 +6002,7 @@
           </a:ln>
           <a:extLst>
             <a:ext uri="{C572A759-6A51-4108-AA02-DFA0A04FC94B}">
-              <ma14:wrappingTextBoxFlag xmlns:ma14="http://schemas.microsoft.com/office/mac/drawingml/2011/main" val="1"/>
+              <ma14:wrappingTextBoxFlag xmlns:ma14="http://schemas.microsoft.com/office/mac/drawingml/2011/main" xmlns:a14="http://schemas.microsoft.com/office/drawing/2010/main" xmlns:m="http://schemas.openxmlformats.org/officeDocument/2006/math" xmlns="" val="1"/>
             </a:ext>
           </a:extLst>
         </p:spPr>
@@ -5894,7 +6016,7 @@
               <a:lnSpc>
                 <a:spcPct val="150000"/>
               </a:lnSpc>
-              <a:defRPr b="1" sz="1200"/>
+              <a:defRPr sz="1200" b="1"/>
             </a:pPr>
             <a:r>
               <a:t>Mandatory Rules</a:t>
@@ -5907,7 +6029,7 @@
               </a:lnSpc>
               <a:buSzPct val="100000"/>
               <a:buChar char="•"/>
-              <a:defRPr b="1" sz="1200"/>
+              <a:defRPr sz="1200" b="1"/>
             </a:pPr>
             <a:r>
               <a:t>All abstract methods must be implemented</a:t>
@@ -5925,7 +6047,6 @@
               <a:rPr b="0"/>
               <a:t> method declared in the</a:t>
             </a:r>
-            <a:endParaRPr b="0"/>
           </a:p>
           <a:p>
             <a:pPr>
@@ -5945,7 +6066,7 @@
               </a:lnSpc>
               <a:buSzPct val="100000"/>
               <a:buChar char="•"/>
-              <a:defRPr b="1" sz="1200"/>
+              <a:defRPr sz="1200" b="1"/>
             </a:pPr>
             <a:r>
               <a:t>Implemented methods must be </a:t>
@@ -5971,7 +6092,6 @@
               <a:rPr b="0"/>
               <a:t>Reducing access level is not allowed because interface methods are implicitly</a:t>
             </a:r>
-            <a:endParaRPr b="0"/>
           </a:p>
           <a:p>
             <a:pPr>
@@ -5991,7 +6111,7 @@
               </a:lnSpc>
               <a:buSzPct val="100000"/>
               <a:buChar char="•"/>
-              <a:defRPr b="1" sz="1200"/>
+              <a:defRPr sz="1200" b="1"/>
             </a:pPr>
             <a:r>
               <a:t>Method signature must match exactly</a:t>
@@ -6001,7 +6121,6 @@
               <a:rPr b="0"/>
               <a:t>Method name, return type, and parameters must be the same as declared in </a:t>
             </a:r>
-            <a:endParaRPr b="0"/>
           </a:p>
           <a:p>
             <a:pPr>
@@ -6021,7 +6140,7 @@
               </a:lnSpc>
               <a:buSzPct val="100000"/>
               <a:buChar char="•"/>
-              <a:defRPr b="1" sz="1200"/>
+              <a:defRPr sz="1200" b="1"/>
             </a:pPr>
             <a:r>
               <a:t>A class can implement multiple interfaces</a:t>
@@ -6031,7 +6150,6 @@
               <a:rPr b="0"/>
               <a:t>This allows Java to support multiple inheritance of behavior.</a:t>
             </a:r>
-            <a:endParaRPr b="0"/>
           </a:p>
         </p:txBody>
       </p:sp>
@@ -6054,7 +6172,7 @@
           </a:ln>
           <a:extLst>
             <a:ext uri="{C572A759-6A51-4108-AA02-DFA0A04FC94B}">
-              <ma14:wrappingTextBoxFlag xmlns:ma14="http://schemas.microsoft.com/office/mac/drawingml/2011/main" val="1"/>
+              <ma14:wrappingTextBoxFlag xmlns:ma14="http://schemas.microsoft.com/office/mac/drawingml/2011/main" xmlns:a14="http://schemas.microsoft.com/office/drawing/2010/main" xmlns:m="http://schemas.openxmlformats.org/officeDocument/2006/math" xmlns="" val="1"/>
             </a:ext>
           </a:extLst>
         </p:spPr>
@@ -6065,7 +6183,7 @@
           <a:lstStyle/>
           <a:p>
             <a:pPr>
-              <a:defRPr b="1" sz="1200"/>
+              <a:defRPr sz="1200" b="1"/>
             </a:pPr>
             <a:r>
               <a:t>Restrictions</a:t>
@@ -6137,12 +6255,13 @@
           </a:p>
           <a:p>
             <a:pPr>
-              <a:defRPr b="1" sz="1200"/>
-            </a:pPr>
+              <a:defRPr sz="1200" b="1"/>
+            </a:pPr>
+            <a:endParaRPr/>
           </a:p>
           <a:p>
             <a:pPr>
-              <a:defRPr b="1" sz="1200"/>
+              <a:defRPr sz="1200" b="1"/>
             </a:pPr>
             <a:r>
               <a:t>Special Case</a:t>
@@ -6171,6 +6290,7 @@
             <a:pPr>
               <a:defRPr sz="1200"/>
             </a:pPr>
+            <a:endParaRPr b="1"/>
           </a:p>
         </p:txBody>
       </p:sp>
@@ -6179,12 +6299,12 @@
   <p:clrMapOvr>
     <a:masterClrMapping/>
   </p:clrMapOvr>
-  <p:transition xmlns:p14="http://schemas.microsoft.com/office/powerpoint/2010/main" spd="med" advClick="1"/>
+  <p:transition spd="med"/>
 </p:sld>
 </file>
 
 <file path=ppt/slides/slide14.xml><?xml version="1.0" encoding="utf-8"?>
-<p:sld xmlns:a="http://schemas.openxmlformats.org/drawingml/2006/main" xmlns:r="http://schemas.openxmlformats.org/officeDocument/2006/relationships" xmlns:p="http://schemas.openxmlformats.org/presentationml/2006/main" xmlns:m="http://schemas.openxmlformats.org/officeDocument/2006/math" xmlns:a14="http://schemas.microsoft.com/office/drawing/2010/main" showMasterSp="1" showMasterPhAnim="1">
+<p:sld xmlns:a="http://schemas.openxmlformats.org/drawingml/2006/main" xmlns:r="http://schemas.openxmlformats.org/officeDocument/2006/relationships" xmlns:p="http://schemas.openxmlformats.org/presentationml/2006/main">
   <p:cSld>
     <p:spTree>
       <p:nvGrpSpPr>
@@ -6203,7 +6323,9 @@
       <p:sp>
         <p:nvSpPr>
           <p:cNvPr id="242" name="Google Shape;184;p31"/>
-          <p:cNvSpPr txBox="1"/>
+          <p:cNvSpPr txBox="1">
+            <a:spLocks noGrp="1"/>
+          </p:cNvSpPr>
           <p:nvPr>
             <p:ph type="title"/>
           </p:nvPr>
@@ -6225,7 +6347,6 @@
             </a:lvl1pPr>
           </a:lstStyle>
           <a:p>
-            <a:pPr/>
             <a:r>
               <a:t>Using an Interface Implementation in a Program</a:t>
             </a:r>
@@ -6280,7 +6401,7 @@
           </a:ln>
           <a:extLst>
             <a:ext uri="{C572A759-6A51-4108-AA02-DFA0A04FC94B}">
-              <ma14:wrappingTextBoxFlag xmlns:ma14="http://schemas.microsoft.com/office/mac/drawingml/2011/main" val="1"/>
+              <ma14:wrappingTextBoxFlag xmlns:ma14="http://schemas.microsoft.com/office/mac/drawingml/2011/main" xmlns:a14="http://schemas.microsoft.com/office/drawing/2010/main" xmlns:m="http://schemas.openxmlformats.org/officeDocument/2006/math" xmlns="" val="1"/>
             </a:ext>
           </a:extLst>
         </p:spPr>
@@ -6333,6 +6454,7 @@
                 <a:sym typeface="Times New Roman"/>
               </a:defRPr>
             </a:pPr>
+            <a:endParaRPr/>
           </a:p>
           <a:p>
             <a:pPr>
@@ -6426,6 +6548,7 @@
                 <a:sym typeface="Times New Roman"/>
               </a:defRPr>
             </a:pPr>
+            <a:endParaRPr/>
           </a:p>
           <a:p>
             <a:pPr>
@@ -6439,6 +6562,7 @@
                 <a:sym typeface="Times New Roman"/>
               </a:defRPr>
             </a:pPr>
+            <a:endParaRPr/>
           </a:p>
           <a:p>
             <a:pPr>
@@ -6452,6 +6576,7 @@
                 <a:sym typeface="Times New Roman"/>
               </a:defRPr>
             </a:pPr>
+            <a:endParaRPr/>
           </a:p>
           <a:p>
             <a:pPr>
@@ -6465,6 +6590,7 @@
                 <a:sym typeface="Times New Roman"/>
               </a:defRPr>
             </a:pPr>
+            <a:endParaRPr/>
           </a:p>
         </p:txBody>
       </p:sp>
@@ -6487,7 +6613,7 @@
           </a:ln>
           <a:extLst>
             <a:ext uri="{C572A759-6A51-4108-AA02-DFA0A04FC94B}">
-              <ma14:wrappingTextBoxFlag xmlns:ma14="http://schemas.microsoft.com/office/mac/drawingml/2011/main" val="1"/>
+              <ma14:wrappingTextBoxFlag xmlns:ma14="http://schemas.microsoft.com/office/mac/drawingml/2011/main" xmlns:a14="http://schemas.microsoft.com/office/drawing/2010/main" xmlns:m="http://schemas.openxmlformats.org/officeDocument/2006/math" xmlns="" val="1"/>
             </a:ext>
           </a:extLst>
         </p:spPr>
@@ -6498,7 +6624,7 @@
           <a:lstStyle/>
           <a:p>
             <a:pPr>
-              <a:defRPr b="1" sz="1200"/>
+              <a:defRPr sz="1200" b="1"/>
             </a:pPr>
             <a:r>
               <a:t>Important Observation</a:t>
@@ -6565,7 +6691,7 @@
           <a:bodyPr lIns="45719" rIns="45719" anchor="ctr"/>
           <a:lstStyle/>
           <a:p>
-            <a:pPr/>
+            <a:endParaRPr/>
           </a:p>
         </p:txBody>
       </p:sp>
@@ -6588,7 +6714,7 @@
           </a:ln>
           <a:extLst>
             <a:ext uri="{C572A759-6A51-4108-AA02-DFA0A04FC94B}">
-              <ma14:wrappingTextBoxFlag xmlns:ma14="http://schemas.microsoft.com/office/mac/drawingml/2011/main" val="1"/>
+              <ma14:wrappingTextBoxFlag xmlns:ma14="http://schemas.microsoft.com/office/mac/drawingml/2011/main" xmlns:a14="http://schemas.microsoft.com/office/drawing/2010/main" xmlns:m="http://schemas.openxmlformats.org/officeDocument/2006/math" xmlns="" val="1"/>
             </a:ext>
           </a:extLst>
         </p:spPr>
@@ -6599,7 +6725,7 @@
           <a:lstStyle/>
           <a:p>
             <a:pPr>
-              <a:defRPr b="1" sz="1200"/>
+              <a:defRPr sz="1200" b="1"/>
             </a:pPr>
             <a:r>
               <a:t>Design Insight</a:t>
@@ -6642,12 +6768,12 @@
   <p:clrMapOvr>
     <a:masterClrMapping/>
   </p:clrMapOvr>
-  <p:transition xmlns:p14="http://schemas.microsoft.com/office/powerpoint/2010/main" spd="med" advClick="1"/>
+  <p:transition spd="med"/>
 </p:sld>
 </file>
 
 <file path=ppt/slides/slide15.xml><?xml version="1.0" encoding="utf-8"?>
-<p:sld xmlns:a="http://schemas.openxmlformats.org/drawingml/2006/main" xmlns:r="http://schemas.openxmlformats.org/officeDocument/2006/relationships" xmlns:p="http://schemas.openxmlformats.org/presentationml/2006/main" xmlns:m="http://schemas.openxmlformats.org/officeDocument/2006/math" xmlns:a14="http://schemas.microsoft.com/office/drawing/2010/main" showMasterSp="1" showMasterPhAnim="1">
+<p:sld xmlns:a="http://schemas.openxmlformats.org/drawingml/2006/main" xmlns:r="http://schemas.openxmlformats.org/officeDocument/2006/relationships" xmlns:p="http://schemas.openxmlformats.org/presentationml/2006/main">
   <p:cSld>
     <p:spTree>
       <p:nvGrpSpPr>
@@ -6666,7 +6792,9 @@
       <p:sp>
         <p:nvSpPr>
           <p:cNvPr id="249" name="Google Shape;191;p32"/>
-          <p:cNvSpPr txBox="1"/>
+          <p:cNvSpPr txBox="1">
+            <a:spLocks noGrp="1"/>
+          </p:cNvSpPr>
           <p:nvPr>
             <p:ph type="title"/>
           </p:nvPr>
@@ -6688,7 +6816,6 @@
             </a:lvl1pPr>
           </a:lstStyle>
           <a:p>
-            <a:pPr/>
             <a:r>
               <a:t>Interface Reference in Java</a:t>
             </a:r>
@@ -6743,7 +6870,7 @@
           </a:ln>
           <a:extLst>
             <a:ext uri="{C572A759-6A51-4108-AA02-DFA0A04FC94B}">
-              <ma14:wrappingTextBoxFlag xmlns:ma14="http://schemas.microsoft.com/office/mac/drawingml/2011/main" val="1"/>
+              <ma14:wrappingTextBoxFlag xmlns:ma14="http://schemas.microsoft.com/office/mac/drawingml/2011/main" xmlns:a14="http://schemas.microsoft.com/office/drawing/2010/main" xmlns:m="http://schemas.openxmlformats.org/officeDocument/2006/math" xmlns="" val="1"/>
             </a:ext>
           </a:extLst>
         </p:spPr>
@@ -6796,7 +6923,7 @@
           </a:ln>
           <a:extLst>
             <a:ext uri="{C572A759-6A51-4108-AA02-DFA0A04FC94B}">
-              <ma14:wrappingTextBoxFlag xmlns:ma14="http://schemas.microsoft.com/office/mac/drawingml/2011/main" val="1"/>
+              <ma14:wrappingTextBoxFlag xmlns:ma14="http://schemas.microsoft.com/office/mac/drawingml/2011/main" xmlns:a14="http://schemas.microsoft.com/office/drawing/2010/main" xmlns:m="http://schemas.openxmlformats.org/officeDocument/2006/math" xmlns="" val="1"/>
             </a:ext>
           </a:extLst>
         </p:spPr>
@@ -6807,12 +6934,13 @@
           <a:lstStyle/>
           <a:p>
             <a:pPr>
-              <a:defRPr b="1" sz="1200"/>
-            </a:pPr>
+              <a:defRPr sz="1200" b="1"/>
+            </a:pPr>
+            <a:endParaRPr/>
           </a:p>
           <a:p>
             <a:pPr>
-              <a:defRPr b="1" sz="1200"/>
+              <a:defRPr sz="1200" b="1"/>
             </a:pPr>
             <a:r>
               <a:t>Concept Explanation</a:t>
@@ -6896,7 +7024,7 @@
           </a:ln>
           <a:extLst>
             <a:ext uri="{C572A759-6A51-4108-AA02-DFA0A04FC94B}">
-              <ma14:wrappingTextBoxFlag xmlns:ma14="http://schemas.microsoft.com/office/mac/drawingml/2011/main" val="1"/>
+              <ma14:wrappingTextBoxFlag xmlns:ma14="http://schemas.microsoft.com/office/mac/drawingml/2011/main" xmlns:a14="http://schemas.microsoft.com/office/drawing/2010/main" xmlns:m="http://schemas.openxmlformats.org/officeDocument/2006/math" xmlns="" val="1"/>
             </a:ext>
           </a:extLst>
         </p:spPr>
@@ -6906,11 +7034,10 @@
           </a:bodyPr>
           <a:lstStyle>
             <a:lvl1pPr>
-              <a:defRPr b="1" sz="1100"/>
+              <a:defRPr sz="1100" b="1"/>
             </a:lvl1pPr>
           </a:lstStyle>
           <a:p>
-            <a:pPr/>
             <a:r>
               <a:t>Syntax of Interface Reference:</a:t>
             </a:r>
@@ -6936,7 +7063,7 @@
           </a:ln>
           <a:extLst>
             <a:ext uri="{C572A759-6A51-4108-AA02-DFA0A04FC94B}">
-              <ma14:wrappingTextBoxFlag xmlns:ma14="http://schemas.microsoft.com/office/mac/drawingml/2011/main" val="1"/>
+              <ma14:wrappingTextBoxFlag xmlns:ma14="http://schemas.microsoft.com/office/mac/drawingml/2011/main" xmlns:a14="http://schemas.microsoft.com/office/drawing/2010/main" xmlns:m="http://schemas.openxmlformats.org/officeDocument/2006/math" xmlns="" val="1"/>
             </a:ext>
           </a:extLst>
         </p:spPr>
@@ -6954,7 +7081,6 @@
             </a:lvl1pPr>
           </a:lstStyle>
           <a:p>
-            <a:pPr/>
             <a:r>
               <a:t>InterfaceName ref = new ImplementingClass();</a:t>
             </a:r>
@@ -6980,7 +7106,7 @@
           </a:ln>
           <a:extLst>
             <a:ext uri="{C572A759-6A51-4108-AA02-DFA0A04FC94B}">
-              <ma14:wrappingTextBoxFlag xmlns:ma14="http://schemas.microsoft.com/office/mac/drawingml/2011/main" val="1"/>
+              <ma14:wrappingTextBoxFlag xmlns:ma14="http://schemas.microsoft.com/office/mac/drawingml/2011/main" xmlns:a14="http://schemas.microsoft.com/office/drawing/2010/main" xmlns:m="http://schemas.openxmlformats.org/officeDocument/2006/math" xmlns="" val="1"/>
             </a:ext>
           </a:extLst>
         </p:spPr>
@@ -6991,7 +7117,7 @@
           <a:lstStyle/>
           <a:p>
             <a:pPr>
-              <a:defRPr b="1" sz="1200"/>
+              <a:defRPr sz="1200" b="1"/>
             </a:pPr>
             <a:r>
               <a:t>Key Observations</a:t>
@@ -7060,7 +7186,7 @@
           </a:ln>
           <a:extLst>
             <a:ext uri="{C572A759-6A51-4108-AA02-DFA0A04FC94B}">
-              <ma14:wrappingTextBoxFlag xmlns:ma14="http://schemas.microsoft.com/office/mac/drawingml/2011/main" val="1"/>
+              <ma14:wrappingTextBoxFlag xmlns:ma14="http://schemas.microsoft.com/office/mac/drawingml/2011/main" xmlns:a14="http://schemas.microsoft.com/office/drawing/2010/main" xmlns:m="http://schemas.openxmlformats.org/officeDocument/2006/math" xmlns="" val="1"/>
             </a:ext>
           </a:extLst>
         </p:spPr>
@@ -7071,7 +7197,7 @@
           <a:lstStyle/>
           <a:p>
             <a:pPr>
-              <a:defRPr b="1" sz="1200"/>
+              <a:defRPr sz="1200" b="1"/>
             </a:pPr>
             <a:r>
               <a:t>Why Interface Reference Is Important</a:t>
@@ -7129,12 +7255,12 @@
   <p:clrMapOvr>
     <a:masterClrMapping/>
   </p:clrMapOvr>
-  <p:transition xmlns:p14="http://schemas.microsoft.com/office/powerpoint/2010/main" spd="med" advClick="1"/>
+  <p:transition spd="med"/>
 </p:sld>
 </file>
 
 <file path=ppt/slides/slide16.xml><?xml version="1.0" encoding="utf-8"?>
-<p:sld xmlns:a="http://schemas.openxmlformats.org/drawingml/2006/main" xmlns:r="http://schemas.openxmlformats.org/officeDocument/2006/relationships" xmlns:p="http://schemas.openxmlformats.org/presentationml/2006/main" xmlns:m="http://schemas.openxmlformats.org/officeDocument/2006/math" xmlns:a14="http://schemas.microsoft.com/office/drawing/2010/main" showMasterSp="1" showMasterPhAnim="1">
+<p:sld xmlns:a="http://schemas.openxmlformats.org/drawingml/2006/main" xmlns:r="http://schemas.openxmlformats.org/officeDocument/2006/relationships" xmlns:p="http://schemas.openxmlformats.org/presentationml/2006/main">
   <p:cSld>
     <p:spTree>
       <p:nvGrpSpPr>
@@ -7153,7 +7279,9 @@
       <p:sp>
         <p:nvSpPr>
           <p:cNvPr id="258" name="Google Shape;206;p34"/>
-          <p:cNvSpPr txBox="1"/>
+          <p:cNvSpPr txBox="1">
+            <a:spLocks noGrp="1"/>
+          </p:cNvSpPr>
           <p:nvPr>
             <p:ph type="title"/>
           </p:nvPr>
@@ -7175,7 +7303,6 @@
             </a:lvl1pPr>
           </a:lstStyle>
           <a:p>
-            <a:pPr/>
             <a:r>
               <a:t>Interface Reference – Example</a:t>
             </a:r>
@@ -7230,7 +7357,7 @@
           </a:ln>
           <a:extLst>
             <a:ext uri="{C572A759-6A51-4108-AA02-DFA0A04FC94B}">
-              <ma14:wrappingTextBoxFlag xmlns:ma14="http://schemas.microsoft.com/office/mac/drawingml/2011/main" val="1"/>
+              <ma14:wrappingTextBoxFlag xmlns:ma14="http://schemas.microsoft.com/office/mac/drawingml/2011/main" xmlns:a14="http://schemas.microsoft.com/office/drawing/2010/main" xmlns:m="http://schemas.openxmlformats.org/officeDocument/2006/math" xmlns="" val="1"/>
             </a:ext>
           </a:extLst>
         </p:spPr>
@@ -7267,6 +7394,7 @@
             <a:pPr>
               <a:defRPr sz="1100"/>
             </a:pPr>
+            <a:endParaRPr/>
           </a:p>
           <a:p>
             <a:pPr>
@@ -7329,7 +7457,7 @@
           </a:ln>
           <a:extLst>
             <a:ext uri="{C572A759-6A51-4108-AA02-DFA0A04FC94B}">
-              <ma14:wrappingTextBoxFlag xmlns:ma14="http://schemas.microsoft.com/office/mac/drawingml/2011/main" val="1"/>
+              <ma14:wrappingTextBoxFlag xmlns:ma14="http://schemas.microsoft.com/office/mac/drawingml/2011/main" xmlns:a14="http://schemas.microsoft.com/office/drawing/2010/main" xmlns:m="http://schemas.openxmlformats.org/officeDocument/2006/math" xmlns="" val="1"/>
             </a:ext>
           </a:extLst>
         </p:spPr>
@@ -7358,6 +7486,7 @@
             <a:pPr>
               <a:defRPr sz="1100"/>
             </a:pPr>
+            <a:endParaRPr/>
           </a:p>
           <a:p>
             <a:pPr>
@@ -7412,7 +7541,7 @@
           </a:ln>
           <a:extLst>
             <a:ext uri="{C572A759-6A51-4108-AA02-DFA0A04FC94B}">
-              <ma14:wrappingTextBoxFlag xmlns:ma14="http://schemas.microsoft.com/office/mac/drawingml/2011/main" val="1"/>
+              <ma14:wrappingTextBoxFlag xmlns:ma14="http://schemas.microsoft.com/office/mac/drawingml/2011/main" xmlns:a14="http://schemas.microsoft.com/office/drawing/2010/main" xmlns:m="http://schemas.openxmlformats.org/officeDocument/2006/math" xmlns="" val="1"/>
             </a:ext>
           </a:extLst>
         </p:spPr>
@@ -7422,11 +7551,10 @@
           </a:bodyPr>
           <a:lstStyle>
             <a:lvl1pPr>
-              <a:defRPr b="1" sz="1100"/>
+              <a:defRPr sz="1100" b="1"/>
             </a:lvl1pPr>
           </a:lstStyle>
           <a:p>
-            <a:pPr/>
             <a:r>
               <a:t>Using Interface Reference</a:t>
             </a:r>
@@ -7452,7 +7580,7 @@
           </a:ln>
           <a:extLst>
             <a:ext uri="{C572A759-6A51-4108-AA02-DFA0A04FC94B}">
-              <ma14:wrappingTextBoxFlag xmlns:ma14="http://schemas.microsoft.com/office/mac/drawingml/2011/main" val="1"/>
+              <ma14:wrappingTextBoxFlag xmlns:ma14="http://schemas.microsoft.com/office/mac/drawingml/2011/main" xmlns:a14="http://schemas.microsoft.com/office/drawing/2010/main" xmlns:m="http://schemas.openxmlformats.org/officeDocument/2006/math" xmlns="" val="1"/>
             </a:ext>
           </a:extLst>
         </p:spPr>
@@ -7463,7 +7591,7 @@
           <a:lstStyle/>
           <a:p>
             <a:pPr>
-              <a:defRPr b="1" sz="1200"/>
+              <a:defRPr sz="1200" b="1"/>
             </a:pPr>
             <a:r>
               <a:t>Key Observation</a:t>
@@ -7524,12 +7652,12 @@
   <p:clrMapOvr>
     <a:masterClrMapping/>
   </p:clrMapOvr>
-  <p:transition xmlns:p14="http://schemas.microsoft.com/office/powerpoint/2010/main" spd="med" advClick="1"/>
+  <p:transition spd="med"/>
 </p:sld>
 </file>
 
 <file path=ppt/slides/slide17.xml><?xml version="1.0" encoding="utf-8"?>
-<p:sld xmlns:a="http://schemas.openxmlformats.org/drawingml/2006/main" xmlns:r="http://schemas.openxmlformats.org/officeDocument/2006/relationships" xmlns:p="http://schemas.openxmlformats.org/presentationml/2006/main" xmlns:m="http://schemas.openxmlformats.org/officeDocument/2006/math" xmlns:a14="http://schemas.microsoft.com/office/drawing/2010/main" showMasterSp="1" showMasterPhAnim="1">
+<p:sld xmlns:a="http://schemas.openxmlformats.org/drawingml/2006/main" xmlns:r="http://schemas.openxmlformats.org/officeDocument/2006/relationships" xmlns:p="http://schemas.openxmlformats.org/presentationml/2006/main">
   <p:cSld>
     <p:spTree>
       <p:nvGrpSpPr>
@@ -7548,7 +7676,9 @@
       <p:sp>
         <p:nvSpPr>
           <p:cNvPr id="265" name="Google Shape;214;p35"/>
-          <p:cNvSpPr txBox="1"/>
+          <p:cNvSpPr txBox="1">
+            <a:spLocks noGrp="1"/>
+          </p:cNvSpPr>
           <p:nvPr>
             <p:ph type="title"/>
           </p:nvPr>
@@ -7570,7 +7700,6 @@
             </a:lvl1pPr>
           </a:lstStyle>
           <a:p>
-            <a:pPr/>
             <a:r>
               <a:t>Runtime Polymorphism Using Interface</a:t>
             </a:r>
@@ -7625,7 +7754,7 @@
           </a:ln>
           <a:extLst>
             <a:ext uri="{C572A759-6A51-4108-AA02-DFA0A04FC94B}">
-              <ma14:wrappingTextBoxFlag xmlns:ma14="http://schemas.microsoft.com/office/mac/drawingml/2011/main" val="1"/>
+              <ma14:wrappingTextBoxFlag xmlns:ma14="http://schemas.microsoft.com/office/mac/drawingml/2011/main" xmlns:a14="http://schemas.microsoft.com/office/drawing/2010/main" xmlns:m="http://schemas.openxmlformats.org/officeDocument/2006/math" xmlns="" val="1"/>
             </a:ext>
           </a:extLst>
         </p:spPr>
@@ -7685,7 +7814,7 @@
           </a:ln>
           <a:extLst>
             <a:ext uri="{C572A759-6A51-4108-AA02-DFA0A04FC94B}">
-              <ma14:wrappingTextBoxFlag xmlns:ma14="http://schemas.microsoft.com/office/mac/drawingml/2011/main" val="1"/>
+              <ma14:wrappingTextBoxFlag xmlns:ma14="http://schemas.microsoft.com/office/mac/drawingml/2011/main" xmlns:a14="http://schemas.microsoft.com/office/drawing/2010/main" xmlns:m="http://schemas.openxmlformats.org/officeDocument/2006/math" xmlns="" val="1"/>
             </a:ext>
           </a:extLst>
         </p:spPr>
@@ -7696,12 +7825,13 @@
           <a:lstStyle/>
           <a:p>
             <a:pPr>
-              <a:defRPr b="1" sz="1200"/>
-            </a:pPr>
+              <a:defRPr sz="1200" b="1"/>
+            </a:pPr>
+            <a:endParaRPr/>
           </a:p>
           <a:p>
             <a:pPr>
-              <a:defRPr b="1" sz="1200"/>
+              <a:defRPr sz="1200" b="1"/>
             </a:pPr>
             <a:r>
               <a:t>How Runtime Polymorphism Works</a:t>
@@ -7766,7 +7896,7 @@
           </a:ln>
           <a:extLst>
             <a:ext uri="{C572A759-6A51-4108-AA02-DFA0A04FC94B}">
-              <ma14:wrappingTextBoxFlag xmlns:ma14="http://schemas.microsoft.com/office/mac/drawingml/2011/main" val="1"/>
+              <ma14:wrappingTextBoxFlag xmlns:ma14="http://schemas.microsoft.com/office/mac/drawingml/2011/main" xmlns:a14="http://schemas.microsoft.com/office/drawing/2010/main" xmlns:m="http://schemas.openxmlformats.org/officeDocument/2006/math" xmlns="" val="1"/>
             </a:ext>
           </a:extLst>
         </p:spPr>
@@ -7820,7 +7950,7 @@
           </a:ln>
           <a:extLst>
             <a:ext uri="{C572A759-6A51-4108-AA02-DFA0A04FC94B}">
-              <ma14:wrappingTextBoxFlag xmlns:ma14="http://schemas.microsoft.com/office/mac/drawingml/2011/main" val="1"/>
+              <ma14:wrappingTextBoxFlag xmlns:ma14="http://schemas.microsoft.com/office/mac/drawingml/2011/main" xmlns:a14="http://schemas.microsoft.com/office/drawing/2010/main" xmlns:m="http://schemas.openxmlformats.org/officeDocument/2006/math" xmlns="" val="1"/>
             </a:ext>
           </a:extLst>
         </p:spPr>
@@ -7831,7 +7961,7 @@
           <a:lstStyle/>
           <a:p>
             <a:pPr>
-              <a:defRPr b="1" sz="1200"/>
+              <a:defRPr sz="1200" b="1"/>
             </a:pPr>
             <a:r>
               <a:t>Important Observations</a:t>
@@ -7909,7 +8039,7 @@
           <a:bodyPr lIns="45719" rIns="45719" anchor="ctr"/>
           <a:lstStyle/>
           <a:p>
-            <a:pPr/>
+            <a:endParaRPr/>
           </a:p>
         </p:txBody>
       </p:sp>
@@ -7932,7 +8062,7 @@
           </a:ln>
           <a:extLst>
             <a:ext uri="{C572A759-6A51-4108-AA02-DFA0A04FC94B}">
-              <ma14:wrappingTextBoxFlag xmlns:ma14="http://schemas.microsoft.com/office/mac/drawingml/2011/main" val="1"/>
+              <ma14:wrappingTextBoxFlag xmlns:ma14="http://schemas.microsoft.com/office/mac/drawingml/2011/main" xmlns:a14="http://schemas.microsoft.com/office/drawing/2010/main" xmlns:m="http://schemas.openxmlformats.org/officeDocument/2006/math" xmlns="" val="1"/>
             </a:ext>
           </a:extLst>
         </p:spPr>
@@ -7943,7 +8073,7 @@
           <a:lstStyle/>
           <a:p>
             <a:pPr>
-              <a:defRPr b="1" sz="1200"/>
+              <a:defRPr sz="1200" b="1"/>
             </a:pPr>
             <a:r>
               <a:t>Why Runtime Polymorphism Is Important</a:t>
@@ -8008,7 +8138,7 @@
           </a:ln>
           <a:extLst>
             <a:ext uri="{C572A759-6A51-4108-AA02-DFA0A04FC94B}">
-              <ma14:wrappingTextBoxFlag xmlns:ma14="http://schemas.microsoft.com/office/mac/drawingml/2011/main" val="1"/>
+              <ma14:wrappingTextBoxFlag xmlns:ma14="http://schemas.microsoft.com/office/mac/drawingml/2011/main" xmlns:a14="http://schemas.microsoft.com/office/drawing/2010/main" xmlns:m="http://schemas.openxmlformats.org/officeDocument/2006/math" xmlns="" val="1"/>
             </a:ext>
           </a:extLst>
         </p:spPr>
@@ -8018,11 +8148,10 @@
           </a:bodyPr>
           <a:lstStyle>
             <a:lvl1pPr>
-              <a:defRPr b="1" sz="1200"/>
+              <a:defRPr sz="1200" b="1"/>
             </a:lvl1pPr>
           </a:lstStyle>
           <a:p>
-            <a:pPr/>
             <a:r>
               <a:t>Runtime polymorphism allows one interface reference to represent multiple object behaviors dynamically.</a:t>
             </a:r>
@@ -8034,12 +8163,12 @@
   <p:clrMapOvr>
     <a:masterClrMapping/>
   </p:clrMapOvr>
-  <p:transition xmlns:p14="http://schemas.microsoft.com/office/powerpoint/2010/main" spd="med" advClick="1"/>
+  <p:transition spd="med"/>
 </p:sld>
 </file>
 
 <file path=ppt/slides/slide18.xml><?xml version="1.0" encoding="utf-8"?>
-<p:sld xmlns:a="http://schemas.openxmlformats.org/drawingml/2006/main" xmlns:r="http://schemas.openxmlformats.org/officeDocument/2006/relationships" xmlns:p="http://schemas.openxmlformats.org/presentationml/2006/main" xmlns:m="http://schemas.openxmlformats.org/officeDocument/2006/math" xmlns:a14="http://schemas.microsoft.com/office/drawing/2010/main" showMasterSp="1" showMasterPhAnim="1">
+<p:sld xmlns:a="http://schemas.openxmlformats.org/drawingml/2006/main" xmlns:r="http://schemas.openxmlformats.org/officeDocument/2006/relationships" xmlns:p="http://schemas.openxmlformats.org/presentationml/2006/main">
   <p:cSld>
     <p:spTree>
       <p:nvGrpSpPr>
@@ -8058,7 +8187,9 @@
       <p:sp>
         <p:nvSpPr>
           <p:cNvPr id="275" name="Google Shape;221;p36"/>
-          <p:cNvSpPr txBox="1"/>
+          <p:cNvSpPr txBox="1">
+            <a:spLocks noGrp="1"/>
+          </p:cNvSpPr>
           <p:nvPr>
             <p:ph type="title"/>
           </p:nvPr>
@@ -8080,7 +8211,6 @@
             </a:lvl1pPr>
           </a:lstStyle>
           <a:p>
-            <a:pPr/>
             <a:r>
               <a:t>Why JVM Executes Object’s Method (Internal View)</a:t>
             </a:r>
@@ -8135,7 +8265,7 @@
           </a:ln>
           <a:extLst>
             <a:ext uri="{C572A759-6A51-4108-AA02-DFA0A04FC94B}">
-              <ma14:wrappingTextBoxFlag xmlns:ma14="http://schemas.microsoft.com/office/mac/drawingml/2011/main" val="1"/>
+              <ma14:wrappingTextBoxFlag xmlns:ma14="http://schemas.microsoft.com/office/mac/drawingml/2011/main" xmlns:a14="http://schemas.microsoft.com/office/drawing/2010/main" xmlns:m="http://schemas.openxmlformats.org/officeDocument/2006/math" xmlns="" val="1"/>
             </a:ext>
           </a:extLst>
         </p:spPr>
@@ -8195,7 +8325,7 @@
           </a:ln>
           <a:extLst>
             <a:ext uri="{C572A759-6A51-4108-AA02-DFA0A04FC94B}">
-              <ma14:wrappingTextBoxFlag xmlns:ma14="http://schemas.microsoft.com/office/mac/drawingml/2011/main" val="1"/>
+              <ma14:wrappingTextBoxFlag xmlns:ma14="http://schemas.microsoft.com/office/mac/drawingml/2011/main" xmlns:a14="http://schemas.microsoft.com/office/drawing/2010/main" xmlns:m="http://schemas.openxmlformats.org/officeDocument/2006/math" xmlns="" val="1"/>
             </a:ext>
           </a:extLst>
         </p:spPr>
@@ -8206,12 +8336,13 @@
           <a:lstStyle/>
           <a:p>
             <a:pPr>
-              <a:defRPr b="1" sz="1200"/>
-            </a:pPr>
+              <a:defRPr sz="1200" b="1"/>
+            </a:pPr>
+            <a:endParaRPr/>
           </a:p>
           <a:p>
             <a:pPr>
-              <a:defRPr b="1" sz="1200"/>
+              <a:defRPr sz="1200" b="1"/>
             </a:pPr>
             <a:r>
               <a:t>Memory-Level Understanding</a:t>
@@ -8290,7 +8421,7 @@
           </a:ln>
           <a:extLst>
             <a:ext uri="{C572A759-6A51-4108-AA02-DFA0A04FC94B}">
-              <ma14:wrappingTextBoxFlag xmlns:ma14="http://schemas.microsoft.com/office/mac/drawingml/2011/main" val="1"/>
+              <ma14:wrappingTextBoxFlag xmlns:ma14="http://schemas.microsoft.com/office/mac/drawingml/2011/main" xmlns:a14="http://schemas.microsoft.com/office/drawing/2010/main" xmlns:m="http://schemas.openxmlformats.org/officeDocument/2006/math" xmlns="" val="1"/>
             </a:ext>
           </a:extLst>
         </p:spPr>
@@ -8344,7 +8475,7 @@
           </a:ln>
           <a:extLst>
             <a:ext uri="{C572A759-6A51-4108-AA02-DFA0A04FC94B}">
-              <ma14:wrappingTextBoxFlag xmlns:ma14="http://schemas.microsoft.com/office/mac/drawingml/2011/main" val="1"/>
+              <ma14:wrappingTextBoxFlag xmlns:ma14="http://schemas.microsoft.com/office/mac/drawingml/2011/main" xmlns:a14="http://schemas.microsoft.com/office/drawing/2010/main" xmlns:m="http://schemas.openxmlformats.org/officeDocument/2006/math" xmlns="" val="1"/>
             </a:ext>
           </a:extLst>
         </p:spPr>
@@ -8355,7 +8486,7 @@
           <a:lstStyle/>
           <a:p>
             <a:pPr>
-              <a:defRPr b="1" sz="1200"/>
+              <a:defRPr sz="1200" b="1"/>
             </a:pPr>
             <a:r>
               <a:t>Key Points</a:t>
@@ -8429,7 +8560,7 @@
           <a:bodyPr lIns="45719" rIns="45719" anchor="ctr"/>
           <a:lstStyle/>
           <a:p>
-            <a:pPr/>
+            <a:endParaRPr/>
           </a:p>
         </p:txBody>
       </p:sp>
@@ -8452,7 +8583,7 @@
           </a:ln>
           <a:extLst>
             <a:ext uri="{C572A759-6A51-4108-AA02-DFA0A04FC94B}">
-              <ma14:wrappingTextBoxFlag xmlns:ma14="http://schemas.microsoft.com/office/mac/drawingml/2011/main" val="1"/>
+              <ma14:wrappingTextBoxFlag xmlns:ma14="http://schemas.microsoft.com/office/mac/drawingml/2011/main" xmlns:a14="http://schemas.microsoft.com/office/drawing/2010/main" xmlns:m="http://schemas.openxmlformats.org/officeDocument/2006/math" xmlns="" val="1"/>
             </a:ext>
           </a:extLst>
         </p:spPr>
@@ -8463,7 +8594,7 @@
           <a:lstStyle/>
           <a:p>
             <a:pPr>
-              <a:defRPr b="1" sz="1200"/>
+              <a:defRPr sz="1200" b="1"/>
             </a:pPr>
             <a:r>
               <a:t>Relation to Dynamic Method Dispatch</a:t>
@@ -8514,12 +8645,12 @@
   <p:clrMapOvr>
     <a:masterClrMapping/>
   </p:clrMapOvr>
-  <p:transition xmlns:p14="http://schemas.microsoft.com/office/powerpoint/2010/main" spd="med" advClick="1"/>
+  <p:transition spd="med"/>
 </p:sld>
 </file>
 
 <file path=ppt/slides/slide19.xml><?xml version="1.0" encoding="utf-8"?>
-<p:sld xmlns:a="http://schemas.openxmlformats.org/drawingml/2006/main" xmlns:r="http://schemas.openxmlformats.org/officeDocument/2006/relationships" xmlns:p="http://schemas.openxmlformats.org/presentationml/2006/main" xmlns:m="http://schemas.openxmlformats.org/officeDocument/2006/math" xmlns:a14="http://schemas.microsoft.com/office/drawing/2010/main" showMasterSp="1" showMasterPhAnim="1">
+<p:sld xmlns:a="http://schemas.openxmlformats.org/drawingml/2006/main" xmlns:r="http://schemas.openxmlformats.org/officeDocument/2006/relationships" xmlns:p="http://schemas.openxmlformats.org/presentationml/2006/main">
   <p:cSld>
     <p:spTree>
       <p:nvGrpSpPr>
@@ -8583,7 +8714,7 @@
           </a:ln>
           <a:extLst>
             <a:ext uri="{C572A759-6A51-4108-AA02-DFA0A04FC94B}">
-              <ma14:wrappingTextBoxFlag xmlns:ma14="http://schemas.microsoft.com/office/mac/drawingml/2011/main" val="1"/>
+              <ma14:wrappingTextBoxFlag xmlns:ma14="http://schemas.microsoft.com/office/mac/drawingml/2011/main" xmlns:a14="http://schemas.microsoft.com/office/drawing/2010/main" xmlns:m="http://schemas.openxmlformats.org/officeDocument/2006/math" xmlns="" val="1"/>
             </a:ext>
           </a:extLst>
         </p:spPr>
@@ -8613,12 +8744,6 @@
               </a:rPr>
               <a:t> </a:t>
             </a:r>
-            <a:endParaRPr b="1">
-              <a:latin typeface="+mj-lt"/>
-              <a:ea typeface="+mj-ea"/>
-              <a:cs typeface="+mj-cs"/>
-              <a:sym typeface="Arial"/>
-            </a:endParaRPr>
           </a:p>
           <a:p>
             <a:pPr>
@@ -8649,7 +8774,7 @@
           </a:ln>
           <a:extLst>
             <a:ext uri="{C572A759-6A51-4108-AA02-DFA0A04FC94B}">
-              <ma14:wrappingTextBoxFlag xmlns:ma14="http://schemas.microsoft.com/office/mac/drawingml/2011/main" val="1"/>
+              <ma14:wrappingTextBoxFlag xmlns:ma14="http://schemas.microsoft.com/office/mac/drawingml/2011/main" xmlns:a14="http://schemas.microsoft.com/office/drawing/2010/main" xmlns:m="http://schemas.openxmlformats.org/officeDocument/2006/math" xmlns="" val="1"/>
             </a:ext>
           </a:extLst>
         </p:spPr>
@@ -8727,7 +8852,7 @@
           <a:bodyPr lIns="45719" rIns="45719" anchor="ctr"/>
           <a:lstStyle/>
           <a:p>
-            <a:pPr/>
+            <a:endParaRPr/>
           </a:p>
         </p:txBody>
       </p:sp>
@@ -8750,7 +8875,7 @@
           </a:ln>
           <a:extLst>
             <a:ext uri="{C572A759-6A51-4108-AA02-DFA0A04FC94B}">
-              <ma14:wrappingTextBoxFlag xmlns:ma14="http://schemas.microsoft.com/office/mac/drawingml/2011/main" val="1"/>
+              <ma14:wrappingTextBoxFlag xmlns:ma14="http://schemas.microsoft.com/office/mac/drawingml/2011/main" xmlns:a14="http://schemas.microsoft.com/office/drawing/2010/main" xmlns:m="http://schemas.openxmlformats.org/officeDocument/2006/math" xmlns="" val="1"/>
             </a:ext>
           </a:extLst>
         </p:spPr>
@@ -8761,12 +8886,13 @@
           <a:lstStyle/>
           <a:p>
             <a:pPr>
-              <a:defRPr b="1" sz="1200"/>
-            </a:pPr>
+              <a:defRPr sz="1200" b="1"/>
+            </a:pPr>
+            <a:endParaRPr/>
           </a:p>
           <a:p>
             <a:pPr>
-              <a:defRPr b="1" sz="1200"/>
+              <a:defRPr sz="1200" b="1"/>
             </a:pPr>
             <a:r>
               <a:t>Definition</a:t>
@@ -8821,7 +8947,7 @@
           </a:ln>
           <a:extLst>
             <a:ext uri="{C572A759-6A51-4108-AA02-DFA0A04FC94B}">
-              <ma14:wrappingTextBoxFlag xmlns:ma14="http://schemas.microsoft.com/office/mac/drawingml/2011/main" val="1"/>
+              <ma14:wrappingTextBoxFlag xmlns:ma14="http://schemas.microsoft.com/office/mac/drawingml/2011/main" xmlns:a14="http://schemas.microsoft.com/office/drawing/2010/main" xmlns:m="http://schemas.openxmlformats.org/officeDocument/2006/math" xmlns="" val="1"/>
             </a:ext>
           </a:extLst>
         </p:spPr>
@@ -8839,7 +8965,6 @@
             </a:lvl1pPr>
           </a:lstStyle>
           <a:p>
-            <a:pPr/>
             <a:r>
               <a:t>objectReference instanceof ClassOrInterfaceName</a:t>
             </a:r>
@@ -8865,7 +8990,7 @@
           </a:ln>
           <a:extLst>
             <a:ext uri="{C572A759-6A51-4108-AA02-DFA0A04FC94B}">
-              <ma14:wrappingTextBoxFlag xmlns:ma14="http://schemas.microsoft.com/office/mac/drawingml/2011/main" val="1"/>
+              <ma14:wrappingTextBoxFlag xmlns:ma14="http://schemas.microsoft.com/office/mac/drawingml/2011/main" xmlns:a14="http://schemas.microsoft.com/office/drawing/2010/main" xmlns:m="http://schemas.openxmlformats.org/officeDocument/2006/math" xmlns="" val="1"/>
             </a:ext>
           </a:extLst>
         </p:spPr>
@@ -8876,7 +9001,7 @@
           <a:lstStyle/>
           <a:p>
             <a:pPr>
-              <a:defRPr b="1" sz="1200"/>
+              <a:defRPr sz="1200" b="1"/>
             </a:pPr>
             <a:r>
               <a:t>Key Characteristics</a:t>
@@ -8977,7 +9102,7 @@
           <a:bodyPr lIns="45719" rIns="45719" anchor="ctr"/>
           <a:lstStyle/>
           <a:p>
-            <a:pPr/>
+            <a:endParaRPr/>
           </a:p>
         </p:txBody>
       </p:sp>
@@ -9000,7 +9125,7 @@
           </a:ln>
           <a:extLst>
             <a:ext uri="{C572A759-6A51-4108-AA02-DFA0A04FC94B}">
-              <ma14:wrappingTextBoxFlag xmlns:ma14="http://schemas.microsoft.com/office/mac/drawingml/2011/main" val="1"/>
+              <ma14:wrappingTextBoxFlag xmlns:ma14="http://schemas.microsoft.com/office/mac/drawingml/2011/main" xmlns:a14="http://schemas.microsoft.com/office/drawing/2010/main" xmlns:m="http://schemas.openxmlformats.org/officeDocument/2006/math" xmlns="" val="1"/>
             </a:ext>
           </a:extLst>
         </p:spPr>
@@ -9011,7 +9136,7 @@
           <a:lstStyle/>
           <a:p>
             <a:pPr>
-              <a:defRPr b="1" sz="1200"/>
+              <a:defRPr sz="1200" b="1"/>
             </a:pPr>
             <a:r>
               <a:t>Why </a:t>
@@ -9098,7 +9223,7 @@
           </a:ln>
           <a:extLst>
             <a:ext uri="{C572A759-6A51-4108-AA02-DFA0A04FC94B}">
-              <ma14:wrappingTextBoxFlag xmlns:ma14="http://schemas.microsoft.com/office/mac/drawingml/2011/main" val="1"/>
+              <ma14:wrappingTextBoxFlag xmlns:ma14="http://schemas.microsoft.com/office/mac/drawingml/2011/main" xmlns:a14="http://schemas.microsoft.com/office/drawing/2010/main" xmlns:m="http://schemas.openxmlformats.org/officeDocument/2006/math" xmlns="" val="1"/>
             </a:ext>
           </a:extLst>
         </p:spPr>
@@ -9136,12 +9261,12 @@
   <p:clrMapOvr>
     <a:masterClrMapping/>
   </p:clrMapOvr>
-  <p:transition xmlns:p14="http://schemas.microsoft.com/office/powerpoint/2010/main" spd="med" advClick="1"/>
+  <p:transition spd="med"/>
 </p:sld>
 </file>
 
 <file path=ppt/slides/slide2.xml><?xml version="1.0" encoding="utf-8"?>
-<p:sld xmlns:a="http://schemas.openxmlformats.org/drawingml/2006/main" xmlns:r="http://schemas.openxmlformats.org/officeDocument/2006/relationships" xmlns:p="http://schemas.openxmlformats.org/presentationml/2006/main" xmlns:m="http://schemas.openxmlformats.org/officeDocument/2006/math" xmlns:a14="http://schemas.microsoft.com/office/drawing/2010/main" showMasterSp="1" showMasterPhAnim="1">
+<p:sld xmlns:a="http://schemas.openxmlformats.org/drawingml/2006/main" xmlns:r="http://schemas.openxmlformats.org/officeDocument/2006/relationships" xmlns:p="http://schemas.openxmlformats.org/presentationml/2006/main">
   <p:cSld>
     <p:spTree>
       <p:nvGrpSpPr>
@@ -9176,7 +9301,7 @@
           </a:ln>
           <a:extLst>
             <a:ext uri="{C572A759-6A51-4108-AA02-DFA0A04FC94B}">
-              <ma14:wrappingTextBoxFlag xmlns:ma14="http://schemas.microsoft.com/office/mac/drawingml/2011/main" val="1"/>
+              <ma14:wrappingTextBoxFlag xmlns:ma14="http://schemas.microsoft.com/office/mac/drawingml/2011/main" xmlns:a14="http://schemas.microsoft.com/office/drawing/2010/main" xmlns:m="http://schemas.openxmlformats.org/officeDocument/2006/math" xmlns="" val="1"/>
             </a:ext>
           </a:extLst>
         </p:spPr>
@@ -9186,11 +9311,10 @@
           </a:bodyPr>
           <a:lstStyle>
             <a:lvl1pPr>
-              <a:defRPr b="1" sz="2400"/>
+              <a:defRPr sz="2400" b="1"/>
             </a:lvl1pPr>
           </a:lstStyle>
           <a:p>
-            <a:pPr/>
             <a:r>
               <a:t>Why Interfaces Are Needed in Java</a:t>
             </a:r>
@@ -9216,7 +9340,7 @@
           </a:ln>
           <a:extLst>
             <a:ext uri="{C572A759-6A51-4108-AA02-DFA0A04FC94B}">
-              <ma14:wrappingTextBoxFlag xmlns:ma14="http://schemas.microsoft.com/office/mac/drawingml/2011/main" val="1"/>
+              <ma14:wrappingTextBoxFlag xmlns:ma14="http://schemas.microsoft.com/office/mac/drawingml/2011/main" xmlns:a14="http://schemas.microsoft.com/office/drawing/2010/main" xmlns:m="http://schemas.openxmlformats.org/officeDocument/2006/math" xmlns="" val="1"/>
             </a:ext>
           </a:extLst>
         </p:spPr>
@@ -9227,7 +9351,7 @@
           <a:lstStyle/>
           <a:p>
             <a:pPr>
-              <a:defRPr b="1" sz="1600"/>
+              <a:defRPr sz="1600" b="1"/>
             </a:pPr>
             <a:r>
               <a:t>Interfaces are required in Java to achieve design flexibility, abstraction, and multiple inheritance while maintaining type safety and loose coupling.</a:t>
@@ -9235,12 +9359,13 @@
           </a:p>
           <a:p>
             <a:pPr>
-              <a:defRPr b="1" sz="1600"/>
-            </a:pPr>
+              <a:defRPr sz="1600" b="1"/>
+            </a:pPr>
+            <a:endParaRPr/>
           </a:p>
           <a:p>
             <a:pPr>
-              <a:defRPr b="1" sz="1600"/>
+              <a:defRPr sz="1600" b="1"/>
             </a:pPr>
             <a:r>
               <a:t>Key Reasons for Using Interfaces</a:t>
@@ -9248,7 +9373,7 @@
           </a:p>
           <a:p>
             <a:pPr>
-              <a:defRPr b="1" sz="1600"/>
+              <a:defRPr sz="1600" b="1"/>
             </a:pPr>
             <a:r>
               <a:t>Support for Multiple Inheritance</a:t>
@@ -9265,11 +9390,10 @@
               <a:rPr b="0"/>
               <a:t>Interfaces allow a class to implement multiple behaviors without inheriting multiple class implementations.</a:t>
             </a:r>
-            <a:endParaRPr b="0"/>
           </a:p>
           <a:p>
             <a:pPr>
-              <a:defRPr b="1" sz="1600"/>
+              <a:defRPr sz="1600" b="1"/>
             </a:pPr>
             <a:r>
               <a:t>Achieving 100% Abstraction</a:t>
@@ -9302,7 +9426,6 @@
               <a:rPr b="0"/>
               <a:t>This separates specification from implementation.</a:t>
             </a:r>
-            <a:endParaRPr b="0"/>
           </a:p>
         </p:txBody>
       </p:sp>
@@ -9369,12 +9492,12 @@
   <p:clrMapOvr>
     <a:masterClrMapping/>
   </p:clrMapOvr>
-  <p:transition xmlns:p14="http://schemas.microsoft.com/office/powerpoint/2010/main" spd="med" advClick="1"/>
+  <p:transition spd="med"/>
 </p:sld>
 </file>
 
 <file path=ppt/slides/slide20.xml><?xml version="1.0" encoding="utf-8"?>
-<p:sld xmlns:a="http://schemas.openxmlformats.org/drawingml/2006/main" xmlns:r="http://schemas.openxmlformats.org/officeDocument/2006/relationships" xmlns:p="http://schemas.openxmlformats.org/presentationml/2006/main" xmlns:m="http://schemas.openxmlformats.org/officeDocument/2006/math" xmlns:a14="http://schemas.microsoft.com/office/drawing/2010/main" showMasterSp="1" showMasterPhAnim="1">
+<p:sld xmlns:a="http://schemas.openxmlformats.org/drawingml/2006/main" xmlns:r="http://schemas.openxmlformats.org/officeDocument/2006/relationships" xmlns:p="http://schemas.openxmlformats.org/presentationml/2006/main">
   <p:cSld>
     <p:spTree>
       <p:nvGrpSpPr>
@@ -9422,7 +9545,9 @@
       <p:sp>
         <p:nvSpPr>
           <p:cNvPr id="296" name="Google Shape;235;p38"/>
-          <p:cNvSpPr txBox="1"/>
+          <p:cNvSpPr txBox="1">
+            <a:spLocks noGrp="1"/>
+          </p:cNvSpPr>
           <p:nvPr>
             <p:ph type="title"/>
           </p:nvPr>
@@ -9444,7 +9569,7 @@
               <a:spcBef>
                 <a:spcPts val="1000"/>
               </a:spcBef>
-              <a:defRPr b="1" sz="1008">
+              <a:defRPr sz="1008" b="1">
                 <a:solidFill>
                   <a:srgbClr val="000000"/>
                 </a:solidFill>
@@ -9454,13 +9579,14 @@
                 <a:sym typeface="Times New Roman"/>
               </a:defRPr>
             </a:pPr>
+            <a:endParaRPr/>
           </a:p>
           <a:p>
             <a:pPr defTabSz="384047">
               <a:spcBef>
                 <a:spcPts val="1200"/>
               </a:spcBef>
-              <a:defRPr b="1" sz="1512">
+              <a:defRPr sz="1512" b="1">
                 <a:solidFill>
                   <a:srgbClr val="000000"/>
                 </a:solidFill>
@@ -9479,7 +9605,7 @@
               <a:spcBef>
                 <a:spcPts val="1000"/>
               </a:spcBef>
-              <a:defRPr b="1" sz="1008">
+              <a:defRPr sz="1008" b="1">
                 <a:solidFill>
                   <a:srgbClr val="000000"/>
                 </a:solidFill>
@@ -9489,6 +9615,7 @@
                 <a:sym typeface="Times New Roman"/>
               </a:defRPr>
             </a:pPr>
+            <a:endParaRPr/>
           </a:p>
         </p:txBody>
       </p:sp>
@@ -9511,7 +9638,7 @@
           </a:ln>
           <a:extLst>
             <a:ext uri="{C572A759-6A51-4108-AA02-DFA0A04FC94B}">
-              <ma14:wrappingTextBoxFlag xmlns:ma14="http://schemas.microsoft.com/office/mac/drawingml/2011/main" val="1"/>
+              <ma14:wrappingTextBoxFlag xmlns:ma14="http://schemas.microsoft.com/office/mac/drawingml/2011/main" xmlns:a14="http://schemas.microsoft.com/office/drawing/2010/main" xmlns:m="http://schemas.openxmlformats.org/officeDocument/2006/math" xmlns="" val="1"/>
             </a:ext>
           </a:extLst>
         </p:spPr>
@@ -9521,52 +9648,44 @@
           </a:bodyPr>
           <a:lstStyle/>
           <a:p>
-            <a:pPr/>
             <a:r>
               <a:t>interface Animal {</a:t>
             </a:r>
           </a:p>
           <a:p>
-            <a:pPr/>
             <a:r>
               <a:t>    void sound();</a:t>
             </a:r>
           </a:p>
           <a:p>
-            <a:pPr/>
             <a:r>
               <a:t>}</a:t>
             </a:r>
           </a:p>
           <a:p>
-            <a:pPr/>
-          </a:p>
-          <a:p>
-            <a:pPr/>
+            <a:endParaRPr/>
+          </a:p>
+          <a:p>
             <a:r>
               <a:t>class Dog implements Animal {</a:t>
             </a:r>
           </a:p>
           <a:p>
-            <a:pPr/>
             <a:r>
               <a:t>    public void sound() {</a:t>
             </a:r>
           </a:p>
           <a:p>
-            <a:pPr/>
             <a:r>
               <a:t>        System.out.println("Dog barks");</a:t>
             </a:r>
           </a:p>
           <a:p>
-            <a:pPr/>
             <a:r>
               <a:t>    }</a:t>
             </a:r>
           </a:p>
           <a:p>
-            <a:pPr/>
             <a:r>
               <a:t>}</a:t>
             </a:r>
@@ -9592,7 +9711,7 @@
           </a:ln>
           <a:extLst>
             <a:ext uri="{C572A759-6A51-4108-AA02-DFA0A04FC94B}">
-              <ma14:wrappingTextBoxFlag xmlns:ma14="http://schemas.microsoft.com/office/mac/drawingml/2011/main" val="1"/>
+              <ma14:wrappingTextBoxFlag xmlns:ma14="http://schemas.microsoft.com/office/mac/drawingml/2011/main" xmlns:a14="http://schemas.microsoft.com/office/drawing/2010/main" xmlns:m="http://schemas.openxmlformats.org/officeDocument/2006/math" xmlns="" val="1"/>
             </a:ext>
           </a:extLst>
         </p:spPr>
@@ -9602,55 +9721,48 @@
           </a:bodyPr>
           <a:lstStyle/>
           <a:p>
-            <a:pPr/>
             <a:r>
               <a:t>class TestInstanceOf {</a:t>
             </a:r>
           </a:p>
           <a:p>
-            <a:pPr/>
-          </a:p>
-          <a:p>
-            <a:pPr/>
+            <a:endParaRPr/>
+          </a:p>
+          <a:p>
             <a:r>
               <a:t>    public static void main(String[] args) {</a:t>
             </a:r>
           </a:p>
           <a:p>
-            <a:pPr/>
-          </a:p>
-          <a:p>
-            <a:pPr/>
+            <a:endParaRPr/>
+          </a:p>
+          <a:p>
             <a:r>
               <a:t>        Animal a = new Dog();</a:t>
             </a:r>
           </a:p>
           <a:p>
-            <a:pPr/>
-          </a:p>
-          <a:p>
-            <a:pPr/>
+            <a:endParaRPr/>
+          </a:p>
+          <a:p>
             <a:r>
               <a:t>        if (a instanceof Dog) {</a:t>
             </a:r>
           </a:p>
           <a:p>
-            <a:pPr/>
             <a:r>
               <a:t>            System.out.println("Object is of type Dog");</a:t>
             </a:r>
           </a:p>
           <a:p>
-            <a:pPr/>
             <a:r>
               <a:t>        }</a:t>
             </a:r>
           </a:p>
           <a:p>
-            <a:pPr/>
-          </a:p>
-          <a:p>
-            <a:pPr/>
+            <a:endParaRPr/>
+          </a:p>
+          <a:p>
             <a:r>
               <a:t>      </a:t>
             </a:r>
@@ -9662,12 +9774,12 @@
   <p:clrMapOvr>
     <a:masterClrMapping/>
   </p:clrMapOvr>
-  <p:transition xmlns:p14="http://schemas.microsoft.com/office/powerpoint/2010/main" spd="med" advClick="1"/>
+  <p:transition spd="med"/>
 </p:sld>
 </file>
 
 <file path=ppt/slides/slide21.xml><?xml version="1.0" encoding="utf-8"?>
-<p:sld xmlns:a="http://schemas.openxmlformats.org/drawingml/2006/main" xmlns:r="http://schemas.openxmlformats.org/officeDocument/2006/relationships" xmlns:p="http://schemas.openxmlformats.org/presentationml/2006/main" xmlns:m="http://schemas.openxmlformats.org/officeDocument/2006/math" xmlns:a14="http://schemas.microsoft.com/office/drawing/2010/main" showMasterSp="1" showMasterPhAnim="1">
+<p:sld xmlns:a="http://schemas.openxmlformats.org/drawingml/2006/main" xmlns:r="http://schemas.openxmlformats.org/officeDocument/2006/relationships" xmlns:p="http://schemas.openxmlformats.org/presentationml/2006/main">
   <p:cSld>
     <p:spTree>
       <p:nvGrpSpPr>
@@ -9692,7 +9804,7 @@
           <p:nvPr/>
         </p:nvPicPr>
         <p:blipFill>
-          <a:blip r:embed="rId3">
+          <a:blip r:embed="rId2">
             <a:extLst/>
           </a:blip>
           <a:stretch>
@@ -9731,7 +9843,7 @@
           </a:ln>
           <a:extLst>
             <a:ext uri="{C572A759-6A51-4108-AA02-DFA0A04FC94B}">
-              <ma14:wrappingTextBoxFlag xmlns:ma14="http://schemas.microsoft.com/office/mac/drawingml/2011/main" val="1"/>
+              <ma14:wrappingTextBoxFlag xmlns:ma14="http://schemas.microsoft.com/office/mac/drawingml/2011/main" xmlns:a14="http://schemas.microsoft.com/office/drawing/2010/main" xmlns:m="http://schemas.openxmlformats.org/officeDocument/2006/math" xmlns="" val="1"/>
             </a:ext>
           </a:extLst>
         </p:spPr>
@@ -9741,40 +9853,34 @@
           </a:bodyPr>
           <a:lstStyle/>
           <a:p>
-            <a:pPr/>
             <a:r>
               <a:t> if (a instanceof Animal) {</a:t>
             </a:r>
           </a:p>
           <a:p>
-            <a:pPr/>
             <a:r>
               <a:t>            System.out.println("Object implements Animal interface");</a:t>
             </a:r>
           </a:p>
           <a:p>
-            <a:pPr/>
             <a:r>
               <a:t>        }</a:t>
             </a:r>
           </a:p>
           <a:p>
-            <a:pPr/>
-          </a:p>
-          <a:p>
-            <a:pPr/>
+            <a:endParaRPr/>
+          </a:p>
+          <a:p>
             <a:r>
               <a:t>        a.sound();</a:t>
             </a:r>
           </a:p>
           <a:p>
-            <a:pPr/>
             <a:r>
               <a:t>    }</a:t>
             </a:r>
           </a:p>
           <a:p>
-            <a:pPr/>
             <a:r>
               <a:t>}</a:t>
             </a:r>
@@ -9800,7 +9906,7 @@
           </a:ln>
           <a:extLst>
             <a:ext uri="{C572A759-6A51-4108-AA02-DFA0A04FC94B}">
-              <ma14:wrappingTextBoxFlag xmlns:ma14="http://schemas.microsoft.com/office/mac/drawingml/2011/main" val="1"/>
+              <ma14:wrappingTextBoxFlag xmlns:ma14="http://schemas.microsoft.com/office/mac/drawingml/2011/main" xmlns:a14="http://schemas.microsoft.com/office/drawing/2010/main" xmlns:m="http://schemas.openxmlformats.org/officeDocument/2006/math" xmlns="" val="1"/>
             </a:ext>
           </a:extLst>
         </p:spPr>
@@ -9821,6 +9927,7 @@
                 <a:sym typeface="Times New Roman"/>
               </a:defRPr>
             </a:pPr>
+            <a:endParaRPr/>
           </a:p>
           <a:p>
             <a:pPr defTabSz="457200">
@@ -9916,7 +10023,9 @@
       <p:sp>
         <p:nvSpPr>
           <p:cNvPr id="303" name="Google Shape;243;p39"/>
-          <p:cNvSpPr txBox="1"/>
+          <p:cNvSpPr txBox="1">
+            <a:spLocks noGrp="1"/>
+          </p:cNvSpPr>
           <p:nvPr>
             <p:ph type="title"/>
           </p:nvPr>
@@ -9938,7 +10047,7 @@
               <a:spcBef>
                 <a:spcPts val="900"/>
               </a:spcBef>
-              <a:defRPr b="1" sz="972">
+              <a:defRPr sz="972" b="1">
                 <a:solidFill>
                   <a:srgbClr val="000000"/>
                 </a:solidFill>
@@ -9948,13 +10057,14 @@
                 <a:sym typeface="Times New Roman"/>
               </a:defRPr>
             </a:pPr>
+            <a:endParaRPr/>
           </a:p>
           <a:p>
             <a:pPr defTabSz="370331">
               <a:spcBef>
                 <a:spcPts val="1200"/>
               </a:spcBef>
-              <a:defRPr b="1" sz="1458">
+              <a:defRPr sz="1458" b="1">
                 <a:solidFill>
                   <a:srgbClr val="000000"/>
                 </a:solidFill>
@@ -9973,7 +10083,7 @@
               <a:spcBef>
                 <a:spcPts val="900"/>
               </a:spcBef>
-              <a:defRPr b="1" sz="972">
+              <a:defRPr sz="972" b="1">
                 <a:solidFill>
                   <a:srgbClr val="000000"/>
                 </a:solidFill>
@@ -9983,6 +10093,7 @@
                 <a:sym typeface="Times New Roman"/>
               </a:defRPr>
             </a:pPr>
+            <a:endParaRPr/>
           </a:p>
         </p:txBody>
       </p:sp>
@@ -10004,16 +10115,16 @@
             <a:miter lim="400000"/>
           </a:ln>
           <a:effectLst>
-            <a:outerShdw sx="100000" sy="100000" kx="0" ky="0" algn="b" rotWithShape="0" blurRad="63500" dist="25400" dir="5400000">
+            <a:outerShdw blurRad="63500" dist="25400" dir="5400000" rotWithShape="0">
               <a:srgbClr val="000000">
                 <a:alpha val="50000"/>
               </a:srgbClr>
             </a:outerShdw>
-            <a:reflection blurRad="0" stA="50000" stPos="0" endA="0" endPos="40000" dist="0" dir="5400000" fadeDir="5400000" sx="100000" sy="-100000" kx="0" ky="0" algn="bl" rotWithShape="0"/>
+            <a:reflection stA="50000" endPos="40000" dir="5400000" sy="-100000" algn="bl" rotWithShape="0"/>
           </a:effectLst>
           <a:extLst>
             <a:ext uri="{C572A759-6A51-4108-AA02-DFA0A04FC94B}">
-              <ma14:wrappingTextBoxFlag xmlns:ma14="http://schemas.microsoft.com/office/mac/drawingml/2011/main" val="1"/>
+              <ma14:wrappingTextBoxFlag xmlns:ma14="http://schemas.microsoft.com/office/mac/drawingml/2011/main" xmlns:a14="http://schemas.microsoft.com/office/drawing/2010/main" xmlns:m="http://schemas.openxmlformats.org/officeDocument/2006/math" xmlns="" val="1"/>
             </a:ext>
           </a:extLst>
         </p:spPr>
@@ -10023,7 +10134,7 @@
           </a:bodyPr>
           <a:lstStyle>
             <a:lvl1pPr marL="190500" indent="-190500" defTabSz="457200">
-              <a:defRPr b="1" sz="1200">
+              <a:defRPr sz="1200" b="1">
                 <a:solidFill>
                   <a:schemeClr val="accent2">
                     <a:lumOff val="-2588"/>
@@ -10037,7 +10148,6 @@
             </a:lvl1pPr>
           </a:lstStyle>
           <a:p>
-            <a:pPr/>
             <a:r>
               <a:t>The instanceof operator validates the object’s actual type in memory, ensuring safe runtime behavior.</a:t>
             </a:r>
@@ -10049,12 +10159,12 @@
   <p:clrMapOvr>
     <a:masterClrMapping/>
   </p:clrMapOvr>
-  <p:transition xmlns:p14="http://schemas.microsoft.com/office/powerpoint/2010/main" spd="med" advClick="1"/>
+  <p:transition spd="med"/>
 </p:sld>
 </file>
 
 <file path=ppt/slides/slide22.xml><?xml version="1.0" encoding="utf-8"?>
-<p:sld xmlns:a="http://schemas.openxmlformats.org/drawingml/2006/main" xmlns:r="http://schemas.openxmlformats.org/officeDocument/2006/relationships" xmlns:p="http://schemas.openxmlformats.org/presentationml/2006/main" xmlns:m="http://schemas.openxmlformats.org/officeDocument/2006/math" xmlns:a14="http://schemas.microsoft.com/office/drawing/2010/main" showMasterSp="1" showMasterPhAnim="1">
+<p:sld xmlns:a="http://schemas.openxmlformats.org/drawingml/2006/main" xmlns:r="http://schemas.openxmlformats.org/officeDocument/2006/relationships" xmlns:p="http://schemas.openxmlformats.org/presentationml/2006/main">
   <p:cSld>
     <p:spTree>
       <p:nvGrpSpPr>
@@ -10118,7 +10228,7 @@
           </a:ln>
           <a:extLst>
             <a:ext uri="{C572A759-6A51-4108-AA02-DFA0A04FC94B}">
-              <ma14:wrappingTextBoxFlag xmlns:ma14="http://schemas.microsoft.com/office/mac/drawingml/2011/main" val="1"/>
+              <ma14:wrappingTextBoxFlag xmlns:ma14="http://schemas.microsoft.com/office/mac/drawingml/2011/main" xmlns:a14="http://schemas.microsoft.com/office/drawing/2010/main" xmlns:m="http://schemas.openxmlformats.org/officeDocument/2006/math" xmlns="" val="1"/>
             </a:ext>
           </a:extLst>
         </p:spPr>
@@ -10139,13 +10249,14 @@
                 <a:sym typeface="Times New Roman"/>
               </a:defRPr>
             </a:pPr>
+            <a:endParaRPr/>
           </a:p>
           <a:p>
             <a:pPr defTabSz="457200">
               <a:spcBef>
                 <a:spcPts val="1400"/>
               </a:spcBef>
-              <a:defRPr b="1" sz="1800">
+              <a:defRPr sz="1800" b="1">
                 <a:latin typeface="Times New Roman"/>
                 <a:ea typeface="Times New Roman"/>
                 <a:cs typeface="Times New Roman"/>
@@ -10168,6 +10279,7 @@
                 <a:sym typeface="Times New Roman"/>
               </a:defRPr>
             </a:pPr>
+            <a:endParaRPr/>
           </a:p>
         </p:txBody>
       </p:sp>
@@ -10190,7 +10302,7 @@
           </a:ln>
           <a:extLst>
             <a:ext uri="{C572A759-6A51-4108-AA02-DFA0A04FC94B}">
-              <ma14:wrappingTextBoxFlag xmlns:ma14="http://schemas.microsoft.com/office/mac/drawingml/2011/main" val="1"/>
+              <ma14:wrappingTextBoxFlag xmlns:ma14="http://schemas.microsoft.com/office/mac/drawingml/2011/main" xmlns:a14="http://schemas.microsoft.com/office/drawing/2010/main" xmlns:m="http://schemas.openxmlformats.org/officeDocument/2006/math" xmlns="" val="1"/>
             </a:ext>
           </a:extLst>
         </p:spPr>
@@ -10252,7 +10364,7 @@
           </a:ln>
           <a:extLst>
             <a:ext uri="{C572A759-6A51-4108-AA02-DFA0A04FC94B}">
-              <ma14:wrappingTextBoxFlag xmlns:ma14="http://schemas.microsoft.com/office/mac/drawingml/2011/main" val="1"/>
+              <ma14:wrappingTextBoxFlag xmlns:ma14="http://schemas.microsoft.com/office/mac/drawingml/2011/main" xmlns:a14="http://schemas.microsoft.com/office/drawing/2010/main" xmlns:m="http://schemas.openxmlformats.org/officeDocument/2006/math" xmlns="" val="1"/>
             </a:ext>
           </a:extLst>
         </p:spPr>
@@ -10314,7 +10426,7 @@
           </a:ln>
           <a:extLst>
             <a:ext uri="{C572A759-6A51-4108-AA02-DFA0A04FC94B}">
-              <ma14:wrappingTextBoxFlag xmlns:ma14="http://schemas.microsoft.com/office/mac/drawingml/2011/main" val="1"/>
+              <ma14:wrappingTextBoxFlag xmlns:ma14="http://schemas.microsoft.com/office/mac/drawingml/2011/main" xmlns:a14="http://schemas.microsoft.com/office/drawing/2010/main" xmlns:m="http://schemas.openxmlformats.org/officeDocument/2006/math" xmlns="" val="1"/>
             </a:ext>
           </a:extLst>
         </p:spPr>
@@ -10324,7 +10436,6 @@
           </a:bodyPr>
           <a:lstStyle/>
           <a:p>
-            <a:pPr/>
             <a:r>
               <a:t>Animal a = new Dog();</a:t>
             </a:r>
@@ -10350,7 +10461,7 @@
           </a:ln>
           <a:extLst>
             <a:ext uri="{C572A759-6A51-4108-AA02-DFA0A04FC94B}">
-              <ma14:wrappingTextBoxFlag xmlns:ma14="http://schemas.microsoft.com/office/mac/drawingml/2011/main" val="1"/>
+              <ma14:wrappingTextBoxFlag xmlns:ma14="http://schemas.microsoft.com/office/mac/drawingml/2011/main" xmlns:a14="http://schemas.microsoft.com/office/drawing/2010/main" xmlns:m="http://schemas.openxmlformats.org/officeDocument/2006/math" xmlns="" val="1"/>
             </a:ext>
           </a:extLst>
         </p:spPr>
@@ -10458,12 +10569,12 @@
   <p:clrMapOvr>
     <a:masterClrMapping/>
   </p:clrMapOvr>
-  <p:transition xmlns:p14="http://schemas.microsoft.com/office/powerpoint/2010/main" spd="med" advClick="1"/>
+  <p:transition spd="med"/>
 </p:sld>
 </file>
 
 <file path=ppt/slides/slide23.xml><?xml version="1.0" encoding="utf-8"?>
-<p:sld xmlns:a="http://schemas.openxmlformats.org/drawingml/2006/main" xmlns:r="http://schemas.openxmlformats.org/officeDocument/2006/relationships" xmlns:p="http://schemas.openxmlformats.org/presentationml/2006/main" xmlns:m="http://schemas.openxmlformats.org/officeDocument/2006/math" xmlns:a14="http://schemas.microsoft.com/office/drawing/2010/main" showMasterSp="1" showMasterPhAnim="1">
+<p:sld xmlns:a="http://schemas.openxmlformats.org/drawingml/2006/main" xmlns:r="http://schemas.openxmlformats.org/officeDocument/2006/relationships" xmlns:p="http://schemas.openxmlformats.org/presentationml/2006/main">
   <p:cSld>
     <p:spTree>
       <p:nvGrpSpPr>
@@ -10527,7 +10638,7 @@
           </a:ln>
           <a:extLst>
             <a:ext uri="{C572A759-6A51-4108-AA02-DFA0A04FC94B}">
-              <ma14:wrappingTextBoxFlag xmlns:ma14="http://schemas.microsoft.com/office/mac/drawingml/2011/main" val="1"/>
+              <ma14:wrappingTextBoxFlag xmlns:ma14="http://schemas.microsoft.com/office/mac/drawingml/2011/main" xmlns:a14="http://schemas.microsoft.com/office/drawing/2010/main" xmlns:m="http://schemas.openxmlformats.org/officeDocument/2006/math" xmlns="" val="1"/>
             </a:ext>
           </a:extLst>
         </p:spPr>
@@ -10548,13 +10659,14 @@
                 <a:sym typeface="Times New Roman"/>
               </a:defRPr>
             </a:pPr>
+            <a:endParaRPr/>
           </a:p>
           <a:p>
             <a:pPr defTabSz="457200">
               <a:spcBef>
                 <a:spcPts val="1400"/>
               </a:spcBef>
-              <a:defRPr b="1" sz="1800">
+              <a:defRPr sz="1800" b="1">
                 <a:latin typeface="Times New Roman"/>
                 <a:ea typeface="Times New Roman"/>
                 <a:cs typeface="Times New Roman"/>
@@ -10577,6 +10689,7 @@
                 <a:sym typeface="Times New Roman"/>
               </a:defRPr>
             </a:pPr>
+            <a:endParaRPr/>
           </a:p>
         </p:txBody>
       </p:sp>
@@ -10599,7 +10712,7 @@
           </a:ln>
           <a:extLst>
             <a:ext uri="{C572A759-6A51-4108-AA02-DFA0A04FC94B}">
-              <ma14:wrappingTextBoxFlag xmlns:ma14="http://schemas.microsoft.com/office/mac/drawingml/2011/main" val="1"/>
+              <ma14:wrappingTextBoxFlag xmlns:ma14="http://schemas.microsoft.com/office/mac/drawingml/2011/main" xmlns:a14="http://schemas.microsoft.com/office/drawing/2010/main" xmlns:m="http://schemas.openxmlformats.org/officeDocument/2006/math" xmlns="" val="1"/>
             </a:ext>
           </a:extLst>
         </p:spPr>
@@ -10620,6 +10733,7 @@
                 <a:sym typeface="Times New Roman"/>
               </a:defRPr>
             </a:pPr>
+            <a:endParaRPr/>
           </a:p>
           <a:p>
             <a:pPr defTabSz="457200">
@@ -10734,7 +10848,7 @@
           </a:ln>
           <a:extLst>
             <a:ext uri="{C572A759-6A51-4108-AA02-DFA0A04FC94B}">
-              <ma14:wrappingTextBoxFlag xmlns:ma14="http://schemas.microsoft.com/office/mac/drawingml/2011/main" val="1"/>
+              <ma14:wrappingTextBoxFlag xmlns:ma14="http://schemas.microsoft.com/office/mac/drawingml/2011/main" xmlns:a14="http://schemas.microsoft.com/office/drawing/2010/main" xmlns:m="http://schemas.openxmlformats.org/officeDocument/2006/math" xmlns="" val="1"/>
             </a:ext>
           </a:extLst>
         </p:spPr>
@@ -10744,25 +10858,21 @@
           </a:bodyPr>
           <a:lstStyle/>
           <a:p>
-            <a:pPr/>
             <a:r>
               <a:t>if (a instanceof Dog) {</a:t>
             </a:r>
           </a:p>
           <a:p>
-            <a:pPr/>
             <a:r>
               <a:t>    Dog d = (Dog) a;</a:t>
             </a:r>
           </a:p>
           <a:p>
-            <a:pPr/>
             <a:r>
               <a:t>    d.sound();</a:t>
             </a:r>
           </a:p>
           <a:p>
-            <a:pPr/>
             <a:r>
               <a:t>}</a:t>
             </a:r>
@@ -10788,7 +10898,7 @@
           </a:ln>
           <a:extLst>
             <a:ext uri="{C572A759-6A51-4108-AA02-DFA0A04FC94B}">
-              <ma14:wrappingTextBoxFlag xmlns:ma14="http://schemas.microsoft.com/office/mac/drawingml/2011/main" val="1"/>
+              <ma14:wrappingTextBoxFlag xmlns:ma14="http://schemas.microsoft.com/office/mac/drawingml/2011/main" xmlns:a14="http://schemas.microsoft.com/office/drawing/2010/main" xmlns:m="http://schemas.openxmlformats.org/officeDocument/2006/math" xmlns="" val="1"/>
             </a:ext>
           </a:extLst>
         </p:spPr>
@@ -10879,6 +10989,7 @@
                 <a:sym typeface="Times New Roman"/>
               </a:defRPr>
             </a:pPr>
+            <a:endParaRPr/>
           </a:p>
         </p:txBody>
       </p:sp>
@@ -10901,7 +11012,7 @@
           </a:ln>
           <a:extLst>
             <a:ext uri="{C572A759-6A51-4108-AA02-DFA0A04FC94B}">
-              <ma14:wrappingTextBoxFlag xmlns:ma14="http://schemas.microsoft.com/office/mac/drawingml/2011/main" val="1"/>
+              <ma14:wrappingTextBoxFlag xmlns:ma14="http://schemas.microsoft.com/office/mac/drawingml/2011/main" xmlns:a14="http://schemas.microsoft.com/office/drawing/2010/main" xmlns:m="http://schemas.openxmlformats.org/officeDocument/2006/math" xmlns="" val="1"/>
             </a:ext>
           </a:extLst>
         </p:spPr>
@@ -10922,6 +11033,7 @@
                 <a:sym typeface="Times New Roman"/>
               </a:defRPr>
             </a:pPr>
+            <a:endParaRPr/>
           </a:p>
           <a:p>
             <a:pPr marL="190500" indent="-190500" defTabSz="457200">
@@ -10943,12 +11055,12 @@
   <p:clrMapOvr>
     <a:masterClrMapping/>
   </p:clrMapOvr>
-  <p:transition xmlns:p14="http://schemas.microsoft.com/office/powerpoint/2010/main" spd="med" advClick="1"/>
+  <p:transition spd="med"/>
 </p:sld>
 </file>
 
 <file path=ppt/slides/slide24.xml><?xml version="1.0" encoding="utf-8"?>
-<p:sld xmlns:a="http://schemas.openxmlformats.org/drawingml/2006/main" xmlns:r="http://schemas.openxmlformats.org/officeDocument/2006/relationships" xmlns:p="http://schemas.openxmlformats.org/presentationml/2006/main" xmlns:m="http://schemas.openxmlformats.org/officeDocument/2006/math" xmlns:a14="http://schemas.microsoft.com/office/drawing/2010/main" showMasterSp="1" showMasterPhAnim="1">
+<p:sld xmlns:a="http://schemas.openxmlformats.org/drawingml/2006/main" xmlns:r="http://schemas.openxmlformats.org/officeDocument/2006/relationships" xmlns:p="http://schemas.openxmlformats.org/presentationml/2006/main">
   <p:cSld>
     <p:spTree>
       <p:nvGrpSpPr>
@@ -11012,7 +11124,7 @@
           </a:ln>
           <a:extLst>
             <a:ext uri="{C572A759-6A51-4108-AA02-DFA0A04FC94B}">
-              <ma14:wrappingTextBoxFlag xmlns:ma14="http://schemas.microsoft.com/office/mac/drawingml/2011/main" val="1"/>
+              <ma14:wrappingTextBoxFlag xmlns:ma14="http://schemas.microsoft.com/office/mac/drawingml/2011/main" xmlns:a14="http://schemas.microsoft.com/office/drawing/2010/main" xmlns:m="http://schemas.openxmlformats.org/officeDocument/2006/math" xmlns="" val="1"/>
             </a:ext>
           </a:extLst>
         </p:spPr>
@@ -11033,13 +11145,14 @@
                 <a:sym typeface="Times New Roman"/>
               </a:defRPr>
             </a:pPr>
+            <a:endParaRPr/>
           </a:p>
           <a:p>
             <a:pPr defTabSz="457200">
               <a:spcBef>
                 <a:spcPts val="1400"/>
               </a:spcBef>
-              <a:defRPr b="1" sz="1800">
+              <a:defRPr sz="1800" b="1">
                 <a:latin typeface="Times New Roman"/>
                 <a:ea typeface="Times New Roman"/>
                 <a:cs typeface="Times New Roman"/>
@@ -11062,6 +11175,7 @@
                 <a:sym typeface="Times New Roman"/>
               </a:defRPr>
             </a:pPr>
+            <a:endParaRPr/>
           </a:p>
         </p:txBody>
       </p:sp>
@@ -11084,7 +11198,7 @@
           </a:ln>
           <a:extLst>
             <a:ext uri="{C572A759-6A51-4108-AA02-DFA0A04FC94B}">
-              <ma14:wrappingTextBoxFlag xmlns:ma14="http://schemas.microsoft.com/office/mac/drawingml/2011/main" val="1"/>
+              <ma14:wrappingTextBoxFlag xmlns:ma14="http://schemas.microsoft.com/office/mac/drawingml/2011/main" xmlns:a14="http://schemas.microsoft.com/office/drawing/2010/main" xmlns:m="http://schemas.openxmlformats.org/officeDocument/2006/math" xmlns="" val="1"/>
             </a:ext>
           </a:extLst>
         </p:spPr>
@@ -11146,7 +11260,7 @@
           </a:ln>
           <a:extLst>
             <a:ext uri="{C572A759-6A51-4108-AA02-DFA0A04FC94B}">
-              <ma14:wrappingTextBoxFlag xmlns:ma14="http://schemas.microsoft.com/office/mac/drawingml/2011/main" val="1"/>
+              <ma14:wrappingTextBoxFlag xmlns:ma14="http://schemas.microsoft.com/office/mac/drawingml/2011/main" xmlns:a14="http://schemas.microsoft.com/office/drawing/2010/main" xmlns:m="http://schemas.openxmlformats.org/officeDocument/2006/math" xmlns="" val="1"/>
             </a:ext>
           </a:extLst>
         </p:spPr>
@@ -11167,6 +11281,7 @@
                 <a:sym typeface="Times New Roman"/>
               </a:defRPr>
             </a:pPr>
+            <a:endParaRPr/>
           </a:p>
           <a:p>
             <a:pPr defTabSz="457200">
@@ -11218,7 +11333,7 @@
           </a:ln>
           <a:extLst>
             <a:ext uri="{C572A759-6A51-4108-AA02-DFA0A04FC94B}">
-              <ma14:wrappingTextBoxFlag xmlns:ma14="http://schemas.microsoft.com/office/mac/drawingml/2011/main" val="1"/>
+              <ma14:wrappingTextBoxFlag xmlns:ma14="http://schemas.microsoft.com/office/mac/drawingml/2011/main" xmlns:a14="http://schemas.microsoft.com/office/drawing/2010/main" xmlns:m="http://schemas.openxmlformats.org/officeDocument/2006/math" xmlns="" val="1"/>
             </a:ext>
           </a:extLst>
         </p:spPr>
@@ -11239,6 +11354,7 @@
                 <a:sym typeface="Times New Roman"/>
               </a:defRPr>
             </a:pPr>
+            <a:endParaRPr/>
           </a:p>
           <a:p>
             <a:pPr marL="457200" indent="-317500" defTabSz="457200">
@@ -11328,6 +11444,7 @@
                 <a:sym typeface="Times New Roman"/>
               </a:defRPr>
             </a:pPr>
+            <a:endParaRPr/>
           </a:p>
         </p:txBody>
       </p:sp>
@@ -11350,7 +11467,7 @@
           </a:ln>
           <a:extLst>
             <a:ext uri="{C572A759-6A51-4108-AA02-DFA0A04FC94B}">
-              <ma14:wrappingTextBoxFlag xmlns:ma14="http://schemas.microsoft.com/office/mac/drawingml/2011/main" val="1"/>
+              <ma14:wrappingTextBoxFlag xmlns:ma14="http://schemas.microsoft.com/office/mac/drawingml/2011/main" xmlns:a14="http://schemas.microsoft.com/office/drawing/2010/main" xmlns:m="http://schemas.openxmlformats.org/officeDocument/2006/math" xmlns="" val="1"/>
             </a:ext>
           </a:extLst>
         </p:spPr>
@@ -11371,6 +11488,7 @@
                 <a:sym typeface="Times New Roman"/>
               </a:defRPr>
             </a:pPr>
+            <a:endParaRPr/>
           </a:p>
           <a:p>
             <a:pPr defTabSz="457200">
@@ -11384,6 +11502,7 @@
                 <a:sym typeface="Times New Roman"/>
               </a:defRPr>
             </a:pPr>
+            <a:endParaRPr/>
           </a:p>
           <a:p>
             <a:pPr defTabSz="457200">
@@ -11397,6 +11516,7 @@
                 <a:sym typeface="Times New Roman"/>
               </a:defRPr>
             </a:pPr>
+            <a:endParaRPr/>
           </a:p>
           <a:p>
             <a:pPr defTabSz="457200">
@@ -11410,6 +11530,7 @@
                 <a:sym typeface="Times New Roman"/>
               </a:defRPr>
             </a:pPr>
+            <a:endParaRPr/>
           </a:p>
           <a:p>
             <a:pPr defTabSz="457200">
@@ -11439,6 +11560,7 @@
                 <a:sym typeface="Times New Roman"/>
               </a:defRPr>
             </a:pPr>
+            <a:endParaRPr/>
           </a:p>
         </p:txBody>
       </p:sp>
@@ -11461,7 +11583,7 @@
           </a:ln>
           <a:extLst>
             <a:ext uri="{C572A759-6A51-4108-AA02-DFA0A04FC94B}">
-              <ma14:wrappingTextBoxFlag xmlns:ma14="http://schemas.microsoft.com/office/mac/drawingml/2011/main" val="1"/>
+              <ma14:wrappingTextBoxFlag xmlns:ma14="http://schemas.microsoft.com/office/mac/drawingml/2011/main" xmlns:a14="http://schemas.microsoft.com/office/drawing/2010/main" xmlns:m="http://schemas.openxmlformats.org/officeDocument/2006/math" xmlns="" val="1"/>
             </a:ext>
           </a:extLst>
         </p:spPr>
@@ -11471,13 +11593,11 @@
           </a:bodyPr>
           <a:lstStyle/>
           <a:p>
-            <a:pPr/>
             <a:r>
               <a:t>Animal a = new Dog();</a:t>
             </a:r>
           </a:p>
           <a:p>
-            <a:pPr/>
             <a:r>
               <a:t>Cat c = (Cat) a;   // Runtime Error</a:t>
             </a:r>
@@ -11489,12 +11609,12 @@
   <p:clrMapOvr>
     <a:masterClrMapping/>
   </p:clrMapOvr>
-  <p:transition xmlns:p14="http://schemas.microsoft.com/office/powerpoint/2010/main" spd="med" advClick="1"/>
+  <p:transition spd="med"/>
 </p:sld>
 </file>
 
 <file path=ppt/slides/slide25.xml><?xml version="1.0" encoding="utf-8"?>
-<p:sld xmlns:a="http://schemas.openxmlformats.org/drawingml/2006/main" xmlns:r="http://schemas.openxmlformats.org/officeDocument/2006/relationships" xmlns:p="http://schemas.openxmlformats.org/presentationml/2006/main" xmlns:m="http://schemas.openxmlformats.org/officeDocument/2006/math" xmlns:a14="http://schemas.microsoft.com/office/drawing/2010/main" showMasterSp="1" showMasterPhAnim="1">
+<p:sld xmlns:a="http://schemas.openxmlformats.org/drawingml/2006/main" xmlns:r="http://schemas.openxmlformats.org/officeDocument/2006/relationships" xmlns:p="http://schemas.openxmlformats.org/presentationml/2006/main">
   <p:cSld>
     <p:spTree>
       <p:nvGrpSpPr>
@@ -11558,7 +11678,7 @@
           </a:ln>
           <a:extLst>
             <a:ext uri="{C572A759-6A51-4108-AA02-DFA0A04FC94B}">
-              <ma14:wrappingTextBoxFlag xmlns:ma14="http://schemas.microsoft.com/office/mac/drawingml/2011/main" val="1"/>
+              <ma14:wrappingTextBoxFlag xmlns:ma14="http://schemas.microsoft.com/office/mac/drawingml/2011/main" xmlns:a14="http://schemas.microsoft.com/office/drawing/2010/main" xmlns:m="http://schemas.openxmlformats.org/officeDocument/2006/math" xmlns="" val="1"/>
             </a:ext>
           </a:extLst>
         </p:spPr>
@@ -11580,7 +11700,6 @@
             </a:lvl1pPr>
           </a:lstStyle>
           <a:p>
-            <a:pPr/>
             <a:r>
               <a:t>How instanceof Prevents This Error</a:t>
             </a:r>
@@ -11606,7 +11725,7 @@
           </a:ln>
           <a:extLst>
             <a:ext uri="{C572A759-6A51-4108-AA02-DFA0A04FC94B}">
-              <ma14:wrappingTextBoxFlag xmlns:ma14="http://schemas.microsoft.com/office/mac/drawingml/2011/main" val="1"/>
+              <ma14:wrappingTextBoxFlag xmlns:ma14="http://schemas.microsoft.com/office/mac/drawingml/2011/main" xmlns:a14="http://schemas.microsoft.com/office/drawing/2010/main" xmlns:m="http://schemas.openxmlformats.org/officeDocument/2006/math" xmlns="" val="1"/>
             </a:ext>
           </a:extLst>
         </p:spPr>
@@ -11616,19 +11735,16 @@
           </a:bodyPr>
           <a:lstStyle/>
           <a:p>
-            <a:pPr/>
             <a:r>
               <a:t>if (a instanceof Cat) {</a:t>
             </a:r>
           </a:p>
           <a:p>
-            <a:pPr/>
             <a:r>
               <a:t>    Cat c = (Cat) a;</a:t>
             </a:r>
           </a:p>
           <a:p>
-            <a:pPr/>
             <a:r>
               <a:t>}</a:t>
             </a:r>
@@ -11654,7 +11770,7 @@
           </a:ln>
           <a:extLst>
             <a:ext uri="{C572A759-6A51-4108-AA02-DFA0A04FC94B}">
-              <ma14:wrappingTextBoxFlag xmlns:ma14="http://schemas.microsoft.com/office/mac/drawingml/2011/main" val="1"/>
+              <ma14:wrappingTextBoxFlag xmlns:ma14="http://schemas.microsoft.com/office/mac/drawingml/2011/main" xmlns:a14="http://schemas.microsoft.com/office/drawing/2010/main" xmlns:m="http://schemas.openxmlformats.org/officeDocument/2006/math" xmlns="" val="1"/>
             </a:ext>
           </a:extLst>
         </p:spPr>
@@ -11741,7 +11857,7 @@
           </a:ln>
           <a:extLst>
             <a:ext uri="{C572A759-6A51-4108-AA02-DFA0A04FC94B}">
-              <ma14:wrappingTextBoxFlag xmlns:ma14="http://schemas.microsoft.com/office/mac/drawingml/2011/main" val="1"/>
+              <ma14:wrappingTextBoxFlag xmlns:ma14="http://schemas.microsoft.com/office/mac/drawingml/2011/main" xmlns:a14="http://schemas.microsoft.com/office/drawing/2010/main" xmlns:m="http://schemas.openxmlformats.org/officeDocument/2006/math" xmlns="" val="1"/>
             </a:ext>
           </a:extLst>
         </p:spPr>
@@ -11844,7 +11960,7 @@
           </a:ln>
           <a:extLst>
             <a:ext uri="{C572A759-6A51-4108-AA02-DFA0A04FC94B}">
-              <ma14:wrappingTextBoxFlag xmlns:ma14="http://schemas.microsoft.com/office/mac/drawingml/2011/main" val="1"/>
+              <ma14:wrappingTextBoxFlag xmlns:ma14="http://schemas.microsoft.com/office/mac/drawingml/2011/main" xmlns:a14="http://schemas.microsoft.com/office/drawing/2010/main" xmlns:m="http://schemas.openxmlformats.org/officeDocument/2006/math" xmlns="" val="1"/>
             </a:ext>
           </a:extLst>
         </p:spPr>
@@ -11863,7 +11979,6 @@
             </a:lvl1pPr>
           </a:lstStyle>
           <a:p>
-            <a:pPr/>
             <a:r>
               <a:t>instanceof ensures that type conversion is valid before performing explicit casting.</a:t>
             </a:r>
@@ -11875,12 +11990,12 @@
   <p:clrMapOvr>
     <a:masterClrMapping/>
   </p:clrMapOvr>
-  <p:transition xmlns:p14="http://schemas.microsoft.com/office/powerpoint/2010/main" spd="med" advClick="1"/>
+  <p:transition spd="med"/>
 </p:sld>
 </file>
 
 <file path=ppt/slides/slide26.xml><?xml version="1.0" encoding="utf-8"?>
-<p:sld xmlns:a="http://schemas.openxmlformats.org/drawingml/2006/main" xmlns:r="http://schemas.openxmlformats.org/officeDocument/2006/relationships" xmlns:p="http://schemas.openxmlformats.org/presentationml/2006/main" xmlns:m="http://schemas.openxmlformats.org/officeDocument/2006/math" xmlns:a14="http://schemas.microsoft.com/office/drawing/2010/main" showMasterSp="1" showMasterPhAnim="1">
+<p:sld xmlns:a="http://schemas.openxmlformats.org/drawingml/2006/main" xmlns:r="http://schemas.openxmlformats.org/officeDocument/2006/relationships" xmlns:p="http://schemas.openxmlformats.org/presentationml/2006/main">
   <p:cSld>
     <p:spTree>
       <p:nvGrpSpPr>
@@ -11944,7 +12059,7 @@
           </a:ln>
           <a:extLst>
             <a:ext uri="{C572A759-6A51-4108-AA02-DFA0A04FC94B}">
-              <ma14:wrappingTextBoxFlag xmlns:ma14="http://schemas.microsoft.com/office/mac/drawingml/2011/main" val="1"/>
+              <ma14:wrappingTextBoxFlag xmlns:ma14="http://schemas.microsoft.com/office/mac/drawingml/2011/main" xmlns:a14="http://schemas.microsoft.com/office/drawing/2010/main" xmlns:m="http://schemas.openxmlformats.org/officeDocument/2006/math" xmlns="" val="1"/>
             </a:ext>
           </a:extLst>
         </p:spPr>
@@ -11965,13 +12080,14 @@
                 <a:sym typeface="Times New Roman"/>
               </a:defRPr>
             </a:pPr>
+            <a:endParaRPr/>
           </a:p>
           <a:p>
             <a:pPr defTabSz="457200">
               <a:spcBef>
                 <a:spcPts val="1400"/>
               </a:spcBef>
-              <a:defRPr b="1" sz="1800">
+              <a:defRPr sz="1800" b="1">
                 <a:latin typeface="Times New Roman"/>
                 <a:ea typeface="Times New Roman"/>
                 <a:cs typeface="Times New Roman"/>
@@ -11994,6 +12110,7 @@
                 <a:sym typeface="Times New Roman"/>
               </a:defRPr>
             </a:pPr>
+            <a:endParaRPr/>
           </a:p>
         </p:txBody>
       </p:sp>
@@ -12016,7 +12133,7 @@
           </a:ln>
           <a:extLst>
             <a:ext uri="{C572A759-6A51-4108-AA02-DFA0A04FC94B}">
-              <ma14:wrappingTextBoxFlag xmlns:ma14="http://schemas.microsoft.com/office/mac/drawingml/2011/main" val="1"/>
+              <ma14:wrappingTextBoxFlag xmlns:ma14="http://schemas.microsoft.com/office/mac/drawingml/2011/main" xmlns:a14="http://schemas.microsoft.com/office/drawing/2010/main" xmlns:m="http://schemas.openxmlformats.org/officeDocument/2006/math" xmlns="" val="1"/>
             </a:ext>
           </a:extLst>
         </p:spPr>
@@ -12038,7 +12155,6 @@
             </a:lvl1pPr>
           </a:lstStyle>
           <a:p>
-            <a:pPr/>
             <a:r>
               <a:t>The statement System.out.println() appears simple, but it is actually a chain of class, object, and method references working together.</a:t>
             </a:r>
@@ -12064,7 +12180,7 @@
           </a:ln>
           <a:extLst>
             <a:ext uri="{C572A759-6A51-4108-AA02-DFA0A04FC94B}">
-              <ma14:wrappingTextBoxFlag xmlns:ma14="http://schemas.microsoft.com/office/mac/drawingml/2011/main" val="1"/>
+              <ma14:wrappingTextBoxFlag xmlns:ma14="http://schemas.microsoft.com/office/mac/drawingml/2011/main" xmlns:a14="http://schemas.microsoft.com/office/drawing/2010/main" xmlns:m="http://schemas.openxmlformats.org/officeDocument/2006/math" xmlns="" val="1"/>
             </a:ext>
           </a:extLst>
         </p:spPr>
@@ -12074,7 +12190,6 @@
           </a:bodyPr>
           <a:lstStyle/>
           <a:p>
-            <a:pPr/>
             <a:r>
               <a:t>System.out.println("Hello Java");</a:t>
             </a:r>
@@ -12089,18 +12204,36 @@
         </p:nvGraphicFramePr>
         <p:xfrm>
           <a:off x="3187494" y="1502919"/>
-          <a:ext cx="5083713" cy="1504579"/>
+          <a:ext cx="5071011" cy="1016000"/>
         </p:xfrm>
-        <a:graphic xmlns:a="http://schemas.openxmlformats.org/drawingml/2006/main">
+        <a:graphic>
           <a:graphicData uri="http://schemas.openxmlformats.org/drawingml/2006/table">
             <a:tbl>
-              <a:tblPr firstCol="0" firstRow="0" lastCol="0" lastRow="0" bandCol="0" bandRow="1" rtl="0">
+              <a:tblPr bandRow="1">
                 <a:tableStyleId>{4C3C2611-4C71-4FC5-86AE-919BDF0F9419}</a:tableStyleId>
               </a:tblPr>
               <a:tblGrid>
-                <a:gridCol w="1027742"/>
-                <a:gridCol w="1065263"/>
-                <a:gridCol w="2978006"/>
+                <a:gridCol w="1027742">
+                  <a:extLst>
+                    <a:ext uri="{9D8B030D-6E8A-4147-A177-3AD203B41FA5}">
+                      <a16:colId xmlns:a16="http://schemas.microsoft.com/office/drawing/2014/main" val="20000"/>
+                    </a:ext>
+                  </a:extLst>
+                </a:gridCol>
+                <a:gridCol w="1065263">
+                  <a:extLst>
+                    <a:ext uri="{9D8B030D-6E8A-4147-A177-3AD203B41FA5}">
+                      <a16:colId xmlns:a16="http://schemas.microsoft.com/office/drawing/2014/main" val="20001"/>
+                    </a:ext>
+                  </a:extLst>
+                </a:gridCol>
+                <a:gridCol w="2978006">
+                  <a:extLst>
+                    <a:ext uri="{9D8B030D-6E8A-4147-A177-3AD203B41FA5}">
+                      <a16:colId xmlns:a16="http://schemas.microsoft.com/office/drawing/2014/main" val="20002"/>
+                    </a:ext>
+                  </a:extLst>
+                </a:gridCol>
               </a:tblGrid>
               <a:tr h="254000">
                 <a:tc>
@@ -12115,7 +12248,7 @@
                         <a:defRPr sz="1800"/>
                       </a:pPr>
                       <a:r>
-                        <a:rPr b="1" sz="1200">
+                        <a:rPr sz="1200" b="1">
                           <a:latin typeface="Times New Roman"/>
                           <a:ea typeface="Times New Roman"/>
                           <a:cs typeface="Times New Roman"/>
@@ -12125,7 +12258,7 @@
                       </a:r>
                     </a:p>
                   </a:txBody>
-                  <a:tcPr marL="12700" marR="12700" marT="12700" marB="12700" anchor="ctr" anchorCtr="0" horzOverflow="overflow"/>
+                  <a:tcPr marL="12700" marR="12700" marT="12700" marB="12700" anchor="ctr" horzOverflow="overflow"/>
                 </a:tc>
                 <a:tc>
                   <a:txBody>
@@ -12139,7 +12272,7 @@
                         <a:defRPr sz="1800"/>
                       </a:pPr>
                       <a:r>
-                        <a:rPr b="1" sz="1200">
+                        <a:rPr sz="1200" b="1">
                           <a:latin typeface="Times New Roman"/>
                           <a:ea typeface="Times New Roman"/>
                           <a:cs typeface="Times New Roman"/>
@@ -12149,7 +12282,7 @@
                       </a:r>
                     </a:p>
                   </a:txBody>
-                  <a:tcPr marL="12700" marR="12700" marT="12700" marB="12700" anchor="ctr" anchorCtr="0" horzOverflow="overflow"/>
+                  <a:tcPr marL="12700" marR="12700" marT="12700" marB="12700" anchor="ctr" horzOverflow="overflow"/>
                 </a:tc>
                 <a:tc>
                   <a:txBody>
@@ -12163,7 +12296,7 @@
                         <a:defRPr sz="1800"/>
                       </a:pPr>
                       <a:r>
-                        <a:rPr b="1" sz="1200">
+                        <a:rPr sz="1200" b="1">
                           <a:latin typeface="Times New Roman"/>
                           <a:ea typeface="Times New Roman"/>
                           <a:cs typeface="Times New Roman"/>
@@ -12173,8 +12306,13 @@
                       </a:r>
                     </a:p>
                   </a:txBody>
-                  <a:tcPr marL="12700" marR="12700" marT="12700" marB="12700" anchor="ctr" anchorCtr="0" horzOverflow="overflow"/>
+                  <a:tcPr marL="12700" marR="12700" marT="12700" marB="12700" anchor="ctr" horzOverflow="overflow"/>
                 </a:tc>
+                <a:extLst>
+                  <a:ext uri="{0D108BD9-81ED-4DB2-BD59-A6C34878D82A}">
+                    <a16:rowId xmlns:a16="http://schemas.microsoft.com/office/drawing/2014/main" val="10000"/>
+                  </a:ext>
+                </a:extLst>
               </a:tr>
               <a:tr h="254000">
                 <a:tc>
@@ -12199,7 +12337,7 @@
                       </a:r>
                     </a:p>
                   </a:txBody>
-                  <a:tcPr marL="12700" marR="12700" marT="12700" marB="12700" anchor="ctr" anchorCtr="0" horzOverflow="overflow"/>
+                  <a:tcPr marL="12700" marR="12700" marT="12700" marB="12700" anchor="ctr" horzOverflow="overflow"/>
                 </a:tc>
                 <a:tc>
                   <a:txBody>
@@ -12223,7 +12361,7 @@
                       </a:r>
                     </a:p>
                   </a:txBody>
-                  <a:tcPr marL="12700" marR="12700" marT="12700" marB="12700" anchor="ctr" anchorCtr="0" horzOverflow="overflow"/>
+                  <a:tcPr marL="12700" marR="12700" marT="12700" marB="12700" anchor="ctr" horzOverflow="overflow"/>
                 </a:tc>
                 <a:tc>
                   <a:txBody>
@@ -12247,8 +12385,13 @@
                       </a:r>
                     </a:p>
                   </a:txBody>
-                  <a:tcPr marL="12700" marR="12700" marT="12700" marB="12700" anchor="ctr" anchorCtr="0" horzOverflow="overflow"/>
+                  <a:tcPr marL="12700" marR="12700" marT="12700" marB="12700" anchor="ctr" horzOverflow="overflow"/>
                 </a:tc>
+                <a:extLst>
+                  <a:ext uri="{0D108BD9-81ED-4DB2-BD59-A6C34878D82A}">
+                    <a16:rowId xmlns:a16="http://schemas.microsoft.com/office/drawing/2014/main" val="10001"/>
+                  </a:ext>
+                </a:extLst>
               </a:tr>
               <a:tr h="254000">
                 <a:tc>
@@ -12273,7 +12416,7 @@
                       </a:r>
                     </a:p>
                   </a:txBody>
-                  <a:tcPr marL="12700" marR="12700" marT="12700" marB="12700" anchor="ctr" anchorCtr="0" horzOverflow="overflow"/>
+                  <a:tcPr marL="12700" marR="12700" marT="12700" marB="12700" anchor="ctr" horzOverflow="overflow"/>
                 </a:tc>
                 <a:tc>
                   <a:txBody>
@@ -12297,7 +12440,7 @@
                       </a:r>
                     </a:p>
                   </a:txBody>
-                  <a:tcPr marL="12700" marR="12700" marT="12700" marB="12700" anchor="ctr" anchorCtr="0" horzOverflow="overflow"/>
+                  <a:tcPr marL="12700" marR="12700" marT="12700" marB="12700" anchor="ctr" horzOverflow="overflow"/>
                 </a:tc>
                 <a:tc>
                   <a:txBody>
@@ -12321,8 +12464,13 @@
                       </a:r>
                     </a:p>
                   </a:txBody>
-                  <a:tcPr marL="12700" marR="12700" marT="12700" marB="12700" anchor="ctr" anchorCtr="0" horzOverflow="overflow"/>
+                  <a:tcPr marL="12700" marR="12700" marT="12700" marB="12700" anchor="ctr" horzOverflow="overflow"/>
                 </a:tc>
+                <a:extLst>
+                  <a:ext uri="{0D108BD9-81ED-4DB2-BD59-A6C34878D82A}">
+                    <a16:rowId xmlns:a16="http://schemas.microsoft.com/office/drawing/2014/main" val="10002"/>
+                  </a:ext>
+                </a:extLst>
               </a:tr>
               <a:tr h="254000">
                 <a:tc>
@@ -12347,7 +12495,7 @@
                       </a:r>
                     </a:p>
                   </a:txBody>
-                  <a:tcPr marL="12700" marR="12700" marT="12700" marB="12700" anchor="ctr" anchorCtr="0" horzOverflow="overflow"/>
+                  <a:tcPr marL="12700" marR="12700" marT="12700" marB="12700" anchor="ctr" horzOverflow="overflow"/>
                 </a:tc>
                 <a:tc>
                   <a:txBody>
@@ -12371,7 +12519,7 @@
                       </a:r>
                     </a:p>
                   </a:txBody>
-                  <a:tcPr marL="12700" marR="12700" marT="12700" marB="12700" anchor="ctr" anchorCtr="0" horzOverflow="overflow"/>
+                  <a:tcPr marL="12700" marR="12700" marT="12700" marB="12700" anchor="ctr" horzOverflow="overflow"/>
                 </a:tc>
                 <a:tc>
                   <a:txBody>
@@ -12395,8 +12543,13 @@
                       </a:r>
                     </a:p>
                   </a:txBody>
-                  <a:tcPr marL="12700" marR="12700" marT="12700" marB="12700" anchor="ctr" anchorCtr="0" horzOverflow="overflow"/>
+                  <a:tcPr marL="12700" marR="12700" marT="12700" marB="12700" anchor="ctr" horzOverflow="overflow"/>
                 </a:tc>
+                <a:extLst>
+                  <a:ext uri="{0D108BD9-81ED-4DB2-BD59-A6C34878D82A}">
+                    <a16:rowId xmlns:a16="http://schemas.microsoft.com/office/drawing/2014/main" val="10003"/>
+                  </a:ext>
+                </a:extLst>
               </a:tr>
             </a:tbl>
           </a:graphicData>
@@ -12421,7 +12574,7 @@
           </a:ln>
           <a:extLst>
             <a:ext uri="{C572A759-6A51-4108-AA02-DFA0A04FC94B}">
-              <ma14:wrappingTextBoxFlag xmlns:ma14="http://schemas.microsoft.com/office/mac/drawingml/2011/main" val="1"/>
+              <ma14:wrappingTextBoxFlag xmlns:ma14="http://schemas.microsoft.com/office/mac/drawingml/2011/main" xmlns:a14="http://schemas.microsoft.com/office/drawing/2010/main" xmlns:m="http://schemas.openxmlformats.org/officeDocument/2006/math" xmlns="" val="1"/>
             </a:ext>
           </a:extLst>
         </p:spPr>
@@ -12472,7 +12625,7 @@
             </a:r>
           </a:p>
           <a:p>
-            <a:pPr lvl="1" marL="914400" indent="-317500" defTabSz="457200">
+            <a:pPr marL="914400" lvl="1" indent="-317500" defTabSz="457200">
               <a:lnSpc>
                 <a:spcPct val="25000"/>
               </a:lnSpc>
@@ -12494,7 +12647,7 @@
             </a:r>
           </a:p>
           <a:p>
-            <a:pPr lvl="1" marL="914400" indent="-317500" defTabSz="457200">
+            <a:pPr marL="914400" lvl="1" indent="-317500" defTabSz="457200">
               <a:lnSpc>
                 <a:spcPct val="25000"/>
               </a:lnSpc>
@@ -12538,7 +12691,7 @@
             </a:r>
           </a:p>
           <a:p>
-            <a:pPr lvl="1" marL="914400" indent="-317500" defTabSz="457200">
+            <a:pPr marL="914400" lvl="1" indent="-317500" defTabSz="457200">
               <a:lnSpc>
                 <a:spcPct val="25000"/>
               </a:lnSpc>
@@ -12560,7 +12713,7 @@
             </a:r>
           </a:p>
           <a:p>
-            <a:pPr lvl="1" marL="914400" indent="-317500" defTabSz="457200">
+            <a:pPr marL="914400" lvl="1" indent="-317500" defTabSz="457200">
               <a:lnSpc>
                 <a:spcPct val="25000"/>
               </a:lnSpc>
@@ -12588,12 +12741,12 @@
   <p:clrMapOvr>
     <a:masterClrMapping/>
   </p:clrMapOvr>
-  <p:transition xmlns:p14="http://schemas.microsoft.com/office/powerpoint/2010/main" spd="med" advClick="1"/>
+  <p:transition spd="med"/>
 </p:sld>
 </file>
 
 <file path=ppt/slides/slide27.xml><?xml version="1.0" encoding="utf-8"?>
-<p:sld xmlns:a="http://schemas.openxmlformats.org/drawingml/2006/main" xmlns:r="http://schemas.openxmlformats.org/officeDocument/2006/relationships" xmlns:p="http://schemas.openxmlformats.org/presentationml/2006/main" xmlns:m="http://schemas.openxmlformats.org/officeDocument/2006/math" xmlns:a14="http://schemas.microsoft.com/office/drawing/2010/main" showMasterSp="1" showMasterPhAnim="1">
+<p:sld xmlns:a="http://schemas.openxmlformats.org/drawingml/2006/main" xmlns:r="http://schemas.openxmlformats.org/officeDocument/2006/relationships" xmlns:p="http://schemas.openxmlformats.org/presentationml/2006/main">
   <p:cSld>
     <p:spTree>
       <p:nvGrpSpPr>
@@ -12657,7 +12810,7 @@
           </a:ln>
           <a:extLst>
             <a:ext uri="{C572A759-6A51-4108-AA02-DFA0A04FC94B}">
-              <ma14:wrappingTextBoxFlag xmlns:ma14="http://schemas.microsoft.com/office/mac/drawingml/2011/main" val="1"/>
+              <ma14:wrappingTextBoxFlag xmlns:ma14="http://schemas.microsoft.com/office/mac/drawingml/2011/main" xmlns:a14="http://schemas.microsoft.com/office/drawing/2010/main" xmlns:m="http://schemas.openxmlformats.org/officeDocument/2006/math" xmlns="" val="1"/>
             </a:ext>
           </a:extLst>
         </p:spPr>
@@ -12671,7 +12824,6 @@
             </a:lvl1pPr>
           </a:lstStyle>
           <a:p>
-            <a:pPr/>
             <a:r>
               <a:t>public static final PrintStream out;</a:t>
             </a:r>
@@ -12697,7 +12849,7 @@
           </a:ln>
           <a:extLst>
             <a:ext uri="{C572A759-6A51-4108-AA02-DFA0A04FC94B}">
-              <ma14:wrappingTextBoxFlag xmlns:ma14="http://schemas.microsoft.com/office/mac/drawingml/2011/main" val="1"/>
+              <ma14:wrappingTextBoxFlag xmlns:ma14="http://schemas.microsoft.com/office/mac/drawingml/2011/main" xmlns:a14="http://schemas.microsoft.com/office/drawing/2010/main" xmlns:m="http://schemas.openxmlformats.org/officeDocument/2006/math" xmlns="" val="1"/>
             </a:ext>
           </a:extLst>
         </p:spPr>
@@ -12718,13 +12870,14 @@
                 <a:sym typeface="Times New Roman"/>
               </a:defRPr>
             </a:pPr>
+            <a:endParaRPr/>
           </a:p>
           <a:p>
             <a:pPr defTabSz="457200">
               <a:spcBef>
                 <a:spcPts val="1400"/>
               </a:spcBef>
-              <a:defRPr b="1" sz="1800">
+              <a:defRPr sz="1800" b="1">
                 <a:latin typeface="Times New Roman"/>
                 <a:ea typeface="Times New Roman"/>
                 <a:cs typeface="Times New Roman"/>
@@ -12747,6 +12900,7 @@
                 <a:sym typeface="Times New Roman"/>
               </a:defRPr>
             </a:pPr>
+            <a:endParaRPr/>
           </a:p>
         </p:txBody>
       </p:sp>
@@ -12769,7 +12923,7 @@
           </a:ln>
           <a:extLst>
             <a:ext uri="{C572A759-6A51-4108-AA02-DFA0A04FC94B}">
-              <ma14:wrappingTextBoxFlag xmlns:ma14="http://schemas.microsoft.com/office/mac/drawingml/2011/main" val="1"/>
+              <ma14:wrappingTextBoxFlag xmlns:ma14="http://schemas.microsoft.com/office/mac/drawingml/2011/main" xmlns:a14="http://schemas.microsoft.com/office/drawing/2010/main" xmlns:m="http://schemas.openxmlformats.org/officeDocument/2006/math" xmlns="" val="1"/>
             </a:ext>
           </a:extLst>
         </p:spPr>
@@ -12779,7 +12933,7 @@
           </a:bodyPr>
           <a:lstStyle/>
           <a:p>
-            <a:pPr lvl="1" marL="914400" indent="-317500" defTabSz="457200">
+            <a:pPr marL="914400" lvl="1" indent="-317500" defTabSz="457200">
               <a:lnSpc>
                 <a:spcPct val="50000"/>
               </a:lnSpc>
@@ -12823,7 +12977,7 @@
             </a:r>
           </a:p>
           <a:p>
-            <a:pPr lvl="1" marL="914400" indent="-317500" defTabSz="457200">
+            <a:pPr marL="914400" lvl="1" indent="-317500" defTabSz="457200">
               <a:lnSpc>
                 <a:spcPct val="50000"/>
               </a:lnSpc>
@@ -12845,7 +12999,7 @@
             </a:r>
           </a:p>
           <a:p>
-            <a:pPr lvl="1" marL="914400" indent="-317500" defTabSz="457200">
+            <a:pPr marL="914400" lvl="1" indent="-317500" defTabSz="457200">
               <a:lnSpc>
                 <a:spcPct val="50000"/>
               </a:lnSpc>
@@ -12895,7 +13049,7 @@
               </a:spcBef>
               <a:buSzPct val="100000"/>
               <a:buFont typeface="Times New Roman"/>
-              <a:buAutoNum type="arabicPeriod" startAt="1"/>
+              <a:buAutoNum type="arabicPeriod"/>
               <a:defRPr sz="1200">
                 <a:latin typeface="Times New Roman"/>
                 <a:ea typeface="Times New Roman"/>
@@ -12917,7 +13071,7 @@
               </a:spcBef>
               <a:buSzPct val="100000"/>
               <a:buFont typeface="Times New Roman"/>
-              <a:buAutoNum type="arabicPeriod" startAt="1"/>
+              <a:buAutoNum type="arabicPeriod"/>
               <a:defRPr sz="1200">
                 <a:latin typeface="Times New Roman"/>
                 <a:ea typeface="Times New Roman"/>
@@ -12939,7 +13093,7 @@
               </a:spcBef>
               <a:buSzPct val="100000"/>
               <a:buFont typeface="Times New Roman"/>
-              <a:buAutoNum type="arabicPeriod" startAt="1"/>
+              <a:buAutoNum type="arabicPeriod"/>
               <a:defRPr sz="1200">
                 <a:latin typeface="Times New Roman"/>
                 <a:ea typeface="Times New Roman"/>
@@ -12961,7 +13115,7 @@
               </a:spcBef>
               <a:buSzPct val="100000"/>
               <a:buFont typeface="Times New Roman"/>
-              <a:buAutoNum type="arabicPeriod" startAt="1"/>
+              <a:buAutoNum type="arabicPeriod"/>
               <a:defRPr sz="1200">
                 <a:latin typeface="Times New Roman"/>
                 <a:ea typeface="Times New Roman"/>
@@ -12994,7 +13148,7 @@
           </a:ln>
           <a:extLst>
             <a:ext uri="{C572A759-6A51-4108-AA02-DFA0A04FC94B}">
-              <ma14:wrappingTextBoxFlag xmlns:ma14="http://schemas.microsoft.com/office/mac/drawingml/2011/main" val="1"/>
+              <ma14:wrappingTextBoxFlag xmlns:ma14="http://schemas.microsoft.com/office/mac/drawingml/2011/main" xmlns:a14="http://schemas.microsoft.com/office/drawing/2010/main" xmlns:m="http://schemas.openxmlformats.org/officeDocument/2006/math" xmlns="" val="1"/>
             </a:ext>
           </a:extLst>
         </p:spPr>
@@ -13013,7 +13167,6 @@
             </a:lvl1pPr>
           </a:lstStyle>
           <a:p>
-            <a:pPr/>
             <a:r>
               <a:t>System.out.println() is a method call on a static object defined inside a predefined class.</a:t>
             </a:r>
@@ -13025,12 +13178,12 @@
   <p:clrMapOvr>
     <a:masterClrMapping/>
   </p:clrMapOvr>
-  <p:transition xmlns:p14="http://schemas.microsoft.com/office/powerpoint/2010/main" spd="med" advClick="1"/>
+  <p:transition spd="med"/>
 </p:sld>
 </file>
 
 <file path=ppt/slides/slide28.xml><?xml version="1.0" encoding="utf-8"?>
-<p:sld xmlns:a="http://schemas.openxmlformats.org/drawingml/2006/main" xmlns:r="http://schemas.openxmlformats.org/officeDocument/2006/relationships" xmlns:p="http://schemas.openxmlformats.org/presentationml/2006/main" xmlns:m="http://schemas.openxmlformats.org/officeDocument/2006/math" xmlns:a14="http://schemas.microsoft.com/office/drawing/2010/main" showMasterSp="1" showMasterPhAnim="1">
+<p:sld xmlns:a="http://schemas.openxmlformats.org/drawingml/2006/main" xmlns:r="http://schemas.openxmlformats.org/officeDocument/2006/relationships" xmlns:p="http://schemas.openxmlformats.org/presentationml/2006/main">
   <p:cSld>
     <p:spTree>
       <p:nvGrpSpPr>
@@ -13094,7 +13247,7 @@
           </a:ln>
           <a:extLst>
             <a:ext uri="{C572A759-6A51-4108-AA02-DFA0A04FC94B}">
-              <ma14:wrappingTextBoxFlag xmlns:ma14="http://schemas.microsoft.com/office/mac/drawingml/2011/main" val="1"/>
+              <ma14:wrappingTextBoxFlag xmlns:ma14="http://schemas.microsoft.com/office/mac/drawingml/2011/main" xmlns:a14="http://schemas.microsoft.com/office/drawing/2010/main" xmlns:m="http://schemas.openxmlformats.org/officeDocument/2006/math" xmlns="" val="1"/>
             </a:ext>
           </a:extLst>
         </p:spPr>
@@ -13115,13 +13268,14 @@
                 <a:sym typeface="Times New Roman"/>
               </a:defRPr>
             </a:pPr>
+            <a:endParaRPr/>
           </a:p>
           <a:p>
             <a:pPr defTabSz="457200">
               <a:spcBef>
                 <a:spcPts val="1400"/>
               </a:spcBef>
-              <a:defRPr b="1" sz="1800">
+              <a:defRPr sz="1800" b="1">
                 <a:latin typeface="Times New Roman"/>
                 <a:ea typeface="Times New Roman"/>
                 <a:cs typeface="Times New Roman"/>
@@ -13144,6 +13298,7 @@
                 <a:sym typeface="Times New Roman"/>
               </a:defRPr>
             </a:pPr>
+            <a:endParaRPr/>
           </a:p>
         </p:txBody>
       </p:sp>
@@ -13166,7 +13321,7 @@
           </a:ln>
           <a:extLst>
             <a:ext uri="{C572A759-6A51-4108-AA02-DFA0A04FC94B}">
-              <ma14:wrappingTextBoxFlag xmlns:ma14="http://schemas.microsoft.com/office/mac/drawingml/2011/main" val="1"/>
+              <ma14:wrappingTextBoxFlag xmlns:ma14="http://schemas.microsoft.com/office/mac/drawingml/2011/main" xmlns:a14="http://schemas.microsoft.com/office/drawing/2010/main" xmlns:m="http://schemas.openxmlformats.org/officeDocument/2006/math" xmlns="" val="1"/>
             </a:ext>
           </a:extLst>
         </p:spPr>
@@ -13183,7 +13338,7 @@
               <a:spcBef>
                 <a:spcPts val="1400"/>
               </a:spcBef>
-              <a:defRPr b="1" sz="1800">
+              <a:defRPr sz="1800" b="1">
                 <a:latin typeface="Times New Roman"/>
                 <a:ea typeface="Times New Roman"/>
                 <a:cs typeface="Times New Roman"/>
@@ -13221,7 +13376,7 @@
               <a:spcBef>
                 <a:spcPts val="1400"/>
               </a:spcBef>
-              <a:defRPr b="1" sz="1800">
+              <a:defRPr sz="1800" b="1">
                 <a:latin typeface="Times New Roman"/>
                 <a:ea typeface="Times New Roman"/>
                 <a:cs typeface="Times New Roman"/>
@@ -13306,7 +13461,7 @@
               <a:spcBef>
                 <a:spcPts val="1400"/>
               </a:spcBef>
-              <a:defRPr b="1" sz="1800">
+              <a:defRPr sz="1800" b="1">
                 <a:latin typeface="Times New Roman"/>
                 <a:ea typeface="Times New Roman"/>
                 <a:cs typeface="Times New Roman"/>
@@ -13413,7 +13568,7 @@
               <a:spcBef>
                 <a:spcPts val="1400"/>
               </a:spcBef>
-              <a:defRPr b="1" sz="1800">
+              <a:defRPr sz="1800" b="1">
                 <a:latin typeface="Times New Roman"/>
                 <a:ea typeface="Times New Roman"/>
                 <a:cs typeface="Times New Roman"/>
@@ -13519,12 +13674,12 @@
   <p:clrMapOvr>
     <a:masterClrMapping/>
   </p:clrMapOvr>
-  <p:transition xmlns:p14="http://schemas.microsoft.com/office/powerpoint/2010/main" spd="med" advClick="1"/>
+  <p:transition spd="med"/>
 </p:sld>
 </file>
 
 <file path=ppt/slides/slide29.xml><?xml version="1.0" encoding="utf-8"?>
-<p:sld xmlns:a="http://schemas.openxmlformats.org/drawingml/2006/main" xmlns:r="http://schemas.openxmlformats.org/officeDocument/2006/relationships" xmlns:p="http://schemas.openxmlformats.org/presentationml/2006/main" xmlns:m="http://schemas.openxmlformats.org/officeDocument/2006/math" xmlns:a14="http://schemas.microsoft.com/office/drawing/2010/main" showMasterSp="1" showMasterPhAnim="1">
+<p:sld xmlns:a="http://schemas.openxmlformats.org/drawingml/2006/main" xmlns:r="http://schemas.openxmlformats.org/officeDocument/2006/relationships" xmlns:p="http://schemas.openxmlformats.org/presentationml/2006/main">
   <p:cSld>
     <p:spTree>
       <p:nvGrpSpPr>
@@ -13588,7 +13743,7 @@
           </a:ln>
           <a:extLst>
             <a:ext uri="{C572A759-6A51-4108-AA02-DFA0A04FC94B}">
-              <ma14:wrappingTextBoxFlag xmlns:ma14="http://schemas.microsoft.com/office/mac/drawingml/2011/main" val="1"/>
+              <ma14:wrappingTextBoxFlag xmlns:ma14="http://schemas.microsoft.com/office/mac/drawingml/2011/main" xmlns:a14="http://schemas.microsoft.com/office/drawing/2010/main" xmlns:m="http://schemas.openxmlformats.org/officeDocument/2006/math" xmlns="" val="1"/>
             </a:ext>
           </a:extLst>
         </p:spPr>
@@ -13602,7 +13757,7 @@
               <a:spcBef>
                 <a:spcPts val="1400"/>
               </a:spcBef>
-              <a:defRPr b="1" sz="1800">
+              <a:defRPr sz="1800" b="1">
                 <a:latin typeface="Times New Roman"/>
                 <a:ea typeface="Times New Roman"/>
                 <a:cs typeface="Times New Roman"/>
@@ -13682,7 +13837,7 @@
               <a:spcBef>
                 <a:spcPts val="1400"/>
               </a:spcBef>
-              <a:defRPr b="1" sz="1800">
+              <a:defRPr sz="1800" b="1">
                 <a:latin typeface="Times New Roman"/>
                 <a:ea typeface="Times New Roman"/>
                 <a:cs typeface="Times New Roman"/>
@@ -13752,7 +13907,7 @@
               <a:spcBef>
                 <a:spcPts val="1400"/>
               </a:spcBef>
-              <a:defRPr b="1" sz="1800">
+              <a:defRPr sz="1800" b="1">
                 <a:latin typeface="Times New Roman"/>
                 <a:ea typeface="Times New Roman"/>
                 <a:cs typeface="Times New Roman"/>
@@ -13800,7 +13955,7 @@
           </a:ln>
           <a:extLst>
             <a:ext uri="{C572A759-6A51-4108-AA02-DFA0A04FC94B}">
-              <ma14:wrappingTextBoxFlag xmlns:ma14="http://schemas.microsoft.com/office/mac/drawingml/2011/main" val="1"/>
+              <ma14:wrappingTextBoxFlag xmlns:ma14="http://schemas.microsoft.com/office/mac/drawingml/2011/main" xmlns:a14="http://schemas.microsoft.com/office/drawing/2010/main" xmlns:m="http://schemas.openxmlformats.org/officeDocument/2006/math" xmlns="" val="1"/>
             </a:ext>
           </a:extLst>
         </p:spPr>
@@ -13821,13 +13976,14 @@
                 <a:sym typeface="Times New Roman"/>
               </a:defRPr>
             </a:pPr>
+            <a:endParaRPr/>
           </a:p>
           <a:p>
             <a:pPr defTabSz="457200">
               <a:spcBef>
                 <a:spcPts val="1400"/>
               </a:spcBef>
-              <a:defRPr b="1" sz="1800">
+              <a:defRPr sz="1800" b="1">
                 <a:latin typeface="Times New Roman"/>
                 <a:ea typeface="Times New Roman"/>
                 <a:cs typeface="Times New Roman"/>
@@ -13850,6 +14006,7 @@
                 <a:sym typeface="Times New Roman"/>
               </a:defRPr>
             </a:pPr>
+            <a:endParaRPr/>
           </a:p>
         </p:txBody>
       </p:sp>
@@ -13858,12 +14015,12 @@
   <p:clrMapOvr>
     <a:masterClrMapping/>
   </p:clrMapOvr>
-  <p:transition xmlns:p14="http://schemas.microsoft.com/office/powerpoint/2010/main" spd="med" advClick="1"/>
+  <p:transition spd="med"/>
 </p:sld>
 </file>
 
 <file path=ppt/slides/slide3.xml><?xml version="1.0" encoding="utf-8"?>
-<p:sld xmlns:a="http://schemas.openxmlformats.org/drawingml/2006/main" xmlns:r="http://schemas.openxmlformats.org/officeDocument/2006/relationships" xmlns:p="http://schemas.openxmlformats.org/presentationml/2006/main" xmlns:m="http://schemas.openxmlformats.org/officeDocument/2006/math" xmlns:a14="http://schemas.microsoft.com/office/drawing/2010/main" showMasterSp="1" showMasterPhAnim="1">
+<p:sld xmlns:a="http://schemas.openxmlformats.org/drawingml/2006/main" xmlns:r="http://schemas.openxmlformats.org/officeDocument/2006/relationships" xmlns:p="http://schemas.openxmlformats.org/presentationml/2006/main">
   <p:cSld>
     <p:spTree>
       <p:nvGrpSpPr>
@@ -13898,7 +14055,7 @@
           </a:ln>
           <a:extLst>
             <a:ext uri="{C572A759-6A51-4108-AA02-DFA0A04FC94B}">
-              <ma14:wrappingTextBoxFlag xmlns:ma14="http://schemas.microsoft.com/office/mac/drawingml/2011/main" val="1"/>
+              <ma14:wrappingTextBoxFlag xmlns:ma14="http://schemas.microsoft.com/office/mac/drawingml/2011/main" xmlns:a14="http://schemas.microsoft.com/office/drawing/2010/main" xmlns:m="http://schemas.openxmlformats.org/officeDocument/2006/math" xmlns="" val="1"/>
             </a:ext>
           </a:extLst>
         </p:spPr>
@@ -13908,11 +14065,10 @@
           </a:bodyPr>
           <a:lstStyle>
             <a:lvl1pPr>
-              <a:defRPr b="1" sz="2400"/>
+              <a:defRPr sz="2400" b="1"/>
             </a:lvl1pPr>
           </a:lstStyle>
           <a:p>
-            <a:pPr/>
             <a:r>
               <a:t>Why Interfaces Are Needed in Java</a:t>
             </a:r>
@@ -13938,7 +14094,7 @@
           </a:ln>
           <a:extLst>
             <a:ext uri="{C572A759-6A51-4108-AA02-DFA0A04FC94B}">
-              <ma14:wrappingTextBoxFlag xmlns:ma14="http://schemas.microsoft.com/office/mac/drawingml/2011/main" val="1"/>
+              <ma14:wrappingTextBoxFlag xmlns:ma14="http://schemas.microsoft.com/office/mac/drawingml/2011/main" xmlns:a14="http://schemas.microsoft.com/office/drawing/2010/main" xmlns:m="http://schemas.openxmlformats.org/officeDocument/2006/math" xmlns="" val="1"/>
             </a:ext>
           </a:extLst>
         </p:spPr>
@@ -13966,7 +14122,6 @@
               <a:rPr b="0"/>
               <a:t>This improves maintainability and scalability of large applications.</a:t>
             </a:r>
-            <a:endParaRPr b="0"/>
           </a:p>
           <a:p>
             <a:pPr>
@@ -13987,7 +14142,6 @@
               <a:rPr b="0"/>
               <a:t>Any class implementing the interface must follow the same method structure.</a:t>
             </a:r>
-            <a:endParaRPr b="0"/>
           </a:p>
           <a:p>
             <a:pPr>
@@ -14001,7 +14155,6 @@
               <a:rPr b="0"/>
               <a:t>Interface references allow method calls to be resolved at runtime based on the actual object, enabling dynamic behavior.</a:t>
             </a:r>
-            <a:endParaRPr b="0"/>
           </a:p>
           <a:p>
             <a:pPr>
@@ -14015,7 +14168,6 @@
               <a:rPr b="0"/>
               <a:t>Multiple classes can implement the same interface in different ways, allowing flexible and reusable designs.</a:t>
             </a:r>
-            <a:endParaRPr b="0"/>
           </a:p>
           <a:p>
             <a:pPr>
@@ -14095,12 +14247,12 @@
   <p:clrMapOvr>
     <a:masterClrMapping/>
   </p:clrMapOvr>
-  <p:transition xmlns:p14="http://schemas.microsoft.com/office/powerpoint/2010/main" spd="med" advClick="1"/>
+  <p:transition spd="med"/>
 </p:sld>
 </file>
 
 <file path=ppt/slides/slide30.xml><?xml version="1.0" encoding="utf-8"?>
-<p:sld xmlns:a="http://schemas.openxmlformats.org/drawingml/2006/main" xmlns:r="http://schemas.openxmlformats.org/officeDocument/2006/relationships" xmlns:p="http://schemas.openxmlformats.org/presentationml/2006/main" xmlns:m="http://schemas.openxmlformats.org/officeDocument/2006/math" xmlns:a14="http://schemas.microsoft.com/office/drawing/2010/main" showMasterSp="1" showMasterPhAnim="1">
+<p:sld xmlns:a="http://schemas.openxmlformats.org/drawingml/2006/main" xmlns:r="http://schemas.openxmlformats.org/officeDocument/2006/relationships" xmlns:p="http://schemas.openxmlformats.org/presentationml/2006/main">
   <p:cSld>
     <p:spTree>
       <p:nvGrpSpPr>
@@ -14164,7 +14316,7 @@
           </a:ln>
           <a:extLst>
             <a:ext uri="{C572A759-6A51-4108-AA02-DFA0A04FC94B}">
-              <ma14:wrappingTextBoxFlag xmlns:ma14="http://schemas.microsoft.com/office/mac/drawingml/2011/main" val="1"/>
+              <ma14:wrappingTextBoxFlag xmlns:ma14="http://schemas.microsoft.com/office/mac/drawingml/2011/main" xmlns:a14="http://schemas.microsoft.com/office/drawing/2010/main" xmlns:m="http://schemas.openxmlformats.org/officeDocument/2006/math" xmlns="" val="1"/>
             </a:ext>
           </a:extLst>
         </p:spPr>
@@ -14185,13 +14337,14 @@
                 <a:sym typeface="Times New Roman"/>
               </a:defRPr>
             </a:pPr>
+            <a:endParaRPr/>
           </a:p>
           <a:p>
             <a:pPr defTabSz="457200">
               <a:spcBef>
                 <a:spcPts val="1400"/>
               </a:spcBef>
-              <a:defRPr b="1" sz="1800">
+              <a:defRPr sz="1800" b="1">
                 <a:latin typeface="Times New Roman"/>
                 <a:ea typeface="Times New Roman"/>
                 <a:cs typeface="Times New Roman"/>
@@ -14214,6 +14367,7 @@
                 <a:sym typeface="Times New Roman"/>
               </a:defRPr>
             </a:pPr>
+            <a:endParaRPr/>
           </a:p>
         </p:txBody>
       </p:sp>
@@ -14236,7 +14390,7 @@
           </a:ln>
           <a:extLst>
             <a:ext uri="{C572A759-6A51-4108-AA02-DFA0A04FC94B}">
-              <ma14:wrappingTextBoxFlag xmlns:ma14="http://schemas.microsoft.com/office/mac/drawingml/2011/main" val="1"/>
+              <ma14:wrappingTextBoxFlag xmlns:ma14="http://schemas.microsoft.com/office/mac/drawingml/2011/main" xmlns:a14="http://schemas.microsoft.com/office/drawing/2010/main" xmlns:m="http://schemas.openxmlformats.org/officeDocument/2006/math" xmlns="" val="1"/>
             </a:ext>
           </a:extLst>
         </p:spPr>
@@ -14253,7 +14407,7 @@
               <a:spcBef>
                 <a:spcPts val="1200"/>
               </a:spcBef>
-              <a:defRPr b="1" sz="1800">
+              <a:defRPr sz="1800" b="1">
                 <a:latin typeface="Times New Roman"/>
                 <a:ea typeface="Times New Roman"/>
                 <a:cs typeface="Times New Roman"/>
@@ -14291,7 +14445,7 @@
               <a:spcBef>
                 <a:spcPts val="1400"/>
               </a:spcBef>
-              <a:defRPr b="1" sz="1800">
+              <a:defRPr sz="1800" b="1">
                 <a:latin typeface="Times New Roman"/>
                 <a:ea typeface="Times New Roman"/>
                 <a:cs typeface="Times New Roman"/>
@@ -14348,7 +14502,7 @@
               <a:spcBef>
                 <a:spcPts val="1400"/>
               </a:spcBef>
-              <a:defRPr b="1" sz="1800">
+              <a:defRPr sz="1800" b="1">
                 <a:latin typeface="Times New Roman"/>
                 <a:ea typeface="Times New Roman"/>
                 <a:cs typeface="Times New Roman"/>
@@ -14433,7 +14587,7 @@
               <a:spcBef>
                 <a:spcPts val="1400"/>
               </a:spcBef>
-              <a:defRPr b="1" sz="1800">
+              <a:defRPr sz="1800" b="1">
                 <a:latin typeface="Times New Roman"/>
                 <a:ea typeface="Times New Roman"/>
                 <a:cs typeface="Times New Roman"/>
@@ -14539,12 +14693,12 @@
   <p:clrMapOvr>
     <a:masterClrMapping/>
   </p:clrMapOvr>
-  <p:transition xmlns:p14="http://schemas.microsoft.com/office/powerpoint/2010/main" spd="med" advClick="1"/>
+  <p:transition spd="med"/>
 </p:sld>
 </file>
 
 <file path=ppt/slides/slide31.xml><?xml version="1.0" encoding="utf-8"?>
-<p:sld xmlns:a="http://schemas.openxmlformats.org/drawingml/2006/main" xmlns:r="http://schemas.openxmlformats.org/officeDocument/2006/relationships" xmlns:p="http://schemas.openxmlformats.org/presentationml/2006/main" xmlns:m="http://schemas.openxmlformats.org/officeDocument/2006/math" xmlns:a14="http://schemas.microsoft.com/office/drawing/2010/main" showMasterSp="1" showMasterPhAnim="1">
+<p:sld xmlns:a="http://schemas.openxmlformats.org/drawingml/2006/main" xmlns:r="http://schemas.openxmlformats.org/officeDocument/2006/relationships" xmlns:p="http://schemas.openxmlformats.org/presentationml/2006/main">
   <p:cSld>
     <p:spTree>
       <p:nvGrpSpPr>
@@ -14608,7 +14762,7 @@
           </a:ln>
           <a:extLst>
             <a:ext uri="{C572A759-6A51-4108-AA02-DFA0A04FC94B}">
-              <ma14:wrappingTextBoxFlag xmlns:ma14="http://schemas.microsoft.com/office/mac/drawingml/2011/main" val="1"/>
+              <ma14:wrappingTextBoxFlag xmlns:ma14="http://schemas.microsoft.com/office/mac/drawingml/2011/main" xmlns:a14="http://schemas.microsoft.com/office/drawing/2010/main" xmlns:m="http://schemas.openxmlformats.org/officeDocument/2006/math" xmlns="" val="1"/>
             </a:ext>
           </a:extLst>
         </p:spPr>
@@ -14625,7 +14779,7 @@
               <a:spcBef>
                 <a:spcPts val="1400"/>
               </a:spcBef>
-              <a:defRPr b="1" sz="1800">
+              <a:defRPr sz="1800" b="1">
                 <a:latin typeface="Times New Roman"/>
                 <a:ea typeface="Times New Roman"/>
                 <a:cs typeface="Times New Roman"/>
@@ -14739,7 +14893,7 @@
               <a:spcBef>
                 <a:spcPts val="1400"/>
               </a:spcBef>
-              <a:defRPr b="1" sz="1800">
+              <a:defRPr sz="1800" b="1">
                 <a:latin typeface="Times New Roman"/>
                 <a:ea typeface="Times New Roman"/>
                 <a:cs typeface="Times New Roman"/>
@@ -14872,7 +15026,7 @@
               <a:spcBef>
                 <a:spcPts val="1400"/>
               </a:spcBef>
-              <a:defRPr b="1" sz="1800">
+              <a:defRPr sz="1800" b="1">
                 <a:latin typeface="Times New Roman"/>
                 <a:ea typeface="Times New Roman"/>
                 <a:cs typeface="Times New Roman"/>
@@ -15008,7 +15162,7 @@
           </a:ln>
           <a:extLst>
             <a:ext uri="{C572A759-6A51-4108-AA02-DFA0A04FC94B}">
-              <ma14:wrappingTextBoxFlag xmlns:ma14="http://schemas.microsoft.com/office/mac/drawingml/2011/main" val="1"/>
+              <ma14:wrappingTextBoxFlag xmlns:ma14="http://schemas.microsoft.com/office/mac/drawingml/2011/main" xmlns:a14="http://schemas.microsoft.com/office/drawing/2010/main" xmlns:m="http://schemas.openxmlformats.org/officeDocument/2006/math" xmlns="" val="1"/>
             </a:ext>
           </a:extLst>
         </p:spPr>
@@ -15029,13 +15183,14 @@
                 <a:sym typeface="Times New Roman"/>
               </a:defRPr>
             </a:pPr>
+            <a:endParaRPr/>
           </a:p>
           <a:p>
             <a:pPr defTabSz="457200">
               <a:spcBef>
                 <a:spcPts val="1400"/>
               </a:spcBef>
-              <a:defRPr b="1" sz="1800">
+              <a:defRPr sz="1800" b="1">
                 <a:latin typeface="Times New Roman"/>
                 <a:ea typeface="Times New Roman"/>
                 <a:cs typeface="Times New Roman"/>
@@ -15058,6 +15213,7 @@
                 <a:sym typeface="Times New Roman"/>
               </a:defRPr>
             </a:pPr>
+            <a:endParaRPr/>
           </a:p>
         </p:txBody>
       </p:sp>
@@ -15066,12 +15222,12 @@
   <p:clrMapOvr>
     <a:masterClrMapping/>
   </p:clrMapOvr>
-  <p:transition xmlns:p14="http://schemas.microsoft.com/office/powerpoint/2010/main" spd="med" advClick="1"/>
+  <p:transition spd="med"/>
 </p:sld>
 </file>
 
 <file path=ppt/slides/slide32.xml><?xml version="1.0" encoding="utf-8"?>
-<p:sld xmlns:a="http://schemas.openxmlformats.org/drawingml/2006/main" xmlns:r="http://schemas.openxmlformats.org/officeDocument/2006/relationships" xmlns:p="http://schemas.openxmlformats.org/presentationml/2006/main" xmlns:m="http://schemas.openxmlformats.org/officeDocument/2006/math" xmlns:a14="http://schemas.microsoft.com/office/drawing/2010/main" showMasterSp="1" showMasterPhAnim="1">
+<p:sld xmlns:a="http://schemas.openxmlformats.org/drawingml/2006/main" xmlns:r="http://schemas.openxmlformats.org/officeDocument/2006/relationships" xmlns:p="http://schemas.openxmlformats.org/presentationml/2006/main">
   <p:cSld>
     <p:spTree>
       <p:nvGrpSpPr>
@@ -15135,7 +15291,7 @@
           </a:ln>
           <a:extLst>
             <a:ext uri="{C572A759-6A51-4108-AA02-DFA0A04FC94B}">
-              <ma14:wrappingTextBoxFlag xmlns:ma14="http://schemas.microsoft.com/office/mac/drawingml/2011/main" val="1"/>
+              <ma14:wrappingTextBoxFlag xmlns:ma14="http://schemas.microsoft.com/office/mac/drawingml/2011/main" xmlns:a14="http://schemas.microsoft.com/office/drawing/2010/main" xmlns:m="http://schemas.openxmlformats.org/officeDocument/2006/math" xmlns="" val="1"/>
             </a:ext>
           </a:extLst>
         </p:spPr>
@@ -15156,13 +15312,14 @@
                 <a:sym typeface="Times New Roman"/>
               </a:defRPr>
             </a:pPr>
+            <a:endParaRPr/>
           </a:p>
           <a:p>
             <a:pPr defTabSz="457200">
               <a:spcBef>
                 <a:spcPts val="1400"/>
               </a:spcBef>
-              <a:defRPr b="1" sz="1800">
+              <a:defRPr sz="1800" b="1">
                 <a:latin typeface="Times New Roman"/>
                 <a:ea typeface="Times New Roman"/>
                 <a:cs typeface="Times New Roman"/>
@@ -15185,6 +15342,7 @@
                 <a:sym typeface="Times New Roman"/>
               </a:defRPr>
             </a:pPr>
+            <a:endParaRPr/>
           </a:p>
         </p:txBody>
       </p:sp>
@@ -15207,7 +15365,7 @@
           </a:ln>
           <a:extLst>
             <a:ext uri="{C572A759-6A51-4108-AA02-DFA0A04FC94B}">
-              <ma14:wrappingTextBoxFlag xmlns:ma14="http://schemas.microsoft.com/office/mac/drawingml/2011/main" val="1"/>
+              <ma14:wrappingTextBoxFlag xmlns:ma14="http://schemas.microsoft.com/office/mac/drawingml/2011/main" xmlns:a14="http://schemas.microsoft.com/office/drawing/2010/main" xmlns:m="http://schemas.openxmlformats.org/officeDocument/2006/math" xmlns="" val="1"/>
             </a:ext>
           </a:extLst>
         </p:spPr>
@@ -15224,7 +15382,7 @@
               <a:spcBef>
                 <a:spcPts val="1400"/>
               </a:spcBef>
-              <a:defRPr b="1" sz="1200">
+              <a:defRPr sz="1200" b="1">
                 <a:latin typeface="Times New Roman"/>
                 <a:ea typeface="Times New Roman"/>
                 <a:cs typeface="Times New Roman"/>
@@ -15262,7 +15420,7 @@
               <a:spcBef>
                 <a:spcPts val="1400"/>
               </a:spcBef>
-              <a:defRPr b="1" sz="1200">
+              <a:defRPr sz="1200" b="1">
                 <a:latin typeface="Times New Roman"/>
                 <a:ea typeface="Times New Roman"/>
                 <a:cs typeface="Times New Roman"/>
@@ -15442,7 +15600,7 @@
               <a:spcBef>
                 <a:spcPts val="1400"/>
               </a:spcBef>
-              <a:defRPr b="1" sz="1200">
+              <a:defRPr sz="1200" b="1">
                 <a:latin typeface="Times New Roman"/>
                 <a:ea typeface="Times New Roman"/>
                 <a:cs typeface="Times New Roman"/>
@@ -15526,12 +15684,12 @@
   <p:clrMapOvr>
     <a:masterClrMapping/>
   </p:clrMapOvr>
-  <p:transition xmlns:p14="http://schemas.microsoft.com/office/powerpoint/2010/main" spd="med" advClick="1"/>
+  <p:transition spd="med"/>
 </p:sld>
 </file>
 
 <file path=ppt/slides/slide33.xml><?xml version="1.0" encoding="utf-8"?>
-<p:sld xmlns:a="http://schemas.openxmlformats.org/drawingml/2006/main" xmlns:r="http://schemas.openxmlformats.org/officeDocument/2006/relationships" xmlns:p="http://schemas.openxmlformats.org/presentationml/2006/main" xmlns:m="http://schemas.openxmlformats.org/officeDocument/2006/math" xmlns:a14="http://schemas.microsoft.com/office/drawing/2010/main" showMasterSp="1" showMasterPhAnim="1">
+<p:sld xmlns:a="http://schemas.openxmlformats.org/drawingml/2006/main" xmlns:r="http://schemas.openxmlformats.org/officeDocument/2006/relationships" xmlns:p="http://schemas.openxmlformats.org/presentationml/2006/main">
   <p:cSld>
     <p:spTree>
       <p:nvGrpSpPr>
@@ -15595,7 +15753,7 @@
           </a:ln>
           <a:extLst>
             <a:ext uri="{C572A759-6A51-4108-AA02-DFA0A04FC94B}">
-              <ma14:wrappingTextBoxFlag xmlns:ma14="http://schemas.microsoft.com/office/mac/drawingml/2011/main" val="1"/>
+              <ma14:wrappingTextBoxFlag xmlns:ma14="http://schemas.microsoft.com/office/mac/drawingml/2011/main" xmlns:a14="http://schemas.microsoft.com/office/drawing/2010/main" xmlns:m="http://schemas.openxmlformats.org/officeDocument/2006/math" xmlns="" val="1"/>
             </a:ext>
           </a:extLst>
         </p:spPr>
@@ -15612,7 +15770,7 @@
               <a:spcBef>
                 <a:spcPts val="1400"/>
               </a:spcBef>
-              <a:defRPr b="1" sz="1100">
+              <a:defRPr sz="1100" b="1">
                 <a:latin typeface="Times New Roman"/>
                 <a:ea typeface="Times New Roman"/>
                 <a:cs typeface="Times New Roman"/>
@@ -15764,7 +15922,7 @@
               <a:spcBef>
                 <a:spcPts val="1400"/>
               </a:spcBef>
-              <a:defRPr b="1" sz="1100">
+              <a:defRPr sz="1100" b="1">
                 <a:latin typeface="Times New Roman"/>
                 <a:ea typeface="Times New Roman"/>
                 <a:cs typeface="Times New Roman"/>
@@ -15802,7 +15960,7 @@
               <a:spcBef>
                 <a:spcPts val="1400"/>
               </a:spcBef>
-              <a:defRPr b="1" sz="1100">
+              <a:defRPr sz="1100" b="1">
                 <a:latin typeface="Times New Roman"/>
                 <a:ea typeface="Times New Roman"/>
                 <a:cs typeface="Times New Roman"/>
@@ -16014,7 +16172,7 @@
           </a:ln>
           <a:extLst>
             <a:ext uri="{C572A759-6A51-4108-AA02-DFA0A04FC94B}">
-              <ma14:wrappingTextBoxFlag xmlns:ma14="http://schemas.microsoft.com/office/mac/drawingml/2011/main" val="1"/>
+              <ma14:wrappingTextBoxFlag xmlns:ma14="http://schemas.microsoft.com/office/mac/drawingml/2011/main" xmlns:a14="http://schemas.microsoft.com/office/drawing/2010/main" xmlns:m="http://schemas.openxmlformats.org/officeDocument/2006/math" xmlns="" val="1"/>
             </a:ext>
           </a:extLst>
         </p:spPr>
@@ -16031,7 +16189,7 @@
               <a:spcBef>
                 <a:spcPts val="1400"/>
               </a:spcBef>
-              <a:defRPr b="1" sz="1200">
+              <a:defRPr sz="1200" b="1">
                 <a:latin typeface="Times New Roman"/>
                 <a:ea typeface="Times New Roman"/>
                 <a:cs typeface="Times New Roman"/>
@@ -16129,7 +16287,7 @@
           </a:ln>
           <a:extLst>
             <a:ext uri="{C572A759-6A51-4108-AA02-DFA0A04FC94B}">
-              <ma14:wrappingTextBoxFlag xmlns:ma14="http://schemas.microsoft.com/office/mac/drawingml/2011/main" val="1"/>
+              <ma14:wrappingTextBoxFlag xmlns:ma14="http://schemas.microsoft.com/office/mac/drawingml/2011/main" xmlns:a14="http://schemas.microsoft.com/office/drawing/2010/main" xmlns:m="http://schemas.openxmlformats.org/officeDocument/2006/math" xmlns="" val="1"/>
             </a:ext>
           </a:extLst>
         </p:spPr>
@@ -16150,13 +16308,14 @@
                 <a:sym typeface="Times New Roman"/>
               </a:defRPr>
             </a:pPr>
+            <a:endParaRPr/>
           </a:p>
           <a:p>
             <a:pPr defTabSz="457200">
               <a:spcBef>
                 <a:spcPts val="1400"/>
               </a:spcBef>
-              <a:defRPr b="1" sz="1800">
+              <a:defRPr sz="1800" b="1">
                 <a:latin typeface="Times New Roman"/>
                 <a:ea typeface="Times New Roman"/>
                 <a:cs typeface="Times New Roman"/>
@@ -16179,6 +16338,7 @@
                 <a:sym typeface="Times New Roman"/>
               </a:defRPr>
             </a:pPr>
+            <a:endParaRPr/>
           </a:p>
         </p:txBody>
       </p:sp>
@@ -16187,12 +16347,12 @@
   <p:clrMapOvr>
     <a:masterClrMapping/>
   </p:clrMapOvr>
-  <p:transition xmlns:p14="http://schemas.microsoft.com/office/powerpoint/2010/main" spd="med" advClick="1"/>
+  <p:transition spd="med"/>
 </p:sld>
 </file>
 
 <file path=ppt/slides/slide34.xml><?xml version="1.0" encoding="utf-8"?>
-<p:sld xmlns:a="http://schemas.openxmlformats.org/drawingml/2006/main" xmlns:r="http://schemas.openxmlformats.org/officeDocument/2006/relationships" xmlns:p="http://schemas.openxmlformats.org/presentationml/2006/main" xmlns:m="http://schemas.openxmlformats.org/officeDocument/2006/math" xmlns:a14="http://schemas.microsoft.com/office/drawing/2010/main" showMasterSp="1" showMasterPhAnim="1">
+<p:sld xmlns:a="http://schemas.openxmlformats.org/drawingml/2006/main" xmlns:r="http://schemas.openxmlformats.org/officeDocument/2006/relationships" xmlns:p="http://schemas.openxmlformats.org/presentationml/2006/main">
   <p:cSld>
     <p:spTree>
       <p:nvGrpSpPr>
@@ -16256,7 +16416,7 @@
           </a:ln>
           <a:extLst>
             <a:ext uri="{C572A759-6A51-4108-AA02-DFA0A04FC94B}">
-              <ma14:wrappingTextBoxFlag xmlns:ma14="http://schemas.microsoft.com/office/mac/drawingml/2011/main" val="1"/>
+              <ma14:wrappingTextBoxFlag xmlns:ma14="http://schemas.microsoft.com/office/mac/drawingml/2011/main" xmlns:a14="http://schemas.microsoft.com/office/drawing/2010/main" xmlns:m="http://schemas.openxmlformats.org/officeDocument/2006/math" xmlns="" val="1"/>
             </a:ext>
           </a:extLst>
         </p:spPr>
@@ -16277,13 +16437,14 @@
                 <a:sym typeface="Times New Roman"/>
               </a:defRPr>
             </a:pPr>
+            <a:endParaRPr/>
           </a:p>
           <a:p>
             <a:pPr defTabSz="457200">
               <a:spcBef>
                 <a:spcPts val="1400"/>
               </a:spcBef>
-              <a:defRPr b="1" sz="1800">
+              <a:defRPr sz="1800" b="1">
                 <a:latin typeface="Times New Roman"/>
                 <a:ea typeface="Times New Roman"/>
                 <a:cs typeface="Times New Roman"/>
@@ -16306,6 +16467,7 @@
                 <a:sym typeface="Times New Roman"/>
               </a:defRPr>
             </a:pPr>
+            <a:endParaRPr/>
           </a:p>
         </p:txBody>
       </p:sp>
@@ -16328,7 +16490,7 @@
           </a:ln>
           <a:extLst>
             <a:ext uri="{C572A759-6A51-4108-AA02-DFA0A04FC94B}">
-              <ma14:wrappingTextBoxFlag xmlns:ma14="http://schemas.microsoft.com/office/mac/drawingml/2011/main" val="1"/>
+              <ma14:wrappingTextBoxFlag xmlns:ma14="http://schemas.microsoft.com/office/mac/drawingml/2011/main" xmlns:a14="http://schemas.microsoft.com/office/drawing/2010/main" xmlns:m="http://schemas.openxmlformats.org/officeDocument/2006/math" xmlns="" val="1"/>
             </a:ext>
           </a:extLst>
         </p:spPr>
@@ -16352,6 +16514,7 @@
                 <a:sym typeface="Times New Roman"/>
               </a:defRPr>
             </a:pPr>
+            <a:endParaRPr/>
           </a:p>
           <a:p>
             <a:pPr defTabSz="457200">
@@ -16361,7 +16524,7 @@
               <a:spcBef>
                 <a:spcPts val="1400"/>
               </a:spcBef>
-              <a:defRPr b="1" sz="1800">
+              <a:defRPr sz="1800" b="1">
                 <a:latin typeface="Times New Roman"/>
                 <a:ea typeface="Times New Roman"/>
                 <a:cs typeface="Times New Roman"/>
@@ -16399,7 +16562,7 @@
               <a:spcBef>
                 <a:spcPts val="1400"/>
               </a:spcBef>
-              <a:defRPr b="1" sz="1800">
+              <a:defRPr sz="1800" b="1">
                 <a:latin typeface="Times New Roman"/>
                 <a:ea typeface="Times New Roman"/>
                 <a:cs typeface="Times New Roman"/>
@@ -16456,7 +16619,7 @@
               <a:spcBef>
                 <a:spcPts val="1400"/>
               </a:spcBef>
-              <a:defRPr b="1" sz="1800">
+              <a:defRPr sz="1800" b="1">
                 <a:latin typeface="Times New Roman"/>
                 <a:ea typeface="Times New Roman"/>
                 <a:cs typeface="Times New Roman"/>
@@ -16541,7 +16704,7 @@
               <a:spcBef>
                 <a:spcPts val="1400"/>
               </a:spcBef>
-              <a:defRPr b="1" sz="1800">
+              <a:defRPr sz="1800" b="1">
                 <a:latin typeface="Times New Roman"/>
                 <a:ea typeface="Times New Roman"/>
                 <a:cs typeface="Times New Roman"/>
@@ -16597,12 +16760,12 @@
   <p:clrMapOvr>
     <a:masterClrMapping/>
   </p:clrMapOvr>
-  <p:transition xmlns:p14="http://schemas.microsoft.com/office/powerpoint/2010/main" spd="med" advClick="1"/>
+  <p:transition spd="med"/>
 </p:sld>
 </file>
 
 <file path=ppt/slides/slide35.xml><?xml version="1.0" encoding="utf-8"?>
-<p:sld xmlns:a="http://schemas.openxmlformats.org/drawingml/2006/main" xmlns:r="http://schemas.openxmlformats.org/officeDocument/2006/relationships" xmlns:p="http://schemas.openxmlformats.org/presentationml/2006/main" xmlns:m="http://schemas.openxmlformats.org/officeDocument/2006/math" xmlns:a14="http://schemas.microsoft.com/office/drawing/2010/main" showMasterSp="1" showMasterPhAnim="1">
+<p:sld xmlns:a="http://schemas.openxmlformats.org/drawingml/2006/main" xmlns:r="http://schemas.openxmlformats.org/officeDocument/2006/relationships" xmlns:p="http://schemas.openxmlformats.org/presentationml/2006/main">
   <p:cSld>
     <p:spTree>
       <p:nvGrpSpPr>
@@ -16666,7 +16829,7 @@
           </a:ln>
           <a:extLst>
             <a:ext uri="{C572A759-6A51-4108-AA02-DFA0A04FC94B}">
-              <ma14:wrappingTextBoxFlag xmlns:ma14="http://schemas.microsoft.com/office/mac/drawingml/2011/main" val="1"/>
+              <ma14:wrappingTextBoxFlag xmlns:ma14="http://schemas.microsoft.com/office/mac/drawingml/2011/main" xmlns:a14="http://schemas.microsoft.com/office/drawing/2010/main" xmlns:m="http://schemas.openxmlformats.org/officeDocument/2006/math" xmlns="" val="1"/>
             </a:ext>
           </a:extLst>
         </p:spPr>
@@ -16683,7 +16846,7 @@
               <a:spcBef>
                 <a:spcPts val="1400"/>
               </a:spcBef>
-              <a:defRPr b="1" sz="1100">
+              <a:defRPr sz="1100" b="1">
                 <a:latin typeface="Times New Roman"/>
                 <a:ea typeface="Times New Roman"/>
                 <a:cs typeface="Times New Roman"/>
@@ -16704,7 +16867,7 @@
               </a:spcBef>
               <a:buSzPct val="100000"/>
               <a:buFont typeface="Times New Roman"/>
-              <a:buAutoNum type="arabicPeriod" startAt="1"/>
+              <a:buAutoNum type="arabicPeriod"/>
               <a:defRPr sz="1100">
                 <a:latin typeface="Times New Roman"/>
                 <a:ea typeface="Times New Roman"/>
@@ -16726,7 +16889,7 @@
               </a:spcBef>
               <a:buSzPct val="100000"/>
               <a:buFont typeface="Times New Roman"/>
-              <a:buAutoNum type="arabicPeriod" startAt="1"/>
+              <a:buAutoNum type="arabicPeriod"/>
               <a:defRPr sz="1100">
                 <a:latin typeface="Times New Roman"/>
                 <a:ea typeface="Times New Roman"/>
@@ -16748,7 +16911,7 @@
               </a:spcBef>
               <a:buSzPct val="100000"/>
               <a:buFont typeface="Times New Roman"/>
-              <a:buAutoNum type="arabicPeriod" startAt="1"/>
+              <a:buAutoNum type="arabicPeriod"/>
               <a:defRPr sz="1100">
                 <a:latin typeface="Times New Roman"/>
                 <a:ea typeface="Times New Roman"/>
@@ -16770,7 +16933,7 @@
               </a:spcBef>
               <a:buSzPct val="100000"/>
               <a:buFont typeface="Times New Roman"/>
-              <a:buAutoNum type="arabicPeriod" startAt="1"/>
+              <a:buAutoNum type="arabicPeriod"/>
               <a:defRPr sz="1100">
                 <a:latin typeface="Times New Roman"/>
                 <a:ea typeface="Times New Roman"/>
@@ -16792,7 +16955,7 @@
               </a:spcBef>
               <a:buSzPct val="100000"/>
               <a:buFont typeface="Times New Roman"/>
-              <a:buAutoNum type="arabicPeriod" startAt="1"/>
+              <a:buAutoNum type="arabicPeriod"/>
               <a:defRPr sz="1100">
                 <a:latin typeface="Times New Roman"/>
                 <a:ea typeface="Times New Roman"/>
@@ -16812,7 +16975,7 @@
               <a:spcBef>
                 <a:spcPts val="1400"/>
               </a:spcBef>
-              <a:defRPr b="1" sz="1100">
+              <a:defRPr sz="1100" b="1">
                 <a:latin typeface="Times New Roman"/>
                 <a:ea typeface="Times New Roman"/>
                 <a:cs typeface="Times New Roman"/>
@@ -16945,7 +17108,7 @@
               <a:spcBef>
                 <a:spcPts val="1400"/>
               </a:spcBef>
-              <a:defRPr b="1" sz="1100">
+              <a:defRPr sz="1100" b="1">
                 <a:latin typeface="Times New Roman"/>
                 <a:ea typeface="Times New Roman"/>
                 <a:cs typeface="Times New Roman"/>
@@ -17065,7 +17228,7 @@
           </a:ln>
           <a:extLst>
             <a:ext uri="{C572A759-6A51-4108-AA02-DFA0A04FC94B}">
-              <ma14:wrappingTextBoxFlag xmlns:ma14="http://schemas.microsoft.com/office/mac/drawingml/2011/main" val="1"/>
+              <ma14:wrappingTextBoxFlag xmlns:ma14="http://schemas.microsoft.com/office/mac/drawingml/2011/main" xmlns:a14="http://schemas.microsoft.com/office/drawing/2010/main" xmlns:m="http://schemas.openxmlformats.org/officeDocument/2006/math" xmlns="" val="1"/>
             </a:ext>
           </a:extLst>
         </p:spPr>
@@ -17180,7 +17343,7 @@
           </a:ln>
           <a:extLst>
             <a:ext uri="{C572A759-6A51-4108-AA02-DFA0A04FC94B}">
-              <ma14:wrappingTextBoxFlag xmlns:ma14="http://schemas.microsoft.com/office/mac/drawingml/2011/main" val="1"/>
+              <ma14:wrappingTextBoxFlag xmlns:ma14="http://schemas.microsoft.com/office/mac/drawingml/2011/main" xmlns:a14="http://schemas.microsoft.com/office/drawing/2010/main" xmlns:m="http://schemas.openxmlformats.org/officeDocument/2006/math" xmlns="" val="1"/>
             </a:ext>
           </a:extLst>
         </p:spPr>
@@ -17201,13 +17364,14 @@
                 <a:sym typeface="Times New Roman"/>
               </a:defRPr>
             </a:pPr>
+            <a:endParaRPr/>
           </a:p>
           <a:p>
             <a:pPr defTabSz="457200">
               <a:spcBef>
                 <a:spcPts val="1400"/>
               </a:spcBef>
-              <a:defRPr b="1" sz="1800">
+              <a:defRPr sz="1800" b="1">
                 <a:latin typeface="Times New Roman"/>
                 <a:ea typeface="Times New Roman"/>
                 <a:cs typeface="Times New Roman"/>
@@ -17230,6 +17394,7 @@
                 <a:sym typeface="Times New Roman"/>
               </a:defRPr>
             </a:pPr>
+            <a:endParaRPr/>
           </a:p>
         </p:txBody>
       </p:sp>
@@ -17238,12 +17403,12 @@
   <p:clrMapOvr>
     <a:masterClrMapping/>
   </p:clrMapOvr>
-  <p:transition xmlns:p14="http://schemas.microsoft.com/office/powerpoint/2010/main" spd="med" advClick="1"/>
+  <p:transition spd="med"/>
 </p:sld>
 </file>
 
 <file path=ppt/slides/slide36.xml><?xml version="1.0" encoding="utf-8"?>
-<p:sld xmlns:a="http://schemas.openxmlformats.org/drawingml/2006/main" xmlns:r="http://schemas.openxmlformats.org/officeDocument/2006/relationships" xmlns:p="http://schemas.openxmlformats.org/presentationml/2006/main" xmlns:m="http://schemas.openxmlformats.org/officeDocument/2006/math" xmlns:a14="http://schemas.microsoft.com/office/drawing/2010/main" showMasterSp="1" showMasterPhAnim="1">
+<p:sld xmlns:a="http://schemas.openxmlformats.org/drawingml/2006/main" xmlns:r="http://schemas.openxmlformats.org/officeDocument/2006/relationships" xmlns:p="http://schemas.openxmlformats.org/presentationml/2006/main">
   <p:cSld>
     <p:spTree>
       <p:nvGrpSpPr>
@@ -17307,7 +17472,7 @@
           </a:ln>
           <a:extLst>
             <a:ext uri="{C572A759-6A51-4108-AA02-DFA0A04FC94B}">
-              <ma14:wrappingTextBoxFlag xmlns:ma14="http://schemas.microsoft.com/office/mac/drawingml/2011/main" val="1"/>
+              <ma14:wrappingTextBoxFlag xmlns:ma14="http://schemas.microsoft.com/office/mac/drawingml/2011/main" xmlns:a14="http://schemas.microsoft.com/office/drawing/2010/main" xmlns:m="http://schemas.openxmlformats.org/officeDocument/2006/math" xmlns="" val="1"/>
             </a:ext>
           </a:extLst>
         </p:spPr>
@@ -17328,13 +17493,14 @@
                 <a:sym typeface="Times New Roman"/>
               </a:defRPr>
             </a:pPr>
+            <a:endParaRPr/>
           </a:p>
           <a:p>
             <a:pPr defTabSz="457200">
               <a:spcBef>
                 <a:spcPts val="1400"/>
               </a:spcBef>
-              <a:defRPr b="1" sz="1800">
+              <a:defRPr sz="1800" b="1">
                 <a:latin typeface="Times New Roman"/>
                 <a:ea typeface="Times New Roman"/>
                 <a:cs typeface="Times New Roman"/>
@@ -17357,6 +17523,7 @@
                 <a:sym typeface="Times New Roman"/>
               </a:defRPr>
             </a:pPr>
+            <a:endParaRPr/>
           </a:p>
         </p:txBody>
       </p:sp>
@@ -17379,7 +17546,7 @@
           </a:ln>
           <a:extLst>
             <a:ext uri="{C572A759-6A51-4108-AA02-DFA0A04FC94B}">
-              <ma14:wrappingTextBoxFlag xmlns:ma14="http://schemas.microsoft.com/office/mac/drawingml/2011/main" val="1"/>
+              <ma14:wrappingTextBoxFlag xmlns:ma14="http://schemas.microsoft.com/office/mac/drawingml/2011/main" xmlns:a14="http://schemas.microsoft.com/office/drawing/2010/main" xmlns:m="http://schemas.openxmlformats.org/officeDocument/2006/math" xmlns="" val="1"/>
             </a:ext>
           </a:extLst>
         </p:spPr>
@@ -17396,7 +17563,7 @@
               <a:spcBef>
                 <a:spcPts val="800"/>
               </a:spcBef>
-              <a:defRPr b="1" sz="1200">
+              <a:defRPr sz="1200" b="1">
                 <a:latin typeface="Times New Roman"/>
                 <a:ea typeface="Times New Roman"/>
                 <a:cs typeface="Times New Roman"/>
@@ -17434,7 +17601,7 @@
               <a:spcBef>
                 <a:spcPts val="800"/>
               </a:spcBef>
-              <a:defRPr b="1" sz="1200">
+              <a:defRPr sz="1200" b="1">
                 <a:latin typeface="Times New Roman"/>
                 <a:ea typeface="Times New Roman"/>
                 <a:cs typeface="Times New Roman"/>
@@ -17453,7 +17620,7 @@
               <a:spcBef>
                 <a:spcPts val="800"/>
               </a:spcBef>
-              <a:defRPr b="1" sz="1200">
+              <a:defRPr sz="1200" b="1">
                 <a:latin typeface="Times New Roman"/>
                 <a:ea typeface="Times New Roman"/>
                 <a:cs typeface="Times New Roman"/>
@@ -17538,7 +17705,7 @@
               <a:spcBef>
                 <a:spcPts val="800"/>
               </a:spcBef>
-              <a:defRPr b="1" sz="1200">
+              <a:defRPr sz="1200" b="1">
                 <a:latin typeface="Times New Roman"/>
                 <a:ea typeface="Times New Roman"/>
                 <a:cs typeface="Times New Roman"/>
@@ -17623,7 +17790,7 @@
               <a:spcBef>
                 <a:spcPts val="800"/>
               </a:spcBef>
-              <a:defRPr b="1" sz="1200">
+              <a:defRPr sz="1200" b="1">
                 <a:latin typeface="Times New Roman"/>
                 <a:ea typeface="Times New Roman"/>
                 <a:cs typeface="Times New Roman"/>
@@ -17759,7 +17926,7 @@
           </a:ln>
           <a:extLst>
             <a:ext uri="{C572A759-6A51-4108-AA02-DFA0A04FC94B}">
-              <ma14:wrappingTextBoxFlag xmlns:ma14="http://schemas.microsoft.com/office/mac/drawingml/2011/main" val="1"/>
+              <ma14:wrappingTextBoxFlag xmlns:ma14="http://schemas.microsoft.com/office/mac/drawingml/2011/main" xmlns:a14="http://schemas.microsoft.com/office/drawing/2010/main" xmlns:m="http://schemas.openxmlformats.org/officeDocument/2006/math" xmlns="" val="1"/>
             </a:ext>
           </a:extLst>
         </p:spPr>
@@ -17832,12 +17999,12 @@
   <p:clrMapOvr>
     <a:masterClrMapping/>
   </p:clrMapOvr>
-  <p:transition xmlns:p14="http://schemas.microsoft.com/office/powerpoint/2010/main" spd="med" advClick="1"/>
+  <p:transition spd="med"/>
 </p:sld>
 </file>
 
 <file path=ppt/slides/slide37.xml><?xml version="1.0" encoding="utf-8"?>
-<p:sld xmlns:a="http://schemas.openxmlformats.org/drawingml/2006/main" xmlns:r="http://schemas.openxmlformats.org/officeDocument/2006/relationships" xmlns:p="http://schemas.openxmlformats.org/presentationml/2006/main" xmlns:m="http://schemas.openxmlformats.org/officeDocument/2006/math" xmlns:a14="http://schemas.microsoft.com/office/drawing/2010/main" showMasterSp="1" showMasterPhAnim="1">
+<p:sld xmlns:a="http://schemas.openxmlformats.org/drawingml/2006/main" xmlns:r="http://schemas.openxmlformats.org/officeDocument/2006/relationships" xmlns:p="http://schemas.openxmlformats.org/presentationml/2006/main">
   <p:cSld>
     <p:spTree>
       <p:nvGrpSpPr>
@@ -17901,7 +18068,7 @@
           </a:ln>
           <a:extLst>
             <a:ext uri="{C572A759-6A51-4108-AA02-DFA0A04FC94B}">
-              <ma14:wrappingTextBoxFlag xmlns:ma14="http://schemas.microsoft.com/office/mac/drawingml/2011/main" val="1"/>
+              <ma14:wrappingTextBoxFlag xmlns:ma14="http://schemas.microsoft.com/office/mac/drawingml/2011/main" xmlns:a14="http://schemas.microsoft.com/office/drawing/2010/main" xmlns:m="http://schemas.openxmlformats.org/officeDocument/2006/math" xmlns="" val="1"/>
             </a:ext>
           </a:extLst>
         </p:spPr>
@@ -17918,7 +18085,7 @@
               <a:spcBef>
                 <a:spcPts val="700"/>
               </a:spcBef>
-              <a:defRPr b="1" sz="1800">
+              <a:defRPr sz="1800" b="1">
                 <a:latin typeface="Times New Roman"/>
                 <a:ea typeface="Times New Roman"/>
                 <a:cs typeface="Times New Roman"/>
@@ -18022,7 +18189,7 @@
               <a:spcBef>
                 <a:spcPts val="700"/>
               </a:spcBef>
-              <a:defRPr b="1" sz="1800">
+              <a:defRPr sz="1800" b="1">
                 <a:latin typeface="Times New Roman"/>
                 <a:ea typeface="Times New Roman"/>
                 <a:cs typeface="Times New Roman"/>
@@ -18060,7 +18227,7 @@
               <a:spcBef>
                 <a:spcPts val="700"/>
               </a:spcBef>
-              <a:defRPr b="1" sz="1800">
+              <a:defRPr sz="1800" b="1">
                 <a:latin typeface="Times New Roman"/>
                 <a:ea typeface="Times New Roman"/>
                 <a:cs typeface="Times New Roman"/>
@@ -18167,7 +18334,7 @@
               <a:spcBef>
                 <a:spcPts val="700"/>
               </a:spcBef>
-              <a:defRPr b="1" sz="1800">
+              <a:defRPr sz="1800" b="1">
                 <a:latin typeface="Times New Roman"/>
                 <a:ea typeface="Times New Roman"/>
                 <a:cs typeface="Times New Roman"/>
@@ -18275,7 +18442,7 @@
           </a:ln>
           <a:extLst>
             <a:ext uri="{C572A759-6A51-4108-AA02-DFA0A04FC94B}">
-              <ma14:wrappingTextBoxFlag xmlns:ma14="http://schemas.microsoft.com/office/mac/drawingml/2011/main" val="1"/>
+              <ma14:wrappingTextBoxFlag xmlns:ma14="http://schemas.microsoft.com/office/mac/drawingml/2011/main" xmlns:a14="http://schemas.microsoft.com/office/drawing/2010/main" xmlns:m="http://schemas.openxmlformats.org/officeDocument/2006/math" xmlns="" val="1"/>
             </a:ext>
           </a:extLst>
         </p:spPr>
@@ -18296,13 +18463,14 @@
                 <a:sym typeface="Times New Roman"/>
               </a:defRPr>
             </a:pPr>
+            <a:endParaRPr/>
           </a:p>
           <a:p>
             <a:pPr defTabSz="457200">
               <a:spcBef>
                 <a:spcPts val="1400"/>
               </a:spcBef>
-              <a:defRPr b="1" sz="1800">
+              <a:defRPr sz="1800" b="1">
                 <a:latin typeface="Times New Roman"/>
                 <a:ea typeface="Times New Roman"/>
                 <a:cs typeface="Times New Roman"/>
@@ -18325,6 +18493,7 @@
                 <a:sym typeface="Times New Roman"/>
               </a:defRPr>
             </a:pPr>
+            <a:endParaRPr/>
           </a:p>
         </p:txBody>
       </p:sp>
@@ -18333,12 +18502,12 @@
   <p:clrMapOvr>
     <a:masterClrMapping/>
   </p:clrMapOvr>
-  <p:transition xmlns:p14="http://schemas.microsoft.com/office/powerpoint/2010/main" spd="med" advClick="1"/>
+  <p:transition spd="med"/>
 </p:sld>
 </file>
 
 <file path=ppt/slides/slide38.xml><?xml version="1.0" encoding="utf-8"?>
-<p:sld xmlns:a="http://schemas.openxmlformats.org/drawingml/2006/main" xmlns:r="http://schemas.openxmlformats.org/officeDocument/2006/relationships" xmlns:p="http://schemas.openxmlformats.org/presentationml/2006/main" xmlns:m="http://schemas.openxmlformats.org/officeDocument/2006/math" xmlns:a14="http://schemas.microsoft.com/office/drawing/2010/main" showMasterSp="1" showMasterPhAnim="1">
+<p:sld xmlns:a="http://schemas.openxmlformats.org/drawingml/2006/main" xmlns:r="http://schemas.openxmlformats.org/officeDocument/2006/relationships" xmlns:p="http://schemas.openxmlformats.org/presentationml/2006/main">
   <p:cSld>
     <p:spTree>
       <p:nvGrpSpPr>
@@ -18402,7 +18571,7 @@
           </a:ln>
           <a:extLst>
             <a:ext uri="{C572A759-6A51-4108-AA02-DFA0A04FC94B}">
-              <ma14:wrappingTextBoxFlag xmlns:ma14="http://schemas.microsoft.com/office/mac/drawingml/2011/main" val="1"/>
+              <ma14:wrappingTextBoxFlag xmlns:ma14="http://schemas.microsoft.com/office/mac/drawingml/2011/main" xmlns:a14="http://schemas.microsoft.com/office/drawing/2010/main" xmlns:m="http://schemas.openxmlformats.org/officeDocument/2006/math" xmlns="" val="1"/>
             </a:ext>
           </a:extLst>
         </p:spPr>
@@ -18423,13 +18592,14 @@
                 <a:sym typeface="Times New Roman"/>
               </a:defRPr>
             </a:pPr>
+            <a:endParaRPr/>
           </a:p>
           <a:p>
             <a:pPr defTabSz="457200">
               <a:spcBef>
                 <a:spcPts val="1400"/>
               </a:spcBef>
-              <a:defRPr b="1" sz="1800">
+              <a:defRPr sz="1800" b="1">
                 <a:latin typeface="Times New Roman"/>
                 <a:ea typeface="Times New Roman"/>
                 <a:cs typeface="Times New Roman"/>
@@ -18452,6 +18622,7 @@
                 <a:sym typeface="Times New Roman"/>
               </a:defRPr>
             </a:pPr>
+            <a:endParaRPr/>
           </a:p>
         </p:txBody>
       </p:sp>
@@ -18474,7 +18645,7 @@
           </a:ln>
           <a:extLst>
             <a:ext uri="{C572A759-6A51-4108-AA02-DFA0A04FC94B}">
-              <ma14:wrappingTextBoxFlag xmlns:ma14="http://schemas.microsoft.com/office/mac/drawingml/2011/main" val="1"/>
+              <ma14:wrappingTextBoxFlag xmlns:ma14="http://schemas.microsoft.com/office/mac/drawingml/2011/main" xmlns:a14="http://schemas.microsoft.com/office/drawing/2010/main" xmlns:m="http://schemas.openxmlformats.org/officeDocument/2006/math" xmlns="" val="1"/>
             </a:ext>
           </a:extLst>
         </p:spPr>
@@ -18491,7 +18662,7 @@
               <a:spcBef>
                 <a:spcPts val="400"/>
               </a:spcBef>
-              <a:defRPr b="1" sz="1200">
+              <a:defRPr sz="1200" b="1">
                 <a:latin typeface="Times New Roman"/>
                 <a:ea typeface="Times New Roman"/>
                 <a:cs typeface="Times New Roman"/>
@@ -18529,7 +18700,7 @@
               <a:spcBef>
                 <a:spcPts val="400"/>
               </a:spcBef>
-              <a:defRPr b="1" sz="1200">
+              <a:defRPr sz="1200" b="1">
                 <a:latin typeface="Times New Roman"/>
                 <a:ea typeface="Times New Roman"/>
                 <a:cs typeface="Times New Roman"/>
@@ -18652,7 +18823,7 @@
               <a:spcBef>
                 <a:spcPts val="400"/>
               </a:spcBef>
-              <a:defRPr b="1" sz="1200">
+              <a:defRPr sz="1200" b="1">
                 <a:latin typeface="Times New Roman"/>
                 <a:ea typeface="Times New Roman"/>
                 <a:cs typeface="Times New Roman"/>
@@ -18729,9 +18900,10 @@
               <a:t>May contain:</a:t>
             </a:r>
             <a:br/>
-          </a:p>
-          <a:p>
-            <a:pPr lvl="1" marL="914400" indent="-317500" defTabSz="457200">
+            <a:endParaRPr/>
+          </a:p>
+          <a:p>
+            <a:pPr marL="914400" lvl="1" indent="-317500" defTabSz="457200">
               <a:lnSpc>
                 <a:spcPct val="75000"/>
               </a:lnSpc>
@@ -18753,7 +18925,7 @@
             </a:r>
           </a:p>
           <a:p>
-            <a:pPr lvl="1" marL="914400" indent="-317500" defTabSz="457200">
+            <a:pPr marL="914400" lvl="1" indent="-317500" defTabSz="457200">
               <a:lnSpc>
                 <a:spcPct val="75000"/>
               </a:lnSpc>
@@ -18775,7 +18947,7 @@
             </a:r>
           </a:p>
           <a:p>
-            <a:pPr lvl="1" marL="914400" indent="-317500" defTabSz="457200">
+            <a:pPr marL="914400" lvl="1" indent="-317500" defTabSz="457200">
               <a:lnSpc>
                 <a:spcPct val="75000"/>
               </a:lnSpc>
@@ -18797,7 +18969,7 @@
             </a:r>
           </a:p>
           <a:p>
-            <a:pPr lvl="1" marL="914400" indent="-317500" defTabSz="457200">
+            <a:pPr marL="914400" lvl="1" indent="-317500" defTabSz="457200">
               <a:lnSpc>
                 <a:spcPct val="75000"/>
               </a:lnSpc>
@@ -18819,7 +18991,7 @@
             </a:r>
           </a:p>
           <a:p>
-            <a:pPr lvl="1" marL="914400" indent="-317500" defTabSz="457200">
+            <a:pPr marL="914400" lvl="1" indent="-317500" defTabSz="457200">
               <a:lnSpc>
                 <a:spcPct val="75000"/>
               </a:lnSpc>
@@ -18848,7 +19020,7 @@
               <a:spcBef>
                 <a:spcPts val="400"/>
               </a:spcBef>
-              <a:defRPr b="1" sz="1200">
+              <a:defRPr sz="1200" b="1">
                 <a:latin typeface="Times New Roman"/>
                 <a:ea typeface="Times New Roman"/>
                 <a:cs typeface="Times New Roman"/>
@@ -18954,12 +19126,12 @@
   <p:clrMapOvr>
     <a:masterClrMapping/>
   </p:clrMapOvr>
-  <p:transition xmlns:p14="http://schemas.microsoft.com/office/powerpoint/2010/main" spd="med" advClick="1"/>
+  <p:transition spd="med"/>
 </p:sld>
 </file>
 
 <file path=ppt/slides/slide39.xml><?xml version="1.0" encoding="utf-8"?>
-<p:sld xmlns:a="http://schemas.openxmlformats.org/drawingml/2006/main" xmlns:r="http://schemas.openxmlformats.org/officeDocument/2006/relationships" xmlns:p="http://schemas.openxmlformats.org/presentationml/2006/main" xmlns:m="http://schemas.openxmlformats.org/officeDocument/2006/math" xmlns:a14="http://schemas.microsoft.com/office/drawing/2010/main" showMasterSp="1" showMasterPhAnim="1">
+<p:sld xmlns:a="http://schemas.openxmlformats.org/drawingml/2006/main" xmlns:r="http://schemas.openxmlformats.org/officeDocument/2006/relationships" xmlns:p="http://schemas.openxmlformats.org/presentationml/2006/main">
   <p:cSld>
     <p:spTree>
       <p:nvGrpSpPr>
@@ -18994,7 +19166,7 @@
           </a:ln>
           <a:extLst>
             <a:ext uri="{C572A759-6A51-4108-AA02-DFA0A04FC94B}">
-              <ma14:wrappingTextBoxFlag xmlns:ma14="http://schemas.microsoft.com/office/mac/drawingml/2011/main" val="1"/>
+              <ma14:wrappingTextBoxFlag xmlns:ma14="http://schemas.microsoft.com/office/mac/drawingml/2011/main" xmlns:a14="http://schemas.microsoft.com/office/drawing/2010/main" xmlns:m="http://schemas.openxmlformats.org/officeDocument/2006/math" xmlns="" val="1"/>
             </a:ext>
           </a:extLst>
         </p:spPr>
@@ -19011,7 +19183,7 @@
               <a:spcBef>
                 <a:spcPts val="600"/>
               </a:spcBef>
-              <a:defRPr b="1" sz="1200">
+              <a:defRPr sz="1200" b="1">
                 <a:latin typeface="Times New Roman"/>
                 <a:ea typeface="Times New Roman"/>
                 <a:cs typeface="Times New Roman"/>
@@ -19049,7 +19221,7 @@
               <a:spcBef>
                 <a:spcPts val="600"/>
               </a:spcBef>
-              <a:defRPr b="1" sz="1200">
+              <a:defRPr sz="1200" b="1">
                 <a:latin typeface="Times New Roman"/>
                 <a:ea typeface="Times New Roman"/>
                 <a:cs typeface="Times New Roman"/>
@@ -19258,7 +19430,7 @@
               <a:spcBef>
                 <a:spcPts val="600"/>
               </a:spcBef>
-              <a:defRPr b="1" sz="1200">
+              <a:defRPr sz="1200" b="1">
                 <a:latin typeface="Times New Roman"/>
                 <a:ea typeface="Times New Roman"/>
                 <a:cs typeface="Times New Roman"/>
@@ -19343,7 +19515,7 @@
               <a:spcBef>
                 <a:spcPts val="600"/>
               </a:spcBef>
-              <a:defRPr b="1" sz="1200">
+              <a:defRPr sz="1200" b="1">
                 <a:latin typeface="Times New Roman"/>
                 <a:ea typeface="Times New Roman"/>
                 <a:cs typeface="Times New Roman"/>
@@ -19423,7 +19595,7 @@
           </a:ln>
           <a:extLst>
             <a:ext uri="{C572A759-6A51-4108-AA02-DFA0A04FC94B}">
-              <ma14:wrappingTextBoxFlag xmlns:ma14="http://schemas.microsoft.com/office/mac/drawingml/2011/main" val="1"/>
+              <ma14:wrappingTextBoxFlag xmlns:ma14="http://schemas.microsoft.com/office/mac/drawingml/2011/main" xmlns:a14="http://schemas.microsoft.com/office/drawing/2010/main" xmlns:m="http://schemas.openxmlformats.org/officeDocument/2006/math" xmlns="" val="1"/>
             </a:ext>
           </a:extLst>
         </p:spPr>
@@ -19444,13 +19616,14 @@
                 <a:sym typeface="Times New Roman"/>
               </a:defRPr>
             </a:pPr>
+            <a:endParaRPr/>
           </a:p>
           <a:p>
             <a:pPr defTabSz="457200">
               <a:spcBef>
                 <a:spcPts val="1400"/>
               </a:spcBef>
-              <a:defRPr b="1" sz="1800">
+              <a:defRPr sz="1800" b="1">
                 <a:latin typeface="Times New Roman"/>
                 <a:ea typeface="Times New Roman"/>
                 <a:cs typeface="Times New Roman"/>
@@ -19473,6 +19646,7 @@
                 <a:sym typeface="Times New Roman"/>
               </a:defRPr>
             </a:pPr>
+            <a:endParaRPr/>
           </a:p>
         </p:txBody>
       </p:sp>
@@ -19481,12 +19655,12 @@
   <p:clrMapOvr>
     <a:masterClrMapping/>
   </p:clrMapOvr>
-  <p:transition xmlns:p14="http://schemas.microsoft.com/office/powerpoint/2010/main" spd="med" advClick="1"/>
+  <p:transition spd="med"/>
 </p:sld>
 </file>
 
 <file path=ppt/slides/slide4.xml><?xml version="1.0" encoding="utf-8"?>
-<p:sld xmlns:a="http://schemas.openxmlformats.org/drawingml/2006/main" xmlns:r="http://schemas.openxmlformats.org/officeDocument/2006/relationships" xmlns:p="http://schemas.openxmlformats.org/presentationml/2006/main" xmlns:m="http://schemas.openxmlformats.org/officeDocument/2006/math" xmlns:a14="http://schemas.microsoft.com/office/drawing/2010/main" showMasterSp="1" showMasterPhAnim="1">
+<p:sld xmlns:a="http://schemas.openxmlformats.org/drawingml/2006/main" xmlns:r="http://schemas.openxmlformats.org/officeDocument/2006/relationships" xmlns:p="http://schemas.openxmlformats.org/presentationml/2006/main">
   <p:cSld>
     <p:spTree>
       <p:nvGrpSpPr>
@@ -19521,7 +19695,7 @@
           </a:ln>
           <a:extLst>
             <a:ext uri="{C572A759-6A51-4108-AA02-DFA0A04FC94B}">
-              <ma14:wrappingTextBoxFlag xmlns:ma14="http://schemas.microsoft.com/office/mac/drawingml/2011/main" val="1"/>
+              <ma14:wrappingTextBoxFlag xmlns:ma14="http://schemas.microsoft.com/office/mac/drawingml/2011/main" xmlns:a14="http://schemas.microsoft.com/office/drawing/2010/main" xmlns:m="http://schemas.openxmlformats.org/officeDocument/2006/math" xmlns="" val="1"/>
             </a:ext>
           </a:extLst>
         </p:spPr>
@@ -19531,11 +19705,10 @@
           </a:bodyPr>
           <a:lstStyle>
             <a:lvl1pPr>
-              <a:defRPr b="1" sz="2400"/>
+              <a:defRPr sz="2400" b="1"/>
             </a:lvl1pPr>
           </a:lstStyle>
           <a:p>
-            <a:pPr/>
             <a:r>
               <a:t>What Is an Interface in Java</a:t>
             </a:r>
@@ -19561,7 +19734,7 @@
           </a:ln>
           <a:extLst>
             <a:ext uri="{C572A759-6A51-4108-AA02-DFA0A04FC94B}">
-              <ma14:wrappingTextBoxFlag xmlns:ma14="http://schemas.microsoft.com/office/mac/drawingml/2011/main" val="1"/>
+              <ma14:wrappingTextBoxFlag xmlns:ma14="http://schemas.microsoft.com/office/mac/drawingml/2011/main" xmlns:a14="http://schemas.microsoft.com/office/drawing/2010/main" xmlns:m="http://schemas.openxmlformats.org/officeDocument/2006/math" xmlns="" val="1"/>
             </a:ext>
           </a:extLst>
         </p:spPr>
@@ -19640,7 +19813,7 @@
           </a:p>
           <a:p>
             <a:pPr>
-              <a:defRPr b="1" sz="1600"/>
+              <a:defRPr sz="1600" b="1"/>
             </a:pPr>
             <a:r>
               <a:t>Formal Definition</a:t>
@@ -19704,7 +19877,7 @@
           </a:ln>
           <a:extLst>
             <a:ext uri="{C572A759-6A51-4108-AA02-DFA0A04FC94B}">
-              <ma14:wrappingTextBoxFlag xmlns:ma14="http://schemas.microsoft.com/office/mac/drawingml/2011/main" val="1"/>
+              <ma14:wrappingTextBoxFlag xmlns:ma14="http://schemas.microsoft.com/office/mac/drawingml/2011/main" xmlns:a14="http://schemas.microsoft.com/office/drawing/2010/main" xmlns:m="http://schemas.openxmlformats.org/officeDocument/2006/math" xmlns="" val="1"/>
             </a:ext>
           </a:extLst>
         </p:spPr>
@@ -19867,12 +20040,12 @@
   <p:clrMapOvr>
     <a:masterClrMapping/>
   </p:clrMapOvr>
-  <p:transition xmlns:p14="http://schemas.microsoft.com/office/powerpoint/2010/main" spd="med" advClick="1"/>
+  <p:transition spd="med"/>
 </p:sld>
 </file>
 
 <file path=ppt/slides/slide40.xml><?xml version="1.0" encoding="utf-8"?>
-<p:sld xmlns:a="http://schemas.openxmlformats.org/drawingml/2006/main" xmlns:r="http://schemas.openxmlformats.org/officeDocument/2006/relationships" xmlns:p="http://schemas.openxmlformats.org/presentationml/2006/main" xmlns:m="http://schemas.openxmlformats.org/officeDocument/2006/math" xmlns:a14="http://schemas.microsoft.com/office/drawing/2010/main" showMasterSp="1" showMasterPhAnim="1">
+<p:sld xmlns:a="http://schemas.openxmlformats.org/drawingml/2006/main" xmlns:r="http://schemas.openxmlformats.org/officeDocument/2006/relationships" xmlns:p="http://schemas.openxmlformats.org/presentationml/2006/main">
   <p:cSld>
     <p:spTree>
       <p:nvGrpSpPr>
@@ -19936,7 +20109,7 @@
           </a:ln>
           <a:extLst>
             <a:ext uri="{C572A759-6A51-4108-AA02-DFA0A04FC94B}">
-              <ma14:wrappingTextBoxFlag xmlns:ma14="http://schemas.microsoft.com/office/mac/drawingml/2011/main" val="1"/>
+              <ma14:wrappingTextBoxFlag xmlns:ma14="http://schemas.microsoft.com/office/mac/drawingml/2011/main" xmlns:a14="http://schemas.microsoft.com/office/drawing/2010/main" xmlns:m="http://schemas.openxmlformats.org/officeDocument/2006/math" xmlns="" val="1"/>
             </a:ext>
           </a:extLst>
         </p:spPr>
@@ -19957,13 +20130,14 @@
                 <a:sym typeface="Times New Roman"/>
               </a:defRPr>
             </a:pPr>
+            <a:endParaRPr/>
           </a:p>
           <a:p>
             <a:pPr defTabSz="457200">
               <a:spcBef>
                 <a:spcPts val="1400"/>
               </a:spcBef>
-              <a:defRPr b="1" sz="1800">
+              <a:defRPr sz="1800" b="1">
                 <a:latin typeface="Times New Roman"/>
                 <a:ea typeface="Times New Roman"/>
                 <a:cs typeface="Times New Roman"/>
@@ -19986,6 +20160,7 @@
                 <a:sym typeface="Times New Roman"/>
               </a:defRPr>
             </a:pPr>
+            <a:endParaRPr/>
           </a:p>
         </p:txBody>
       </p:sp>
@@ -20008,7 +20183,7 @@
           </a:ln>
           <a:extLst>
             <a:ext uri="{C572A759-6A51-4108-AA02-DFA0A04FC94B}">
-              <ma14:wrappingTextBoxFlag xmlns:ma14="http://schemas.microsoft.com/office/mac/drawingml/2011/main" val="1"/>
+              <ma14:wrappingTextBoxFlag xmlns:ma14="http://schemas.microsoft.com/office/mac/drawingml/2011/main" xmlns:a14="http://schemas.microsoft.com/office/drawing/2010/main" xmlns:m="http://schemas.openxmlformats.org/officeDocument/2006/math" xmlns="" val="1"/>
             </a:ext>
           </a:extLst>
         </p:spPr>
@@ -20327,12 +20502,12 @@
   <p:clrMapOvr>
     <a:masterClrMapping/>
   </p:clrMapOvr>
-  <p:transition xmlns:p14="http://schemas.microsoft.com/office/powerpoint/2010/main" spd="med" advClick="1"/>
+  <p:transition spd="med"/>
 </p:sld>
 </file>
 
 <file path=ppt/slides/slide41.xml><?xml version="1.0" encoding="utf-8"?>
-<p:sld xmlns:a="http://schemas.openxmlformats.org/drawingml/2006/main" xmlns:r="http://schemas.openxmlformats.org/officeDocument/2006/relationships" xmlns:p="http://schemas.openxmlformats.org/presentationml/2006/main" xmlns:m="http://schemas.openxmlformats.org/officeDocument/2006/math" xmlns:a14="http://schemas.microsoft.com/office/drawing/2010/main" showMasterSp="1" showMasterPhAnim="1">
+<p:sld xmlns:a="http://schemas.openxmlformats.org/drawingml/2006/main" xmlns:r="http://schemas.openxmlformats.org/officeDocument/2006/relationships" xmlns:p="http://schemas.openxmlformats.org/presentationml/2006/main">
   <p:cSld>
     <p:spTree>
       <p:nvGrpSpPr>
@@ -20396,7 +20571,7 @@
           </a:ln>
           <a:extLst>
             <a:ext uri="{C572A759-6A51-4108-AA02-DFA0A04FC94B}">
-              <ma14:wrappingTextBoxFlag xmlns:ma14="http://schemas.microsoft.com/office/mac/drawingml/2011/main" val="1"/>
+              <ma14:wrappingTextBoxFlag xmlns:ma14="http://schemas.microsoft.com/office/mac/drawingml/2011/main" xmlns:a14="http://schemas.microsoft.com/office/drawing/2010/main" xmlns:m="http://schemas.openxmlformats.org/officeDocument/2006/math" xmlns="" val="1"/>
             </a:ext>
           </a:extLst>
         </p:spPr>
@@ -20643,7 +20818,7 @@
           </a:ln>
           <a:extLst>
             <a:ext uri="{C572A759-6A51-4108-AA02-DFA0A04FC94B}">
-              <ma14:wrappingTextBoxFlag xmlns:ma14="http://schemas.microsoft.com/office/mac/drawingml/2011/main" val="1"/>
+              <ma14:wrappingTextBoxFlag xmlns:ma14="http://schemas.microsoft.com/office/mac/drawingml/2011/main" xmlns:a14="http://schemas.microsoft.com/office/drawing/2010/main" xmlns:m="http://schemas.openxmlformats.org/officeDocument/2006/math" xmlns="" val="1"/>
             </a:ext>
           </a:extLst>
         </p:spPr>
@@ -20664,13 +20839,14 @@
                 <a:sym typeface="Times New Roman"/>
               </a:defRPr>
             </a:pPr>
+            <a:endParaRPr/>
           </a:p>
           <a:p>
             <a:pPr defTabSz="457200">
               <a:spcBef>
                 <a:spcPts val="1400"/>
               </a:spcBef>
-              <a:defRPr b="1" sz="1800">
+              <a:defRPr sz="1800" b="1">
                 <a:latin typeface="Times New Roman"/>
                 <a:ea typeface="Times New Roman"/>
                 <a:cs typeface="Times New Roman"/>
@@ -20693,6 +20869,7 @@
                 <a:sym typeface="Times New Roman"/>
               </a:defRPr>
             </a:pPr>
+            <a:endParaRPr/>
           </a:p>
         </p:txBody>
       </p:sp>
@@ -20701,12 +20878,12 @@
   <p:clrMapOvr>
     <a:masterClrMapping/>
   </p:clrMapOvr>
-  <p:transition xmlns:p14="http://schemas.microsoft.com/office/powerpoint/2010/main" spd="med" advClick="1"/>
+  <p:transition spd="med"/>
 </p:sld>
 </file>
 
 <file path=ppt/slides/slide42.xml><?xml version="1.0" encoding="utf-8"?>
-<p:sld xmlns:a="http://schemas.openxmlformats.org/drawingml/2006/main" xmlns:r="http://schemas.openxmlformats.org/officeDocument/2006/relationships" xmlns:p="http://schemas.openxmlformats.org/presentationml/2006/main" xmlns:m="http://schemas.openxmlformats.org/officeDocument/2006/math" xmlns:a14="http://schemas.microsoft.com/office/drawing/2010/main" showMasterSp="1" showMasterPhAnim="1">
+<p:sld xmlns:a="http://schemas.openxmlformats.org/drawingml/2006/main" xmlns:r="http://schemas.openxmlformats.org/officeDocument/2006/relationships" xmlns:p="http://schemas.openxmlformats.org/presentationml/2006/main">
   <p:cSld>
     <p:spTree>
       <p:nvGrpSpPr>
@@ -20770,7 +20947,7 @@
           </a:ln>
           <a:extLst>
             <a:ext uri="{C572A759-6A51-4108-AA02-DFA0A04FC94B}">
-              <ma14:wrappingTextBoxFlag xmlns:ma14="http://schemas.microsoft.com/office/mac/drawingml/2011/main" val="1"/>
+              <ma14:wrappingTextBoxFlag xmlns:ma14="http://schemas.microsoft.com/office/mac/drawingml/2011/main" xmlns:a14="http://schemas.microsoft.com/office/drawing/2010/main" xmlns:m="http://schemas.openxmlformats.org/officeDocument/2006/math" xmlns="" val="1"/>
             </a:ext>
           </a:extLst>
         </p:spPr>
@@ -20791,13 +20968,14 @@
                 <a:sym typeface="Times New Roman"/>
               </a:defRPr>
             </a:pPr>
+            <a:endParaRPr/>
           </a:p>
           <a:p>
             <a:pPr defTabSz="457200">
               <a:spcBef>
                 <a:spcPts val="1400"/>
               </a:spcBef>
-              <a:defRPr b="1" sz="1800">
+              <a:defRPr sz="1800" b="1">
                 <a:latin typeface="Times New Roman"/>
                 <a:ea typeface="Times New Roman"/>
                 <a:cs typeface="Times New Roman"/>
@@ -20820,6 +20998,7 @@
                 <a:sym typeface="Times New Roman"/>
               </a:defRPr>
             </a:pPr>
+            <a:endParaRPr/>
           </a:p>
         </p:txBody>
       </p:sp>
@@ -20842,7 +21021,7 @@
           </a:ln>
           <a:extLst>
             <a:ext uri="{C572A759-6A51-4108-AA02-DFA0A04FC94B}">
-              <ma14:wrappingTextBoxFlag xmlns:ma14="http://schemas.microsoft.com/office/mac/drawingml/2011/main" val="1"/>
+              <ma14:wrappingTextBoxFlag xmlns:ma14="http://schemas.microsoft.com/office/mac/drawingml/2011/main" xmlns:a14="http://schemas.microsoft.com/office/drawing/2010/main" xmlns:m="http://schemas.openxmlformats.org/officeDocument/2006/math" xmlns="" val="1"/>
             </a:ext>
           </a:extLst>
         </p:spPr>
@@ -20904,7 +21083,7 @@
           </a:ln>
           <a:extLst>
             <a:ext uri="{C572A759-6A51-4108-AA02-DFA0A04FC94B}">
-              <ma14:wrappingTextBoxFlag xmlns:ma14="http://schemas.microsoft.com/office/mac/drawingml/2011/main" val="1"/>
+              <ma14:wrappingTextBoxFlag xmlns:ma14="http://schemas.microsoft.com/office/mac/drawingml/2011/main" xmlns:a14="http://schemas.microsoft.com/office/drawing/2010/main" xmlns:m="http://schemas.openxmlformats.org/officeDocument/2006/math" xmlns="" val="1"/>
             </a:ext>
           </a:extLst>
         </p:spPr>
@@ -20928,6 +21107,7 @@
                 <a:sym typeface="Times New Roman"/>
               </a:defRPr>
             </a:pPr>
+            <a:endParaRPr/>
           </a:p>
           <a:p>
             <a:pPr defTabSz="457200">
@@ -20937,7 +21117,7 @@
               <a:spcBef>
                 <a:spcPts val="600"/>
               </a:spcBef>
-              <a:defRPr b="1" sz="1200">
+              <a:defRPr sz="1200" b="1">
                 <a:latin typeface="Times New Roman"/>
                 <a:ea typeface="Times New Roman"/>
                 <a:cs typeface="Times New Roman"/>
@@ -20994,7 +21174,7 @@
               <a:spcBef>
                 <a:spcPts val="600"/>
               </a:spcBef>
-              <a:defRPr b="1" sz="1200">
+              <a:defRPr sz="1200" b="1">
                 <a:latin typeface="Times New Roman"/>
                 <a:ea typeface="Times New Roman"/>
                 <a:cs typeface="Times New Roman"/>
@@ -21327,12 +21507,12 @@
   <p:clrMapOvr>
     <a:masterClrMapping/>
   </p:clrMapOvr>
-  <p:transition xmlns:p14="http://schemas.microsoft.com/office/powerpoint/2010/main" spd="med" advClick="1"/>
+  <p:transition spd="med"/>
 </p:sld>
 </file>
 
 <file path=ppt/slides/slide43.xml><?xml version="1.0" encoding="utf-8"?>
-<p:sld xmlns:a="http://schemas.openxmlformats.org/drawingml/2006/main" xmlns:r="http://schemas.openxmlformats.org/officeDocument/2006/relationships" xmlns:p="http://schemas.openxmlformats.org/presentationml/2006/main" xmlns:m="http://schemas.openxmlformats.org/officeDocument/2006/math" xmlns:a14="http://schemas.microsoft.com/office/drawing/2010/main" showMasterSp="1" showMasterPhAnim="1">
+<p:sld xmlns:a="http://schemas.openxmlformats.org/drawingml/2006/main" xmlns:r="http://schemas.openxmlformats.org/officeDocument/2006/relationships" xmlns:p="http://schemas.openxmlformats.org/presentationml/2006/main">
   <p:cSld>
     <p:spTree>
       <p:nvGrpSpPr>
@@ -21396,7 +21576,7 @@
           </a:ln>
           <a:extLst>
             <a:ext uri="{C572A759-6A51-4108-AA02-DFA0A04FC94B}">
-              <ma14:wrappingTextBoxFlag xmlns:ma14="http://schemas.microsoft.com/office/mac/drawingml/2011/main" val="1"/>
+              <ma14:wrappingTextBoxFlag xmlns:ma14="http://schemas.microsoft.com/office/mac/drawingml/2011/main" xmlns:a14="http://schemas.microsoft.com/office/drawing/2010/main" xmlns:m="http://schemas.openxmlformats.org/officeDocument/2006/math" xmlns="" val="1"/>
             </a:ext>
           </a:extLst>
         </p:spPr>
@@ -21417,13 +21597,14 @@
                 <a:sym typeface="Times New Roman"/>
               </a:defRPr>
             </a:pPr>
+            <a:endParaRPr/>
           </a:p>
           <a:p>
             <a:pPr defTabSz="457200">
               <a:spcBef>
                 <a:spcPts val="1400"/>
               </a:spcBef>
-              <a:defRPr b="1" sz="1800">
+              <a:defRPr sz="1800" b="1">
                 <a:latin typeface="Times New Roman"/>
                 <a:ea typeface="Times New Roman"/>
                 <a:cs typeface="Times New Roman"/>
@@ -21446,6 +21627,7 @@
                 <a:sym typeface="Times New Roman"/>
               </a:defRPr>
             </a:pPr>
+            <a:endParaRPr/>
           </a:p>
         </p:txBody>
       </p:sp>
@@ -21468,7 +21650,7 @@
           </a:ln>
           <a:extLst>
             <a:ext uri="{C572A759-6A51-4108-AA02-DFA0A04FC94B}">
-              <ma14:wrappingTextBoxFlag xmlns:ma14="http://schemas.microsoft.com/office/mac/drawingml/2011/main" val="1"/>
+              <ma14:wrappingTextBoxFlag xmlns:ma14="http://schemas.microsoft.com/office/mac/drawingml/2011/main" xmlns:a14="http://schemas.microsoft.com/office/drawing/2010/main" xmlns:m="http://schemas.openxmlformats.org/officeDocument/2006/math" xmlns="" val="1"/>
             </a:ext>
           </a:extLst>
         </p:spPr>
@@ -21913,12 +22095,12 @@
   <p:clrMapOvr>
     <a:masterClrMapping/>
   </p:clrMapOvr>
-  <p:transition xmlns:p14="http://schemas.microsoft.com/office/powerpoint/2010/main" spd="med" advClick="1"/>
+  <p:transition spd="med"/>
 </p:sld>
 </file>
 
 <file path=ppt/slides/slide44.xml><?xml version="1.0" encoding="utf-8"?>
-<p:sld xmlns:a="http://schemas.openxmlformats.org/drawingml/2006/main" xmlns:r="http://schemas.openxmlformats.org/officeDocument/2006/relationships" xmlns:p="http://schemas.openxmlformats.org/presentationml/2006/main" xmlns:m="http://schemas.openxmlformats.org/officeDocument/2006/math" xmlns:a14="http://schemas.microsoft.com/office/drawing/2010/main" showMasterSp="1" showMasterPhAnim="1">
+<p:sld xmlns:a="http://schemas.openxmlformats.org/drawingml/2006/main" xmlns:r="http://schemas.openxmlformats.org/officeDocument/2006/relationships" xmlns:p="http://schemas.openxmlformats.org/presentationml/2006/main">
   <p:cSld>
     <p:spTree>
       <p:nvGrpSpPr>
@@ -21982,7 +22164,7 @@
           </a:ln>
           <a:extLst>
             <a:ext uri="{C572A759-6A51-4108-AA02-DFA0A04FC94B}">
-              <ma14:wrappingTextBoxFlag xmlns:ma14="http://schemas.microsoft.com/office/mac/drawingml/2011/main" val="1"/>
+              <ma14:wrappingTextBoxFlag xmlns:ma14="http://schemas.microsoft.com/office/mac/drawingml/2011/main" xmlns:a14="http://schemas.microsoft.com/office/drawing/2010/main" xmlns:m="http://schemas.openxmlformats.org/officeDocument/2006/math" xmlns="" val="1"/>
             </a:ext>
           </a:extLst>
         </p:spPr>
@@ -21999,7 +22181,7 @@
               <a:spcBef>
                 <a:spcPts val="700"/>
               </a:spcBef>
-              <a:defRPr b="1" sz="1200">
+              <a:defRPr sz="1200" b="1">
                 <a:latin typeface="Times New Roman"/>
                 <a:ea typeface="Times New Roman"/>
                 <a:cs typeface="Times New Roman"/>
@@ -22113,7 +22295,7 @@
               <a:spcBef>
                 <a:spcPts val="700"/>
               </a:spcBef>
-              <a:defRPr b="1" sz="1200">
+              <a:defRPr sz="1200" b="1">
                 <a:latin typeface="Times New Roman"/>
                 <a:ea typeface="Times New Roman"/>
                 <a:cs typeface="Times New Roman"/>
@@ -22208,7 +22390,7 @@
               <a:spcBef>
                 <a:spcPts val="700"/>
               </a:spcBef>
-              <a:defRPr b="1" sz="1200">
+              <a:defRPr sz="1200" b="1">
                 <a:latin typeface="Times New Roman"/>
                 <a:ea typeface="Times New Roman"/>
                 <a:cs typeface="Times New Roman"/>
@@ -22316,7 +22498,7 @@
           </a:ln>
           <a:extLst>
             <a:ext uri="{C572A759-6A51-4108-AA02-DFA0A04FC94B}">
-              <ma14:wrappingTextBoxFlag xmlns:ma14="http://schemas.microsoft.com/office/mac/drawingml/2011/main" val="1"/>
+              <ma14:wrappingTextBoxFlag xmlns:ma14="http://schemas.microsoft.com/office/mac/drawingml/2011/main" xmlns:a14="http://schemas.microsoft.com/office/drawing/2010/main" xmlns:m="http://schemas.openxmlformats.org/officeDocument/2006/math" xmlns="" val="1"/>
             </a:ext>
           </a:extLst>
         </p:spPr>
@@ -22337,13 +22519,14 @@
                 <a:sym typeface="Times New Roman"/>
               </a:defRPr>
             </a:pPr>
+            <a:endParaRPr/>
           </a:p>
           <a:p>
             <a:pPr defTabSz="457200">
               <a:spcBef>
                 <a:spcPts val="1400"/>
               </a:spcBef>
-              <a:defRPr b="1" sz="1800">
+              <a:defRPr sz="1800" b="1">
                 <a:latin typeface="Times New Roman"/>
                 <a:ea typeface="Times New Roman"/>
                 <a:cs typeface="Times New Roman"/>
@@ -22366,6 +22549,7 @@
                 <a:sym typeface="Times New Roman"/>
               </a:defRPr>
             </a:pPr>
+            <a:endParaRPr/>
           </a:p>
         </p:txBody>
       </p:sp>
@@ -22374,12 +22558,12 @@
   <p:clrMapOvr>
     <a:masterClrMapping/>
   </p:clrMapOvr>
-  <p:transition xmlns:p14="http://schemas.microsoft.com/office/powerpoint/2010/main" spd="med" advClick="1"/>
+  <p:transition spd="med"/>
 </p:sld>
 </file>
 
 <file path=ppt/slides/slide45.xml><?xml version="1.0" encoding="utf-8"?>
-<p:sld xmlns:a="http://schemas.openxmlformats.org/drawingml/2006/main" xmlns:r="http://schemas.openxmlformats.org/officeDocument/2006/relationships" xmlns:p="http://schemas.openxmlformats.org/presentationml/2006/main" xmlns:m="http://schemas.openxmlformats.org/officeDocument/2006/math" xmlns:a14="http://schemas.microsoft.com/office/drawing/2010/main" showMasterSp="1" showMasterPhAnim="1">
+<p:sld xmlns:a="http://schemas.openxmlformats.org/drawingml/2006/main" xmlns:r="http://schemas.openxmlformats.org/officeDocument/2006/relationships" xmlns:p="http://schemas.openxmlformats.org/presentationml/2006/main">
   <p:cSld>
     <p:spTree>
       <p:nvGrpSpPr>
@@ -22443,7 +22627,7 @@
           </a:ln>
           <a:extLst>
             <a:ext uri="{C572A759-6A51-4108-AA02-DFA0A04FC94B}">
-              <ma14:wrappingTextBoxFlag xmlns:ma14="http://schemas.microsoft.com/office/mac/drawingml/2011/main" val="1"/>
+              <ma14:wrappingTextBoxFlag xmlns:ma14="http://schemas.microsoft.com/office/mac/drawingml/2011/main" xmlns:a14="http://schemas.microsoft.com/office/drawing/2010/main" xmlns:m="http://schemas.openxmlformats.org/officeDocument/2006/math" xmlns="" val="1"/>
             </a:ext>
           </a:extLst>
         </p:spPr>
@@ -22457,7 +22641,7 @@
               <a:spcBef>
                 <a:spcPts val="1400"/>
               </a:spcBef>
-              <a:defRPr b="1" sz="4800">
+              <a:defRPr sz="4800" b="1">
                 <a:latin typeface="Times New Roman"/>
                 <a:ea typeface="Times New Roman"/>
                 <a:cs typeface="Times New Roman"/>
@@ -22480,6 +22664,7 @@
                 <a:sym typeface="Times New Roman"/>
               </a:defRPr>
             </a:pPr>
+            <a:endParaRPr/>
           </a:p>
         </p:txBody>
       </p:sp>
@@ -22488,12 +22673,12 @@
   <p:clrMapOvr>
     <a:masterClrMapping/>
   </p:clrMapOvr>
-  <p:transition xmlns:p14="http://schemas.microsoft.com/office/powerpoint/2010/main" spd="med" advClick="1"/>
+  <p:transition spd="med"/>
 </p:sld>
 </file>
 
 <file path=ppt/slides/slide5.xml><?xml version="1.0" encoding="utf-8"?>
-<p:sld xmlns:a="http://schemas.openxmlformats.org/drawingml/2006/main" xmlns:r="http://schemas.openxmlformats.org/officeDocument/2006/relationships" xmlns:p="http://schemas.openxmlformats.org/presentationml/2006/main" xmlns:m="http://schemas.openxmlformats.org/officeDocument/2006/math" xmlns:a14="http://schemas.microsoft.com/office/drawing/2010/main" showMasterSp="1" showMasterPhAnim="1">
+<p:sld xmlns:a="http://schemas.openxmlformats.org/drawingml/2006/main" xmlns:r="http://schemas.openxmlformats.org/officeDocument/2006/relationships" xmlns:p="http://schemas.openxmlformats.org/presentationml/2006/main">
   <p:cSld>
     <p:spTree>
       <p:nvGrpSpPr>
@@ -22528,7 +22713,7 @@
           </a:ln>
           <a:extLst>
             <a:ext uri="{C572A759-6A51-4108-AA02-DFA0A04FC94B}">
-              <ma14:wrappingTextBoxFlag xmlns:ma14="http://schemas.microsoft.com/office/mac/drawingml/2011/main" val="1"/>
+              <ma14:wrappingTextBoxFlag xmlns:ma14="http://schemas.microsoft.com/office/mac/drawingml/2011/main" xmlns:a14="http://schemas.microsoft.com/office/drawing/2010/main" xmlns:m="http://schemas.openxmlformats.org/officeDocument/2006/math" xmlns="" val="1"/>
             </a:ext>
           </a:extLst>
         </p:spPr>
@@ -22539,7 +22724,7 @@
           <a:lstStyle/>
           <a:p>
             <a:pPr>
-              <a:defRPr b="1" sz="1800">
+              <a:defRPr sz="1800" b="1">
                 <a:latin typeface="Calibri"/>
                 <a:ea typeface="Calibri"/>
                 <a:cs typeface="Calibri"/>
@@ -22633,38 +22818,6 @@
               <a:t>definition from implementation</a:t>
             </a:r>
             <a:endParaRPr sz="900"/>
-          </a:p>
-        </p:txBody>
-      </p:sp>
-      <p:sp>
-        <p:nvSpPr>
-          <p:cNvPr id="193" name="Rectangle 2"/>
-          <p:cNvSpPr/>
-          <p:nvPr/>
-        </p:nvSpPr>
-        <p:spPr>
-          <a:xfrm flipV="1">
-            <a:off x="2590604" y="2351320"/>
-            <a:ext cx="6255525" cy="45720"/>
-          </a:xfrm>
-          <a:prstGeom prst="rect">
-            <a:avLst/>
-          </a:prstGeom>
-          <a:solidFill>
-            <a:srgbClr val="000000"/>
-          </a:solidFill>
-          <a:ln>
-            <a:solidFill>
-              <a:srgbClr val="000000"/>
-            </a:solidFill>
-            <a:miter/>
-          </a:ln>
-        </p:spPr>
-        <p:txBody>
-          <a:bodyPr lIns="45719" rIns="45719" anchor="ctr"/>
-          <a:lstStyle/>
-          <a:p>
-            <a:pPr/>
           </a:p>
         </p:txBody>
       </p:sp>
@@ -22687,7 +22840,7 @@
           </a:ln>
           <a:extLst>
             <a:ext uri="{C572A759-6A51-4108-AA02-DFA0A04FC94B}">
-              <ma14:wrappingTextBoxFlag xmlns:ma14="http://schemas.microsoft.com/office/mac/drawingml/2011/main" val="1"/>
+              <ma14:wrappingTextBoxFlag xmlns:ma14="http://schemas.microsoft.com/office/mac/drawingml/2011/main" xmlns:a14="http://schemas.microsoft.com/office/drawing/2010/main" xmlns:m="http://schemas.openxmlformats.org/officeDocument/2006/math" xmlns="" val="1"/>
             </a:ext>
           </a:extLst>
         </p:spPr>
@@ -22698,7 +22851,7 @@
           <a:lstStyle/>
           <a:p>
             <a:pPr>
-              <a:defRPr b="1" sz="1600">
+              <a:defRPr sz="1600" b="1">
                 <a:latin typeface="Calibri"/>
                 <a:ea typeface="Calibri"/>
                 <a:cs typeface="Calibri"/>
@@ -22776,7 +22929,7 @@
           </a:ln>
           <a:extLst>
             <a:ext uri="{C572A759-6A51-4108-AA02-DFA0A04FC94B}">
-              <ma14:wrappingTextBoxFlag xmlns:ma14="http://schemas.microsoft.com/office/mac/drawingml/2011/main" val="1"/>
+              <ma14:wrappingTextBoxFlag xmlns:ma14="http://schemas.microsoft.com/office/mac/drawingml/2011/main" xmlns:a14="http://schemas.microsoft.com/office/drawing/2010/main" xmlns:m="http://schemas.openxmlformats.org/officeDocument/2006/math" xmlns="" val="1"/>
             </a:ext>
           </a:extLst>
         </p:spPr>
@@ -22786,11 +22939,10 @@
           </a:bodyPr>
           <a:lstStyle>
             <a:lvl1pPr>
-              <a:defRPr b="1" sz="2400"/>
+              <a:defRPr sz="2400" b="1"/>
             </a:lvl1pPr>
           </a:lstStyle>
           <a:p>
-            <a:pPr/>
             <a:r>
               <a:t>What Is an Interface in Java</a:t>
             </a:r>
@@ -22800,7 +22952,9 @@
       <p:sp>
         <p:nvSpPr>
           <p:cNvPr id="196" name="Title 4"/>
-          <p:cNvSpPr txBox="1"/>
+          <p:cNvSpPr txBox="1">
+            <a:spLocks noGrp="1"/>
+          </p:cNvSpPr>
           <p:nvPr>
             <p:ph type="title"/>
           </p:nvPr>
@@ -22814,7 +22968,7 @@
           <a:bodyPr/>
           <a:lstStyle/>
           <a:p>
-            <a:pPr/>
+            <a:endParaRPr/>
           </a:p>
         </p:txBody>
       </p:sp>
@@ -22852,12 +23006,12 @@
   <p:clrMapOvr>
     <a:masterClrMapping/>
   </p:clrMapOvr>
-  <p:transition xmlns:p14="http://schemas.microsoft.com/office/powerpoint/2010/main" spd="med" advClick="1"/>
+  <p:transition spd="med"/>
 </p:sld>
 </file>
 
 <file path=ppt/slides/slide6.xml><?xml version="1.0" encoding="utf-8"?>
-<p:sld xmlns:a="http://schemas.openxmlformats.org/drawingml/2006/main" xmlns:r="http://schemas.openxmlformats.org/officeDocument/2006/relationships" xmlns:p="http://schemas.openxmlformats.org/presentationml/2006/main" xmlns:m="http://schemas.openxmlformats.org/officeDocument/2006/math" xmlns:a14="http://schemas.microsoft.com/office/drawing/2010/main" showMasterSp="1" showMasterPhAnim="1">
+<p:sld xmlns:a="http://schemas.openxmlformats.org/drawingml/2006/main" xmlns:r="http://schemas.openxmlformats.org/officeDocument/2006/relationships" xmlns:p="http://schemas.openxmlformats.org/presentationml/2006/main">
   <p:cSld>
     <p:spTree>
       <p:nvGrpSpPr>
@@ -22892,7 +23046,7 @@
           </a:ln>
           <a:extLst>
             <a:ext uri="{C572A759-6A51-4108-AA02-DFA0A04FC94B}">
-              <ma14:wrappingTextBoxFlag xmlns:ma14="http://schemas.microsoft.com/office/mac/drawingml/2011/main" val="1"/>
+              <ma14:wrappingTextBoxFlag xmlns:ma14="http://schemas.microsoft.com/office/mac/drawingml/2011/main" xmlns:a14="http://schemas.microsoft.com/office/drawing/2010/main" xmlns:m="http://schemas.openxmlformats.org/officeDocument/2006/math" xmlns="" val="1"/>
             </a:ext>
           </a:extLst>
         </p:spPr>
@@ -22902,11 +23056,10 @@
           </a:bodyPr>
           <a:lstStyle>
             <a:lvl1pPr>
-              <a:defRPr b="1" sz="2400"/>
+              <a:defRPr sz="2400" b="1"/>
             </a:lvl1pPr>
           </a:lstStyle>
           <a:p>
-            <a:pPr/>
             <a:r>
               <a:t>Key Properties of an Interface in Java</a:t>
             </a:r>
@@ -22932,7 +23085,7 @@
           </a:ln>
           <a:extLst>
             <a:ext uri="{C572A759-6A51-4108-AA02-DFA0A04FC94B}">
-              <ma14:wrappingTextBoxFlag xmlns:ma14="http://schemas.microsoft.com/office/mac/drawingml/2011/main" val="1"/>
+              <ma14:wrappingTextBoxFlag xmlns:ma14="http://schemas.microsoft.com/office/mac/drawingml/2011/main" xmlns:a14="http://schemas.microsoft.com/office/drawing/2010/main" xmlns:m="http://schemas.openxmlformats.org/officeDocument/2006/math" xmlns="" val="1"/>
             </a:ext>
           </a:extLst>
         </p:spPr>
@@ -23006,7 +23159,7 @@
           </a:ln>
           <a:extLst>
             <a:ext uri="{C572A759-6A51-4108-AA02-DFA0A04FC94B}">
-              <ma14:wrappingTextBoxFlag xmlns:ma14="http://schemas.microsoft.com/office/mac/drawingml/2011/main" val="1"/>
+              <ma14:wrappingTextBoxFlag xmlns:ma14="http://schemas.microsoft.com/office/mac/drawingml/2011/main" xmlns:a14="http://schemas.microsoft.com/office/drawing/2010/main" xmlns:m="http://schemas.openxmlformats.org/officeDocument/2006/math" xmlns="" val="1"/>
             </a:ext>
           </a:extLst>
         </p:spPr>
@@ -23020,7 +23173,7 @@
               <a:tabLst>
                 <a:tab pos="457200" algn="l"/>
               </a:tabLst>
-              <a:defRPr b="1" sz="1200"/>
+              <a:defRPr sz="1200" b="1"/>
             </a:pPr>
             <a:r>
               <a:t>Fundamental Properties</a:t>
@@ -23033,13 +23186,13 @@
               <a:tabLst>
                 <a:tab pos="457200" algn="l"/>
               </a:tabLst>
-              <a:defRPr b="1" sz="1100"/>
+              <a:defRPr sz="1100" b="1"/>
             </a:pPr>
             <a:r>
               <a:t>All methods are implicitly </a:t>
             </a:r>
             <a:r>
-              <a:rPr b="0" sz="900">
+              <a:rPr sz="900" b="0">
                 <a:latin typeface="Arial Unicode MS"/>
                 <a:ea typeface="Arial Unicode MS"/>
                 <a:cs typeface="Arial Unicode MS"/>
@@ -23051,7 +23204,7 @@
               <a:t> and </a:t>
             </a:r>
             <a:r>
-              <a:rPr b="0" sz="900">
+              <a:rPr sz="900" b="0">
                 <a:latin typeface="Arial Unicode MS"/>
                 <a:ea typeface="Arial Unicode MS"/>
                 <a:cs typeface="Arial Unicode MS"/>
@@ -23060,7 +23213,7 @@
               <a:t>abstract</a:t>
             </a:r>
             <a:br>
-              <a:rPr b="0" sz="900">
+              <a:rPr sz="900" b="0">
                 <a:latin typeface="Arial Unicode MS"/>
                 <a:ea typeface="Arial Unicode MS"/>
                 <a:cs typeface="Arial Unicode MS"/>
@@ -23071,7 +23224,6 @@
               <a:rPr b="0"/>
               <a:t>Even if not explicitly mentioned, every method in an interface is automatically public and abstract.</a:t>
             </a:r>
-            <a:endParaRPr b="0"/>
           </a:p>
           <a:p>
             <a:pPr>
@@ -23080,13 +23232,13 @@
               <a:tabLst>
                 <a:tab pos="457200" algn="l"/>
               </a:tabLst>
-              <a:defRPr b="1" sz="1100"/>
+              <a:defRPr sz="1100" b="1"/>
             </a:pPr>
             <a:r>
               <a:t>All variables are implicitly </a:t>
             </a:r>
             <a:r>
-              <a:rPr b="0" sz="900">
+              <a:rPr sz="900" b="0">
                 <a:latin typeface="Arial Unicode MS"/>
                 <a:ea typeface="Arial Unicode MS"/>
                 <a:cs typeface="Arial Unicode MS"/>
@@ -23098,7 +23250,7 @@
               <a:t>, </a:t>
             </a:r>
             <a:r>
-              <a:rPr b="0" sz="900">
+              <a:rPr sz="900" b="0">
                 <a:latin typeface="Arial Unicode MS"/>
                 <a:ea typeface="Arial Unicode MS"/>
                 <a:cs typeface="Arial Unicode MS"/>
@@ -23110,7 +23262,7 @@
               <a:t>, and </a:t>
             </a:r>
             <a:r>
-              <a:rPr b="0" sz="900">
+              <a:rPr sz="900" b="0">
                 <a:latin typeface="Arial Unicode MS"/>
                 <a:ea typeface="Arial Unicode MS"/>
                 <a:cs typeface="Arial Unicode MS"/>
@@ -23119,7 +23271,7 @@
               <a:t>final</a:t>
             </a:r>
             <a:br>
-              <a:rPr b="0" sz="900">
+              <a:rPr sz="900" b="0">
                 <a:latin typeface="Arial Unicode MS"/>
                 <a:ea typeface="Arial Unicode MS"/>
                 <a:cs typeface="Arial Unicode MS"/>
@@ -23130,7 +23282,6 @@
               <a:rPr b="0"/>
               <a:t>Interface variables behave as constants and must be initialized at the time of declaration.</a:t>
             </a:r>
-            <a:endParaRPr b="0"/>
           </a:p>
           <a:p>
             <a:pPr>
@@ -23139,7 +23290,7 @@
               <a:tabLst>
                 <a:tab pos="457200" algn="l"/>
               </a:tabLst>
-              <a:defRPr b="1" sz="1100"/>
+              <a:defRPr sz="1100" b="1"/>
             </a:pPr>
             <a:r>
               <a:t>No method implementation (Java 7 and earlier)</a:t>
@@ -23149,7 +23300,6 @@
               <a:rPr b="0"/>
               <a:t>Interfaces only declare methods; implementation is provided by implementing classes.</a:t>
             </a:r>
-            <a:endParaRPr b="0"/>
           </a:p>
           <a:p>
             <a:pPr>
@@ -23158,7 +23308,7 @@
               <a:tabLst>
                 <a:tab pos="457200" algn="l"/>
               </a:tabLst>
-              <a:defRPr b="1" sz="1100"/>
+              <a:defRPr sz="1100" b="1"/>
             </a:pPr>
             <a:r>
               <a:t>Interfaces cannot be instantiated</a:t>
@@ -23169,7 +23319,7 @@
               <a:t>Object creation using </a:t>
             </a:r>
             <a:r>
-              <a:rPr b="0" sz="900">
+              <a:rPr sz="900" b="0">
                 <a:latin typeface="Arial Unicode MS"/>
                 <a:ea typeface="Arial Unicode MS"/>
                 <a:cs typeface="Arial Unicode MS"/>
@@ -23181,7 +23331,6 @@
               <a:rPr b="0"/>
               <a:t> is not allowed because interfaces have no constructors.</a:t>
             </a:r>
-            <a:endParaRPr b="0"/>
           </a:p>
           <a:p>
             <a:pPr>
@@ -23190,7 +23339,7 @@
               <a:tabLst>
                 <a:tab pos="457200" algn="l"/>
               </a:tabLst>
-              <a:defRPr b="1" sz="1100"/>
+              <a:defRPr sz="1100" b="1"/>
             </a:pPr>
             <a:r>
               <a:t>Interfaces do not have constructors</a:t>
@@ -23200,7 +23349,6 @@
               <a:rPr b="0"/>
               <a:t>Since no objects can be created, constructors are not permitted.</a:t>
             </a:r>
-            <a:endParaRPr b="0"/>
           </a:p>
           <a:p>
             <a:pPr>
@@ -23209,7 +23357,7 @@
               <a:tabLst>
                 <a:tab pos="457200" algn="l"/>
               </a:tabLst>
-              <a:defRPr b="1" sz="1100"/>
+              <a:defRPr sz="1100" b="1"/>
             </a:pPr>
             <a:r>
               <a:t>A class can implement multiple interfaces</a:t>
@@ -23219,7 +23367,6 @@
               <a:rPr b="0"/>
               <a:t>This enables multiple inheritance of behavior in Java.</a:t>
             </a:r>
-            <a:endParaRPr b="0"/>
           </a:p>
         </p:txBody>
       </p:sp>
@@ -23257,12 +23404,12 @@
   <p:clrMapOvr>
     <a:masterClrMapping/>
   </p:clrMapOvr>
-  <p:transition xmlns:p14="http://schemas.microsoft.com/office/powerpoint/2010/main" spd="med" advClick="1"/>
+  <p:transition spd="med"/>
 </p:sld>
 </file>
 
 <file path=ppt/slides/slide7.xml><?xml version="1.0" encoding="utf-8"?>
-<p:sld xmlns:a="http://schemas.openxmlformats.org/drawingml/2006/main" xmlns:r="http://schemas.openxmlformats.org/officeDocument/2006/relationships" xmlns:p="http://schemas.openxmlformats.org/presentationml/2006/main" xmlns:m="http://schemas.openxmlformats.org/officeDocument/2006/math" xmlns:a14="http://schemas.microsoft.com/office/drawing/2010/main" showMasterSp="1" showMasterPhAnim="1">
+<p:sld xmlns:a="http://schemas.openxmlformats.org/drawingml/2006/main" xmlns:r="http://schemas.openxmlformats.org/officeDocument/2006/relationships" xmlns:p="http://schemas.openxmlformats.org/presentationml/2006/main">
   <p:cSld>
     <p:spTree>
       <p:nvGrpSpPr>
@@ -23326,7 +23473,7 @@
           </a:ln>
           <a:extLst>
             <a:ext uri="{C572A759-6A51-4108-AA02-DFA0A04FC94B}">
-              <ma14:wrappingTextBoxFlag xmlns:ma14="http://schemas.microsoft.com/office/mac/drawingml/2011/main" val="1"/>
+              <ma14:wrappingTextBoxFlag xmlns:ma14="http://schemas.microsoft.com/office/mac/drawingml/2011/main" xmlns:a14="http://schemas.microsoft.com/office/drawing/2010/main" xmlns:m="http://schemas.openxmlformats.org/officeDocument/2006/math" xmlns="" val="1"/>
             </a:ext>
           </a:extLst>
         </p:spPr>
@@ -23343,7 +23490,7 @@
               <a:spcBef>
                 <a:spcPts val="800"/>
               </a:spcBef>
-              <a:defRPr b="1" sz="1600">
+              <a:defRPr sz="1600" b="1">
                 <a:latin typeface="Times New Roman"/>
                 <a:ea typeface="Times New Roman"/>
                 <a:cs typeface="Times New Roman"/>
@@ -23498,7 +23645,7 @@
           </a:ln>
           <a:extLst>
             <a:ext uri="{C572A759-6A51-4108-AA02-DFA0A04FC94B}">
-              <ma14:wrappingTextBoxFlag xmlns:ma14="http://schemas.microsoft.com/office/mac/drawingml/2011/main" val="1"/>
+              <ma14:wrappingTextBoxFlag xmlns:ma14="http://schemas.microsoft.com/office/mac/drawingml/2011/main" xmlns:a14="http://schemas.microsoft.com/office/drawing/2010/main" xmlns:m="http://schemas.openxmlformats.org/officeDocument/2006/math" xmlns="" val="1"/>
             </a:ext>
           </a:extLst>
         </p:spPr>
@@ -23515,7 +23662,7 @@
               <a:spcBef>
                 <a:spcPts val="800"/>
               </a:spcBef>
-              <a:defRPr b="1" sz="1600">
+              <a:defRPr sz="1600" b="1">
                 <a:latin typeface="Times New Roman"/>
                 <a:ea typeface="Times New Roman"/>
                 <a:cs typeface="Times New Roman"/>
@@ -23570,7 +23717,7 @@
           </a:ln>
           <a:extLst>
             <a:ext uri="{C572A759-6A51-4108-AA02-DFA0A04FC94B}">
-              <ma14:wrappingTextBoxFlag xmlns:ma14="http://schemas.microsoft.com/office/mac/drawingml/2011/main" val="1"/>
+              <ma14:wrappingTextBoxFlag xmlns:ma14="http://schemas.microsoft.com/office/mac/drawingml/2011/main" xmlns:a14="http://schemas.microsoft.com/office/drawing/2010/main" xmlns:m="http://schemas.openxmlformats.org/officeDocument/2006/math" xmlns="" val="1"/>
             </a:ext>
           </a:extLst>
         </p:spPr>
@@ -23580,11 +23727,10 @@
           </a:bodyPr>
           <a:lstStyle>
             <a:lvl1pPr>
-              <a:defRPr b="1" sz="2400"/>
+              <a:defRPr sz="2400" b="1"/>
             </a:lvl1pPr>
           </a:lstStyle>
           <a:p>
-            <a:pPr/>
             <a:r>
               <a:t>Key Properties of an Interface in Java</a:t>
             </a:r>
@@ -23596,12 +23742,12 @@
   <p:clrMapOvr>
     <a:masterClrMapping/>
   </p:clrMapOvr>
-  <p:transition xmlns:p14="http://schemas.microsoft.com/office/powerpoint/2010/main" spd="med" advClick="1"/>
+  <p:transition spd="med"/>
 </p:sld>
 </file>
 
 <file path=ppt/slides/slide8.xml><?xml version="1.0" encoding="utf-8"?>
-<p:sld xmlns:a="http://schemas.openxmlformats.org/drawingml/2006/main" xmlns:r="http://schemas.openxmlformats.org/officeDocument/2006/relationships" xmlns:p="http://schemas.openxmlformats.org/presentationml/2006/main" xmlns:m="http://schemas.openxmlformats.org/officeDocument/2006/math" xmlns:a14="http://schemas.microsoft.com/office/drawing/2010/main" showMasterSp="1" showMasterPhAnim="1">
+<p:sld xmlns:a="http://schemas.openxmlformats.org/drawingml/2006/main" xmlns:r="http://schemas.openxmlformats.org/officeDocument/2006/relationships" xmlns:p="http://schemas.openxmlformats.org/presentationml/2006/main">
   <p:cSld>
     <p:spTree>
       <p:nvGrpSpPr>
@@ -23620,7 +23766,9 @@
       <p:sp>
         <p:nvSpPr>
           <p:cNvPr id="210" name="Google Shape;137;p25"/>
-          <p:cNvSpPr txBox="1"/>
+          <p:cNvSpPr txBox="1">
+            <a:spLocks noGrp="1"/>
+          </p:cNvSpPr>
           <p:nvPr>
             <p:ph type="title"/>
           </p:nvPr>
@@ -23642,7 +23790,6 @@
             </a:lvl1pPr>
           </a:lstStyle>
           <a:p>
-            <a:pPr/>
             <a:r>
               <a:t>Syntax of an Interface in Java</a:t>
             </a:r>
@@ -23668,7 +23815,7 @@
           </a:ln>
           <a:extLst>
             <a:ext uri="{C572A759-6A51-4108-AA02-DFA0A04FC94B}">
-              <ma14:wrappingTextBoxFlag xmlns:ma14="http://schemas.microsoft.com/office/mac/drawingml/2011/main" val="1"/>
+              <ma14:wrappingTextBoxFlag xmlns:ma14="http://schemas.microsoft.com/office/mac/drawingml/2011/main" xmlns:a14="http://schemas.microsoft.com/office/drawing/2010/main" xmlns:m="http://schemas.openxmlformats.org/officeDocument/2006/math" xmlns="" val="1"/>
             </a:ext>
           </a:extLst>
         </p:spPr>
@@ -23682,7 +23829,7 @@
               <a:lnSpc>
                 <a:spcPct val="150000"/>
               </a:lnSpc>
-              <a:defRPr b="1" sz="1100"/>
+              <a:defRPr sz="1100" b="1"/>
             </a:pPr>
             <a:r>
               <a:t>interface InterfaceName {</a:t>
@@ -23693,7 +23840,7 @@
               <a:lnSpc>
                 <a:spcPct val="150000"/>
               </a:lnSpc>
-              <a:defRPr b="1" sz="1100"/>
+              <a:defRPr sz="1100" b="1"/>
             </a:pPr>
             <a:r>
               <a:t>    returnType methodName1();</a:t>
@@ -23704,7 +23851,7 @@
               <a:lnSpc>
                 <a:spcPct val="150000"/>
               </a:lnSpc>
-              <a:defRPr b="1" sz="1100"/>
+              <a:defRPr sz="1100" b="1"/>
             </a:pPr>
             <a:r>
               <a:t>    returnType methodName2();</a:t>
@@ -23715,7 +23862,7 @@
               <a:lnSpc>
                 <a:spcPct val="150000"/>
               </a:lnSpc>
-              <a:defRPr b="1" sz="1100"/>
+              <a:defRPr sz="1100" b="1"/>
             </a:pPr>
             <a:r>
               <a:t>}</a:t>
@@ -23742,7 +23889,7 @@
           </a:ln>
           <a:extLst>
             <a:ext uri="{C572A759-6A51-4108-AA02-DFA0A04FC94B}">
-              <ma14:wrappingTextBoxFlag xmlns:ma14="http://schemas.microsoft.com/office/mac/drawingml/2011/main" val="1"/>
+              <ma14:wrappingTextBoxFlag xmlns:ma14="http://schemas.microsoft.com/office/mac/drawingml/2011/main" xmlns:a14="http://schemas.microsoft.com/office/drawing/2010/main" xmlns:m="http://schemas.openxmlformats.org/officeDocument/2006/math" xmlns="" val="1"/>
             </a:ext>
           </a:extLst>
         </p:spPr>
@@ -23753,7 +23900,7 @@
           <a:lstStyle/>
           <a:p>
             <a:pPr>
-              <a:defRPr b="1" sz="2000"/>
+              <a:defRPr sz="2000" b="1"/>
             </a:pPr>
             <a:r>
               <a:t>Important Rules</a:t>
@@ -23761,8 +23908,9 @@
           </a:p>
           <a:p>
             <a:pPr>
-              <a:defRPr b="1" sz="2000"/>
-            </a:pPr>
+              <a:defRPr sz="2000" b="1"/>
+            </a:pPr>
+            <a:endParaRPr/>
           </a:p>
           <a:p>
             <a:pPr>
@@ -23833,12 +23981,12 @@
   <p:clrMapOvr>
     <a:masterClrMapping/>
   </p:clrMapOvr>
-  <p:transition xmlns:p14="http://schemas.microsoft.com/office/powerpoint/2010/main" spd="med" advClick="1"/>
+  <p:transition spd="med"/>
 </p:sld>
 </file>
 
 <file path=ppt/slides/slide9.xml><?xml version="1.0" encoding="utf-8"?>
-<p:sld xmlns:a="http://schemas.openxmlformats.org/drawingml/2006/main" xmlns:r="http://schemas.openxmlformats.org/officeDocument/2006/relationships" xmlns:p="http://schemas.openxmlformats.org/presentationml/2006/main" xmlns:m="http://schemas.openxmlformats.org/officeDocument/2006/math" xmlns:a14="http://schemas.microsoft.com/office/drawing/2010/main" showMasterSp="1" showMasterPhAnim="1">
+<p:sld xmlns:a="http://schemas.openxmlformats.org/drawingml/2006/main" xmlns:r="http://schemas.openxmlformats.org/officeDocument/2006/relationships" xmlns:p="http://schemas.openxmlformats.org/presentationml/2006/main">
   <p:cSld>
     <p:spTree>
       <p:nvGrpSpPr>
@@ -23857,7 +24005,9 @@
       <p:sp>
         <p:nvSpPr>
           <p:cNvPr id="214" name="Google Shape;143;p26"/>
-          <p:cNvSpPr txBox="1"/>
+          <p:cNvSpPr txBox="1">
+            <a:spLocks noGrp="1"/>
+          </p:cNvSpPr>
           <p:nvPr>
             <p:ph type="title"/>
           </p:nvPr>
@@ -23879,7 +24029,6 @@
             </a:lvl1pPr>
           </a:lstStyle>
           <a:p>
-            <a:pPr/>
             <a:r>
               <a:t>Real-World Analogy of an Interface</a:t>
             </a:r>
@@ -23889,7 +24038,9 @@
       <p:sp>
         <p:nvSpPr>
           <p:cNvPr id="215" name="Google Shape;144;p26"/>
-          <p:cNvSpPr txBox="1"/>
+          <p:cNvSpPr txBox="1">
+            <a:spLocks noGrp="1"/>
+          </p:cNvSpPr>
           <p:nvPr>
             <p:ph type="body" sz="quarter" idx="1"/>
           </p:nvPr>
@@ -23916,13 +24067,7 @@
               <a:buChar char="•"/>
             </a:pPr>
             <a:r>
-              <a:t>An interface can be understood using real-world contracts where </a:t>
-            </a:r>
-            <a:r>
-              <a:t>rules are defined but implementation is left to the user</a:t>
-            </a:r>
-            <a:r>
-              <a:t>.</a:t>
+              <a:t>An interface can be understood using real-world contracts where rules are defined but implementation is left to the user.</a:t>
             </a:r>
           </a:p>
         </p:txBody>
@@ -23975,7 +24120,7 @@
           </a:ln>
           <a:extLst>
             <a:ext uri="{C572A759-6A51-4108-AA02-DFA0A04FC94B}">
-              <ma14:wrappingTextBoxFlag xmlns:ma14="http://schemas.microsoft.com/office/mac/drawingml/2011/main" val="1"/>
+              <ma14:wrappingTextBoxFlag xmlns:ma14="http://schemas.microsoft.com/office/mac/drawingml/2011/main" xmlns:a14="http://schemas.microsoft.com/office/drawing/2010/main" xmlns:m="http://schemas.openxmlformats.org/officeDocument/2006/math" xmlns="" val="1"/>
             </a:ext>
           </a:extLst>
         </p:spPr>
@@ -23986,7 +24131,7 @@
           <a:lstStyle/>
           <a:p>
             <a:pPr>
-              <a:defRPr b="1" sz="1600"/>
+              <a:defRPr sz="1600" b="1"/>
             </a:pPr>
             <a:r>
               <a:t>Example: Electrical Switch</a:t>
@@ -24003,7 +24148,7 @@
             <a:endParaRPr sz="4800"/>
           </a:p>
           <a:p>
-            <a:pPr lvl="1" marL="457200">
+            <a:pPr marL="457200" lvl="1">
               <a:buSzPct val="100000"/>
               <a:buChar char="•"/>
               <a:defRPr sz="1100">
@@ -24019,7 +24164,7 @@
             <a:endParaRPr sz="800"/>
           </a:p>
           <a:p>
-            <a:pPr lvl="1" marL="457200">
+            <a:pPr marL="457200" lvl="1">
               <a:buSzPct val="100000"/>
               <a:buChar char="•"/>
               <a:defRPr sz="1200">
@@ -24037,6 +24182,7 @@
             <a:pPr lvl="1" indent="457200">
               <a:defRPr sz="900"/>
             </a:pPr>
+            <a:endParaRPr/>
           </a:p>
           <a:p>
             <a:pPr>
@@ -24069,9 +24215,10 @@
             <a:pPr>
               <a:defRPr sz="1800"/>
             </a:pPr>
-          </a:p>
-          <a:p>
-            <a:pPr lvl="1" marL="457200">
+            <a:endParaRPr/>
+          </a:p>
+          <a:p>
+            <a:pPr marL="457200" lvl="1">
               <a:buSzPct val="100000"/>
               <a:buChar char="•"/>
               <a:defRPr sz="1800"/>
@@ -24081,7 +24228,7 @@
             </a:r>
           </a:p>
           <a:p>
-            <a:pPr lvl="1" marL="457200">
+            <a:pPr marL="457200" lvl="1">
               <a:buSzPct val="100000"/>
               <a:buChar char="•"/>
               <a:defRPr sz="1800"/>
@@ -24091,7 +24238,7 @@
             </a:r>
           </a:p>
           <a:p>
-            <a:pPr lvl="1" marL="457200">
+            <a:pPr marL="457200" lvl="1">
               <a:buSzPct val="100000"/>
               <a:buChar char="•"/>
               <a:defRPr sz="1800"/>
@@ -24136,12 +24283,12 @@
   <p:clrMapOvr>
     <a:masterClrMapping/>
   </p:clrMapOvr>
-  <p:transition xmlns:p14="http://schemas.microsoft.com/office/powerpoint/2010/main" spd="med" advClick="1"/>
+  <p:transition spd="med"/>
 </p:sld>
 </file>
 
 <file path=ppt/theme/theme1.xml><?xml version="1.0" encoding="utf-8"?>
-<a:theme xmlns:a="http://schemas.openxmlformats.org/drawingml/2006/main" xmlns:r="http://schemas.openxmlformats.org/officeDocument/2006/relationships" name="Simple Light">
+<a:theme xmlns:a="http://schemas.openxmlformats.org/drawingml/2006/main" name="Simple Light">
   <a:themeElements>
     <a:clrScheme name="Simple Light">
       <a:dk1>
@@ -24267,7 +24414,7 @@
       <a:effectStyleLst>
         <a:effectStyle>
           <a:effectLst>
-            <a:outerShdw sx="100000" sy="100000" kx="0" ky="0" algn="b" rotWithShape="0" blurRad="38100" dist="23000" dir="5400000">
+            <a:outerShdw blurRad="38100" dist="23000" dir="5400000" rotWithShape="0">
               <a:srgbClr val="000000">
                 <a:alpha val="35000"/>
               </a:srgbClr>
@@ -24276,7 +24423,7 @@
         </a:effectStyle>
         <a:effectStyle>
           <a:effectLst>
-            <a:outerShdw sx="100000" sy="100000" kx="0" ky="0" algn="b" rotWithShape="0" blurRad="38100" dist="23000" dir="5400000">
+            <a:outerShdw blurRad="38100" dist="23000" dir="5400000" rotWithShape="0">
               <a:srgbClr val="000000">
                 <a:alpha val="35000"/>
               </a:srgbClr>
@@ -24285,7 +24432,7 @@
         </a:effectStyle>
         <a:effectStyle>
           <a:effectLst>
-            <a:outerShdw sx="100000" sy="100000" kx="0" ky="0" algn="b" rotWithShape="0" blurRad="38100" dist="20000" dir="5400000">
+            <a:outerShdw blurRad="38100" dist="20000" dir="5400000" rotWithShape="0">
               <a:srgbClr val="000000">
                 <a:alpha val="38000"/>
               </a:srgbClr>
@@ -24359,7 +24506,7 @@
           <a:round/>
         </a:ln>
         <a:effectLst>
-          <a:outerShdw sx="100000" sy="100000" kx="0" ky="0" algn="b" rotWithShape="0" blurRad="38100" dist="23000" dir="5400000">
+          <a:outerShdw blurRad="38100" dist="23000" dir="5400000" rotWithShape="0">
             <a:srgbClr val="000000">
               <a:alpha val="35000"/>
             </a:srgbClr>
@@ -24367,7 +24514,7 @@
         </a:effectLst>
         <a:sp3d/>
       </a:spPr>
-      <a:bodyPr rot="0" spcFirstLastPara="1" vertOverflow="overflow" horzOverflow="overflow" vert="horz" wrap="square" lIns="45719" tIns="45719" rIns="45719" bIns="45719" numCol="1" spcCol="38100" rtlCol="0" anchor="ctr" upright="0">
+      <a:bodyPr rot="0" spcFirstLastPara="1" vertOverflow="overflow" horzOverflow="overflow" vert="horz" wrap="square" lIns="45719" tIns="45719" rIns="45719" bIns="45719" numCol="1" spcCol="38100" rtlCol="0" anchor="ctr">
         <a:spAutoFit/>
       </a:bodyPr>
       <a:lstStyle>
@@ -24386,7 +24533,7 @@
           <a:buFontTx/>
           <a:buNone/>
           <a:tabLst/>
-          <a:defRPr b="0" baseline="0" cap="none" i="0" spc="0" strike="noStrike" sz="1400" u="none" kumimoji="0" normalizeH="0">
+          <a:defRPr kumimoji="0" sz="1400" b="0" i="0" u="none" strike="noStrike" cap="none" spc="0" normalizeH="0" baseline="0">
             <a:ln>
               <a:noFill/>
             </a:ln>
@@ -24416,7 +24563,7 @@
           <a:buFontTx/>
           <a:buNone/>
           <a:tabLst/>
-          <a:defRPr b="0" baseline="0" cap="none" i="0" spc="0" strike="noStrike" sz="1800" u="none" kumimoji="0" normalizeH="0">
+          <a:defRPr kumimoji="0" sz="1800" b="0" i="0" u="none" strike="noStrike" cap="none" spc="0" normalizeH="0" baseline="0">
             <a:ln>
               <a:noFill/>
             </a:ln>
@@ -24442,7 +24589,7 @@
           <a:buFontTx/>
           <a:buNone/>
           <a:tabLst/>
-          <a:defRPr b="0" baseline="0" cap="none" i="0" spc="0" strike="noStrike" sz="1800" u="none" kumimoji="0" normalizeH="0">
+          <a:defRPr kumimoji="0" sz="1800" b="0" i="0" u="none" strike="noStrike" cap="none" spc="0" normalizeH="0" baseline="0">
             <a:ln>
               <a:noFill/>
             </a:ln>
@@ -24468,7 +24615,7 @@
           <a:buFontTx/>
           <a:buNone/>
           <a:tabLst/>
-          <a:defRPr b="0" baseline="0" cap="none" i="0" spc="0" strike="noStrike" sz="1800" u="none" kumimoji="0" normalizeH="0">
+          <a:defRPr kumimoji="0" sz="1800" b="0" i="0" u="none" strike="noStrike" cap="none" spc="0" normalizeH="0" baseline="0">
             <a:ln>
               <a:noFill/>
             </a:ln>
@@ -24494,7 +24641,7 @@
           <a:buFontTx/>
           <a:buNone/>
           <a:tabLst/>
-          <a:defRPr b="0" baseline="0" cap="none" i="0" spc="0" strike="noStrike" sz="1800" u="none" kumimoji="0" normalizeH="0">
+          <a:defRPr kumimoji="0" sz="1800" b="0" i="0" u="none" strike="noStrike" cap="none" spc="0" normalizeH="0" baseline="0">
             <a:ln>
               <a:noFill/>
             </a:ln>
@@ -24520,7 +24667,7 @@
           <a:buFontTx/>
           <a:buNone/>
           <a:tabLst/>
-          <a:defRPr b="0" baseline="0" cap="none" i="0" spc="0" strike="noStrike" sz="1800" u="none" kumimoji="0" normalizeH="0">
+          <a:defRPr kumimoji="0" sz="1800" b="0" i="0" u="none" strike="noStrike" cap="none" spc="0" normalizeH="0" baseline="0">
             <a:ln>
               <a:noFill/>
             </a:ln>
@@ -24546,7 +24693,7 @@
           <a:buFontTx/>
           <a:buNone/>
           <a:tabLst/>
-          <a:defRPr b="0" baseline="0" cap="none" i="0" spc="0" strike="noStrike" sz="1800" u="none" kumimoji="0" normalizeH="0">
+          <a:defRPr kumimoji="0" sz="1800" b="0" i="0" u="none" strike="noStrike" cap="none" spc="0" normalizeH="0" baseline="0">
             <a:ln>
               <a:noFill/>
             </a:ln>
@@ -24572,7 +24719,7 @@
           <a:buFontTx/>
           <a:buNone/>
           <a:tabLst/>
-          <a:defRPr b="0" baseline="0" cap="none" i="0" spc="0" strike="noStrike" sz="1800" u="none" kumimoji="0" normalizeH="0">
+          <a:defRPr kumimoji="0" sz="1800" b="0" i="0" u="none" strike="noStrike" cap="none" spc="0" normalizeH="0" baseline="0">
             <a:ln>
               <a:noFill/>
             </a:ln>
@@ -24598,7 +24745,7 @@
           <a:buFontTx/>
           <a:buNone/>
           <a:tabLst/>
-          <a:defRPr b="0" baseline="0" cap="none" i="0" spc="0" strike="noStrike" sz="1800" u="none" kumimoji="0" normalizeH="0">
+          <a:defRPr kumimoji="0" sz="1800" b="0" i="0" u="none" strike="noStrike" cap="none" spc="0" normalizeH="0" baseline="0">
             <a:ln>
               <a:noFill/>
             </a:ln>
@@ -24624,7 +24771,7 @@
           <a:buFontTx/>
           <a:buNone/>
           <a:tabLst/>
-          <a:defRPr b="0" baseline="0" cap="none" i="0" spc="0" strike="noStrike" sz="1800" u="none" kumimoji="0" normalizeH="0">
+          <a:defRPr kumimoji="0" sz="1800" b="0" i="0" u="none" strike="noStrike" cap="none" spc="0" normalizeH="0" baseline="0">
             <a:ln>
               <a:noFill/>
             </a:ln>
@@ -24637,9 +24784,15 @@
         </a:lvl9pPr>
       </a:lstStyle>
       <a:style>
-        <a:lnRef idx="0"/>
-        <a:fillRef idx="0"/>
-        <a:effectRef idx="0"/>
+        <a:lnRef idx="0">
+          <a:scrgbClr r="0" g="0" b="0"/>
+        </a:lnRef>
+        <a:fillRef idx="0">
+          <a:scrgbClr r="0" g="0" b="0"/>
+        </a:fillRef>
+        <a:effectRef idx="0">
+          <a:scrgbClr r="0" g="0" b="0"/>
+        </a:effectRef>
         <a:fontRef idx="none"/>
       </a:style>
     </a:spDef>
@@ -24654,7 +24807,7 @@
           <a:round/>
         </a:ln>
         <a:effectLst>
-          <a:outerShdw sx="100000" sy="100000" kx="0" ky="0" algn="b" rotWithShape="0" blurRad="38100" dist="20000" dir="5400000">
+          <a:outerShdw blurRad="38100" dist="20000" dir="5400000" rotWithShape="0">
             <a:srgbClr val="000000">
               <a:alpha val="38000"/>
             </a:srgbClr>
@@ -24662,7 +24815,7 @@
         </a:effectLst>
         <a:sp3d/>
       </a:spPr>
-      <a:bodyPr rot="0" spcFirstLastPara="1" vertOverflow="overflow" horzOverflow="overflow" vert="horz" wrap="square" lIns="91439" tIns="45719" rIns="91439" bIns="45719" numCol="1" spcCol="38100" rtlCol="0" anchor="t" upright="0">
+      <a:bodyPr rot="0" spcFirstLastPara="1" vertOverflow="overflow" horzOverflow="overflow" vert="horz" wrap="square" lIns="91439" tIns="45719" rIns="91439" bIns="45719" numCol="1" spcCol="38100" rtlCol="0" anchor="t">
         <a:noAutofit/>
       </a:bodyPr>
       <a:lstStyle>
@@ -24681,7 +24834,7 @@
           <a:buFontTx/>
           <a:buNone/>
           <a:tabLst/>
-          <a:defRPr b="0" baseline="0" cap="none" i="0" spc="0" strike="noStrike" sz="1800" u="none" kumimoji="0" normalizeH="0">
+          <a:defRPr kumimoji="0" sz="1800" b="0" i="0" u="none" strike="noStrike" cap="none" spc="0" normalizeH="0" baseline="0">
             <a:ln>
               <a:noFill/>
             </a:ln>
@@ -24707,7 +24860,7 @@
           <a:buFontTx/>
           <a:buNone/>
           <a:tabLst/>
-          <a:defRPr b="0" baseline="0" cap="none" i="0" spc="0" strike="noStrike" sz="1800" u="none" kumimoji="0" normalizeH="0">
+          <a:defRPr kumimoji="0" sz="1800" b="0" i="0" u="none" strike="noStrike" cap="none" spc="0" normalizeH="0" baseline="0">
             <a:ln>
               <a:noFill/>
             </a:ln>
@@ -24733,7 +24886,7 @@
           <a:buFontTx/>
           <a:buNone/>
           <a:tabLst/>
-          <a:defRPr b="0" baseline="0" cap="none" i="0" spc="0" strike="noStrike" sz="1800" u="none" kumimoji="0" normalizeH="0">
+          <a:defRPr kumimoji="0" sz="1800" b="0" i="0" u="none" strike="noStrike" cap="none" spc="0" normalizeH="0" baseline="0">
             <a:ln>
               <a:noFill/>
             </a:ln>
@@ -24759,7 +24912,7 @@
           <a:buFontTx/>
           <a:buNone/>
           <a:tabLst/>
-          <a:defRPr b="0" baseline="0" cap="none" i="0" spc="0" strike="noStrike" sz="1800" u="none" kumimoji="0" normalizeH="0">
+          <a:defRPr kumimoji="0" sz="1800" b="0" i="0" u="none" strike="noStrike" cap="none" spc="0" normalizeH="0" baseline="0">
             <a:ln>
               <a:noFill/>
             </a:ln>
@@ -24785,7 +24938,7 @@
           <a:buFontTx/>
           <a:buNone/>
           <a:tabLst/>
-          <a:defRPr b="0" baseline="0" cap="none" i="0" spc="0" strike="noStrike" sz="1800" u="none" kumimoji="0" normalizeH="0">
+          <a:defRPr kumimoji="0" sz="1800" b="0" i="0" u="none" strike="noStrike" cap="none" spc="0" normalizeH="0" baseline="0">
             <a:ln>
               <a:noFill/>
             </a:ln>
@@ -24811,7 +24964,7 @@
           <a:buFontTx/>
           <a:buNone/>
           <a:tabLst/>
-          <a:defRPr b="0" baseline="0" cap="none" i="0" spc="0" strike="noStrike" sz="1800" u="none" kumimoji="0" normalizeH="0">
+          <a:defRPr kumimoji="0" sz="1800" b="0" i="0" u="none" strike="noStrike" cap="none" spc="0" normalizeH="0" baseline="0">
             <a:ln>
               <a:noFill/>
             </a:ln>
@@ -24837,7 +24990,7 @@
           <a:buFontTx/>
           <a:buNone/>
           <a:tabLst/>
-          <a:defRPr b="0" baseline="0" cap="none" i="0" spc="0" strike="noStrike" sz="1800" u="none" kumimoji="0" normalizeH="0">
+          <a:defRPr kumimoji="0" sz="1800" b="0" i="0" u="none" strike="noStrike" cap="none" spc="0" normalizeH="0" baseline="0">
             <a:ln>
               <a:noFill/>
             </a:ln>
@@ -24863,7 +25016,7 @@
           <a:buFontTx/>
           <a:buNone/>
           <a:tabLst/>
-          <a:defRPr b="0" baseline="0" cap="none" i="0" spc="0" strike="noStrike" sz="1800" u="none" kumimoji="0" normalizeH="0">
+          <a:defRPr kumimoji="0" sz="1800" b="0" i="0" u="none" strike="noStrike" cap="none" spc="0" normalizeH="0" baseline="0">
             <a:ln>
               <a:noFill/>
             </a:ln>
@@ -24889,7 +25042,7 @@
           <a:buFontTx/>
           <a:buNone/>
           <a:tabLst/>
-          <a:defRPr b="0" baseline="0" cap="none" i="0" spc="0" strike="noStrike" sz="1800" u="none" kumimoji="0" normalizeH="0">
+          <a:defRPr kumimoji="0" sz="1800" b="0" i="0" u="none" strike="noStrike" cap="none" spc="0" normalizeH="0" baseline="0">
             <a:ln>
               <a:noFill/>
             </a:ln>
@@ -24915,7 +25068,7 @@
           <a:buFontTx/>
           <a:buNone/>
           <a:tabLst/>
-          <a:defRPr b="0" baseline="0" cap="none" i="0" spc="0" strike="noStrike" sz="1800" u="none" kumimoji="0" normalizeH="0">
+          <a:defRPr kumimoji="0" sz="1800" b="0" i="0" u="none" strike="noStrike" cap="none" spc="0" normalizeH="0" baseline="0">
             <a:ln>
               <a:noFill/>
             </a:ln>
@@ -24928,9 +25081,15 @@
         </a:lvl9pPr>
       </a:lstStyle>
       <a:style>
-        <a:lnRef idx="0"/>
-        <a:fillRef idx="0"/>
-        <a:effectRef idx="0"/>
+        <a:lnRef idx="0">
+          <a:scrgbClr r="0" g="0" b="0"/>
+        </a:lnRef>
+        <a:fillRef idx="0">
+          <a:scrgbClr r="0" g="0" b="0"/>
+        </a:fillRef>
+        <a:effectRef idx="0">
+          <a:scrgbClr r="0" g="0" b="0"/>
+        </a:effectRef>
         <a:fontRef idx="none"/>
       </a:style>
     </a:lnDef>
@@ -24944,7 +25103,7 @@
         <a:effectLst/>
         <a:sp3d/>
       </a:spPr>
-      <a:bodyPr rot="0" spcFirstLastPara="1" vertOverflow="overflow" horzOverflow="overflow" vert="horz" wrap="square" lIns="45719" tIns="45719" rIns="45719" bIns="45719" numCol="1" spcCol="38100" rtlCol="0" anchor="t" upright="0">
+      <a:bodyPr rot="0" spcFirstLastPara="1" vertOverflow="overflow" horzOverflow="overflow" vert="horz" wrap="square" lIns="45719" tIns="45719" rIns="45719" bIns="45719" numCol="1" spcCol="38100" rtlCol="0" anchor="t">
         <a:spAutoFit/>
       </a:bodyPr>
       <a:lstStyle>
@@ -24963,7 +25122,7 @@
           <a:buFontTx/>
           <a:buNone/>
           <a:tabLst/>
-          <a:defRPr b="0" baseline="0" cap="none" i="0" spc="0" strike="noStrike" sz="1400" u="none" kumimoji="0" normalizeH="0">
+          <a:defRPr kumimoji="0" sz="1400" b="0" i="0" u="none" strike="noStrike" cap="none" spc="0" normalizeH="0" baseline="0">
             <a:ln>
               <a:noFill/>
             </a:ln>
@@ -24993,7 +25152,7 @@
           <a:buFontTx/>
           <a:buNone/>
           <a:tabLst/>
-          <a:defRPr b="0" baseline="0" cap="none" i="0" spc="0" strike="noStrike" sz="1800" u="none" kumimoji="0" normalizeH="0">
+          <a:defRPr kumimoji="0" sz="1800" b="0" i="0" u="none" strike="noStrike" cap="none" spc="0" normalizeH="0" baseline="0">
             <a:ln>
               <a:noFill/>
             </a:ln>
@@ -25019,7 +25178,7 @@
           <a:buFontTx/>
           <a:buNone/>
           <a:tabLst/>
-          <a:defRPr b="0" baseline="0" cap="none" i="0" spc="0" strike="noStrike" sz="1800" u="none" kumimoji="0" normalizeH="0">
+          <a:defRPr kumimoji="0" sz="1800" b="0" i="0" u="none" strike="noStrike" cap="none" spc="0" normalizeH="0" baseline="0">
             <a:ln>
               <a:noFill/>
             </a:ln>
@@ -25045,7 +25204,7 @@
           <a:buFontTx/>
           <a:buNone/>
           <a:tabLst/>
-          <a:defRPr b="0" baseline="0" cap="none" i="0" spc="0" strike="noStrike" sz="1800" u="none" kumimoji="0" normalizeH="0">
+          <a:defRPr kumimoji="0" sz="1800" b="0" i="0" u="none" strike="noStrike" cap="none" spc="0" normalizeH="0" baseline="0">
             <a:ln>
               <a:noFill/>
             </a:ln>
@@ -25071,7 +25230,7 @@
           <a:buFontTx/>
           <a:buNone/>
           <a:tabLst/>
-          <a:defRPr b="0" baseline="0" cap="none" i="0" spc="0" strike="noStrike" sz="1800" u="none" kumimoji="0" normalizeH="0">
+          <a:defRPr kumimoji="0" sz="1800" b="0" i="0" u="none" strike="noStrike" cap="none" spc="0" normalizeH="0" baseline="0">
             <a:ln>
               <a:noFill/>
             </a:ln>
@@ -25097,7 +25256,7 @@
           <a:buFontTx/>
           <a:buNone/>
           <a:tabLst/>
-          <a:defRPr b="0" baseline="0" cap="none" i="0" spc="0" strike="noStrike" sz="1800" u="none" kumimoji="0" normalizeH="0">
+          <a:defRPr kumimoji="0" sz="1800" b="0" i="0" u="none" strike="noStrike" cap="none" spc="0" normalizeH="0" baseline="0">
             <a:ln>
               <a:noFill/>
             </a:ln>
@@ -25123,7 +25282,7 @@
           <a:buFontTx/>
           <a:buNone/>
           <a:tabLst/>
-          <a:defRPr b="0" baseline="0" cap="none" i="0" spc="0" strike="noStrike" sz="1800" u="none" kumimoji="0" normalizeH="0">
+          <a:defRPr kumimoji="0" sz="1800" b="0" i="0" u="none" strike="noStrike" cap="none" spc="0" normalizeH="0" baseline="0">
             <a:ln>
               <a:noFill/>
             </a:ln>
@@ -25149,7 +25308,7 @@
           <a:buFontTx/>
           <a:buNone/>
           <a:tabLst/>
-          <a:defRPr b="0" baseline="0" cap="none" i="0" spc="0" strike="noStrike" sz="1800" u="none" kumimoji="0" normalizeH="0">
+          <a:defRPr kumimoji="0" sz="1800" b="0" i="0" u="none" strike="noStrike" cap="none" spc="0" normalizeH="0" baseline="0">
             <a:ln>
               <a:noFill/>
             </a:ln>
@@ -25175,7 +25334,7 @@
           <a:buFontTx/>
           <a:buNone/>
           <a:tabLst/>
-          <a:defRPr b="0" baseline="0" cap="none" i="0" spc="0" strike="noStrike" sz="1800" u="none" kumimoji="0" normalizeH="0">
+          <a:defRPr kumimoji="0" sz="1800" b="0" i="0" u="none" strike="noStrike" cap="none" spc="0" normalizeH="0" baseline="0">
             <a:ln>
               <a:noFill/>
             </a:ln>
@@ -25201,7 +25360,7 @@
           <a:buFontTx/>
           <a:buNone/>
           <a:tabLst/>
-          <a:defRPr b="0" baseline="0" cap="none" i="0" spc="0" strike="noStrike" sz="1800" u="none" kumimoji="0" normalizeH="0">
+          <a:defRPr kumimoji="0" sz="1800" b="0" i="0" u="none" strike="noStrike" cap="none" spc="0" normalizeH="0" baseline="0">
             <a:ln>
               <a:noFill/>
             </a:ln>
@@ -25214,18 +25373,25 @@
         </a:lvl9pPr>
       </a:lstStyle>
       <a:style>
-        <a:lnRef idx="0"/>
-        <a:fillRef idx="0"/>
-        <a:effectRef idx="0"/>
+        <a:lnRef idx="0">
+          <a:scrgbClr r="0" g="0" b="0"/>
+        </a:lnRef>
+        <a:fillRef idx="0">
+          <a:scrgbClr r="0" g="0" b="0"/>
+        </a:fillRef>
+        <a:effectRef idx="0">
+          <a:scrgbClr r="0" g="0" b="0"/>
+        </a:effectRef>
         <a:fontRef idx="none"/>
       </a:style>
     </a:txDef>
   </a:objectDefaults>
+  <a:extraClrSchemeLst/>
 </a:theme>
 </file>
 
 <file path=ppt/theme/theme2.xml><?xml version="1.0" encoding="utf-8"?>
-<a:theme xmlns:a="http://schemas.openxmlformats.org/drawingml/2006/main" xmlns:r="http://schemas.openxmlformats.org/officeDocument/2006/relationships" name="Simple Light">
+<a:theme xmlns:a="http://schemas.openxmlformats.org/drawingml/2006/main" name="Simple Light">
   <a:themeElements>
     <a:clrScheme name="Simple Light">
       <a:dk1>
@@ -25351,7 +25517,7 @@
       <a:effectStyleLst>
         <a:effectStyle>
           <a:effectLst>
-            <a:outerShdw sx="100000" sy="100000" kx="0" ky="0" algn="b" rotWithShape="0" blurRad="38100" dist="23000" dir="5400000">
+            <a:outerShdw blurRad="38100" dist="23000" dir="5400000" rotWithShape="0">
               <a:srgbClr val="000000">
                 <a:alpha val="35000"/>
               </a:srgbClr>
@@ -25360,7 +25526,7 @@
         </a:effectStyle>
         <a:effectStyle>
           <a:effectLst>
-            <a:outerShdw sx="100000" sy="100000" kx="0" ky="0" algn="b" rotWithShape="0" blurRad="38100" dist="23000" dir="5400000">
+            <a:outerShdw blurRad="38100" dist="23000" dir="5400000" rotWithShape="0">
               <a:srgbClr val="000000">
                 <a:alpha val="35000"/>
               </a:srgbClr>
@@ -25369,7 +25535,7 @@
         </a:effectStyle>
         <a:effectStyle>
           <a:effectLst>
-            <a:outerShdw sx="100000" sy="100000" kx="0" ky="0" algn="b" rotWithShape="0" blurRad="38100" dist="20000" dir="5400000">
+            <a:outerShdw blurRad="38100" dist="20000" dir="5400000" rotWithShape="0">
               <a:srgbClr val="000000">
                 <a:alpha val="38000"/>
               </a:srgbClr>
@@ -25443,7 +25609,7 @@
           <a:round/>
         </a:ln>
         <a:effectLst>
-          <a:outerShdw sx="100000" sy="100000" kx="0" ky="0" algn="b" rotWithShape="0" blurRad="38100" dist="23000" dir="5400000">
+          <a:outerShdw blurRad="38100" dist="23000" dir="5400000" rotWithShape="0">
             <a:srgbClr val="000000">
               <a:alpha val="35000"/>
             </a:srgbClr>
@@ -25451,7 +25617,7 @@
         </a:effectLst>
         <a:sp3d/>
       </a:spPr>
-      <a:bodyPr rot="0" spcFirstLastPara="1" vertOverflow="overflow" horzOverflow="overflow" vert="horz" wrap="square" lIns="45719" tIns="45719" rIns="45719" bIns="45719" numCol="1" spcCol="38100" rtlCol="0" anchor="ctr" upright="0">
+      <a:bodyPr rot="0" spcFirstLastPara="1" vertOverflow="overflow" horzOverflow="overflow" vert="horz" wrap="square" lIns="45719" tIns="45719" rIns="45719" bIns="45719" numCol="1" spcCol="38100" rtlCol="0" anchor="ctr">
         <a:spAutoFit/>
       </a:bodyPr>
       <a:lstStyle>
@@ -25470,7 +25636,7 @@
           <a:buFontTx/>
           <a:buNone/>
           <a:tabLst/>
-          <a:defRPr b="0" baseline="0" cap="none" i="0" spc="0" strike="noStrike" sz="1400" u="none" kumimoji="0" normalizeH="0">
+          <a:defRPr kumimoji="0" sz="1400" b="0" i="0" u="none" strike="noStrike" cap="none" spc="0" normalizeH="0" baseline="0">
             <a:ln>
               <a:noFill/>
             </a:ln>
@@ -25500,7 +25666,7 @@
           <a:buFontTx/>
           <a:buNone/>
           <a:tabLst/>
-          <a:defRPr b="0" baseline="0" cap="none" i="0" spc="0" strike="noStrike" sz="1800" u="none" kumimoji="0" normalizeH="0">
+          <a:defRPr kumimoji="0" sz="1800" b="0" i="0" u="none" strike="noStrike" cap="none" spc="0" normalizeH="0" baseline="0">
             <a:ln>
               <a:noFill/>
             </a:ln>
@@ -25526,7 +25692,7 @@
           <a:buFontTx/>
           <a:buNone/>
           <a:tabLst/>
-          <a:defRPr b="0" baseline="0" cap="none" i="0" spc="0" strike="noStrike" sz="1800" u="none" kumimoji="0" normalizeH="0">
+          <a:defRPr kumimoji="0" sz="1800" b="0" i="0" u="none" strike="noStrike" cap="none" spc="0" normalizeH="0" baseline="0">
             <a:ln>
               <a:noFill/>
             </a:ln>
@@ -25552,7 +25718,7 @@
           <a:buFontTx/>
           <a:buNone/>
           <a:tabLst/>
-          <a:defRPr b="0" baseline="0" cap="none" i="0" spc="0" strike="noStrike" sz="1800" u="none" kumimoji="0" normalizeH="0">
+          <a:defRPr kumimoji="0" sz="1800" b="0" i="0" u="none" strike="noStrike" cap="none" spc="0" normalizeH="0" baseline="0">
             <a:ln>
               <a:noFill/>
             </a:ln>
@@ -25578,7 +25744,7 @@
           <a:buFontTx/>
           <a:buNone/>
           <a:tabLst/>
-          <a:defRPr b="0" baseline="0" cap="none" i="0" spc="0" strike="noStrike" sz="1800" u="none" kumimoji="0" normalizeH="0">
+          <a:defRPr kumimoji="0" sz="1800" b="0" i="0" u="none" strike="noStrike" cap="none" spc="0" normalizeH="0" baseline="0">
             <a:ln>
               <a:noFill/>
             </a:ln>
@@ -25604,7 +25770,7 @@
           <a:buFontTx/>
           <a:buNone/>
           <a:tabLst/>
-          <a:defRPr b="0" baseline="0" cap="none" i="0" spc="0" strike="noStrike" sz="1800" u="none" kumimoji="0" normalizeH="0">
+          <a:defRPr kumimoji="0" sz="1800" b="0" i="0" u="none" strike="noStrike" cap="none" spc="0" normalizeH="0" baseline="0">
             <a:ln>
               <a:noFill/>
             </a:ln>
@@ -25630,7 +25796,7 @@
           <a:buFontTx/>
           <a:buNone/>
           <a:tabLst/>
-          <a:defRPr b="0" baseline="0" cap="none" i="0" spc="0" strike="noStrike" sz="1800" u="none" kumimoji="0" normalizeH="0">
+          <a:defRPr kumimoji="0" sz="1800" b="0" i="0" u="none" strike="noStrike" cap="none" spc="0" normalizeH="0" baseline="0">
             <a:ln>
               <a:noFill/>
             </a:ln>
@@ -25656,7 +25822,7 @@
           <a:buFontTx/>
           <a:buNone/>
           <a:tabLst/>
-          <a:defRPr b="0" baseline="0" cap="none" i="0" spc="0" strike="noStrike" sz="1800" u="none" kumimoji="0" normalizeH="0">
+          <a:defRPr kumimoji="0" sz="1800" b="0" i="0" u="none" strike="noStrike" cap="none" spc="0" normalizeH="0" baseline="0">
             <a:ln>
               <a:noFill/>
             </a:ln>
@@ -25682,7 +25848,7 @@
           <a:buFontTx/>
           <a:buNone/>
           <a:tabLst/>
-          <a:defRPr b="0" baseline="0" cap="none" i="0" spc="0" strike="noStrike" sz="1800" u="none" kumimoji="0" normalizeH="0">
+          <a:defRPr kumimoji="0" sz="1800" b="0" i="0" u="none" strike="noStrike" cap="none" spc="0" normalizeH="0" baseline="0">
             <a:ln>
               <a:noFill/>
             </a:ln>
@@ -25708,7 +25874,7 @@
           <a:buFontTx/>
           <a:buNone/>
           <a:tabLst/>
-          <a:defRPr b="0" baseline="0" cap="none" i="0" spc="0" strike="noStrike" sz="1800" u="none" kumimoji="0" normalizeH="0">
+          <a:defRPr kumimoji="0" sz="1800" b="0" i="0" u="none" strike="noStrike" cap="none" spc="0" normalizeH="0" baseline="0">
             <a:ln>
               <a:noFill/>
             </a:ln>
@@ -25721,9 +25887,15 @@
         </a:lvl9pPr>
       </a:lstStyle>
       <a:style>
-        <a:lnRef idx="0"/>
-        <a:fillRef idx="0"/>
-        <a:effectRef idx="0"/>
+        <a:lnRef idx="0">
+          <a:scrgbClr r="0" g="0" b="0"/>
+        </a:lnRef>
+        <a:fillRef idx="0">
+          <a:scrgbClr r="0" g="0" b="0"/>
+        </a:fillRef>
+        <a:effectRef idx="0">
+          <a:scrgbClr r="0" g="0" b="0"/>
+        </a:effectRef>
         <a:fontRef idx="none"/>
       </a:style>
     </a:spDef>
@@ -25738,7 +25910,7 @@
           <a:round/>
         </a:ln>
         <a:effectLst>
-          <a:outerShdw sx="100000" sy="100000" kx="0" ky="0" algn="b" rotWithShape="0" blurRad="38100" dist="20000" dir="5400000">
+          <a:outerShdw blurRad="38100" dist="20000" dir="5400000" rotWithShape="0">
             <a:srgbClr val="000000">
               <a:alpha val="38000"/>
             </a:srgbClr>
@@ -25746,7 +25918,7 @@
         </a:effectLst>
         <a:sp3d/>
       </a:spPr>
-      <a:bodyPr rot="0" spcFirstLastPara="1" vertOverflow="overflow" horzOverflow="overflow" vert="horz" wrap="square" lIns="91439" tIns="45719" rIns="91439" bIns="45719" numCol="1" spcCol="38100" rtlCol="0" anchor="t" upright="0">
+      <a:bodyPr rot="0" spcFirstLastPara="1" vertOverflow="overflow" horzOverflow="overflow" vert="horz" wrap="square" lIns="91439" tIns="45719" rIns="91439" bIns="45719" numCol="1" spcCol="38100" rtlCol="0" anchor="t">
         <a:noAutofit/>
       </a:bodyPr>
       <a:lstStyle>
@@ -25765,7 +25937,7 @@
           <a:buFontTx/>
           <a:buNone/>
           <a:tabLst/>
-          <a:defRPr b="0" baseline="0" cap="none" i="0" spc="0" strike="noStrike" sz="1800" u="none" kumimoji="0" normalizeH="0">
+          <a:defRPr kumimoji="0" sz="1800" b="0" i="0" u="none" strike="noStrike" cap="none" spc="0" normalizeH="0" baseline="0">
             <a:ln>
               <a:noFill/>
             </a:ln>
@@ -25791,7 +25963,7 @@
           <a:buFontTx/>
           <a:buNone/>
           <a:tabLst/>
-          <a:defRPr b="0" baseline="0" cap="none" i="0" spc="0" strike="noStrike" sz="1800" u="none" kumimoji="0" normalizeH="0">
+          <a:defRPr kumimoji="0" sz="1800" b="0" i="0" u="none" strike="noStrike" cap="none" spc="0" normalizeH="0" baseline="0">
             <a:ln>
               <a:noFill/>
             </a:ln>
@@ -25817,7 +25989,7 @@
           <a:buFontTx/>
           <a:buNone/>
           <a:tabLst/>
-          <a:defRPr b="0" baseline="0" cap="none" i="0" spc="0" strike="noStrike" sz="1800" u="none" kumimoji="0" normalizeH="0">
+          <a:defRPr kumimoji="0" sz="1800" b="0" i="0" u="none" strike="noStrike" cap="none" spc="0" normalizeH="0" baseline="0">
             <a:ln>
               <a:noFill/>
             </a:ln>
@@ -25843,7 +26015,7 @@
           <a:buFontTx/>
           <a:buNone/>
           <a:tabLst/>
-          <a:defRPr b="0" baseline="0" cap="none" i="0" spc="0" strike="noStrike" sz="1800" u="none" kumimoji="0" normalizeH="0">
+          <a:defRPr kumimoji="0" sz="1800" b="0" i="0" u="none" strike="noStrike" cap="none" spc="0" normalizeH="0" baseline="0">
             <a:ln>
               <a:noFill/>
             </a:ln>
@@ -25869,7 +26041,7 @@
           <a:buFontTx/>
           <a:buNone/>
           <a:tabLst/>
-          <a:defRPr b="0" baseline="0" cap="none" i="0" spc="0" strike="noStrike" sz="1800" u="none" kumimoji="0" normalizeH="0">
+          <a:defRPr kumimoji="0" sz="1800" b="0" i="0" u="none" strike="noStrike" cap="none" spc="0" normalizeH="0" baseline="0">
             <a:ln>
               <a:noFill/>
             </a:ln>
@@ -25895,7 +26067,7 @@
           <a:buFontTx/>
           <a:buNone/>
           <a:tabLst/>
-          <a:defRPr b="0" baseline="0" cap="none" i="0" spc="0" strike="noStrike" sz="1800" u="none" kumimoji="0" normalizeH="0">
+          <a:defRPr kumimoji="0" sz="1800" b="0" i="0" u="none" strike="noStrike" cap="none" spc="0" normalizeH="0" baseline="0">
             <a:ln>
               <a:noFill/>
             </a:ln>
@@ -25921,7 +26093,7 @@
           <a:buFontTx/>
           <a:buNone/>
           <a:tabLst/>
-          <a:defRPr b="0" baseline="0" cap="none" i="0" spc="0" strike="noStrike" sz="1800" u="none" kumimoji="0" normalizeH="0">
+          <a:defRPr kumimoji="0" sz="1800" b="0" i="0" u="none" strike="noStrike" cap="none" spc="0" normalizeH="0" baseline="0">
             <a:ln>
               <a:noFill/>
             </a:ln>
@@ -25947,7 +26119,7 @@
           <a:buFontTx/>
           <a:buNone/>
           <a:tabLst/>
-          <a:defRPr b="0" baseline="0" cap="none" i="0" spc="0" strike="noStrike" sz="1800" u="none" kumimoji="0" normalizeH="0">
+          <a:defRPr kumimoji="0" sz="1800" b="0" i="0" u="none" strike="noStrike" cap="none" spc="0" normalizeH="0" baseline="0">
             <a:ln>
               <a:noFill/>
             </a:ln>
@@ -25973,7 +26145,7 @@
           <a:buFontTx/>
           <a:buNone/>
           <a:tabLst/>
-          <a:defRPr b="0" baseline="0" cap="none" i="0" spc="0" strike="noStrike" sz="1800" u="none" kumimoji="0" normalizeH="0">
+          <a:defRPr kumimoji="0" sz="1800" b="0" i="0" u="none" strike="noStrike" cap="none" spc="0" normalizeH="0" baseline="0">
             <a:ln>
               <a:noFill/>
             </a:ln>
@@ -25999,7 +26171,7 @@
           <a:buFontTx/>
           <a:buNone/>
           <a:tabLst/>
-          <a:defRPr b="0" baseline="0" cap="none" i="0" spc="0" strike="noStrike" sz="1800" u="none" kumimoji="0" normalizeH="0">
+          <a:defRPr kumimoji="0" sz="1800" b="0" i="0" u="none" strike="noStrike" cap="none" spc="0" normalizeH="0" baseline="0">
             <a:ln>
               <a:noFill/>
             </a:ln>
@@ -26012,9 +26184,15 @@
         </a:lvl9pPr>
       </a:lstStyle>
       <a:style>
-        <a:lnRef idx="0"/>
-        <a:fillRef idx="0"/>
-        <a:effectRef idx="0"/>
+        <a:lnRef idx="0">
+          <a:scrgbClr r="0" g="0" b="0"/>
+        </a:lnRef>
+        <a:fillRef idx="0">
+          <a:scrgbClr r="0" g="0" b="0"/>
+        </a:fillRef>
+        <a:effectRef idx="0">
+          <a:scrgbClr r="0" g="0" b="0"/>
+        </a:effectRef>
         <a:fontRef idx="none"/>
       </a:style>
     </a:lnDef>
@@ -26028,7 +26206,7 @@
         <a:effectLst/>
         <a:sp3d/>
       </a:spPr>
-      <a:bodyPr rot="0" spcFirstLastPara="1" vertOverflow="overflow" horzOverflow="overflow" vert="horz" wrap="square" lIns="45719" tIns="45719" rIns="45719" bIns="45719" numCol="1" spcCol="38100" rtlCol="0" anchor="t" upright="0">
+      <a:bodyPr rot="0" spcFirstLastPara="1" vertOverflow="overflow" horzOverflow="overflow" vert="horz" wrap="square" lIns="45719" tIns="45719" rIns="45719" bIns="45719" numCol="1" spcCol="38100" rtlCol="0" anchor="t">
         <a:spAutoFit/>
       </a:bodyPr>
       <a:lstStyle>
@@ -26047,7 +26225,7 @@
           <a:buFontTx/>
           <a:buNone/>
           <a:tabLst/>
-          <a:defRPr b="0" baseline="0" cap="none" i="0" spc="0" strike="noStrike" sz="1400" u="none" kumimoji="0" normalizeH="0">
+          <a:defRPr kumimoji="0" sz="1400" b="0" i="0" u="none" strike="noStrike" cap="none" spc="0" normalizeH="0" baseline="0">
             <a:ln>
               <a:noFill/>
             </a:ln>
@@ -26077,7 +26255,7 @@
           <a:buFontTx/>
           <a:buNone/>
           <a:tabLst/>
-          <a:defRPr b="0" baseline="0" cap="none" i="0" spc="0" strike="noStrike" sz="1800" u="none" kumimoji="0" normalizeH="0">
+          <a:defRPr kumimoji="0" sz="1800" b="0" i="0" u="none" strike="noStrike" cap="none" spc="0" normalizeH="0" baseline="0">
             <a:ln>
               <a:noFill/>
             </a:ln>
@@ -26103,7 +26281,7 @@
           <a:buFontTx/>
           <a:buNone/>
           <a:tabLst/>
-          <a:defRPr b="0" baseline="0" cap="none" i="0" spc="0" strike="noStrike" sz="1800" u="none" kumimoji="0" normalizeH="0">
+          <a:defRPr kumimoji="0" sz="1800" b="0" i="0" u="none" strike="noStrike" cap="none" spc="0" normalizeH="0" baseline="0">
             <a:ln>
               <a:noFill/>
             </a:ln>
@@ -26129,7 +26307,7 @@
           <a:buFontTx/>
           <a:buNone/>
           <a:tabLst/>
-          <a:defRPr b="0" baseline="0" cap="none" i="0" spc="0" strike="noStrike" sz="1800" u="none" kumimoji="0" normalizeH="0">
+          <a:defRPr kumimoji="0" sz="1800" b="0" i="0" u="none" strike="noStrike" cap="none" spc="0" normalizeH="0" baseline="0">
             <a:ln>
               <a:noFill/>
             </a:ln>
@@ -26155,7 +26333,7 @@
           <a:buFontTx/>
           <a:buNone/>
           <a:tabLst/>
-          <a:defRPr b="0" baseline="0" cap="none" i="0" spc="0" strike="noStrike" sz="1800" u="none" kumimoji="0" normalizeH="0">
+          <a:defRPr kumimoji="0" sz="1800" b="0" i="0" u="none" strike="noStrike" cap="none" spc="0" normalizeH="0" baseline="0">
             <a:ln>
               <a:noFill/>
             </a:ln>
@@ -26181,7 +26359,7 @@
           <a:buFontTx/>
           <a:buNone/>
           <a:tabLst/>
-          <a:defRPr b="0" baseline="0" cap="none" i="0" spc="0" strike="noStrike" sz="1800" u="none" kumimoji="0" normalizeH="0">
+          <a:defRPr kumimoji="0" sz="1800" b="0" i="0" u="none" strike="noStrike" cap="none" spc="0" normalizeH="0" baseline="0">
             <a:ln>
               <a:noFill/>
             </a:ln>
@@ -26207,7 +26385,7 @@
           <a:buFontTx/>
           <a:buNone/>
           <a:tabLst/>
-          <a:defRPr b="0" baseline="0" cap="none" i="0" spc="0" strike="noStrike" sz="1800" u="none" kumimoji="0" normalizeH="0">
+          <a:defRPr kumimoji="0" sz="1800" b="0" i="0" u="none" strike="noStrike" cap="none" spc="0" normalizeH="0" baseline="0">
             <a:ln>
               <a:noFill/>
             </a:ln>
@@ -26233,7 +26411,7 @@
           <a:buFontTx/>
           <a:buNone/>
           <a:tabLst/>
-          <a:defRPr b="0" baseline="0" cap="none" i="0" spc="0" strike="noStrike" sz="1800" u="none" kumimoji="0" normalizeH="0">
+          <a:defRPr kumimoji="0" sz="1800" b="0" i="0" u="none" strike="noStrike" cap="none" spc="0" normalizeH="0" baseline="0">
             <a:ln>
               <a:noFill/>
             </a:ln>
@@ -26259,7 +26437,7 @@
           <a:buFontTx/>
           <a:buNone/>
           <a:tabLst/>
-          <a:defRPr b="0" baseline="0" cap="none" i="0" spc="0" strike="noStrike" sz="1800" u="none" kumimoji="0" normalizeH="0">
+          <a:defRPr kumimoji="0" sz="1800" b="0" i="0" u="none" strike="noStrike" cap="none" spc="0" normalizeH="0" baseline="0">
             <a:ln>
               <a:noFill/>
             </a:ln>
@@ -26285,7 +26463,7 @@
           <a:buFontTx/>
           <a:buNone/>
           <a:tabLst/>
-          <a:defRPr b="0" baseline="0" cap="none" i="0" spc="0" strike="noStrike" sz="1800" u="none" kumimoji="0" normalizeH="0">
+          <a:defRPr kumimoji="0" sz="1800" b="0" i="0" u="none" strike="noStrike" cap="none" spc="0" normalizeH="0" baseline="0">
             <a:ln>
               <a:noFill/>
             </a:ln>
@@ -26298,12 +26476,19 @@
         </a:lvl9pPr>
       </a:lstStyle>
       <a:style>
-        <a:lnRef idx="0"/>
-        <a:fillRef idx="0"/>
-        <a:effectRef idx="0"/>
+        <a:lnRef idx="0">
+          <a:scrgbClr r="0" g="0" b="0"/>
+        </a:lnRef>
+        <a:fillRef idx="0">
+          <a:scrgbClr r="0" g="0" b="0"/>
+        </a:fillRef>
+        <a:effectRef idx="0">
+          <a:scrgbClr r="0" g="0" b="0"/>
+        </a:effectRef>
         <a:fontRef idx="none"/>
       </a:style>
     </a:txDef>
   </a:objectDefaults>
+  <a:extraClrSchemeLst/>
 </a:theme>
 </file>